--- a/docs/public/course-assets/course-pptx/em-006.pptx
+++ b/docs/public/course-assets/course-pptx/em-006.pptx
@@ -2,25 +2,25 @@
 <file path=ppt/presentation.xml><?xml version="1.0" encoding="utf-8"?>
 <p:presentation xmlns:p="http://schemas.openxmlformats.org/presentationml/2006/main">
   <p:sldMasterIdLst>
-    <p:sldMasterId xmlns:r="http://schemas.openxmlformats.org/officeDocument/2006/relationships" id="2147483648" r:id="R1f882e1fe742486c"/>
+    <p:sldMasterId xmlns:r="http://schemas.openxmlformats.org/officeDocument/2006/relationships" id="2147483648" r:id="R3e213e53d36e46cd"/>
   </p:sldMasterIdLst>
   <p:notesMasterIdLst>
-    <p:notesMasterId xmlns:r="http://schemas.openxmlformats.org/officeDocument/2006/relationships" r:id="Rcd223f81486d40e9"/>
+    <p:notesMasterId xmlns:r="http://schemas.openxmlformats.org/officeDocument/2006/relationships" r:id="R775a4f398ce54849"/>
   </p:notesMasterIdLst>
   <p:sldIdLst>
-    <p:sldId xmlns:r="http://schemas.openxmlformats.org/officeDocument/2006/relationships" id="256" r:id="Rc8a9e6c30e8b41b9"/>
-    <p:sldId xmlns:r="http://schemas.openxmlformats.org/officeDocument/2006/relationships" id="257" r:id="R3f0c000b994d4af0"/>
-    <p:sldId xmlns:r="http://schemas.openxmlformats.org/officeDocument/2006/relationships" id="258" r:id="R9fe3f7d4474b451e"/>
-    <p:sldId xmlns:r="http://schemas.openxmlformats.org/officeDocument/2006/relationships" id="259" r:id="Rfb68abd338394ae8"/>
-    <p:sldId xmlns:r="http://schemas.openxmlformats.org/officeDocument/2006/relationships" id="260" r:id="R4980709926d24da9"/>
-    <p:sldId xmlns:r="http://schemas.openxmlformats.org/officeDocument/2006/relationships" id="261" r:id="Ra256fa4e89d645a4"/>
-    <p:sldId xmlns:r="http://schemas.openxmlformats.org/officeDocument/2006/relationships" id="262" r:id="Rabf825b8977642c4"/>
-    <p:sldId xmlns:r="http://schemas.openxmlformats.org/officeDocument/2006/relationships" id="263" r:id="R94d5a43d8cda4113"/>
-    <p:sldId xmlns:r="http://schemas.openxmlformats.org/officeDocument/2006/relationships" id="264" r:id="Ra72c49d3433f4f02"/>
-    <p:sldId xmlns:r="http://schemas.openxmlformats.org/officeDocument/2006/relationships" id="265" r:id="Re096987faf3742d0"/>
-    <p:sldId xmlns:r="http://schemas.openxmlformats.org/officeDocument/2006/relationships" id="266" r:id="R12637d67a82c4214"/>
-    <p:sldId xmlns:r="http://schemas.openxmlformats.org/officeDocument/2006/relationships" id="267" r:id="Re15d2e7f1df44417"/>
-    <p:sldId xmlns:r="http://schemas.openxmlformats.org/officeDocument/2006/relationships" id="268" r:id="R11b68c40861245aa"/>
+    <p:sldId xmlns:r="http://schemas.openxmlformats.org/officeDocument/2006/relationships" id="256" r:id="R1fb917401467411b"/>
+    <p:sldId xmlns:r="http://schemas.openxmlformats.org/officeDocument/2006/relationships" id="257" r:id="R36e70fe8071e47a2"/>
+    <p:sldId xmlns:r="http://schemas.openxmlformats.org/officeDocument/2006/relationships" id="258" r:id="Rb3ff5dd3fe89472d"/>
+    <p:sldId xmlns:r="http://schemas.openxmlformats.org/officeDocument/2006/relationships" id="259" r:id="R4193705deb554dbb"/>
+    <p:sldId xmlns:r="http://schemas.openxmlformats.org/officeDocument/2006/relationships" id="260" r:id="Rf59ae355a2c94261"/>
+    <p:sldId xmlns:r="http://schemas.openxmlformats.org/officeDocument/2006/relationships" id="261" r:id="R2021f9deb8904659"/>
+    <p:sldId xmlns:r="http://schemas.openxmlformats.org/officeDocument/2006/relationships" id="262" r:id="R65e95cd3ba4d41c7"/>
+    <p:sldId xmlns:r="http://schemas.openxmlformats.org/officeDocument/2006/relationships" id="263" r:id="R6f3d84744efd4721"/>
+    <p:sldId xmlns:r="http://schemas.openxmlformats.org/officeDocument/2006/relationships" id="264" r:id="R73005e0a400b4f78"/>
+    <p:sldId xmlns:r="http://schemas.openxmlformats.org/officeDocument/2006/relationships" id="265" r:id="R0990b776f93e4f05"/>
+    <p:sldId xmlns:r="http://schemas.openxmlformats.org/officeDocument/2006/relationships" id="266" r:id="R694547fa058a4ccf"/>
+    <p:sldId xmlns:r="http://schemas.openxmlformats.org/officeDocument/2006/relationships" id="267" r:id="R2adad7225ac74aff"/>
+    <p:sldId xmlns:r="http://schemas.openxmlformats.org/officeDocument/2006/relationships" id="268" r:id="R620dcab5eac34f57"/>
   </p:sldIdLst>
   <p:sldSz cx="12192000" cy="6858000"/>
   <p:notesSz cx="6858000" cy="9144000"/>
@@ -1405,7 +1405,7 @@
   </p:cSld>
   <p:clrMap bg1="lt1" tx1="dk1" bg2="lt2" tx2="dk2" accent1="accent1" accent2="accent2" accent3="accent3" accent4="accent4" accent5="accent5" accent6="accent6" hlink="hlink" folHlink="folHlink"/>
   <p:sldLayoutIdLst>
-    <p:sldLayoutId xmlns:r="http://schemas.openxmlformats.org/officeDocument/2006/relationships" id="2147483649" r:id="R9ac29c4892834441"/>
+    <p:sldLayoutId xmlns:r="http://schemas.openxmlformats.org/officeDocument/2006/relationships" id="2147483649" r:id="R3e4bec7254ce4711"/>
   </p:sldLayoutIdLst>
   <p:txStyles>
     <p:titleStyle>
@@ -1956,7 +1956,7 @@
           <p:cNvPr id="1" name="cover-rule">
             <a:extLst xmlns:a="http://schemas.openxmlformats.org/drawingml/2006/main">
               <a:ext uri="{FF2B5EF4-FFF2-40B4-BE49-F238E27FC236}">
-                <a16:creationId xmlns:a16="http://schemas.microsoft.com/office/drawing/2014/main" id="{FF489301-B44B-4A85-8E17-31262FC70369}"/>
+                <a16:creationId xmlns:a16="http://schemas.microsoft.com/office/drawing/2014/main" id="{F49E4E03-C117-4252-84A0-FE9397612995}"/>
               </a:ext>
             </a:extLst>
           </p:cNvPr>
@@ -1989,7 +1989,7 @@
           <p:cNvPr id="2" name="cover-ring-1">
             <a:extLst xmlns:a="http://schemas.openxmlformats.org/drawingml/2006/main">
               <a:ext uri="{FF2B5EF4-FFF2-40B4-BE49-F238E27FC236}">
-                <a16:creationId xmlns:a16="http://schemas.microsoft.com/office/drawing/2014/main" id="{FCFEFAD3-A30A-416F-974C-0C9466718066}"/>
+                <a16:creationId xmlns:a16="http://schemas.microsoft.com/office/drawing/2014/main" id="{02E6C6A5-AC88-47BF-82BE-D12EE049B1AA}"/>
               </a:ext>
             </a:extLst>
           </p:cNvPr>
@@ -2020,7 +2020,7 @@
           <p:cNvPr id="3" name="cover-ring-2">
             <a:extLst xmlns:a="http://schemas.openxmlformats.org/drawingml/2006/main">
               <a:ext uri="{FF2B5EF4-FFF2-40B4-BE49-F238E27FC236}">
-                <a16:creationId xmlns:a16="http://schemas.microsoft.com/office/drawing/2014/main" id="{F44299B5-60F7-4AA9-A1A7-6394FDB78D61}"/>
+                <a16:creationId xmlns:a16="http://schemas.microsoft.com/office/drawing/2014/main" id="{D2129240-93FE-47A2-BB7E-24F46C7E129B}"/>
               </a:ext>
             </a:extLst>
           </p:cNvPr>
@@ -2051,7 +2051,7 @@
           <p:cNvPr id="4" name="cover-core">
             <a:extLst xmlns:a="http://schemas.openxmlformats.org/drawingml/2006/main">
               <a:ext uri="{FF2B5EF4-FFF2-40B4-BE49-F238E27FC236}">
-                <a16:creationId xmlns:a16="http://schemas.microsoft.com/office/drawing/2014/main" id="{4F84E1CC-BA40-4931-AABE-5ACC66739206}"/>
+                <a16:creationId xmlns:a16="http://schemas.microsoft.com/office/drawing/2014/main" id="{A4F843FB-F743-4C13-8275-4CC56343985A}"/>
               </a:ext>
             </a:extLst>
           </p:cNvPr>
@@ -2084,7 +2084,7 @@
           <p:cNvPr id="5" name="cover-line-1">
             <a:extLst xmlns:a="http://schemas.openxmlformats.org/drawingml/2006/main">
               <a:ext uri="{FF2B5EF4-FFF2-40B4-BE49-F238E27FC236}">
-                <a16:creationId xmlns:a16="http://schemas.microsoft.com/office/drawing/2014/main" id="{A634B7D1-573C-4063-ABAB-B66B3C1370A3}"/>
+                <a16:creationId xmlns:a16="http://schemas.microsoft.com/office/drawing/2014/main" id="{032B7CD7-006E-47E5-AAE8-8989D5320828}"/>
               </a:ext>
             </a:extLst>
           </p:cNvPr>
@@ -2115,7 +2115,7 @@
           <p:cNvPr id="6" name="cover-line-2">
             <a:extLst xmlns:a="http://schemas.openxmlformats.org/drawingml/2006/main">
               <a:ext uri="{FF2B5EF4-FFF2-40B4-BE49-F238E27FC236}">
-                <a16:creationId xmlns:a16="http://schemas.microsoft.com/office/drawing/2014/main" id="{81BF22B5-42EA-4BEA-A3A5-BD60661DA46C}"/>
+                <a16:creationId xmlns:a16="http://schemas.microsoft.com/office/drawing/2014/main" id="{BEC3D0A4-264A-48D9-9B70-82DC408FFF6E}"/>
               </a:ext>
             </a:extLst>
           </p:cNvPr>
@@ -2146,7 +2146,7 @@
           <p:cNvPr id="7" name="cover-eyebrow">
             <a:extLst xmlns:a="http://schemas.openxmlformats.org/drawingml/2006/main">
               <a:ext uri="{FF2B5EF4-FFF2-40B4-BE49-F238E27FC236}">
-                <a16:creationId xmlns:a16="http://schemas.microsoft.com/office/drawing/2014/main" id="{E033EFD5-4E21-468D-9DE6-53A8EE76EB5A}"/>
+                <a16:creationId xmlns:a16="http://schemas.microsoft.com/office/drawing/2014/main" id="{BA4A0594-16EB-42A8-BB15-E78EBE8C903A}"/>
               </a:ext>
             </a:extLst>
           </p:cNvPr>
@@ -2204,7 +2204,7 @@
           <p:cNvPr id="8" name="cover-title">
             <a:extLst xmlns:a="http://schemas.openxmlformats.org/drawingml/2006/main">
               <a:ext uri="{FF2B5EF4-FFF2-40B4-BE49-F238E27FC236}">
-                <a16:creationId xmlns:a16="http://schemas.microsoft.com/office/drawing/2014/main" id="{0D8B117E-0756-4FA0-BB26-3B2308EA9C05}"/>
+                <a16:creationId xmlns:a16="http://schemas.microsoft.com/office/drawing/2014/main" id="{7F7C3330-D453-4ABA-AF12-61041ED0AC3A}"/>
               </a:ext>
             </a:extLst>
           </p:cNvPr>
@@ -2262,7 +2262,7 @@
           <p:cNvPr id="9" name="cover-subtitle">
             <a:extLst xmlns:a="http://schemas.openxmlformats.org/drawingml/2006/main">
               <a:ext uri="{FF2B5EF4-FFF2-40B4-BE49-F238E27FC236}">
-                <a16:creationId xmlns:a16="http://schemas.microsoft.com/office/drawing/2014/main" id="{7219C8ED-5AF7-46A5-B304-AB000016A9AF}"/>
+                <a16:creationId xmlns:a16="http://schemas.microsoft.com/office/drawing/2014/main" id="{BDFEA58C-286C-4356-8233-C1CB80BBC112}"/>
               </a:ext>
             </a:extLst>
           </p:cNvPr>
@@ -2324,7 +2324,7 @@
           <p:cNvPr id="10" name="cover-lead">
             <a:extLst xmlns:a="http://schemas.openxmlformats.org/drawingml/2006/main">
               <a:ext uri="{FF2B5EF4-FFF2-40B4-BE49-F238E27FC236}">
-                <a16:creationId xmlns:a16="http://schemas.microsoft.com/office/drawing/2014/main" id="{E0DBDCA0-9577-4065-9A97-2954581AF531}"/>
+                <a16:creationId xmlns:a16="http://schemas.microsoft.com/office/drawing/2014/main" id="{1CBA19FB-0F17-4348-95A7-B65EBF7E362F}"/>
               </a:ext>
             </a:extLst>
           </p:cNvPr>
@@ -2372,7 +2372,7 @@
                 <a:ea typeface="PingFang SC"/>
                 <a:cs typeface="PingFang SC"/>
               </a:rPr>
-              <a:t>单个机器人完成目标导航时，主要处理自己与环境的关系；数十或数百个智能体共享空间后，还会出现拥堵、争抢、队列、局部协作和连锁故障。群体表现并不是单个体性能的简单相加，通信、视野…</a:t>
+              <a:t>单个机器人完成目标导航时；主要处理自己与环境的关系；数十或数百个智能体共享空间后；还会出现拥堵、争抢、队列、局部协作和连锁故障；群体表现并不是单个体性能的简单相加</a:t>
             </a:r>
           </a:p>
         </p:txBody>
@@ -2382,7 +2382,7 @@
           <p:cNvPr id="11" name="cover-course">
             <a:extLst xmlns:a="http://schemas.openxmlformats.org/drawingml/2006/main">
               <a:ext uri="{FF2B5EF4-FFF2-40B4-BE49-F238E27FC236}">
-                <a16:creationId xmlns:a16="http://schemas.microsoft.com/office/drawing/2014/main" id="{BBE30285-24FE-47A3-BFDC-1806C75FBE1F}"/>
+                <a16:creationId xmlns:a16="http://schemas.microsoft.com/office/drawing/2014/main" id="{442CEAD7-C25B-4C3B-9246-71F197317970}"/>
               </a:ext>
             </a:extLst>
           </p:cNvPr>
@@ -2440,7 +2440,7 @@
           <p:cNvPr id="12" name="cover-id">
             <a:extLst xmlns:a="http://schemas.openxmlformats.org/drawingml/2006/main">
               <a:ext uri="{FF2B5EF4-FFF2-40B4-BE49-F238E27FC236}">
-                <a16:creationId xmlns:a16="http://schemas.microsoft.com/office/drawing/2014/main" id="{C3F46942-BBC5-4ED3-899E-B64C57936C14}"/>
+                <a16:creationId xmlns:a16="http://schemas.microsoft.com/office/drawing/2014/main" id="{D4F488F4-B23F-4685-9B6F-F4DEA6C001A3}"/>
               </a:ext>
             </a:extLst>
           </p:cNvPr>
@@ -2496,7 +2496,7 @@
     </p:spTree>
     <p:extLst>
       <p:ext uri="{BB962C8B-B14F-4D97-AF65-F5344CB8AC3E}">
-        <p14:creationId xmlns:p14="http://schemas.microsoft.com/office/powerpoint/2010/main" val="1796529578"/>
+        <p14:creationId xmlns:p14="http://schemas.microsoft.com/office/powerpoint/2010/main" val="934661358"/>
       </p:ext>
     </p:extLst>
   </p:cSld>
@@ -2527,7 +2527,7 @@
           <p:cNvPr id="1" name="s10-rule">
             <a:extLst xmlns:a="http://schemas.openxmlformats.org/drawingml/2006/main">
               <a:ext uri="{FF2B5EF4-FFF2-40B4-BE49-F238E27FC236}">
-                <a16:creationId xmlns:a16="http://schemas.microsoft.com/office/drawing/2014/main" id="{232F8D61-31B3-4108-9C53-5739960E5458}"/>
+                <a16:creationId xmlns:a16="http://schemas.microsoft.com/office/drawing/2014/main" id="{F74F0CFB-56B4-4056-9C2A-F7278A3C007E}"/>
               </a:ext>
             </a:extLst>
           </p:cNvPr>
@@ -2560,7 +2560,7 @@
           <p:cNvPr id="2" name="s10-eyebrow">
             <a:extLst xmlns:a="http://schemas.openxmlformats.org/drawingml/2006/main">
               <a:ext uri="{FF2B5EF4-FFF2-40B4-BE49-F238E27FC236}">
-                <a16:creationId xmlns:a16="http://schemas.microsoft.com/office/drawing/2014/main" id="{7ADE94E4-0B19-4E34-837B-B5F9F611BE08}"/>
+                <a16:creationId xmlns:a16="http://schemas.microsoft.com/office/drawing/2014/main" id="{F9EB3763-1117-4BD7-8001-CFBFD5D8ABEC}"/>
               </a:ext>
             </a:extLst>
           </p:cNvPr>
@@ -2618,7 +2618,7 @@
           <p:cNvPr id="3" name="s10-title">
             <a:extLst xmlns:a="http://schemas.openxmlformats.org/drawingml/2006/main">
               <a:ext uri="{FF2B5EF4-FFF2-40B4-BE49-F238E27FC236}">
-                <a16:creationId xmlns:a16="http://schemas.microsoft.com/office/drawing/2014/main" id="{3932EE8D-9732-4B69-B487-9F60AABA824F}"/>
+                <a16:creationId xmlns:a16="http://schemas.microsoft.com/office/drawing/2014/main" id="{F866F086-2775-4A0B-B0AB-C2B7E139B744}"/>
               </a:ext>
             </a:extLst>
           </p:cNvPr>
@@ -2666,7 +2666,7 @@
                 <a:ea typeface="PingFang SC"/>
                 <a:cs typeface="PingFang SC"/>
               </a:rPr>
-              <a:t>多机器人巡检的通信失效必须经过边界验证</a:t>
+              <a:t>通信失效测试揭示协作策略的恢复能力</a:t>
             </a:r>
           </a:p>
         </p:txBody>
@@ -2676,7 +2676,7 @@
           <p:cNvPr id="4" name="s10-footer">
             <a:extLst xmlns:a="http://schemas.openxmlformats.org/drawingml/2006/main">
               <a:ext uri="{FF2B5EF4-FFF2-40B4-BE49-F238E27FC236}">
-                <a16:creationId xmlns:a16="http://schemas.microsoft.com/office/drawing/2014/main" id="{B5438CD9-45AE-4DBD-BA51-C42CD2A0B9A4}"/>
+                <a16:creationId xmlns:a16="http://schemas.microsoft.com/office/drawing/2014/main" id="{B502A889-C9A7-4AA8-878C-760E13F9F839}"/>
               </a:ext>
             </a:extLst>
           </p:cNvPr>
@@ -2707,7 +2707,7 @@
           <p:cNvPr id="5" name="s10-identity">
             <a:extLst xmlns:a="http://schemas.openxmlformats.org/drawingml/2006/main">
               <a:ext uri="{FF2B5EF4-FFF2-40B4-BE49-F238E27FC236}">
-                <a16:creationId xmlns:a16="http://schemas.microsoft.com/office/drawing/2014/main" id="{096D78F1-AB42-4320-9263-1590B6113BD1}"/>
+                <a16:creationId xmlns:a16="http://schemas.microsoft.com/office/drawing/2014/main" id="{99E78235-2A64-4B9B-897A-DEA5D27CF885}"/>
               </a:ext>
             </a:extLst>
           </p:cNvPr>
@@ -2765,7 +2765,7 @@
           <p:cNvPr id="6" name="case-title">
             <a:extLst xmlns:a="http://schemas.openxmlformats.org/drawingml/2006/main">
               <a:ext uri="{FF2B5EF4-FFF2-40B4-BE49-F238E27FC236}">
-                <a16:creationId xmlns:a16="http://schemas.microsoft.com/office/drawing/2014/main" id="{A03594B8-9396-4CA9-981D-87BFE7334D36}"/>
+                <a16:creationId xmlns:a16="http://schemas.microsoft.com/office/drawing/2014/main" id="{45ABC3A0-3228-43AD-82C3-7A82790CD55D}"/>
               </a:ext>
             </a:extLst>
           </p:cNvPr>
@@ -2829,23 +2829,23 @@
           <p:cNvPr id="7" name="case-row-0">
             <a:extLst xmlns:a="http://schemas.openxmlformats.org/drawingml/2006/main">
               <a:ext uri="{FF2B5EF4-FFF2-40B4-BE49-F238E27FC236}">
-                <a16:creationId xmlns:a16="http://schemas.microsoft.com/office/drawing/2014/main" id="{C61ACE85-3C83-433D-8456-78B8620E128B}"/>
-              </a:ext>
-            </a:extLst>
-          </p:cNvPr>
-          <p:cNvSpPr>
-            <a:spLocks xmlns:a="http://schemas.openxmlformats.org/drawingml/2006/main" noGrp="1"/>
-          </p:cNvSpPr>
-          <p:nvPr/>
-        </p:nvSpPr>
-        <p:spPr>
-          <a:xfrm xmlns:a="http://schemas.openxmlformats.org/drawingml/2006/main">
-            <a:off x="4286250" y="2228850"/>
-            <a:ext cx="6534150" cy="1238250"/>
+                <a16:creationId xmlns:a16="http://schemas.microsoft.com/office/drawing/2014/main" id="{D64EADFC-834A-40E3-95B6-35496FCAA458}"/>
+              </a:ext>
+            </a:extLst>
+          </p:cNvPr>
+          <p:cNvSpPr>
+            <a:spLocks xmlns:a="http://schemas.openxmlformats.org/drawingml/2006/main" noGrp="1"/>
+          </p:cNvSpPr>
+          <p:nvPr/>
+        </p:nvSpPr>
+        <p:spPr>
+          <a:xfrm xmlns:a="http://schemas.openxmlformats.org/drawingml/2006/main">
+            <a:off x="4286250" y="2057400"/>
+            <a:ext cx="6534150" cy="838200"/>
           </a:xfrm>
           <a:prstGeom xmlns:a="http://schemas.openxmlformats.org/drawingml/2006/main" prst="roundRect">
             <a:avLst>
-              <a:gd name="adj" fmla="val 10000"/>
+              <a:gd name="adj" fmla="val 14773"/>
             </a:avLst>
           </a:prstGeom>
           <a:solidFill xmlns:a="http://schemas.openxmlformats.org/drawingml/2006/main">
@@ -2883,7 +2883,7 @@
                 <a:ea typeface="PingFang SC"/>
                 <a:cs typeface="PingFang SC"/>
               </a:rPr>
-              <a:t>场景｜多台机器人分区巡检时，可在训练场中注入延迟、丢包和单机失效。系统比较集中式调度、邻居协商和预设分区三种策略，观察覆盖率、重复路径、恢复时间和通信开销…</a:t>
+              <a:t>边界｜多台机器人分区巡检时，可在训练场中注入延迟、丢包和单机失效</a:t>
             </a:r>
           </a:p>
         </p:txBody>
@@ -2893,23 +2893,87 @@
           <p:cNvPr id="8" name="case-row-1">
             <a:extLst xmlns:a="http://schemas.openxmlformats.org/drawingml/2006/main">
               <a:ext uri="{FF2B5EF4-FFF2-40B4-BE49-F238E27FC236}">
-                <a16:creationId xmlns:a16="http://schemas.microsoft.com/office/drawing/2014/main" id="{143CB1D1-94CA-426F-837A-1E70EE13049B}"/>
-              </a:ext>
-            </a:extLst>
-          </p:cNvPr>
-          <p:cNvSpPr>
-            <a:spLocks xmlns:a="http://schemas.openxmlformats.org/drawingml/2006/main" noGrp="1"/>
-          </p:cNvSpPr>
-          <p:nvPr/>
-        </p:nvSpPr>
-        <p:spPr>
-          <a:xfrm xmlns:a="http://schemas.openxmlformats.org/drawingml/2006/main">
-            <a:off x="4286250" y="3714750"/>
-            <a:ext cx="6534150" cy="1238250"/>
+                <a16:creationId xmlns:a16="http://schemas.microsoft.com/office/drawing/2014/main" id="{2EF86725-A7F8-4494-A253-4B4146B4C50F}"/>
+              </a:ext>
+            </a:extLst>
+          </p:cNvPr>
+          <p:cNvSpPr>
+            <a:spLocks xmlns:a="http://schemas.openxmlformats.org/drawingml/2006/main" noGrp="1"/>
+          </p:cNvSpPr>
+          <p:nvPr/>
+        </p:nvSpPr>
+        <p:spPr>
+          <a:xfrm xmlns:a="http://schemas.openxmlformats.org/drawingml/2006/main">
+            <a:off x="4286250" y="3086100"/>
+            <a:ext cx="6534150" cy="838200"/>
           </a:xfrm>
           <a:prstGeom xmlns:a="http://schemas.openxmlformats.org/drawingml/2006/main" prst="roundRect">
             <a:avLst>
-              <a:gd name="adj" fmla="val 10000"/>
+              <a:gd name="adj" fmla="val 14773"/>
+            </a:avLst>
+          </a:prstGeom>
+          <a:solidFill xmlns:a="http://schemas.openxmlformats.org/drawingml/2006/main">
+            <a:srgbClr val="FFFFFF"/>
+          </a:solidFill>
+          <a:ln xmlns:a="http://schemas.openxmlformats.org/drawingml/2006/main" w="9525">
+            <a:solidFill>
+              <a:srgbClr val="D8E0E8"/>
+            </a:solidFill>
+            <a:prstDash val="solid"/>
+          </a:ln>
+        </p:spPr>
+        <p:txBody>
+          <a:bodyPr xmlns:a="http://schemas.openxmlformats.org/drawingml/2006/main" lIns="152400" tIns="133350" rIns="152400" bIns="133350" anchor="ctr">
+            <a:normAutofit fontScale="100000"/>
+          </a:bodyPr>
+          <a:lstStyle xmlns:a="http://schemas.openxmlformats.org/drawingml/2006/main"/>
+          <a:p xmlns:a="http://schemas.openxmlformats.org/drawingml/2006/main">
+            <a:pPr algn="l">
+              <a:defRPr sz="1575" b="0">
+                <a:solidFill>
+                  <a:srgbClr val="10233F"/>
+                </a:solidFill>
+                <a:latin typeface="PingFang SC"/>
+                <a:ea typeface="PingFang SC"/>
+                <a:cs typeface="PingFang SC"/>
+              </a:defRPr>
+            </a:pPr>
+            <a:r>
+              <a:rPr sz="1575" b="0">
+                <a:solidFill>
+                  <a:srgbClr val="10233F"/>
+                </a:solidFill>
+                <a:latin typeface="PingFang SC"/>
+                <a:ea typeface="PingFang SC"/>
+                <a:cs typeface="PingFang SC"/>
+              </a:rPr>
+              <a:t>方法｜系统比较集中式调度、邻居协商和预设分区三种策略，观察覆盖率、重复路径、恢复时间和通信开销</a:t>
+            </a:r>
+          </a:p>
+        </p:txBody>
+      </p:sp>
+      <p:sp>
+        <p:nvSpPr>
+          <p:cNvPr id="9" name="case-row-2">
+            <a:extLst xmlns:a="http://schemas.openxmlformats.org/drawingml/2006/main">
+              <a:ext uri="{FF2B5EF4-FFF2-40B4-BE49-F238E27FC236}">
+                <a16:creationId xmlns:a16="http://schemas.microsoft.com/office/drawing/2014/main" id="{6C6373F1-399A-46B1-A038-AC2E54F158DE}"/>
+              </a:ext>
+            </a:extLst>
+          </p:cNvPr>
+          <p:cNvSpPr>
+            <a:spLocks xmlns:a="http://schemas.openxmlformats.org/drawingml/2006/main" noGrp="1"/>
+          </p:cNvSpPr>
+          <p:nvPr/>
+        </p:nvSpPr>
+        <p:spPr>
+          <a:xfrm xmlns:a="http://schemas.openxmlformats.org/drawingml/2006/main">
+            <a:off x="4286250" y="4114800"/>
+            <a:ext cx="6534150" cy="838200"/>
+          </a:xfrm>
+          <a:prstGeom xmlns:a="http://schemas.openxmlformats.org/drawingml/2006/main" prst="roundRect">
+            <a:avLst>
+              <a:gd name="adj" fmla="val 14773"/>
             </a:avLst>
           </a:prstGeom>
           <a:solidFill xmlns:a="http://schemas.openxmlformats.org/drawingml/2006/main">
@@ -2917,7 +2981,7 @@
           </a:solidFill>
           <a:ln xmlns:a="http://schemas.openxmlformats.org/drawingml/2006/main" w="9525">
             <a:solidFill>
-              <a:srgbClr val="2D9B72"/>
+              <a:srgbClr val="0B6B4F"/>
             </a:solidFill>
             <a:prstDash val="solid"/>
           </a:ln>
@@ -2947,17 +3011,17 @@
                 <a:ea typeface="PingFang SC"/>
                 <a:cs typeface="PingFang SC"/>
               </a:rPr>
-              <a:t>验证｜验收“多机器人巡检的通信失效”时，要同时记录适用场景、证据来源、失败条件与人工责任</a:t>
-            </a:r>
-          </a:p>
-        </p:txBody>
-      </p:sp>
-      <p:sp>
-        <p:nvSpPr>
-          <p:cNvPr id="9" name="s10-takeaway-rule">
-            <a:extLst xmlns:a="http://schemas.openxmlformats.org/drawingml/2006/main">
-              <a:ext uri="{FF2B5EF4-FFF2-40B4-BE49-F238E27FC236}">
-                <a16:creationId xmlns:a16="http://schemas.microsoft.com/office/drawing/2014/main" id="{B4C9AB6C-5A75-4AF2-867E-DA47BBA60C69}"/>
+              <a:t>启示｜结果帮助团队选择在正常状态高效、故障时仍可降级运行的方案</a:t>
+            </a:r>
+          </a:p>
+        </p:txBody>
+      </p:sp>
+      <p:sp>
+        <p:nvSpPr>
+          <p:cNvPr id="10" name="s10-takeaway-rule">
+            <a:extLst xmlns:a="http://schemas.openxmlformats.org/drawingml/2006/main">
+              <a:ext uri="{FF2B5EF4-FFF2-40B4-BE49-F238E27FC236}">
+                <a16:creationId xmlns:a16="http://schemas.microsoft.com/office/drawing/2014/main" id="{0FF8FC85-51D1-4326-BA41-A9EE38454875}"/>
               </a:ext>
             </a:extLst>
           </p:cNvPr>
@@ -2987,10 +3051,10 @@
       </p:sp>
       <p:sp>
         <p:nvSpPr>
-          <p:cNvPr id="10" name="s10-takeaway">
-            <a:extLst xmlns:a="http://schemas.openxmlformats.org/drawingml/2006/main">
-              <a:ext uri="{FF2B5EF4-FFF2-40B4-BE49-F238E27FC236}">
-                <a16:creationId xmlns:a16="http://schemas.microsoft.com/office/drawing/2014/main" id="{D7BCAF43-039D-4E72-913B-DA13951819DF}"/>
+          <p:cNvPr id="11" name="s10-takeaway">
+            <a:extLst xmlns:a="http://schemas.openxmlformats.org/drawingml/2006/main">
+              <a:ext uri="{FF2B5EF4-FFF2-40B4-BE49-F238E27FC236}">
+                <a16:creationId xmlns:a16="http://schemas.microsoft.com/office/drawing/2014/main" id="{C4DB571A-E7D7-45AA-A3BA-9EC6667BD2C3}"/>
               </a:ext>
             </a:extLst>
           </p:cNvPr>
@@ -3038,7 +3102,7 @@
                 <a:ea typeface="PingFang SC"/>
                 <a:cs typeface="PingFang SC"/>
               </a:rPr>
-              <a:t>多机器人巡检的通信失效必须经过边界验证</a:t>
+              <a:t>通信失效测试揭示协作策略的恢复能力</a:t>
             </a:r>
           </a:p>
         </p:txBody>
@@ -3046,7 +3110,7 @@
     </p:spTree>
     <p:extLst>
       <p:ext uri="{BB962C8B-B14F-4D97-AF65-F5344CB8AC3E}">
-        <p14:creationId xmlns:p14="http://schemas.microsoft.com/office/powerpoint/2010/main" val="610297269"/>
+        <p14:creationId xmlns:p14="http://schemas.microsoft.com/office/powerpoint/2010/main" val="1290473370"/>
       </p:ext>
     </p:extLst>
   </p:cSld>
@@ -3077,7 +3141,7 @@
           <p:cNvPr id="1" name="s11-rule">
             <a:extLst xmlns:a="http://schemas.openxmlformats.org/drawingml/2006/main">
               <a:ext uri="{FF2B5EF4-FFF2-40B4-BE49-F238E27FC236}">
-                <a16:creationId xmlns:a16="http://schemas.microsoft.com/office/drawing/2014/main" id="{B1599E9C-85E8-4AC3-9D16-19739ADFE116}"/>
+                <a16:creationId xmlns:a16="http://schemas.microsoft.com/office/drawing/2014/main" id="{304E32F9-34D1-49C4-8D5A-9E71194183F7}"/>
               </a:ext>
             </a:extLst>
           </p:cNvPr>
@@ -3110,7 +3174,7 @@
           <p:cNvPr id="2" name="s11-eyebrow">
             <a:extLst xmlns:a="http://schemas.openxmlformats.org/drawingml/2006/main">
               <a:ext uri="{FF2B5EF4-FFF2-40B4-BE49-F238E27FC236}">
-                <a16:creationId xmlns:a16="http://schemas.microsoft.com/office/drawing/2014/main" id="{CE481306-7631-4965-9E27-AF4377E069C6}"/>
+                <a16:creationId xmlns:a16="http://schemas.microsoft.com/office/drawing/2014/main" id="{2FD80A37-0B06-4111-BC34-9D7396B5702C}"/>
               </a:ext>
             </a:extLst>
           </p:cNvPr>
@@ -3168,7 +3232,7 @@
           <p:cNvPr id="3" name="s11-title">
             <a:extLst xmlns:a="http://schemas.openxmlformats.org/drawingml/2006/main">
               <a:ext uri="{FF2B5EF4-FFF2-40B4-BE49-F238E27FC236}">
-                <a16:creationId xmlns:a16="http://schemas.microsoft.com/office/drawing/2014/main" id="{FC9D26BA-475F-4253-A823-A14CC9960D7D}"/>
+                <a16:creationId xmlns:a16="http://schemas.microsoft.com/office/drawing/2014/main" id="{5400C08C-4489-4B3B-BEF2-8ABAA30ECB5F}"/>
               </a:ext>
             </a:extLst>
           </p:cNvPr>
@@ -3216,7 +3280,7 @@
                 <a:ea typeface="PingFang SC"/>
                 <a:cs typeface="PingFang SC"/>
               </a:rPr>
-              <a:t>把方法落实为可验证的行动</a:t>
+              <a:t>群体具身智能：一次可验收练习</a:t>
             </a:r>
           </a:p>
         </p:txBody>
@@ -3226,7 +3290,7 @@
           <p:cNvPr id="4" name="s11-footer">
             <a:extLst xmlns:a="http://schemas.openxmlformats.org/drawingml/2006/main">
               <a:ext uri="{FF2B5EF4-FFF2-40B4-BE49-F238E27FC236}">
-                <a16:creationId xmlns:a16="http://schemas.microsoft.com/office/drawing/2014/main" id="{5A22C99F-0E2B-4E99-923D-1AF444383FB6}"/>
+                <a16:creationId xmlns:a16="http://schemas.microsoft.com/office/drawing/2014/main" id="{2DE3994E-5F81-4EF4-9D86-7EF2035E4648}"/>
               </a:ext>
             </a:extLst>
           </p:cNvPr>
@@ -3257,7 +3321,7 @@
           <p:cNvPr id="5" name="s11-identity">
             <a:extLst xmlns:a="http://schemas.openxmlformats.org/drawingml/2006/main">
               <a:ext uri="{FF2B5EF4-FFF2-40B4-BE49-F238E27FC236}">
-                <a16:creationId xmlns:a16="http://schemas.microsoft.com/office/drawing/2014/main" id="{C7785D71-2FFD-435D-884F-046293616703}"/>
+                <a16:creationId xmlns:a16="http://schemas.microsoft.com/office/drawing/2014/main" id="{21944640-78E1-4448-86AB-DC851227986E}"/>
               </a:ext>
             </a:extLst>
           </p:cNvPr>
@@ -3315,7 +3379,7 @@
           <p:cNvPr id="6" name="practice-circle-0">
             <a:extLst xmlns:a="http://schemas.openxmlformats.org/drawingml/2006/main">
               <a:ext uri="{FF2B5EF4-FFF2-40B4-BE49-F238E27FC236}">
-                <a16:creationId xmlns:a16="http://schemas.microsoft.com/office/drawing/2014/main" id="{8A846E22-0EF3-4C36-8D68-7A22AD7E070F}"/>
+                <a16:creationId xmlns:a16="http://schemas.microsoft.com/office/drawing/2014/main" id="{36E021D6-F698-4958-9720-3B4F9CB9FE47}"/>
               </a:ext>
             </a:extLst>
           </p:cNvPr>
@@ -3348,7 +3412,7 @@
           <p:cNvPr id="7" name="practice-number-0">
             <a:extLst xmlns:a="http://schemas.openxmlformats.org/drawingml/2006/main">
               <a:ext uri="{FF2B5EF4-FFF2-40B4-BE49-F238E27FC236}">
-                <a16:creationId xmlns:a16="http://schemas.microsoft.com/office/drawing/2014/main" id="{E0357585-DBA2-4DB0-B5D8-49A3B430C375}"/>
+                <a16:creationId xmlns:a16="http://schemas.microsoft.com/office/drawing/2014/main" id="{07F6D759-611F-4B34-9B38-A4BB1DE67393}"/>
               </a:ext>
             </a:extLst>
           </p:cNvPr>
@@ -3406,7 +3470,7 @@
           <p:cNvPr id="8" name="practice-item-0">
             <a:extLst xmlns:a="http://schemas.openxmlformats.org/drawingml/2006/main">
               <a:ext uri="{FF2B5EF4-FFF2-40B4-BE49-F238E27FC236}">
-                <a16:creationId xmlns:a16="http://schemas.microsoft.com/office/drawing/2014/main" id="{8277D1C2-6CA6-40BA-889E-7736D1130C0F}"/>
+                <a16:creationId xmlns:a16="http://schemas.microsoft.com/office/drawing/2014/main" id="{537FBAF0-9087-481E-9A2B-AC0217143E41}"/>
               </a:ext>
             </a:extLst>
           </p:cNvPr>
@@ -3460,7 +3524,7 @@
                 <a:ea typeface="PingFang SC"/>
                 <a:cs typeface="PingFang SC"/>
               </a:rPr>
-              <a:t>设计一个群体任务，写出环境、个体、交互和实验四层配置。；选择至少两个个体指标、三个群体指标和两个系统指标，并说明彼此可能冲突的地方</a:t>
+              <a:t>设计一个群体任务，写出环境、个体、交互和实验四层配置；选择至少两个个体指标、三个群体指标和两个系统指标，并说明彼此可能冲突的地方</a:t>
             </a:r>
           </a:p>
         </p:txBody>
@@ -3470,7 +3534,7 @@
           <p:cNvPr id="9" name="practice-connector-0">
             <a:extLst xmlns:a="http://schemas.openxmlformats.org/drawingml/2006/main">
               <a:ext uri="{FF2B5EF4-FFF2-40B4-BE49-F238E27FC236}">
-                <a16:creationId xmlns:a16="http://schemas.microsoft.com/office/drawing/2014/main" id="{DD2A3ACD-0861-4594-BC39-52A8382D40BB}"/>
+                <a16:creationId xmlns:a16="http://schemas.microsoft.com/office/drawing/2014/main" id="{B4D18803-60B3-4293-9D49-A2AEFD2212DD}"/>
               </a:ext>
             </a:extLst>
           </p:cNvPr>
@@ -3490,7 +3554,7 @@
           <a:noFill xmlns:a="http://schemas.openxmlformats.org/drawingml/2006/main"/>
           <a:ln xmlns:a="http://schemas.openxmlformats.org/drawingml/2006/main" w="28575">
             <a:solidFill>
-              <a:srgbClr val="2D9B72"/>
+              <a:srgbClr val="0B6B4F"/>
             </a:solidFill>
             <a:prstDash val="solid"/>
           </a:ln>
@@ -3501,7 +3565,7 @@
           <p:cNvPr id="10" name="practice-circle-1">
             <a:extLst xmlns:a="http://schemas.openxmlformats.org/drawingml/2006/main">
               <a:ext uri="{FF2B5EF4-FFF2-40B4-BE49-F238E27FC236}">
-                <a16:creationId xmlns:a16="http://schemas.microsoft.com/office/drawing/2014/main" id="{D447F38F-F409-4366-B522-2AEA798592C4}"/>
+                <a16:creationId xmlns:a16="http://schemas.microsoft.com/office/drawing/2014/main" id="{5E920B8D-E02C-4FF9-B605-E1860B81895C}"/>
               </a:ext>
             </a:extLst>
           </p:cNvPr>
@@ -3534,7 +3598,7 @@
           <p:cNvPr id="11" name="practice-number-1">
             <a:extLst xmlns:a="http://schemas.openxmlformats.org/drawingml/2006/main">
               <a:ext uri="{FF2B5EF4-FFF2-40B4-BE49-F238E27FC236}">
-                <a16:creationId xmlns:a16="http://schemas.microsoft.com/office/drawing/2014/main" id="{9B98D47F-ABCE-4AE4-9D60-18501D5B22E1}"/>
+                <a16:creationId xmlns:a16="http://schemas.microsoft.com/office/drawing/2014/main" id="{2ABB3757-1383-48BA-8445-B1B56EC6BD8C}"/>
               </a:ext>
             </a:extLst>
           </p:cNvPr>
@@ -3592,7 +3656,7 @@
           <p:cNvPr id="12" name="practice-item-1">
             <a:extLst xmlns:a="http://schemas.openxmlformats.org/drawingml/2006/main">
               <a:ext uri="{FF2B5EF4-FFF2-40B4-BE49-F238E27FC236}">
-                <a16:creationId xmlns:a16="http://schemas.microsoft.com/office/drawing/2014/main" id="{1D4C6BB1-8C56-453C-8469-CC1A68FA0587}"/>
+                <a16:creationId xmlns:a16="http://schemas.microsoft.com/office/drawing/2014/main" id="{E726E4E8-8E33-4267-914E-ED6C82EFAC3B}"/>
               </a:ext>
             </a:extLst>
           </p:cNvPr>
@@ -3656,7 +3720,7 @@
           <p:cNvPr id="13" name="practice-connector-1">
             <a:extLst xmlns:a="http://schemas.openxmlformats.org/drawingml/2006/main">
               <a:ext uri="{FF2B5EF4-FFF2-40B4-BE49-F238E27FC236}">
-                <a16:creationId xmlns:a16="http://schemas.microsoft.com/office/drawing/2014/main" id="{BA8975DB-AC44-4DDE-A16D-80FBD9EE5766}"/>
+                <a16:creationId xmlns:a16="http://schemas.microsoft.com/office/drawing/2014/main" id="{265BE24E-603B-4466-9C1A-957848154567}"/>
               </a:ext>
             </a:extLst>
           </p:cNvPr>
@@ -3676,7 +3740,7 @@
           <a:noFill xmlns:a="http://schemas.openxmlformats.org/drawingml/2006/main"/>
           <a:ln xmlns:a="http://schemas.openxmlformats.org/drawingml/2006/main" w="28575">
             <a:solidFill>
-              <a:srgbClr val="2D9B72"/>
+              <a:srgbClr val="0B6B4F"/>
             </a:solidFill>
             <a:prstDash val="solid"/>
           </a:ln>
@@ -3687,7 +3751,7 @@
           <p:cNvPr id="14" name="practice-circle-2">
             <a:extLst xmlns:a="http://schemas.openxmlformats.org/drawingml/2006/main">
               <a:ext uri="{FF2B5EF4-FFF2-40B4-BE49-F238E27FC236}">
-                <a16:creationId xmlns:a16="http://schemas.microsoft.com/office/drawing/2014/main" id="{D6E13121-4046-4215-86F7-9F94D3E49DB6}"/>
+                <a16:creationId xmlns:a16="http://schemas.microsoft.com/office/drawing/2014/main" id="{5535D80D-3CBE-4DE5-91DE-D6CDB32A069E}"/>
               </a:ext>
             </a:extLst>
           </p:cNvPr>
@@ -3705,7 +3769,7 @@
             <a:avLst/>
           </a:prstGeom>
           <a:solidFill xmlns:a="http://schemas.openxmlformats.org/drawingml/2006/main">
-            <a:srgbClr val="2D9B72"/>
+            <a:srgbClr val="0B6B4F"/>
           </a:solidFill>
           <a:ln xmlns:a="http://schemas.openxmlformats.org/drawingml/2006/main" w="28575">
             <a:solidFill>
@@ -3720,7 +3784,7 @@
           <p:cNvPr id="15" name="practice-number-2">
             <a:extLst xmlns:a="http://schemas.openxmlformats.org/drawingml/2006/main">
               <a:ext uri="{FF2B5EF4-FFF2-40B4-BE49-F238E27FC236}">
-                <a16:creationId xmlns:a16="http://schemas.microsoft.com/office/drawing/2014/main" id="{2F45880A-0819-4B50-9BFD-5D7193AC3279}"/>
+                <a16:creationId xmlns:a16="http://schemas.microsoft.com/office/drawing/2014/main" id="{9A3F7244-4F14-4E3C-8CB1-D894DD5ADB5B}"/>
               </a:ext>
             </a:extLst>
           </p:cNvPr>
@@ -3778,7 +3842,7 @@
           <p:cNvPr id="16" name="practice-item-2">
             <a:extLst xmlns:a="http://schemas.openxmlformats.org/drawingml/2006/main">
               <a:ext uri="{FF2B5EF4-FFF2-40B4-BE49-F238E27FC236}">
-                <a16:creationId xmlns:a16="http://schemas.microsoft.com/office/drawing/2014/main" id="{77CD20C8-4282-4AE9-BAEA-102A33343311}"/>
+                <a16:creationId xmlns:a16="http://schemas.microsoft.com/office/drawing/2014/main" id="{A31066C4-6598-408B-8450-BAE7B64978C9}"/>
               </a:ext>
             </a:extLst>
           </p:cNvPr>
@@ -3802,7 +3866,7 @@
           </a:solidFill>
           <a:ln xmlns:a="http://schemas.openxmlformats.org/drawingml/2006/main" w="19050">
             <a:solidFill>
-              <a:srgbClr val="2D9B72"/>
+              <a:srgbClr val="0B6B4F"/>
             </a:solidFill>
             <a:prstDash val="solid"/>
           </a:ln>
@@ -3840,7 +3904,7 @@
     </p:spTree>
     <p:extLst>
       <p:ext uri="{BB962C8B-B14F-4D97-AF65-F5344CB8AC3E}">
-        <p14:creationId xmlns:p14="http://schemas.microsoft.com/office/powerpoint/2010/main" val="2007531687"/>
+        <p14:creationId xmlns:p14="http://schemas.microsoft.com/office/powerpoint/2010/main" val="1390161268"/>
       </p:ext>
     </p:extLst>
   </p:cSld>
@@ -3871,7 +3935,7 @@
           <p:cNvPr id="1" name="s12-rule">
             <a:extLst xmlns:a="http://schemas.openxmlformats.org/drawingml/2006/main">
               <a:ext uri="{FF2B5EF4-FFF2-40B4-BE49-F238E27FC236}">
-                <a16:creationId xmlns:a16="http://schemas.microsoft.com/office/drawing/2014/main" id="{6AB4DDBB-340D-40C2-A711-757A6AE49D99}"/>
+                <a16:creationId xmlns:a16="http://schemas.microsoft.com/office/drawing/2014/main" id="{D733698D-43ED-4873-816B-F4A34A5AE0A2}"/>
               </a:ext>
             </a:extLst>
           </p:cNvPr>
@@ -3904,7 +3968,7 @@
           <p:cNvPr id="2" name="s12-eyebrow">
             <a:extLst xmlns:a="http://schemas.openxmlformats.org/drawingml/2006/main">
               <a:ext uri="{FF2B5EF4-FFF2-40B4-BE49-F238E27FC236}">
-                <a16:creationId xmlns:a16="http://schemas.microsoft.com/office/drawing/2014/main" id="{9E2DCB19-E851-401F-881C-A8DC6F406AFB}"/>
+                <a16:creationId xmlns:a16="http://schemas.microsoft.com/office/drawing/2014/main" id="{52785422-967D-408B-BE60-BF18ACBB9EED}"/>
               </a:ext>
             </a:extLst>
           </p:cNvPr>
@@ -3962,7 +4026,7 @@
           <p:cNvPr id="3" name="s12-title">
             <a:extLst xmlns:a="http://schemas.openxmlformats.org/drawingml/2006/main">
               <a:ext uri="{FF2B5EF4-FFF2-40B4-BE49-F238E27FC236}">
-                <a16:creationId xmlns:a16="http://schemas.microsoft.com/office/drawing/2014/main" id="{2136F144-F6A9-4281-A326-335E775B9190}"/>
+                <a16:creationId xmlns:a16="http://schemas.microsoft.com/office/drawing/2014/main" id="{4C27B03B-B3BA-4BF3-BAC5-386C66102BC5}"/>
               </a:ext>
             </a:extLst>
           </p:cNvPr>
@@ -4010,7 +4074,7 @@
                 <a:ea typeface="PingFang SC"/>
                 <a:cs typeface="PingFang SC"/>
               </a:rPr>
-              <a:t>带走三条可复用的判断原则</a:t>
+              <a:t>群体具身智能：判断时先抓住三点</a:t>
             </a:r>
           </a:p>
         </p:txBody>
@@ -4020,7 +4084,7 @@
           <p:cNvPr id="4" name="s12-footer">
             <a:extLst xmlns:a="http://schemas.openxmlformats.org/drawingml/2006/main">
               <a:ext uri="{FF2B5EF4-FFF2-40B4-BE49-F238E27FC236}">
-                <a16:creationId xmlns:a16="http://schemas.microsoft.com/office/drawing/2014/main" id="{FBD0A3FA-14F9-4E6C-AB02-AEB77C47B68D}"/>
+                <a16:creationId xmlns:a16="http://schemas.microsoft.com/office/drawing/2014/main" id="{0055AE2F-EC0B-488D-B754-D589BEBA7A62}"/>
               </a:ext>
             </a:extLst>
           </p:cNvPr>
@@ -4051,7 +4115,7 @@
           <p:cNvPr id="5" name="s12-identity">
             <a:extLst xmlns:a="http://schemas.openxmlformats.org/drawingml/2006/main">
               <a:ext uri="{FF2B5EF4-FFF2-40B4-BE49-F238E27FC236}">
-                <a16:creationId xmlns:a16="http://schemas.microsoft.com/office/drawing/2014/main" id="{CFB9A7CF-9808-43C1-9E1D-BA805786FD55}"/>
+                <a16:creationId xmlns:a16="http://schemas.microsoft.com/office/drawing/2014/main" id="{083D37D8-9C33-4924-A097-DA46520960B8}"/>
               </a:ext>
             </a:extLst>
           </p:cNvPr>
@@ -4109,7 +4173,7 @@
           <p:cNvPr id="6" name="recap-circle-0">
             <a:extLst xmlns:a="http://schemas.openxmlformats.org/drawingml/2006/main">
               <a:ext uri="{FF2B5EF4-FFF2-40B4-BE49-F238E27FC236}">
-                <a16:creationId xmlns:a16="http://schemas.microsoft.com/office/drawing/2014/main" id="{EC6264DA-3E38-4FFF-BBA1-701C69C4420A}"/>
+                <a16:creationId xmlns:a16="http://schemas.microsoft.com/office/drawing/2014/main" id="{9BA4AB87-3CC9-48D7-806A-FDA482486067}"/>
               </a:ext>
             </a:extLst>
           </p:cNvPr>
@@ -4142,7 +4206,7 @@
           <p:cNvPr id="7" name="recap-number-0">
             <a:extLst xmlns:a="http://schemas.openxmlformats.org/drawingml/2006/main">
               <a:ext uri="{FF2B5EF4-FFF2-40B4-BE49-F238E27FC236}">
-                <a16:creationId xmlns:a16="http://schemas.microsoft.com/office/drawing/2014/main" id="{B45BB817-3F32-45A2-8F96-7C8C82163AAA}"/>
+                <a16:creationId xmlns:a16="http://schemas.microsoft.com/office/drawing/2014/main" id="{B90C3257-46BA-436F-B99B-4628F9A89D4C}"/>
               </a:ext>
             </a:extLst>
           </p:cNvPr>
@@ -4200,7 +4264,7 @@
           <p:cNvPr id="8" name="recap-item-0">
             <a:extLst xmlns:a="http://schemas.openxmlformats.org/drawingml/2006/main">
               <a:ext uri="{FF2B5EF4-FFF2-40B4-BE49-F238E27FC236}">
-                <a16:creationId xmlns:a16="http://schemas.microsoft.com/office/drawing/2014/main" id="{51906B2F-B520-4AC7-833C-4B86A6A844A9}"/>
+                <a16:creationId xmlns:a16="http://schemas.microsoft.com/office/drawing/2014/main" id="{11EB6979-FA83-4F59-A755-C0F75ED46541}"/>
               </a:ext>
             </a:extLst>
           </p:cNvPr>
@@ -4264,7 +4328,7 @@
           <p:cNvPr id="9" name="recap-connector-0">
             <a:extLst xmlns:a="http://schemas.openxmlformats.org/drawingml/2006/main">
               <a:ext uri="{FF2B5EF4-FFF2-40B4-BE49-F238E27FC236}">
-                <a16:creationId xmlns:a16="http://schemas.microsoft.com/office/drawing/2014/main" id="{A0EA9FC5-DAD7-42DE-B7A2-72066481F1F5}"/>
+                <a16:creationId xmlns:a16="http://schemas.microsoft.com/office/drawing/2014/main" id="{E9224490-01F3-41C6-A6B3-B2799148660F}"/>
               </a:ext>
             </a:extLst>
           </p:cNvPr>
@@ -4284,7 +4348,7 @@
           <a:noFill xmlns:a="http://schemas.openxmlformats.org/drawingml/2006/main"/>
           <a:ln xmlns:a="http://schemas.openxmlformats.org/drawingml/2006/main" w="28575">
             <a:solidFill>
-              <a:srgbClr val="2D9B72"/>
+              <a:srgbClr val="0B6B4F"/>
             </a:solidFill>
             <a:prstDash val="solid"/>
           </a:ln>
@@ -4295,7 +4359,7 @@
           <p:cNvPr id="10" name="recap-circle-1">
             <a:extLst xmlns:a="http://schemas.openxmlformats.org/drawingml/2006/main">
               <a:ext uri="{FF2B5EF4-FFF2-40B4-BE49-F238E27FC236}">
-                <a16:creationId xmlns:a16="http://schemas.microsoft.com/office/drawing/2014/main" id="{88D17EF1-4F0F-4F88-B229-0A5EE6607D9E}"/>
+                <a16:creationId xmlns:a16="http://schemas.microsoft.com/office/drawing/2014/main" id="{9E0DF4E7-CEC8-4F8C-9119-E5571EC671FD}"/>
               </a:ext>
             </a:extLst>
           </p:cNvPr>
@@ -4328,7 +4392,7 @@
           <p:cNvPr id="11" name="recap-number-1">
             <a:extLst xmlns:a="http://schemas.openxmlformats.org/drawingml/2006/main">
               <a:ext uri="{FF2B5EF4-FFF2-40B4-BE49-F238E27FC236}">
-                <a16:creationId xmlns:a16="http://schemas.microsoft.com/office/drawing/2014/main" id="{15E795A0-116C-427D-B21C-94FBE09206DC}"/>
+                <a16:creationId xmlns:a16="http://schemas.microsoft.com/office/drawing/2014/main" id="{A25EEF41-4B9B-4609-9497-2AB97C51CA3A}"/>
               </a:ext>
             </a:extLst>
           </p:cNvPr>
@@ -4386,7 +4450,7 @@
           <p:cNvPr id="12" name="recap-item-1">
             <a:extLst xmlns:a="http://schemas.openxmlformats.org/drawingml/2006/main">
               <a:ext uri="{FF2B5EF4-FFF2-40B4-BE49-F238E27FC236}">
-                <a16:creationId xmlns:a16="http://schemas.microsoft.com/office/drawing/2014/main" id="{A02AFE86-BC31-459B-8064-07B0275F0919}"/>
+                <a16:creationId xmlns:a16="http://schemas.microsoft.com/office/drawing/2014/main" id="{19439410-679D-4EB9-B787-E0DFBEA67AA2}"/>
               </a:ext>
             </a:extLst>
           </p:cNvPr>
@@ -4450,7 +4514,7 @@
           <p:cNvPr id="13" name="recap-connector-1">
             <a:extLst xmlns:a="http://schemas.openxmlformats.org/drawingml/2006/main">
               <a:ext uri="{FF2B5EF4-FFF2-40B4-BE49-F238E27FC236}">
-                <a16:creationId xmlns:a16="http://schemas.microsoft.com/office/drawing/2014/main" id="{3A7A99C3-3548-41F1-9449-C08376146935}"/>
+                <a16:creationId xmlns:a16="http://schemas.microsoft.com/office/drawing/2014/main" id="{334605D4-55F6-408D-B118-B61019C853E4}"/>
               </a:ext>
             </a:extLst>
           </p:cNvPr>
@@ -4470,7 +4534,7 @@
           <a:noFill xmlns:a="http://schemas.openxmlformats.org/drawingml/2006/main"/>
           <a:ln xmlns:a="http://schemas.openxmlformats.org/drawingml/2006/main" w="28575">
             <a:solidFill>
-              <a:srgbClr val="2D9B72"/>
+              <a:srgbClr val="0B6B4F"/>
             </a:solidFill>
             <a:prstDash val="solid"/>
           </a:ln>
@@ -4481,7 +4545,7 @@
           <p:cNvPr id="14" name="recap-circle-2">
             <a:extLst xmlns:a="http://schemas.openxmlformats.org/drawingml/2006/main">
               <a:ext uri="{FF2B5EF4-FFF2-40B4-BE49-F238E27FC236}">
-                <a16:creationId xmlns:a16="http://schemas.microsoft.com/office/drawing/2014/main" id="{9E7375E4-A41F-4BD3-AF07-04F96EFC54AD}"/>
+                <a16:creationId xmlns:a16="http://schemas.microsoft.com/office/drawing/2014/main" id="{BCB19634-0C3F-4820-8954-3DF19A4516FC}"/>
               </a:ext>
             </a:extLst>
           </p:cNvPr>
@@ -4499,7 +4563,7 @@
             <a:avLst/>
           </a:prstGeom>
           <a:solidFill xmlns:a="http://schemas.openxmlformats.org/drawingml/2006/main">
-            <a:srgbClr val="2D9B72"/>
+            <a:srgbClr val="0B6B4F"/>
           </a:solidFill>
           <a:ln xmlns:a="http://schemas.openxmlformats.org/drawingml/2006/main" w="28575">
             <a:solidFill>
@@ -4514,7 +4578,7 @@
           <p:cNvPr id="15" name="recap-number-2">
             <a:extLst xmlns:a="http://schemas.openxmlformats.org/drawingml/2006/main">
               <a:ext uri="{FF2B5EF4-FFF2-40B4-BE49-F238E27FC236}">
-                <a16:creationId xmlns:a16="http://schemas.microsoft.com/office/drawing/2014/main" id="{238B84EC-47A4-4A90-A644-7D9AF50980C2}"/>
+                <a16:creationId xmlns:a16="http://schemas.microsoft.com/office/drawing/2014/main" id="{A1294002-943C-4CDD-BC71-54E9290BEDF3}"/>
               </a:ext>
             </a:extLst>
           </p:cNvPr>
@@ -4572,7 +4636,7 @@
           <p:cNvPr id="16" name="recap-item-2">
             <a:extLst xmlns:a="http://schemas.openxmlformats.org/drawingml/2006/main">
               <a:ext uri="{FF2B5EF4-FFF2-40B4-BE49-F238E27FC236}">
-                <a16:creationId xmlns:a16="http://schemas.microsoft.com/office/drawing/2014/main" id="{EC680054-140D-457C-9D0B-E24DF7C71228}"/>
+                <a16:creationId xmlns:a16="http://schemas.microsoft.com/office/drawing/2014/main" id="{FEE7E83E-D6F5-41BF-BB3E-FE995FEC56C2}"/>
               </a:ext>
             </a:extLst>
           </p:cNvPr>
@@ -4596,7 +4660,7 @@
           </a:solidFill>
           <a:ln xmlns:a="http://schemas.openxmlformats.org/drawingml/2006/main" w="19050">
             <a:solidFill>
-              <a:srgbClr val="2D9B72"/>
+              <a:srgbClr val="0B6B4F"/>
             </a:solidFill>
             <a:prstDash val="solid"/>
           </a:ln>
@@ -4634,7 +4698,7 @@
     </p:spTree>
     <p:extLst>
       <p:ext uri="{BB962C8B-B14F-4D97-AF65-F5344CB8AC3E}">
-        <p14:creationId xmlns:p14="http://schemas.microsoft.com/office/powerpoint/2010/main" val="239437225"/>
+        <p14:creationId xmlns:p14="http://schemas.microsoft.com/office/powerpoint/2010/main" val="120189746"/>
       </p:ext>
     </p:extLst>
   </p:cSld>
@@ -4665,7 +4729,7 @@
           <p:cNvPr id="1" name="s13-rule">
             <a:extLst xmlns:a="http://schemas.openxmlformats.org/drawingml/2006/main">
               <a:ext uri="{FF2B5EF4-FFF2-40B4-BE49-F238E27FC236}">
-                <a16:creationId xmlns:a16="http://schemas.microsoft.com/office/drawing/2014/main" id="{FAA59D50-50BD-4535-B825-CA8A13965F52}"/>
+                <a16:creationId xmlns:a16="http://schemas.microsoft.com/office/drawing/2014/main" id="{0636CAD4-3ABA-4495-A83F-928DF68FB2BA}"/>
               </a:ext>
             </a:extLst>
           </p:cNvPr>
@@ -4698,7 +4762,7 @@
           <p:cNvPr id="2" name="s13-eyebrow">
             <a:extLst xmlns:a="http://schemas.openxmlformats.org/drawingml/2006/main">
               <a:ext uri="{FF2B5EF4-FFF2-40B4-BE49-F238E27FC236}">
-                <a16:creationId xmlns:a16="http://schemas.microsoft.com/office/drawing/2014/main" id="{B58BF1C2-236B-4785-876C-459EDC9621EC}"/>
+                <a16:creationId xmlns:a16="http://schemas.microsoft.com/office/drawing/2014/main" id="{6D80631C-D9EA-49C3-BFEE-7701DCBE6007}"/>
               </a:ext>
             </a:extLst>
           </p:cNvPr>
@@ -4756,7 +4820,7 @@
           <p:cNvPr id="3" name="s13-title">
             <a:extLst xmlns:a="http://schemas.openxmlformats.org/drawingml/2006/main">
               <a:ext uri="{FF2B5EF4-FFF2-40B4-BE49-F238E27FC236}">
-                <a16:creationId xmlns:a16="http://schemas.microsoft.com/office/drawing/2014/main" id="{1737FFE1-E215-4A68-846F-36F1EBE30B99}"/>
+                <a16:creationId xmlns:a16="http://schemas.microsoft.com/office/drawing/2014/main" id="{CED1A72C-6395-41EA-9574-E436A8674962}"/>
               </a:ext>
             </a:extLst>
           </p:cNvPr>
@@ -4804,7 +4868,7 @@
                 <a:ea typeface="PingFang SC"/>
                 <a:cs typeface="PingFang SC"/>
               </a:rPr>
-              <a:t>从公开重制课件回到可核对的学习资料</a:t>
+              <a:t>群体具身智能：依据、边界与延伸</a:t>
             </a:r>
           </a:p>
         </p:txBody>
@@ -4814,7 +4878,7 @@
           <p:cNvPr id="4" name="s13-footer">
             <a:extLst xmlns:a="http://schemas.openxmlformats.org/drawingml/2006/main">
               <a:ext uri="{FF2B5EF4-FFF2-40B4-BE49-F238E27FC236}">
-                <a16:creationId xmlns:a16="http://schemas.microsoft.com/office/drawing/2014/main" id="{CB46527E-9E07-4B34-B77D-0CAED223CAF5}"/>
+                <a16:creationId xmlns:a16="http://schemas.microsoft.com/office/drawing/2014/main" id="{FE1A2DA3-80DB-4773-98A2-3F6704797028}"/>
               </a:ext>
             </a:extLst>
           </p:cNvPr>
@@ -4845,7 +4909,7 @@
           <p:cNvPr id="5" name="s13-identity">
             <a:extLst xmlns:a="http://schemas.openxmlformats.org/drawingml/2006/main">
               <a:ext uri="{FF2B5EF4-FFF2-40B4-BE49-F238E27FC236}">
-                <a16:creationId xmlns:a16="http://schemas.microsoft.com/office/drawing/2014/main" id="{329C458C-9CD6-4A55-8213-8D2CA51C0D67}"/>
+                <a16:creationId xmlns:a16="http://schemas.microsoft.com/office/drawing/2014/main" id="{408D76AB-7C2E-4B05-92E1-3D8323BDACAC}"/>
               </a:ext>
             </a:extLst>
           </p:cNvPr>
@@ -4903,7 +4967,7 @@
           <p:cNvPr id="6" name="source-0">
             <a:extLst xmlns:a="http://schemas.openxmlformats.org/drawingml/2006/main">
               <a:ext uri="{FF2B5EF4-FFF2-40B4-BE49-F238E27FC236}">
-                <a16:creationId xmlns:a16="http://schemas.microsoft.com/office/drawing/2014/main" id="{5CE89A07-F22A-4ACF-98FA-17E3A181FF6D}"/>
+                <a16:creationId xmlns:a16="http://schemas.microsoft.com/office/drawing/2014/main" id="{346A24B6-86DD-4AB1-8F17-193E8E9BCD15}"/>
               </a:ext>
             </a:extLst>
           </p:cNvPr>
@@ -4927,7 +4991,7 @@
           </a:solidFill>
           <a:ln xmlns:a="http://schemas.openxmlformats.org/drawingml/2006/main" w="9525">
             <a:solidFill>
-              <a:srgbClr val="2D9B72"/>
+              <a:srgbClr val="0B6B4F"/>
             </a:solidFill>
             <a:prstDash val="solid"/>
           </a:ln>
@@ -4967,7 +5031,7 @@
           <p:cNvPr id="7" name="source-1">
             <a:extLst xmlns:a="http://schemas.openxmlformats.org/drawingml/2006/main">
               <a:ext uri="{FF2B5EF4-FFF2-40B4-BE49-F238E27FC236}">
-                <a16:creationId xmlns:a16="http://schemas.microsoft.com/office/drawing/2014/main" id="{08C178F5-F1A1-4FE7-AB15-40B31F5DAEC8}"/>
+                <a16:creationId xmlns:a16="http://schemas.microsoft.com/office/drawing/2014/main" id="{6AD4CC4D-4E7C-4009-BC3B-14381456C796}"/>
               </a:ext>
             </a:extLst>
           </p:cNvPr>
@@ -4998,7 +5062,7 @@
         </p:spPr>
         <p:txBody>
           <a:bodyPr xmlns:a="http://schemas.openxmlformats.org/drawingml/2006/main" lIns="152400" tIns="133350" rIns="152400" bIns="133350" anchor="ctr">
-            <a:normAutofit fontScale="87377"/>
+            <a:normAutofit fontScale="70467"/>
           </a:bodyPr>
           <a:lstStyle xmlns:a="http://schemas.openxmlformats.org/drawingml/2006/main"/>
           <a:p xmlns:a="http://schemas.openxmlformats.org/drawingml/2006/main">
@@ -5021,17 +5085,209 @@
                 <a:ea typeface="PingFang SC"/>
                 <a:cs typeface="PingFang SC"/>
               </a:rPr>
-              <a:t>02  复现实验时应保存场景、策略、参数、随机种子、软件版本和原始日志；没有这些证据的演示不作为可比较实验结果</a:t>
-            </a:r>
-          </a:p>
-        </p:txBody>
-      </p:sp>
-      <p:sp>
-        <p:nvSpPr>
-          <p:cNvPr id="8" name="s13-takeaway-rule">
-            <a:extLst xmlns:a="http://schemas.openxmlformats.org/drawingml/2006/main">
-              <a:ext uri="{FF2B5EF4-FFF2-40B4-BE49-F238E27FC236}">
-                <a16:creationId xmlns:a16="http://schemas.microsoft.com/office/drawing/2014/main" id="{A54EA263-3C0D-48D7-BAF2-8C113A2C63D1}"/>
+              <a:t>02  Reynolds：Flocks, Herds, and Schools：局部感知与简单规则产生宏观群体运动的原始计算机动画模型；不能自动证明真实群体机制。（核对日期：2026-07-12）</a:t>
+            </a:r>
+          </a:p>
+        </p:txBody>
+      </p:sp>
+      <p:sp>
+        <p:nvSpPr>
+          <p:cNvPr id="8" name="source-2">
+            <a:extLst xmlns:a="http://schemas.openxmlformats.org/drawingml/2006/main">
+              <a:ext uri="{FF2B5EF4-FFF2-40B4-BE49-F238E27FC236}">
+                <a16:creationId xmlns:a16="http://schemas.microsoft.com/office/drawing/2014/main" id="{4D3E1C29-EBDA-4DF0-8EAE-DD21858C90EE}"/>
+              </a:ext>
+            </a:extLst>
+          </p:cNvPr>
+          <p:cNvSpPr>
+            <a:spLocks xmlns:a="http://schemas.openxmlformats.org/drawingml/2006/main" noGrp="1"/>
+          </p:cNvSpPr>
+          <p:nvPr/>
+        </p:nvSpPr>
+        <p:spPr>
+          <a:xfrm xmlns:a="http://schemas.openxmlformats.org/drawingml/2006/main">
+            <a:off x="914400" y="3314700"/>
+            <a:ext cx="10363200" cy="533400"/>
+          </a:xfrm>
+          <a:prstGeom xmlns:a="http://schemas.openxmlformats.org/drawingml/2006/main" prst="roundRect">
+            <a:avLst>
+              <a:gd name="adj" fmla="val 21429"/>
+            </a:avLst>
+          </a:prstGeom>
+          <a:solidFill xmlns:a="http://schemas.openxmlformats.org/drawingml/2006/main">
+            <a:srgbClr val="FFFFFF"/>
+          </a:solidFill>
+          <a:ln xmlns:a="http://schemas.openxmlformats.org/drawingml/2006/main" w="9525">
+            <a:solidFill>
+              <a:srgbClr val="D8E0E8"/>
+            </a:solidFill>
+            <a:prstDash val="solid"/>
+          </a:ln>
+        </p:spPr>
+        <p:txBody>
+          <a:bodyPr xmlns:a="http://schemas.openxmlformats.org/drawingml/2006/main" lIns="152400" tIns="133350" rIns="152400" bIns="133350" anchor="ctr">
+            <a:normAutofit fontScale="85627"/>
+          </a:bodyPr>
+          <a:lstStyle xmlns:a="http://schemas.openxmlformats.org/drawingml/2006/main"/>
+          <a:p xmlns:a="http://schemas.openxmlformats.org/drawingml/2006/main">
+            <a:pPr algn="l">
+              <a:defRPr sz="1500" b="0">
+                <a:solidFill>
+                  <a:srgbClr val="10233F"/>
+                </a:solidFill>
+                <a:latin typeface="PingFang SC"/>
+                <a:ea typeface="PingFang SC"/>
+                <a:cs typeface="PingFang SC"/>
+              </a:defRPr>
+            </a:pPr>
+            <a:r>
+              <a:rPr sz="1500" b="0">
+                <a:solidFill>
+                  <a:srgbClr val="10233F"/>
+                </a:solidFill>
+                <a:latin typeface="PingFang SC"/>
+                <a:ea typeface="PingFang SC"/>
+                <a:cs typeface="PingFang SC"/>
+              </a:rPr>
+              <a:t>03  ARGoS 原论文：面向大规模、异构多机器人实验的模块化仿真系统；性能和精度结论只对具体场景成立。（核对日期：2026-07-12）</a:t>
+            </a:r>
+          </a:p>
+        </p:txBody>
+      </p:sp>
+      <p:sp>
+        <p:nvSpPr>
+          <p:cNvPr id="9" name="source-3">
+            <a:extLst xmlns:a="http://schemas.openxmlformats.org/drawingml/2006/main">
+              <a:ext uri="{FF2B5EF4-FFF2-40B4-BE49-F238E27FC236}">
+                <a16:creationId xmlns:a16="http://schemas.microsoft.com/office/drawing/2014/main" id="{8620D1E8-B5BA-4973-9A54-9848DDD7158B}"/>
+              </a:ext>
+            </a:extLst>
+          </p:cNvPr>
+          <p:cNvSpPr>
+            <a:spLocks xmlns:a="http://schemas.openxmlformats.org/drawingml/2006/main" noGrp="1"/>
+          </p:cNvSpPr>
+          <p:nvPr/>
+        </p:nvSpPr>
+        <p:spPr>
+          <a:xfrm xmlns:a="http://schemas.openxmlformats.org/drawingml/2006/main">
+            <a:off x="914400" y="4000500"/>
+            <a:ext cx="10363200" cy="533400"/>
+          </a:xfrm>
+          <a:prstGeom xmlns:a="http://schemas.openxmlformats.org/drawingml/2006/main" prst="roundRect">
+            <a:avLst>
+              <a:gd name="adj" fmla="val 21429"/>
+            </a:avLst>
+          </a:prstGeom>
+          <a:solidFill xmlns:a="http://schemas.openxmlformats.org/drawingml/2006/main">
+            <a:srgbClr val="FFFFFF"/>
+          </a:solidFill>
+          <a:ln xmlns:a="http://schemas.openxmlformats.org/drawingml/2006/main" w="9525">
+            <a:solidFill>
+              <a:srgbClr val="D8E0E8"/>
+            </a:solidFill>
+            <a:prstDash val="solid"/>
+          </a:ln>
+        </p:spPr>
+        <p:txBody>
+          <a:bodyPr xmlns:a="http://schemas.openxmlformats.org/drawingml/2006/main" lIns="152400" tIns="133350" rIns="152400" bIns="133350" anchor="ctr">
+            <a:normAutofit fontScale="77562"/>
+          </a:bodyPr>
+          <a:lstStyle xmlns:a="http://schemas.openxmlformats.org/drawingml/2006/main"/>
+          <a:p xmlns:a="http://schemas.openxmlformats.org/drawingml/2006/main">
+            <a:pPr algn="l">
+              <a:defRPr sz="1500" b="0">
+                <a:solidFill>
+                  <a:srgbClr val="10233F"/>
+                </a:solidFill>
+                <a:latin typeface="PingFang SC"/>
+                <a:ea typeface="PingFang SC"/>
+                <a:cs typeface="PingFang SC"/>
+              </a:defRPr>
+            </a:pPr>
+            <a:r>
+              <a:rPr sz="1500" b="0">
+                <a:solidFill>
+                  <a:srgbClr val="10233F"/>
+                </a:solidFill>
+                <a:latin typeface="PingFang SC"/>
+                <a:ea typeface="PingFang SC"/>
+                <a:cs typeface="PingFang SC"/>
+              </a:rPr>
+              <a:t>04  ROS2 QoS 官方设计：核对可靠性、队列、历史与兼容性；通信失效实验要区分丢包、延迟、消息过期和 QoS 不兼容。（核对日期：2026-07-12）</a:t>
+            </a:r>
+          </a:p>
+        </p:txBody>
+      </p:sp>
+      <p:sp>
+        <p:nvSpPr>
+          <p:cNvPr id="10" name="source-4">
+            <a:extLst xmlns:a="http://schemas.openxmlformats.org/drawingml/2006/main">
+              <a:ext uri="{FF2B5EF4-FFF2-40B4-BE49-F238E27FC236}">
+                <a16:creationId xmlns:a16="http://schemas.microsoft.com/office/drawing/2014/main" id="{3DFD8AC7-AEDC-48B1-9B1B-DC0B6C33D389}"/>
+              </a:ext>
+            </a:extLst>
+          </p:cNvPr>
+          <p:cNvSpPr>
+            <a:spLocks xmlns:a="http://schemas.openxmlformats.org/drawingml/2006/main" noGrp="1"/>
+          </p:cNvSpPr>
+          <p:nvPr/>
+        </p:nvSpPr>
+        <p:spPr>
+          <a:xfrm xmlns:a="http://schemas.openxmlformats.org/drawingml/2006/main">
+            <a:off x="914400" y="4686300"/>
+            <a:ext cx="10363200" cy="533400"/>
+          </a:xfrm>
+          <a:prstGeom xmlns:a="http://schemas.openxmlformats.org/drawingml/2006/main" prst="roundRect">
+            <a:avLst>
+              <a:gd name="adj" fmla="val 21429"/>
+            </a:avLst>
+          </a:prstGeom>
+          <a:solidFill xmlns:a="http://schemas.openxmlformats.org/drawingml/2006/main">
+            <a:srgbClr val="FFFFFF"/>
+          </a:solidFill>
+          <a:ln xmlns:a="http://schemas.openxmlformats.org/drawingml/2006/main" w="9525">
+            <a:solidFill>
+              <a:srgbClr val="D8E0E8"/>
+            </a:solidFill>
+            <a:prstDash val="solid"/>
+          </a:ln>
+        </p:spPr>
+        <p:txBody>
+          <a:bodyPr xmlns:a="http://schemas.openxmlformats.org/drawingml/2006/main" lIns="152400" tIns="133350" rIns="152400" bIns="133350" anchor="ctr">
+            <a:normAutofit fontScale="70412"/>
+          </a:bodyPr>
+          <a:lstStyle xmlns:a="http://schemas.openxmlformats.org/drawingml/2006/main"/>
+          <a:p xmlns:a="http://schemas.openxmlformats.org/drawingml/2006/main">
+            <a:pPr algn="l">
+              <a:defRPr sz="1500" b="0">
+                <a:solidFill>
+                  <a:srgbClr val="10233F"/>
+                </a:solidFill>
+                <a:latin typeface="PingFang SC"/>
+                <a:ea typeface="PingFang SC"/>
+                <a:cs typeface="PingFang SC"/>
+              </a:defRPr>
+            </a:pPr>
+            <a:r>
+              <a:rPr sz="1500" b="0">
+                <a:solidFill>
+                  <a:srgbClr val="10233F"/>
+                </a:solidFill>
+                <a:latin typeface="PingFang SC"/>
+                <a:ea typeface="PingFang SC"/>
+                <a:cs typeface="PingFang SC"/>
+              </a:rPr>
+              <a:t>05  Open-RMF 多机器人协同架构：理解未来行程、冲突检测、路线协商与 fleet adapter；多机器人协作不是复制单机器人节点即可完成。（核对日期：2026-07-12）</a:t>
+            </a:r>
+          </a:p>
+        </p:txBody>
+      </p:sp>
+      <p:sp>
+        <p:nvSpPr>
+          <p:cNvPr id="11" name="s13-takeaway-rule">
+            <a:extLst xmlns:a="http://schemas.openxmlformats.org/drawingml/2006/main">
+              <a:ext uri="{FF2B5EF4-FFF2-40B4-BE49-F238E27FC236}">
+                <a16:creationId xmlns:a16="http://schemas.microsoft.com/office/drawing/2014/main" id="{49674FCB-87DD-4694-9820-021C524E72E0}"/>
               </a:ext>
             </a:extLst>
           </p:cNvPr>
@@ -5061,10 +5317,10 @@
       </p:sp>
       <p:sp>
         <p:nvSpPr>
-          <p:cNvPr id="9" name="s13-takeaway">
-            <a:extLst xmlns:a="http://schemas.openxmlformats.org/drawingml/2006/main">
-              <a:ext uri="{FF2B5EF4-FFF2-40B4-BE49-F238E27FC236}">
-                <a16:creationId xmlns:a16="http://schemas.microsoft.com/office/drawing/2014/main" id="{6D283419-FEEA-4007-81ED-2B2894ADB686}"/>
+          <p:cNvPr id="12" name="s13-takeaway">
+            <a:extLst xmlns:a="http://schemas.openxmlformats.org/drawingml/2006/main">
+              <a:ext uri="{FF2B5EF4-FFF2-40B4-BE49-F238E27FC236}">
+                <a16:creationId xmlns:a16="http://schemas.microsoft.com/office/drawing/2014/main" id="{C85A39E4-EBFC-4C76-BFF2-7782CF6B60E3}"/>
               </a:ext>
             </a:extLst>
           </p:cNvPr>
@@ -5120,7 +5376,7 @@
     </p:spTree>
     <p:extLst>
       <p:ext uri="{BB962C8B-B14F-4D97-AF65-F5344CB8AC3E}">
-        <p14:creationId xmlns:p14="http://schemas.microsoft.com/office/powerpoint/2010/main" val="784268239"/>
+        <p14:creationId xmlns:p14="http://schemas.microsoft.com/office/powerpoint/2010/main" val="1235623993"/>
       </p:ext>
     </p:extLst>
   </p:cSld>
@@ -5151,7 +5407,7 @@
           <p:cNvPr id="1" name="s2-rule">
             <a:extLst xmlns:a="http://schemas.openxmlformats.org/drawingml/2006/main">
               <a:ext uri="{FF2B5EF4-FFF2-40B4-BE49-F238E27FC236}">
-                <a16:creationId xmlns:a16="http://schemas.microsoft.com/office/drawing/2014/main" id="{4030CEAA-77BD-4300-908E-50894DE17DDB}"/>
+                <a16:creationId xmlns:a16="http://schemas.microsoft.com/office/drawing/2014/main" id="{A571766A-F448-4E80-AF88-91C298A9AE0F}"/>
               </a:ext>
             </a:extLst>
           </p:cNvPr>
@@ -5184,7 +5440,7 @@
           <p:cNvPr id="2" name="s2-eyebrow">
             <a:extLst xmlns:a="http://schemas.openxmlformats.org/drawingml/2006/main">
               <a:ext uri="{FF2B5EF4-FFF2-40B4-BE49-F238E27FC236}">
-                <a16:creationId xmlns:a16="http://schemas.microsoft.com/office/drawing/2014/main" id="{E327E205-4E6A-42F1-9034-575F17F8BB87}"/>
+                <a16:creationId xmlns:a16="http://schemas.microsoft.com/office/drawing/2014/main" id="{C403233F-A560-44C8-AD02-B30B1E37F7CC}"/>
               </a:ext>
             </a:extLst>
           </p:cNvPr>
@@ -5242,7 +5498,7 @@
           <p:cNvPr id="3" name="s2-title">
             <a:extLst xmlns:a="http://schemas.openxmlformats.org/drawingml/2006/main">
               <a:ext uri="{FF2B5EF4-FFF2-40B4-BE49-F238E27FC236}">
-                <a16:creationId xmlns:a16="http://schemas.microsoft.com/office/drawing/2014/main" id="{71C87070-05D3-40A0-8702-1C57AE5C3932}"/>
+                <a16:creationId xmlns:a16="http://schemas.microsoft.com/office/drawing/2014/main" id="{4BCF91AE-63B4-47F1-84BF-ECBD2742DE3B}"/>
               </a:ext>
             </a:extLst>
           </p:cNvPr>
@@ -5290,7 +5546,7 @@
                 <a:ea typeface="PingFang SC"/>
                 <a:cs typeface="PingFang SC"/>
               </a:rPr>
-              <a:t>学完这一节，你能完成这些判断与行动</a:t>
+              <a:t>群体具身智能：4项学习结果</a:t>
             </a:r>
           </a:p>
         </p:txBody>
@@ -5300,7 +5556,7 @@
           <p:cNvPr id="4" name="s2-footer">
             <a:extLst xmlns:a="http://schemas.openxmlformats.org/drawingml/2006/main">
               <a:ext uri="{FF2B5EF4-FFF2-40B4-BE49-F238E27FC236}">
-                <a16:creationId xmlns:a16="http://schemas.microsoft.com/office/drawing/2014/main" id="{51B25639-CB34-4F40-A560-3E80E806F41A}"/>
+                <a16:creationId xmlns:a16="http://schemas.microsoft.com/office/drawing/2014/main" id="{1C248551-7E54-4A9F-B8C2-242036F047D0}"/>
               </a:ext>
             </a:extLst>
           </p:cNvPr>
@@ -5331,7 +5587,7 @@
           <p:cNvPr id="5" name="s2-identity">
             <a:extLst xmlns:a="http://schemas.openxmlformats.org/drawingml/2006/main">
               <a:ext uri="{FF2B5EF4-FFF2-40B4-BE49-F238E27FC236}">
-                <a16:creationId xmlns:a16="http://schemas.microsoft.com/office/drawing/2014/main" id="{B0574D78-6D0A-45AC-AAE8-1CA8C29FD19F}"/>
+                <a16:creationId xmlns:a16="http://schemas.microsoft.com/office/drawing/2014/main" id="{39428B29-10F0-45D7-B7C1-4FB70BE19A1D}"/>
               </a:ext>
             </a:extLst>
           </p:cNvPr>
@@ -5389,7 +5645,7 @@
           <p:cNvPr id="6" name="objective-1">
             <a:extLst xmlns:a="http://schemas.openxmlformats.org/drawingml/2006/main">
               <a:ext uri="{FF2B5EF4-FFF2-40B4-BE49-F238E27FC236}">
-                <a16:creationId xmlns:a16="http://schemas.microsoft.com/office/drawing/2014/main" id="{87E636E6-A9BE-4A02-9C9F-35442A4E8C3B}"/>
+                <a16:creationId xmlns:a16="http://schemas.microsoft.com/office/drawing/2014/main" id="{52AF3F09-E3E0-45E6-908E-A9BFC9B94D72}"/>
               </a:ext>
             </a:extLst>
           </p:cNvPr>
@@ -5476,7 +5732,7 @@
           <p:cNvPr id="7" name="objective-2">
             <a:extLst xmlns:a="http://schemas.openxmlformats.org/drawingml/2006/main">
               <a:ext uri="{FF2B5EF4-FFF2-40B4-BE49-F238E27FC236}">
-                <a16:creationId xmlns:a16="http://schemas.microsoft.com/office/drawing/2014/main" id="{BFA9DE88-5349-4CC2-96D4-FAB63E27B31A}"/>
+                <a16:creationId xmlns:a16="http://schemas.microsoft.com/office/drawing/2014/main" id="{92DFDCB6-B6BC-4F7B-8CD0-0FAE2E7A655A}"/>
               </a:ext>
             </a:extLst>
           </p:cNvPr>
@@ -5563,7 +5819,7 @@
           <p:cNvPr id="8" name="objective-3">
             <a:extLst xmlns:a="http://schemas.openxmlformats.org/drawingml/2006/main">
               <a:ext uri="{FF2B5EF4-FFF2-40B4-BE49-F238E27FC236}">
-                <a16:creationId xmlns:a16="http://schemas.microsoft.com/office/drawing/2014/main" id="{D640F0E8-5C7A-4E38-999C-288648613048}"/>
+                <a16:creationId xmlns:a16="http://schemas.microsoft.com/office/drawing/2014/main" id="{617D47FB-FCC5-4307-A642-3554F3CB58A9}"/>
               </a:ext>
             </a:extLst>
           </p:cNvPr>
@@ -5650,7 +5906,7 @@
           <p:cNvPr id="9" name="objective-4">
             <a:extLst xmlns:a="http://schemas.openxmlformats.org/drawingml/2006/main">
               <a:ext uri="{FF2B5EF4-FFF2-40B4-BE49-F238E27FC236}">
-                <a16:creationId xmlns:a16="http://schemas.microsoft.com/office/drawing/2014/main" id="{DBF3DC93-6425-4A86-8931-FE97F8048914}"/>
+                <a16:creationId xmlns:a16="http://schemas.microsoft.com/office/drawing/2014/main" id="{3C433659-C481-4911-9485-0F16F096F009}"/>
               </a:ext>
             </a:extLst>
           </p:cNvPr>
@@ -5674,7 +5930,7 @@
           </a:solidFill>
           <a:ln xmlns:a="http://schemas.openxmlformats.org/drawingml/2006/main" w="19050">
             <a:solidFill>
-              <a:srgbClr val="2D9B72"/>
+              <a:srgbClr val="0B6B4F"/>
             </a:solidFill>
             <a:prstDash val="solid"/>
           </a:ln>
@@ -5735,7 +5991,7 @@
     </p:spTree>
     <p:extLst>
       <p:ext uri="{BB962C8B-B14F-4D97-AF65-F5344CB8AC3E}">
-        <p14:creationId xmlns:p14="http://schemas.microsoft.com/office/powerpoint/2010/main" val="536578972"/>
+        <p14:creationId xmlns:p14="http://schemas.microsoft.com/office/powerpoint/2010/main" val="1181325961"/>
       </p:ext>
     </p:extLst>
   </p:cSld>
@@ -5766,7 +6022,7 @@
           <p:cNvPr id="1" name="s3-rule">
             <a:extLst xmlns:a="http://schemas.openxmlformats.org/drawingml/2006/main">
               <a:ext uri="{FF2B5EF4-FFF2-40B4-BE49-F238E27FC236}">
-                <a16:creationId xmlns:a16="http://schemas.microsoft.com/office/drawing/2014/main" id="{FD7828E5-2FE1-48AB-8FCD-95E23F89BD04}"/>
+                <a16:creationId xmlns:a16="http://schemas.microsoft.com/office/drawing/2014/main" id="{DCC9DBB1-AE3F-4075-BCE5-979A9FBD9DA7}"/>
               </a:ext>
             </a:extLst>
           </p:cNvPr>
@@ -5799,7 +6055,7 @@
           <p:cNvPr id="2" name="s3-eyebrow">
             <a:extLst xmlns:a="http://schemas.openxmlformats.org/drawingml/2006/main">
               <a:ext uri="{FF2B5EF4-FFF2-40B4-BE49-F238E27FC236}">
-                <a16:creationId xmlns:a16="http://schemas.microsoft.com/office/drawing/2014/main" id="{19F942EB-EEFA-4CBB-AE7A-D4A9CCD86489}"/>
+                <a16:creationId xmlns:a16="http://schemas.microsoft.com/office/drawing/2014/main" id="{CFA35006-8FAB-4096-B0DE-8995D0996B07}"/>
               </a:ext>
             </a:extLst>
           </p:cNvPr>
@@ -5857,7 +6113,7 @@
           <p:cNvPr id="3" name="s3-title">
             <a:extLst xmlns:a="http://schemas.openxmlformats.org/drawingml/2006/main">
               <a:ext uri="{FF2B5EF4-FFF2-40B4-BE49-F238E27FC236}">
-                <a16:creationId xmlns:a16="http://schemas.microsoft.com/office/drawing/2014/main" id="{BA0635DF-0062-4ED3-9822-83487AF4A76A}"/>
+                <a16:creationId xmlns:a16="http://schemas.microsoft.com/office/drawing/2014/main" id="{39C073A0-F0F9-494F-957E-6FB01065E551}"/>
               </a:ext>
             </a:extLst>
           </p:cNvPr>
@@ -5915,7 +6171,7 @@
           <p:cNvPr id="4" name="s3-footer">
             <a:extLst xmlns:a="http://schemas.openxmlformats.org/drawingml/2006/main">
               <a:ext uri="{FF2B5EF4-FFF2-40B4-BE49-F238E27FC236}">
-                <a16:creationId xmlns:a16="http://schemas.microsoft.com/office/drawing/2014/main" id="{75496379-15DF-40A3-B740-3A5BFAD1A01B}"/>
+                <a16:creationId xmlns:a16="http://schemas.microsoft.com/office/drawing/2014/main" id="{9E5D57FA-D27C-4C29-8E1D-284802590A9F}"/>
               </a:ext>
             </a:extLst>
           </p:cNvPr>
@@ -5946,7 +6202,7 @@
           <p:cNvPr id="5" name="s3-identity">
             <a:extLst xmlns:a="http://schemas.openxmlformats.org/drawingml/2006/main">
               <a:ext uri="{FF2B5EF4-FFF2-40B4-BE49-F238E27FC236}">
-                <a16:creationId xmlns:a16="http://schemas.microsoft.com/office/drawing/2014/main" id="{A3BDD15F-838A-41D9-8C83-03E44655F071}"/>
+                <a16:creationId xmlns:a16="http://schemas.microsoft.com/office/drawing/2014/main" id="{48868CF5-E67D-4BFC-8019-42DB0677DF8C}"/>
               </a:ext>
             </a:extLst>
           </p:cNvPr>
@@ -6004,7 +6260,7 @@
           <p:cNvPr id="6" name="core-no-0">
             <a:extLst xmlns:a="http://schemas.openxmlformats.org/drawingml/2006/main">
               <a:ext uri="{FF2B5EF4-FFF2-40B4-BE49-F238E27FC236}">
-                <a16:creationId xmlns:a16="http://schemas.microsoft.com/office/drawing/2014/main" id="{C7CB91FC-FBCC-44DA-B4CA-4F1CBBC17973}"/>
+                <a16:creationId xmlns:a16="http://schemas.microsoft.com/office/drawing/2014/main" id="{5C922C93-16E5-4BF3-A9A0-A38EC99A0E35}"/>
               </a:ext>
             </a:extLst>
           </p:cNvPr>
@@ -6036,7 +6292,7 @@
             <a:pPr algn="l">
               <a:defRPr sz="2250" b="1">
                 <a:solidFill>
-                  <a:srgbClr val="2D9B72"/>
+                  <a:srgbClr val="0B6B4F"/>
                 </a:solidFill>
                 <a:latin typeface="PingFang SC"/>
                 <a:ea typeface="PingFang SC"/>
@@ -6046,7 +6302,7 @@
             <a:r>
               <a:rPr sz="2250" b="1">
                 <a:solidFill>
-                  <a:srgbClr val="2D9B72"/>
+                  <a:srgbClr val="0B6B4F"/>
                 </a:solidFill>
                 <a:latin typeface="PingFang SC"/>
                 <a:ea typeface="PingFang SC"/>
@@ -6062,7 +6318,7 @@
           <p:cNvPr id="7" name="core-label-0">
             <a:extLst xmlns:a="http://schemas.openxmlformats.org/drawingml/2006/main">
               <a:ext uri="{FF2B5EF4-FFF2-40B4-BE49-F238E27FC236}">
-                <a16:creationId xmlns:a16="http://schemas.microsoft.com/office/drawing/2014/main" id="{D40F7F9A-91D9-4305-8A9F-B9F1F0BD9D48}"/>
+                <a16:creationId xmlns:a16="http://schemas.microsoft.com/office/drawing/2014/main" id="{E4292884-4202-4782-9205-CDC9D09F5E12}"/>
               </a:ext>
             </a:extLst>
           </p:cNvPr>
@@ -6074,7 +6330,7 @@
         <p:spPr>
           <a:xfrm xmlns:a="http://schemas.openxmlformats.org/drawingml/2006/main">
             <a:off x="914400" y="2590800"/>
-            <a:ext cx="5038725" cy="666750"/>
+            <a:ext cx="3263900" cy="666750"/>
           </a:xfrm>
           <a:prstGeom xmlns:a="http://schemas.openxmlformats.org/drawingml/2006/main" prst="rect">
             <a:avLst/>
@@ -6120,7 +6376,7 @@
           <p:cNvPr id="8" name="core-body-0">
             <a:extLst xmlns:a="http://schemas.openxmlformats.org/drawingml/2006/main">
               <a:ext uri="{FF2B5EF4-FFF2-40B4-BE49-F238E27FC236}">
-                <a16:creationId xmlns:a16="http://schemas.microsoft.com/office/drawing/2014/main" id="{B6A839D8-6AED-41EB-BBAA-6C8228039288}"/>
+                <a16:creationId xmlns:a16="http://schemas.microsoft.com/office/drawing/2014/main" id="{84DD0489-C331-4CA7-B77C-98800A629C0C}"/>
               </a:ext>
             </a:extLst>
           </p:cNvPr>
@@ -6132,7 +6388,7 @@
         <p:spPr>
           <a:xfrm xmlns:a="http://schemas.openxmlformats.org/drawingml/2006/main">
             <a:off x="914400" y="3390900"/>
-            <a:ext cx="5038725" cy="1714500"/>
+            <a:ext cx="3263900" cy="1714500"/>
           </a:xfrm>
           <a:prstGeom xmlns:a="http://schemas.openxmlformats.org/drawingml/2006/main" prst="roundRect">
             <a:avLst>
@@ -6144,19 +6400,19 @@
           </a:solidFill>
           <a:ln xmlns:a="http://schemas.openxmlformats.org/drawingml/2006/main" w="19050">
             <a:solidFill>
-              <a:srgbClr val="2D9B72"/>
+              <a:srgbClr val="0B6B4F"/>
             </a:solidFill>
             <a:prstDash val="solid"/>
           </a:ln>
         </p:spPr>
         <p:txBody>
           <a:bodyPr xmlns:a="http://schemas.openxmlformats.org/drawingml/2006/main" lIns="152400" tIns="133350" rIns="152400" bIns="133350" anchor="ctr">
-            <a:normAutofit fontScale="98233"/>
+            <a:normAutofit fontScale="89303"/>
           </a:bodyPr>
           <a:lstStyle xmlns:a="http://schemas.openxmlformats.org/drawingml/2006/main"/>
           <a:p xmlns:a="http://schemas.openxmlformats.org/drawingml/2006/main">
             <a:pPr algn="l">
-              <a:defRPr sz="1800">
+              <a:defRPr sz="1650">
                 <a:solidFill>
                   <a:srgbClr val="10233F"/>
                 </a:solidFill>
@@ -6166,7 +6422,7 @@
               </a:defRPr>
             </a:pPr>
             <a:r>
-              <a:rPr sz="1800">
+              <a:rPr sz="1650">
                 <a:solidFill>
                   <a:srgbClr val="10233F"/>
                 </a:solidFill>
@@ -6184,18 +6440,18 @@
           <p:cNvPr id="9" name="core-no-1">
             <a:extLst xmlns:a="http://schemas.openxmlformats.org/drawingml/2006/main">
               <a:ext uri="{FF2B5EF4-FFF2-40B4-BE49-F238E27FC236}">
-                <a16:creationId xmlns:a16="http://schemas.microsoft.com/office/drawing/2014/main" id="{2144EE1B-CC5B-4F1E-8B45-BE74E2AB2BC2}"/>
-              </a:ext>
-            </a:extLst>
-          </p:cNvPr>
-          <p:cNvSpPr>
-            <a:spLocks xmlns:a="http://schemas.openxmlformats.org/drawingml/2006/main" noGrp="1"/>
-          </p:cNvSpPr>
-          <p:nvPr/>
-        </p:nvSpPr>
-        <p:spPr>
-          <a:xfrm xmlns:a="http://schemas.openxmlformats.org/drawingml/2006/main">
-            <a:off x="6238875" y="2076450"/>
+                <a16:creationId xmlns:a16="http://schemas.microsoft.com/office/drawing/2014/main" id="{CE328E42-94DB-48AE-A5E1-93D3BCFAD466}"/>
+              </a:ext>
+            </a:extLst>
+          </p:cNvPr>
+          <p:cNvSpPr>
+            <a:spLocks xmlns:a="http://schemas.openxmlformats.org/drawingml/2006/main" noGrp="1"/>
+          </p:cNvSpPr>
+          <p:nvPr/>
+        </p:nvSpPr>
+        <p:spPr>
+          <a:xfrm xmlns:a="http://schemas.openxmlformats.org/drawingml/2006/main">
+            <a:off x="4464050" y="2076450"/>
             <a:ext cx="666750" cy="419100"/>
           </a:xfrm>
           <a:prstGeom xmlns:a="http://schemas.openxmlformats.org/drawingml/2006/main" prst="rect">
@@ -6216,7 +6472,7 @@
             <a:pPr algn="l">
               <a:defRPr sz="2250" b="1">
                 <a:solidFill>
-                  <a:srgbClr val="2D9B72"/>
+                  <a:srgbClr val="0B6B4F"/>
                 </a:solidFill>
                 <a:latin typeface="PingFang SC"/>
                 <a:ea typeface="PingFang SC"/>
@@ -6226,7 +6482,7 @@
             <a:r>
               <a:rPr sz="2250" b="1">
                 <a:solidFill>
-                  <a:srgbClr val="2D9B72"/>
+                  <a:srgbClr val="0B6B4F"/>
                 </a:solidFill>
                 <a:latin typeface="PingFang SC"/>
                 <a:ea typeface="PingFang SC"/>
@@ -6242,19 +6498,19 @@
           <p:cNvPr id="10" name="core-body-1">
             <a:extLst xmlns:a="http://schemas.openxmlformats.org/drawingml/2006/main">
               <a:ext uri="{FF2B5EF4-FFF2-40B4-BE49-F238E27FC236}">
-                <a16:creationId xmlns:a16="http://schemas.microsoft.com/office/drawing/2014/main" id="{A7A475CA-2D86-4EEB-BE33-805B63DBB9C1}"/>
-              </a:ext>
-            </a:extLst>
-          </p:cNvPr>
-          <p:cNvSpPr>
-            <a:spLocks xmlns:a="http://schemas.openxmlformats.org/drawingml/2006/main" noGrp="1"/>
-          </p:cNvSpPr>
-          <p:nvPr/>
-        </p:nvSpPr>
-        <p:spPr>
-          <a:xfrm xmlns:a="http://schemas.openxmlformats.org/drawingml/2006/main">
-            <a:off x="6238875" y="2590800"/>
-            <a:ext cx="5038725" cy="2514600"/>
+                <a16:creationId xmlns:a16="http://schemas.microsoft.com/office/drawing/2014/main" id="{9A9F127B-7BE0-4BBA-A676-3158168C1C4D}"/>
+              </a:ext>
+            </a:extLst>
+          </p:cNvPr>
+          <p:cNvSpPr>
+            <a:spLocks xmlns:a="http://schemas.openxmlformats.org/drawingml/2006/main" noGrp="1"/>
+          </p:cNvSpPr>
+          <p:nvPr/>
+        </p:nvSpPr>
+        <p:spPr>
+          <a:xfrm xmlns:a="http://schemas.openxmlformats.org/drawingml/2006/main">
+            <a:off x="4464050" y="2590800"/>
+            <a:ext cx="3263900" cy="2514600"/>
           </a:xfrm>
           <a:prstGeom xmlns:a="http://schemas.openxmlformats.org/drawingml/2006/main" prst="roundRect">
             <a:avLst>
@@ -6278,7 +6534,7 @@
           <a:lstStyle xmlns:a="http://schemas.openxmlformats.org/drawingml/2006/main"/>
           <a:p xmlns:a="http://schemas.openxmlformats.org/drawingml/2006/main">
             <a:pPr algn="l">
-              <a:defRPr sz="1800">
+              <a:defRPr sz="1650">
                 <a:solidFill>
                   <a:srgbClr val="10233F"/>
                 </a:solidFill>
@@ -6288,7 +6544,7 @@
               </a:defRPr>
             </a:pPr>
             <a:r>
-              <a:rPr sz="1800">
+              <a:rPr sz="1650">
                 <a:solidFill>
                   <a:srgbClr val="10233F"/>
                 </a:solidFill>
@@ -6303,10 +6559,132 @@
       </p:sp>
       <p:sp>
         <p:nvSpPr>
-          <p:cNvPr id="11" name="s3-takeaway-rule">
-            <a:extLst xmlns:a="http://schemas.openxmlformats.org/drawingml/2006/main">
-              <a:ext uri="{FF2B5EF4-FFF2-40B4-BE49-F238E27FC236}">
-                <a16:creationId xmlns:a16="http://schemas.microsoft.com/office/drawing/2014/main" id="{496AF26C-3FDE-4234-9843-6CD4D9621B01}"/>
+          <p:cNvPr id="11" name="core-no-2">
+            <a:extLst xmlns:a="http://schemas.openxmlformats.org/drawingml/2006/main">
+              <a:ext uri="{FF2B5EF4-FFF2-40B4-BE49-F238E27FC236}">
+                <a16:creationId xmlns:a16="http://schemas.microsoft.com/office/drawing/2014/main" id="{E7E8F517-F4BF-4DAC-AFA2-3310215DB38F}"/>
+              </a:ext>
+            </a:extLst>
+          </p:cNvPr>
+          <p:cNvSpPr>
+            <a:spLocks xmlns:a="http://schemas.openxmlformats.org/drawingml/2006/main" noGrp="1"/>
+          </p:cNvSpPr>
+          <p:nvPr/>
+        </p:nvSpPr>
+        <p:spPr>
+          <a:xfrm xmlns:a="http://schemas.openxmlformats.org/drawingml/2006/main">
+            <a:off x="8013700" y="2076450"/>
+            <a:ext cx="666750" cy="419100"/>
+          </a:xfrm>
+          <a:prstGeom xmlns:a="http://schemas.openxmlformats.org/drawingml/2006/main" prst="rect">
+            <a:avLst/>
+          </a:prstGeom>
+          <a:noFill xmlns:a="http://schemas.openxmlformats.org/drawingml/2006/main"/>
+          <a:ln xmlns:a="http://schemas.openxmlformats.org/drawingml/2006/main" w="0">
+            <a:noFill/>
+            <a:prstDash val="solid"/>
+          </a:ln>
+        </p:spPr>
+        <p:txBody>
+          <a:bodyPr xmlns:a="http://schemas.openxmlformats.org/drawingml/2006/main" lIns="0" tIns="0" rIns="0" bIns="0" anchor="t">
+            <a:normAutofit fontScale="100000"/>
+          </a:bodyPr>
+          <a:lstStyle xmlns:a="http://schemas.openxmlformats.org/drawingml/2006/main"/>
+          <a:p xmlns:a="http://schemas.openxmlformats.org/drawingml/2006/main">
+            <a:pPr algn="l">
+              <a:defRPr sz="2250" b="1">
+                <a:solidFill>
+                  <a:srgbClr val="0B6B4F"/>
+                </a:solidFill>
+                <a:latin typeface="PingFang SC"/>
+                <a:ea typeface="PingFang SC"/>
+                <a:cs typeface="PingFang SC"/>
+              </a:defRPr>
+            </a:pPr>
+            <a:r>
+              <a:rPr sz="2250" b="1">
+                <a:solidFill>
+                  <a:srgbClr val="0B6B4F"/>
+                </a:solidFill>
+                <a:latin typeface="PingFang SC"/>
+                <a:ea typeface="PingFang SC"/>
+                <a:cs typeface="PingFang SC"/>
+              </a:rPr>
+              <a:t>03</a:t>
+            </a:r>
+          </a:p>
+        </p:txBody>
+      </p:sp>
+      <p:sp>
+        <p:nvSpPr>
+          <p:cNvPr id="12" name="core-body-2">
+            <a:extLst xmlns:a="http://schemas.openxmlformats.org/drawingml/2006/main">
+              <a:ext uri="{FF2B5EF4-FFF2-40B4-BE49-F238E27FC236}">
+                <a16:creationId xmlns:a16="http://schemas.microsoft.com/office/drawing/2014/main" id="{EEE285B2-CDC1-4A6F-98DA-31AD99E5F2BA}"/>
+              </a:ext>
+            </a:extLst>
+          </p:cNvPr>
+          <p:cNvSpPr>
+            <a:spLocks xmlns:a="http://schemas.openxmlformats.org/drawingml/2006/main" noGrp="1"/>
+          </p:cNvSpPr>
+          <p:nvPr/>
+        </p:nvSpPr>
+        <p:spPr>
+          <a:xfrm xmlns:a="http://schemas.openxmlformats.org/drawingml/2006/main">
+            <a:off x="8013700" y="2590800"/>
+            <a:ext cx="3263900" cy="2514600"/>
+          </a:xfrm>
+          <a:prstGeom xmlns:a="http://schemas.openxmlformats.org/drawingml/2006/main" prst="roundRect">
+            <a:avLst>
+              <a:gd name="adj" fmla="val 6818"/>
+            </a:avLst>
+          </a:prstGeom>
+          <a:solidFill xmlns:a="http://schemas.openxmlformats.org/drawingml/2006/main">
+            <a:srgbClr val="FFFFFF"/>
+          </a:solidFill>
+          <a:ln xmlns:a="http://schemas.openxmlformats.org/drawingml/2006/main" w="19050">
+            <a:solidFill>
+              <a:srgbClr val="D8E0E8"/>
+            </a:solidFill>
+            <a:prstDash val="solid"/>
+          </a:ln>
+        </p:spPr>
+        <p:txBody>
+          <a:bodyPr xmlns:a="http://schemas.openxmlformats.org/drawingml/2006/main" lIns="152400" tIns="133350" rIns="152400" bIns="133350" anchor="ctr">
+            <a:normAutofit fontScale="100000"/>
+          </a:bodyPr>
+          <a:lstStyle xmlns:a="http://schemas.openxmlformats.org/drawingml/2006/main"/>
+          <a:p xmlns:a="http://schemas.openxmlformats.org/drawingml/2006/main">
+            <a:pPr algn="l">
+              <a:defRPr sz="1650">
+                <a:solidFill>
+                  <a:srgbClr val="10233F"/>
+                </a:solidFill>
+                <a:latin typeface="PingFang SC"/>
+                <a:ea typeface="PingFang SC"/>
+                <a:cs typeface="PingFang SC"/>
+              </a:defRPr>
+            </a:pPr>
+            <a:r>
+              <a:rPr sz="1650">
+                <a:solidFill>
+                  <a:srgbClr val="10233F"/>
+                </a:solidFill>
+                <a:latin typeface="PingFang SC"/>
+                <a:ea typeface="PingFang SC"/>
+                <a:cs typeface="PingFang SC"/>
+              </a:rPr>
+              <a:t>群体涌现、机器人车队调度和异构设备互操作是三类不同问题；前者关注局部规则怎样形成宏观模式；第二类关注任务分配、路线冲突和故障恢复；第三类还要处理不同设备能力与接口</a:t>
+            </a:r>
+          </a:p>
+        </p:txBody>
+      </p:sp>
+      <p:sp>
+        <p:nvSpPr>
+          <p:cNvPr id="13" name="s3-takeaway-rule">
+            <a:extLst xmlns:a="http://schemas.openxmlformats.org/drawingml/2006/main">
+              <a:ext uri="{FF2B5EF4-FFF2-40B4-BE49-F238E27FC236}">
+                <a16:creationId xmlns:a16="http://schemas.microsoft.com/office/drawing/2014/main" id="{8251F13D-E4C6-4483-97AB-393A799511A2}"/>
               </a:ext>
             </a:extLst>
           </p:cNvPr>
@@ -6336,10 +6714,10 @@
       </p:sp>
       <p:sp>
         <p:nvSpPr>
-          <p:cNvPr id="12" name="s3-takeaway">
-            <a:extLst xmlns:a="http://schemas.openxmlformats.org/drawingml/2006/main">
-              <a:ext uri="{FF2B5EF4-FFF2-40B4-BE49-F238E27FC236}">
-                <a16:creationId xmlns:a16="http://schemas.microsoft.com/office/drawing/2014/main" id="{82CBB220-7410-458F-BEE1-3C31C3E8AF71}"/>
+          <p:cNvPr id="14" name="s3-takeaway">
+            <a:extLst xmlns:a="http://schemas.openxmlformats.org/drawingml/2006/main">
+              <a:ext uri="{FF2B5EF4-FFF2-40B4-BE49-F238E27FC236}">
+                <a16:creationId xmlns:a16="http://schemas.microsoft.com/office/drawing/2014/main" id="{9F56F69B-A414-4658-9382-F7A61F6B6D42}"/>
               </a:ext>
             </a:extLst>
           </p:cNvPr>
@@ -6395,7 +6773,7 @@
     </p:spTree>
     <p:extLst>
       <p:ext uri="{BB962C8B-B14F-4D97-AF65-F5344CB8AC3E}">
-        <p14:creationId xmlns:p14="http://schemas.microsoft.com/office/powerpoint/2010/main" val="673820697"/>
+        <p14:creationId xmlns:p14="http://schemas.microsoft.com/office/powerpoint/2010/main" val="1866555709"/>
       </p:ext>
     </p:extLst>
   </p:cSld>
@@ -6426,7 +6804,7 @@
           <p:cNvPr id="1" name="s4-rule">
             <a:extLst xmlns:a="http://schemas.openxmlformats.org/drawingml/2006/main">
               <a:ext uri="{FF2B5EF4-FFF2-40B4-BE49-F238E27FC236}">
-                <a16:creationId xmlns:a16="http://schemas.microsoft.com/office/drawing/2014/main" id="{A312F9AD-01DB-4B5E-9B0C-486FB7383C95}"/>
+                <a16:creationId xmlns:a16="http://schemas.microsoft.com/office/drawing/2014/main" id="{A8B7952D-AAC8-47AA-B8A5-70A8E32D4AE7}"/>
               </a:ext>
             </a:extLst>
           </p:cNvPr>
@@ -6459,7 +6837,7 @@
           <p:cNvPr id="2" name="s4-eyebrow">
             <a:extLst xmlns:a="http://schemas.openxmlformats.org/drawingml/2006/main">
               <a:ext uri="{FF2B5EF4-FFF2-40B4-BE49-F238E27FC236}">
-                <a16:creationId xmlns:a16="http://schemas.microsoft.com/office/drawing/2014/main" id="{CA1D47B2-4345-47AB-8FF1-F6DF31CC2670}"/>
+                <a16:creationId xmlns:a16="http://schemas.microsoft.com/office/drawing/2014/main" id="{C8ECFFAF-DFF2-46AA-A756-3D0AB184A9C2}"/>
               </a:ext>
             </a:extLst>
           </p:cNvPr>
@@ -6517,7 +6895,7 @@
           <p:cNvPr id="3" name="s4-title">
             <a:extLst xmlns:a="http://schemas.openxmlformats.org/drawingml/2006/main">
               <a:ext uri="{FF2B5EF4-FFF2-40B4-BE49-F238E27FC236}">
-                <a16:creationId xmlns:a16="http://schemas.microsoft.com/office/drawing/2014/main" id="{127D7083-CB42-4AAD-906B-918078B63489}"/>
+                <a16:creationId xmlns:a16="http://schemas.microsoft.com/office/drawing/2014/main" id="{235B41AC-428A-4207-87B8-58E7CA30DBC4}"/>
               </a:ext>
             </a:extLst>
           </p:cNvPr>
@@ -6575,7 +6953,7 @@
           <p:cNvPr id="4" name="s4-footer">
             <a:extLst xmlns:a="http://schemas.openxmlformats.org/drawingml/2006/main">
               <a:ext uri="{FF2B5EF4-FFF2-40B4-BE49-F238E27FC236}">
-                <a16:creationId xmlns:a16="http://schemas.microsoft.com/office/drawing/2014/main" id="{57F8CA8B-5C43-4D15-A3CD-52A2EFA69311}"/>
+                <a16:creationId xmlns:a16="http://schemas.microsoft.com/office/drawing/2014/main" id="{A0C27F6C-B23F-406B-B1D0-6ACC369E8B37}"/>
               </a:ext>
             </a:extLst>
           </p:cNvPr>
@@ -6606,7 +6984,7 @@
           <p:cNvPr id="5" name="s4-identity">
             <a:extLst xmlns:a="http://schemas.openxmlformats.org/drawingml/2006/main">
               <a:ext uri="{FF2B5EF4-FFF2-40B4-BE49-F238E27FC236}">
-                <a16:creationId xmlns:a16="http://schemas.microsoft.com/office/drawing/2014/main" id="{AC574E7E-6C69-479B-87FD-00C3BFAC9D88}"/>
+                <a16:creationId xmlns:a16="http://schemas.microsoft.com/office/drawing/2014/main" id="{63B05186-8AEF-4F40-ABC2-2A2D3FF36EE5}"/>
               </a:ext>
             </a:extLst>
           </p:cNvPr>
@@ -6664,7 +7042,7 @@
           <p:cNvPr id="6" name="core-no-0">
             <a:extLst xmlns:a="http://schemas.openxmlformats.org/drawingml/2006/main">
               <a:ext uri="{FF2B5EF4-FFF2-40B4-BE49-F238E27FC236}">
-                <a16:creationId xmlns:a16="http://schemas.microsoft.com/office/drawing/2014/main" id="{F9D71E21-1248-4A4D-B5C9-AF6BFEBE3E0B}"/>
+                <a16:creationId xmlns:a16="http://schemas.microsoft.com/office/drawing/2014/main" id="{600CCDD1-9616-4CE0-A163-A31AAA4E98BE}"/>
               </a:ext>
             </a:extLst>
           </p:cNvPr>
@@ -6696,7 +7074,7 @@
             <a:pPr algn="l">
               <a:defRPr sz="2250" b="1">
                 <a:solidFill>
-                  <a:srgbClr val="2D9B72"/>
+                  <a:srgbClr val="0B6B4F"/>
                 </a:solidFill>
                 <a:latin typeface="PingFang SC"/>
                 <a:ea typeface="PingFang SC"/>
@@ -6706,7 +7084,7 @@
             <a:r>
               <a:rPr sz="2250" b="1">
                 <a:solidFill>
-                  <a:srgbClr val="2D9B72"/>
+                  <a:srgbClr val="0B6B4F"/>
                 </a:solidFill>
                 <a:latin typeface="PingFang SC"/>
                 <a:ea typeface="PingFang SC"/>
@@ -6722,7 +7100,7 @@
           <p:cNvPr id="7" name="core-label-0">
             <a:extLst xmlns:a="http://schemas.openxmlformats.org/drawingml/2006/main">
               <a:ext uri="{FF2B5EF4-FFF2-40B4-BE49-F238E27FC236}">
-                <a16:creationId xmlns:a16="http://schemas.microsoft.com/office/drawing/2014/main" id="{20F0D6F3-6EA4-42F5-A3AC-4B1D9ECC49D8}"/>
+                <a16:creationId xmlns:a16="http://schemas.microsoft.com/office/drawing/2014/main" id="{5FDE658B-22F0-4154-A7E9-04523076EE68}"/>
               </a:ext>
             </a:extLst>
           </p:cNvPr>
@@ -6780,7 +7158,7 @@
           <p:cNvPr id="8" name="core-body-0">
             <a:extLst xmlns:a="http://schemas.openxmlformats.org/drawingml/2006/main">
               <a:ext uri="{FF2B5EF4-FFF2-40B4-BE49-F238E27FC236}">
-                <a16:creationId xmlns:a16="http://schemas.microsoft.com/office/drawing/2014/main" id="{19014B1D-5357-4421-9283-8B852DC8AEB2}"/>
+                <a16:creationId xmlns:a16="http://schemas.microsoft.com/office/drawing/2014/main" id="{E0B15D20-16E7-4BFB-88AA-79AA7F2BACAF}"/>
               </a:ext>
             </a:extLst>
           </p:cNvPr>
@@ -6804,7 +7182,7 @@
           </a:solidFill>
           <a:ln xmlns:a="http://schemas.openxmlformats.org/drawingml/2006/main" w="19050">
             <a:solidFill>
-              <a:srgbClr val="2D9B72"/>
+              <a:srgbClr val="0B6B4F"/>
             </a:solidFill>
             <a:prstDash val="solid"/>
           </a:ln>
@@ -6844,7 +7222,7 @@
           <p:cNvPr id="9" name="core-no-1">
             <a:extLst xmlns:a="http://schemas.openxmlformats.org/drawingml/2006/main">
               <a:ext uri="{FF2B5EF4-FFF2-40B4-BE49-F238E27FC236}">
-                <a16:creationId xmlns:a16="http://schemas.microsoft.com/office/drawing/2014/main" id="{A441A39C-9F80-47E7-942F-DB06BC1CB003}"/>
+                <a16:creationId xmlns:a16="http://schemas.microsoft.com/office/drawing/2014/main" id="{EB9D5BBD-8C26-4481-A66F-052E239A5A2E}"/>
               </a:ext>
             </a:extLst>
           </p:cNvPr>
@@ -6876,7 +7254,7 @@
             <a:pPr algn="l">
               <a:defRPr sz="2250" b="1">
                 <a:solidFill>
-                  <a:srgbClr val="2D9B72"/>
+                  <a:srgbClr val="0B6B4F"/>
                 </a:solidFill>
                 <a:latin typeface="PingFang SC"/>
                 <a:ea typeface="PingFang SC"/>
@@ -6886,7 +7264,7 @@
             <a:r>
               <a:rPr sz="2250" b="1">
                 <a:solidFill>
-                  <a:srgbClr val="2D9B72"/>
+                  <a:srgbClr val="0B6B4F"/>
                 </a:solidFill>
                 <a:latin typeface="PingFang SC"/>
                 <a:ea typeface="PingFang SC"/>
@@ -6902,7 +7280,7 @@
           <p:cNvPr id="10" name="core-body-1">
             <a:extLst xmlns:a="http://schemas.openxmlformats.org/drawingml/2006/main">
               <a:ext uri="{FF2B5EF4-FFF2-40B4-BE49-F238E27FC236}">
-                <a16:creationId xmlns:a16="http://schemas.microsoft.com/office/drawing/2014/main" id="{09F6C1DD-962C-4571-93C2-1DDCCA78AA52}"/>
+                <a16:creationId xmlns:a16="http://schemas.microsoft.com/office/drawing/2014/main" id="{82FFBFCC-651D-44C1-92B4-054FDAD0C96B}"/>
               </a:ext>
             </a:extLst>
           </p:cNvPr>
@@ -6966,7 +7344,7 @@
           <p:cNvPr id="11" name="core-no-2">
             <a:extLst xmlns:a="http://schemas.openxmlformats.org/drawingml/2006/main">
               <a:ext uri="{FF2B5EF4-FFF2-40B4-BE49-F238E27FC236}">
-                <a16:creationId xmlns:a16="http://schemas.microsoft.com/office/drawing/2014/main" id="{827F5E29-CC17-4C93-B5F5-69A7A391275C}"/>
+                <a16:creationId xmlns:a16="http://schemas.microsoft.com/office/drawing/2014/main" id="{8F4D1332-E4FA-4535-B364-C80EEDE38BF5}"/>
               </a:ext>
             </a:extLst>
           </p:cNvPr>
@@ -6998,7 +7376,7 @@
             <a:pPr algn="l">
               <a:defRPr sz="2250" b="1">
                 <a:solidFill>
-                  <a:srgbClr val="2D9B72"/>
+                  <a:srgbClr val="0B6B4F"/>
                 </a:solidFill>
                 <a:latin typeface="PingFang SC"/>
                 <a:ea typeface="PingFang SC"/>
@@ -7008,7 +7386,7 @@
             <a:r>
               <a:rPr sz="2250" b="1">
                 <a:solidFill>
-                  <a:srgbClr val="2D9B72"/>
+                  <a:srgbClr val="0B6B4F"/>
                 </a:solidFill>
                 <a:latin typeface="PingFang SC"/>
                 <a:ea typeface="PingFang SC"/>
@@ -7024,7 +7402,7 @@
           <p:cNvPr id="12" name="core-body-2">
             <a:extLst xmlns:a="http://schemas.openxmlformats.org/drawingml/2006/main">
               <a:ext uri="{FF2B5EF4-FFF2-40B4-BE49-F238E27FC236}">
-                <a16:creationId xmlns:a16="http://schemas.microsoft.com/office/drawing/2014/main" id="{11A20C5A-59F4-4AD4-BFF9-14F670FFCE15}"/>
+                <a16:creationId xmlns:a16="http://schemas.microsoft.com/office/drawing/2014/main" id="{AD2B67F7-1376-456E-9B1F-9251E2540824}"/>
               </a:ext>
             </a:extLst>
           </p:cNvPr>
@@ -7088,7 +7466,7 @@
           <p:cNvPr id="13" name="s4-takeaway-rule">
             <a:extLst xmlns:a="http://schemas.openxmlformats.org/drawingml/2006/main">
               <a:ext uri="{FF2B5EF4-FFF2-40B4-BE49-F238E27FC236}">
-                <a16:creationId xmlns:a16="http://schemas.microsoft.com/office/drawing/2014/main" id="{4505F993-3EFB-4CA6-99E6-7C26D109E39B}"/>
+                <a16:creationId xmlns:a16="http://schemas.microsoft.com/office/drawing/2014/main" id="{6FC66595-59C0-4231-BF30-F1E3598A7E6D}"/>
               </a:ext>
             </a:extLst>
           </p:cNvPr>
@@ -7121,7 +7499,7 @@
           <p:cNvPr id="14" name="s4-takeaway">
             <a:extLst xmlns:a="http://schemas.openxmlformats.org/drawingml/2006/main">
               <a:ext uri="{FF2B5EF4-FFF2-40B4-BE49-F238E27FC236}">
-                <a16:creationId xmlns:a16="http://schemas.microsoft.com/office/drawing/2014/main" id="{4B0D0864-8F36-435A-B8E5-CDBB55590A26}"/>
+                <a16:creationId xmlns:a16="http://schemas.microsoft.com/office/drawing/2014/main" id="{82F9E66C-3537-4533-BA7F-6580436AD646}"/>
               </a:ext>
             </a:extLst>
           </p:cNvPr>
@@ -7177,7 +7555,7 @@
     </p:spTree>
     <p:extLst>
       <p:ext uri="{BB962C8B-B14F-4D97-AF65-F5344CB8AC3E}">
-        <p14:creationId xmlns:p14="http://schemas.microsoft.com/office/powerpoint/2010/main" val="252830545"/>
+        <p14:creationId xmlns:p14="http://schemas.microsoft.com/office/powerpoint/2010/main" val="1057851211"/>
       </p:ext>
     </p:extLst>
   </p:cSld>
@@ -7208,7 +7586,7 @@
           <p:cNvPr id="1" name="s5-rule">
             <a:extLst xmlns:a="http://schemas.openxmlformats.org/drawingml/2006/main">
               <a:ext uri="{FF2B5EF4-FFF2-40B4-BE49-F238E27FC236}">
-                <a16:creationId xmlns:a16="http://schemas.microsoft.com/office/drawing/2014/main" id="{FFB402BF-5BE7-4AC1-9E04-2DD845B773FC}"/>
+                <a16:creationId xmlns:a16="http://schemas.microsoft.com/office/drawing/2014/main" id="{1172F798-F1EC-4FC0-BD4A-5A4A1FE4A055}"/>
               </a:ext>
             </a:extLst>
           </p:cNvPr>
@@ -7241,7 +7619,7 @@
           <p:cNvPr id="2" name="s5-eyebrow">
             <a:extLst xmlns:a="http://schemas.openxmlformats.org/drawingml/2006/main">
               <a:ext uri="{FF2B5EF4-FFF2-40B4-BE49-F238E27FC236}">
-                <a16:creationId xmlns:a16="http://schemas.microsoft.com/office/drawing/2014/main" id="{4A32E599-5C8A-4590-A9A1-A9FE4C550006}"/>
+                <a16:creationId xmlns:a16="http://schemas.microsoft.com/office/drawing/2014/main" id="{F75E642B-DCD6-475E-A953-727FCE2EF524}"/>
               </a:ext>
             </a:extLst>
           </p:cNvPr>
@@ -7299,7 +7677,7 @@
           <p:cNvPr id="3" name="s5-title">
             <a:extLst xmlns:a="http://schemas.openxmlformats.org/drawingml/2006/main">
               <a:ext uri="{FF2B5EF4-FFF2-40B4-BE49-F238E27FC236}">
-                <a16:creationId xmlns:a16="http://schemas.microsoft.com/office/drawing/2014/main" id="{62E6389E-1A1F-4C6E-91C5-517C4F0EBB7F}"/>
+                <a16:creationId xmlns:a16="http://schemas.microsoft.com/office/drawing/2014/main" id="{83F6EF20-D635-47ED-A8BE-B1A4711B6ECC}"/>
               </a:ext>
             </a:extLst>
           </p:cNvPr>
@@ -7357,7 +7735,7 @@
           <p:cNvPr id="4" name="s5-footer">
             <a:extLst xmlns:a="http://schemas.openxmlformats.org/drawingml/2006/main">
               <a:ext uri="{FF2B5EF4-FFF2-40B4-BE49-F238E27FC236}">
-                <a16:creationId xmlns:a16="http://schemas.microsoft.com/office/drawing/2014/main" id="{A60937CF-36C0-4C92-9929-457702E4AB62}"/>
+                <a16:creationId xmlns:a16="http://schemas.microsoft.com/office/drawing/2014/main" id="{6AE841FF-6782-4704-BAC4-D85220A3FBB7}"/>
               </a:ext>
             </a:extLst>
           </p:cNvPr>
@@ -7388,7 +7766,7 @@
           <p:cNvPr id="5" name="s5-identity">
             <a:extLst xmlns:a="http://schemas.openxmlformats.org/drawingml/2006/main">
               <a:ext uri="{FF2B5EF4-FFF2-40B4-BE49-F238E27FC236}">
-                <a16:creationId xmlns:a16="http://schemas.microsoft.com/office/drawing/2014/main" id="{F0D1BCF5-2CE1-4C13-816A-C71A31C0F62D}"/>
+                <a16:creationId xmlns:a16="http://schemas.microsoft.com/office/drawing/2014/main" id="{701CBA45-1E93-4BE0-B8A2-2DE9A01F4206}"/>
               </a:ext>
             </a:extLst>
           </p:cNvPr>
@@ -7446,7 +7824,7 @@
           <p:cNvPr id="6" name="core-no-0">
             <a:extLst xmlns:a="http://schemas.openxmlformats.org/drawingml/2006/main">
               <a:ext uri="{FF2B5EF4-FFF2-40B4-BE49-F238E27FC236}">
-                <a16:creationId xmlns:a16="http://schemas.microsoft.com/office/drawing/2014/main" id="{1316981D-6210-401F-9E32-28E1C6FF70BB}"/>
+                <a16:creationId xmlns:a16="http://schemas.microsoft.com/office/drawing/2014/main" id="{1BDEC623-03F8-4C42-8E36-76D0F132E918}"/>
               </a:ext>
             </a:extLst>
           </p:cNvPr>
@@ -7478,7 +7856,7 @@
             <a:pPr algn="l">
               <a:defRPr sz="2250" b="1">
                 <a:solidFill>
-                  <a:srgbClr val="2D9B72"/>
+                  <a:srgbClr val="0B6B4F"/>
                 </a:solidFill>
                 <a:latin typeface="PingFang SC"/>
                 <a:ea typeface="PingFang SC"/>
@@ -7488,7 +7866,7 @@
             <a:r>
               <a:rPr sz="2250" b="1">
                 <a:solidFill>
-                  <a:srgbClr val="2D9B72"/>
+                  <a:srgbClr val="0B6B4F"/>
                 </a:solidFill>
                 <a:latin typeface="PingFang SC"/>
                 <a:ea typeface="PingFang SC"/>
@@ -7504,7 +7882,7 @@
           <p:cNvPr id="7" name="core-label-0">
             <a:extLst xmlns:a="http://schemas.openxmlformats.org/drawingml/2006/main">
               <a:ext uri="{FF2B5EF4-FFF2-40B4-BE49-F238E27FC236}">
-                <a16:creationId xmlns:a16="http://schemas.microsoft.com/office/drawing/2014/main" id="{C232FFFF-AE56-4100-99EC-F36A9F33D1FE}"/>
+                <a16:creationId xmlns:a16="http://schemas.microsoft.com/office/drawing/2014/main" id="{AED1F751-C2BD-45E1-82C0-E8214CB99704}"/>
               </a:ext>
             </a:extLst>
           </p:cNvPr>
@@ -7562,7 +7940,7 @@
           <p:cNvPr id="8" name="core-body-0">
             <a:extLst xmlns:a="http://schemas.openxmlformats.org/drawingml/2006/main">
               <a:ext uri="{FF2B5EF4-FFF2-40B4-BE49-F238E27FC236}">
-                <a16:creationId xmlns:a16="http://schemas.microsoft.com/office/drawing/2014/main" id="{3382D582-D560-49F4-8B8D-E77CBFEBE99F}"/>
+                <a16:creationId xmlns:a16="http://schemas.microsoft.com/office/drawing/2014/main" id="{D8AFDB63-2C5D-4DB4-ADD4-FFE77D985A63}"/>
               </a:ext>
             </a:extLst>
           </p:cNvPr>
@@ -7586,7 +7964,7 @@
           </a:solidFill>
           <a:ln xmlns:a="http://schemas.openxmlformats.org/drawingml/2006/main" w="19050">
             <a:solidFill>
-              <a:srgbClr val="2D9B72"/>
+              <a:srgbClr val="0B6B4F"/>
             </a:solidFill>
             <a:prstDash val="solid"/>
           </a:ln>
@@ -7626,7 +8004,7 @@
           <p:cNvPr id="9" name="core-no-1">
             <a:extLst xmlns:a="http://schemas.openxmlformats.org/drawingml/2006/main">
               <a:ext uri="{FF2B5EF4-FFF2-40B4-BE49-F238E27FC236}">
-                <a16:creationId xmlns:a16="http://schemas.microsoft.com/office/drawing/2014/main" id="{6ACFC311-A10F-4F27-844F-7FF7511EC2D4}"/>
+                <a16:creationId xmlns:a16="http://schemas.microsoft.com/office/drawing/2014/main" id="{3BDC810F-D839-452F-ABAC-7270A0FF8A35}"/>
               </a:ext>
             </a:extLst>
           </p:cNvPr>
@@ -7658,7 +8036,7 @@
             <a:pPr algn="l">
               <a:defRPr sz="2250" b="1">
                 <a:solidFill>
-                  <a:srgbClr val="2D9B72"/>
+                  <a:srgbClr val="0B6B4F"/>
                 </a:solidFill>
                 <a:latin typeface="PingFang SC"/>
                 <a:ea typeface="PingFang SC"/>
@@ -7668,7 +8046,7 @@
             <a:r>
               <a:rPr sz="2250" b="1">
                 <a:solidFill>
-                  <a:srgbClr val="2D9B72"/>
+                  <a:srgbClr val="0B6B4F"/>
                 </a:solidFill>
                 <a:latin typeface="PingFang SC"/>
                 <a:ea typeface="PingFang SC"/>
@@ -7684,7 +8062,7 @@
           <p:cNvPr id="10" name="core-body-1">
             <a:extLst xmlns:a="http://schemas.openxmlformats.org/drawingml/2006/main">
               <a:ext uri="{FF2B5EF4-FFF2-40B4-BE49-F238E27FC236}">
-                <a16:creationId xmlns:a16="http://schemas.microsoft.com/office/drawing/2014/main" id="{82C0E23E-DE54-417C-A1CC-5673284186CD}"/>
+                <a16:creationId xmlns:a16="http://schemas.microsoft.com/office/drawing/2014/main" id="{5A73D4E4-BD6C-46AA-AD6E-D3E71EE4F518}"/>
               </a:ext>
             </a:extLst>
           </p:cNvPr>
@@ -7748,7 +8126,7 @@
           <p:cNvPr id="11" name="s5-takeaway-rule">
             <a:extLst xmlns:a="http://schemas.openxmlformats.org/drawingml/2006/main">
               <a:ext uri="{FF2B5EF4-FFF2-40B4-BE49-F238E27FC236}">
-                <a16:creationId xmlns:a16="http://schemas.microsoft.com/office/drawing/2014/main" id="{83260629-94F5-45D0-B21C-9F8DBDCD0709}"/>
+                <a16:creationId xmlns:a16="http://schemas.microsoft.com/office/drawing/2014/main" id="{70F798BE-3202-466E-8D22-36B403BC567F}"/>
               </a:ext>
             </a:extLst>
           </p:cNvPr>
@@ -7781,7 +8159,7 @@
           <p:cNvPr id="12" name="s5-takeaway">
             <a:extLst xmlns:a="http://schemas.openxmlformats.org/drawingml/2006/main">
               <a:ext uri="{FF2B5EF4-FFF2-40B4-BE49-F238E27FC236}">
-                <a16:creationId xmlns:a16="http://schemas.microsoft.com/office/drawing/2014/main" id="{3D94EDCB-42CF-43CF-92FE-54B029D28B74}"/>
+                <a16:creationId xmlns:a16="http://schemas.microsoft.com/office/drawing/2014/main" id="{634B8FA3-8C5E-4330-A8E3-284C0DF3CF02}"/>
               </a:ext>
             </a:extLst>
           </p:cNvPr>
@@ -7837,7 +8215,7 @@
     </p:spTree>
     <p:extLst>
       <p:ext uri="{BB962C8B-B14F-4D97-AF65-F5344CB8AC3E}">
-        <p14:creationId xmlns:p14="http://schemas.microsoft.com/office/powerpoint/2010/main" val="434727517"/>
+        <p14:creationId xmlns:p14="http://schemas.microsoft.com/office/powerpoint/2010/main" val="330320248"/>
       </p:ext>
     </p:extLst>
   </p:cSld>
@@ -7868,7 +8246,7 @@
           <p:cNvPr id="1" name="s6-rule">
             <a:extLst xmlns:a="http://schemas.openxmlformats.org/drawingml/2006/main">
               <a:ext uri="{FF2B5EF4-FFF2-40B4-BE49-F238E27FC236}">
-                <a16:creationId xmlns:a16="http://schemas.microsoft.com/office/drawing/2014/main" id="{BD41EB94-24A4-4F3C-8551-9F481DC5417B}"/>
+                <a16:creationId xmlns:a16="http://schemas.microsoft.com/office/drawing/2014/main" id="{364FCC0A-F617-45A8-A534-E7A7C927B852}"/>
               </a:ext>
             </a:extLst>
           </p:cNvPr>
@@ -7901,7 +8279,7 @@
           <p:cNvPr id="2" name="s6-eyebrow">
             <a:extLst xmlns:a="http://schemas.openxmlformats.org/drawingml/2006/main">
               <a:ext uri="{FF2B5EF4-FFF2-40B4-BE49-F238E27FC236}">
-                <a16:creationId xmlns:a16="http://schemas.microsoft.com/office/drawing/2014/main" id="{A631DF47-A1AC-49D8-A65D-2273D3FFE0DA}"/>
+                <a16:creationId xmlns:a16="http://schemas.microsoft.com/office/drawing/2014/main" id="{1C75E0BA-BF97-4182-8D4C-4105E59F3B73}"/>
               </a:ext>
             </a:extLst>
           </p:cNvPr>
@@ -7959,7 +8337,7 @@
           <p:cNvPr id="3" name="s6-title">
             <a:extLst xmlns:a="http://schemas.openxmlformats.org/drawingml/2006/main">
               <a:ext uri="{FF2B5EF4-FFF2-40B4-BE49-F238E27FC236}">
-                <a16:creationId xmlns:a16="http://schemas.microsoft.com/office/drawing/2014/main" id="{37A41DBA-D4B7-4D97-A79A-157D8C471CE5}"/>
+                <a16:creationId xmlns:a16="http://schemas.microsoft.com/office/drawing/2014/main" id="{92F600AB-B6E3-4B91-B31D-606C0B5B49AB}"/>
               </a:ext>
             </a:extLst>
           </p:cNvPr>
@@ -8017,7 +8395,7 @@
           <p:cNvPr id="4" name="s6-footer">
             <a:extLst xmlns:a="http://schemas.openxmlformats.org/drawingml/2006/main">
               <a:ext uri="{FF2B5EF4-FFF2-40B4-BE49-F238E27FC236}">
-                <a16:creationId xmlns:a16="http://schemas.microsoft.com/office/drawing/2014/main" id="{AC26A120-0C8E-40CE-9A4E-0D1ECCEFA91A}"/>
+                <a16:creationId xmlns:a16="http://schemas.microsoft.com/office/drawing/2014/main" id="{9CF331C6-F0A2-4F73-A936-22CD537BF6C8}"/>
               </a:ext>
             </a:extLst>
           </p:cNvPr>
@@ -8048,7 +8426,7 @@
           <p:cNvPr id="5" name="s6-identity">
             <a:extLst xmlns:a="http://schemas.openxmlformats.org/drawingml/2006/main">
               <a:ext uri="{FF2B5EF4-FFF2-40B4-BE49-F238E27FC236}">
-                <a16:creationId xmlns:a16="http://schemas.microsoft.com/office/drawing/2014/main" id="{9345BD38-51CD-45D5-96C4-0E38BDDE7ED0}"/>
+                <a16:creationId xmlns:a16="http://schemas.microsoft.com/office/drawing/2014/main" id="{54B5ECAD-38C5-4F22-85DD-A7A2840221D4}"/>
               </a:ext>
             </a:extLst>
           </p:cNvPr>
@@ -8106,7 +8484,7 @@
           <p:cNvPr id="6" name="core-no-0">
             <a:extLst xmlns:a="http://schemas.openxmlformats.org/drawingml/2006/main">
               <a:ext uri="{FF2B5EF4-FFF2-40B4-BE49-F238E27FC236}">
-                <a16:creationId xmlns:a16="http://schemas.microsoft.com/office/drawing/2014/main" id="{EDE2FCD1-7C8B-4700-92C8-9EC410794C86}"/>
+                <a16:creationId xmlns:a16="http://schemas.microsoft.com/office/drawing/2014/main" id="{A703A0F9-AE7F-4B5D-B1AE-4E1B73EF32C7}"/>
               </a:ext>
             </a:extLst>
           </p:cNvPr>
@@ -8138,7 +8516,7 @@
             <a:pPr algn="l">
               <a:defRPr sz="2250" b="1">
                 <a:solidFill>
-                  <a:srgbClr val="2D9B72"/>
+                  <a:srgbClr val="0B6B4F"/>
                 </a:solidFill>
                 <a:latin typeface="PingFang SC"/>
                 <a:ea typeface="PingFang SC"/>
@@ -8148,7 +8526,7 @@
             <a:r>
               <a:rPr sz="2250" b="1">
                 <a:solidFill>
-                  <a:srgbClr val="2D9B72"/>
+                  <a:srgbClr val="0B6B4F"/>
                 </a:solidFill>
                 <a:latin typeface="PingFang SC"/>
                 <a:ea typeface="PingFang SC"/>
@@ -8164,7 +8542,7 @@
           <p:cNvPr id="7" name="core-label-0">
             <a:extLst xmlns:a="http://schemas.openxmlformats.org/drawingml/2006/main">
               <a:ext uri="{FF2B5EF4-FFF2-40B4-BE49-F238E27FC236}">
-                <a16:creationId xmlns:a16="http://schemas.microsoft.com/office/drawing/2014/main" id="{FFE38A5E-E98E-4472-B1B3-769A6D4E2A35}"/>
+                <a16:creationId xmlns:a16="http://schemas.microsoft.com/office/drawing/2014/main" id="{D4863C83-9917-4806-8748-605C5D20C2BB}"/>
               </a:ext>
             </a:extLst>
           </p:cNvPr>
@@ -8222,7 +8600,7 @@
           <p:cNvPr id="8" name="core-body-0">
             <a:extLst xmlns:a="http://schemas.openxmlformats.org/drawingml/2006/main">
               <a:ext uri="{FF2B5EF4-FFF2-40B4-BE49-F238E27FC236}">
-                <a16:creationId xmlns:a16="http://schemas.microsoft.com/office/drawing/2014/main" id="{CA9A832A-21C8-4D2E-965C-31EF2AB1BA42}"/>
+                <a16:creationId xmlns:a16="http://schemas.microsoft.com/office/drawing/2014/main" id="{DE64AF49-A1D7-40B4-BF76-346E54502FD6}"/>
               </a:ext>
             </a:extLst>
           </p:cNvPr>
@@ -8246,7 +8624,7 @@
           </a:solidFill>
           <a:ln xmlns:a="http://schemas.openxmlformats.org/drawingml/2006/main" w="19050">
             <a:solidFill>
-              <a:srgbClr val="2D9B72"/>
+              <a:srgbClr val="0B6B4F"/>
             </a:solidFill>
             <a:prstDash val="solid"/>
           </a:ln>
@@ -8276,7 +8654,7 @@
                 <a:ea typeface="PingFang SC"/>
                 <a:cs typeface="PingFang SC"/>
               </a:rPr>
-              <a:t>群体关系会随时间变化。动态聚类可以根据位置、速度或交互关系识别暂时形成的群组；时空张量等表示方法可以把“个体—时间—特征”组织起来，帮助发现周期、异常或协同行为。这些方法是分析工具…</a:t>
+              <a:t>群体关系会随时间变化；动态聚类可以根据位置、速度或交互关系识别暂时形成的群组；时空张量等表示方法可以把“个体—时间—特征”组织起来；帮助发现周期、异常或协同行为；这些方法是分析工具</a:t>
             </a:r>
           </a:p>
         </p:txBody>
@@ -8286,7 +8664,7 @@
           <p:cNvPr id="9" name="core-no-1">
             <a:extLst xmlns:a="http://schemas.openxmlformats.org/drawingml/2006/main">
               <a:ext uri="{FF2B5EF4-FFF2-40B4-BE49-F238E27FC236}">
-                <a16:creationId xmlns:a16="http://schemas.microsoft.com/office/drawing/2014/main" id="{E45B0D28-2551-47A1-9486-2B9EF0C775BB}"/>
+                <a16:creationId xmlns:a16="http://schemas.microsoft.com/office/drawing/2014/main" id="{22EE9D0B-2404-42BB-A177-4B988BE2C33D}"/>
               </a:ext>
             </a:extLst>
           </p:cNvPr>
@@ -8318,7 +8696,7 @@
             <a:pPr algn="l">
               <a:defRPr sz="2250" b="1">
                 <a:solidFill>
-                  <a:srgbClr val="2D9B72"/>
+                  <a:srgbClr val="0B6B4F"/>
                 </a:solidFill>
                 <a:latin typeface="PingFang SC"/>
                 <a:ea typeface="PingFang SC"/>
@@ -8328,7 +8706,7 @@
             <a:r>
               <a:rPr sz="2250" b="1">
                 <a:solidFill>
-                  <a:srgbClr val="2D9B72"/>
+                  <a:srgbClr val="0B6B4F"/>
                 </a:solidFill>
                 <a:latin typeface="PingFang SC"/>
                 <a:ea typeface="PingFang SC"/>
@@ -8344,7 +8722,7 @@
           <p:cNvPr id="10" name="core-body-1">
             <a:extLst xmlns:a="http://schemas.openxmlformats.org/drawingml/2006/main">
               <a:ext uri="{FF2B5EF4-FFF2-40B4-BE49-F238E27FC236}">
-                <a16:creationId xmlns:a16="http://schemas.microsoft.com/office/drawing/2014/main" id="{B9654F50-19C8-4AF4-8481-B64847265BB9}"/>
+                <a16:creationId xmlns:a16="http://schemas.microsoft.com/office/drawing/2014/main" id="{B7C7B986-743B-42C2-8DA7-B752DE6509DE}"/>
               </a:ext>
             </a:extLst>
           </p:cNvPr>
@@ -8408,7 +8786,7 @@
           <p:cNvPr id="11" name="s6-takeaway-rule">
             <a:extLst xmlns:a="http://schemas.openxmlformats.org/drawingml/2006/main">
               <a:ext uri="{FF2B5EF4-FFF2-40B4-BE49-F238E27FC236}">
-                <a16:creationId xmlns:a16="http://schemas.microsoft.com/office/drawing/2014/main" id="{11507FC4-8BE9-4D5C-A513-1006DB563E9B}"/>
+                <a16:creationId xmlns:a16="http://schemas.microsoft.com/office/drawing/2014/main" id="{532D4B44-2851-4C15-ABBB-1032515C8FDB}"/>
               </a:ext>
             </a:extLst>
           </p:cNvPr>
@@ -8441,7 +8819,7 @@
           <p:cNvPr id="12" name="s6-takeaway">
             <a:extLst xmlns:a="http://schemas.openxmlformats.org/drawingml/2006/main">
               <a:ext uri="{FF2B5EF4-FFF2-40B4-BE49-F238E27FC236}">
-                <a16:creationId xmlns:a16="http://schemas.microsoft.com/office/drawing/2014/main" id="{E91984D0-F2B7-4CE1-87A8-7E5F279A3073}"/>
+                <a16:creationId xmlns:a16="http://schemas.microsoft.com/office/drawing/2014/main" id="{1F13261A-E09C-4325-8789-4A12B87CD3E4}"/>
               </a:ext>
             </a:extLst>
           </p:cNvPr>
@@ -8497,7 +8875,7 @@
     </p:spTree>
     <p:extLst>
       <p:ext uri="{BB962C8B-B14F-4D97-AF65-F5344CB8AC3E}">
-        <p14:creationId xmlns:p14="http://schemas.microsoft.com/office/powerpoint/2010/main" val="945920156"/>
+        <p14:creationId xmlns:p14="http://schemas.microsoft.com/office/powerpoint/2010/main" val="1474648296"/>
       </p:ext>
     </p:extLst>
   </p:cSld>
@@ -8528,7 +8906,7 @@
           <p:cNvPr id="1" name="s7-rule">
             <a:extLst xmlns:a="http://schemas.openxmlformats.org/drawingml/2006/main">
               <a:ext uri="{FF2B5EF4-FFF2-40B4-BE49-F238E27FC236}">
-                <a16:creationId xmlns:a16="http://schemas.microsoft.com/office/drawing/2014/main" id="{F0D6ED88-F012-4ACF-902B-9D9F7C7B3DB8}"/>
+                <a16:creationId xmlns:a16="http://schemas.microsoft.com/office/drawing/2014/main" id="{529988F8-3C68-4FC1-964C-B654B7B7660F}"/>
               </a:ext>
             </a:extLst>
           </p:cNvPr>
@@ -8561,7 +8939,7 @@
           <p:cNvPr id="2" name="s7-eyebrow">
             <a:extLst xmlns:a="http://schemas.openxmlformats.org/drawingml/2006/main">
               <a:ext uri="{FF2B5EF4-FFF2-40B4-BE49-F238E27FC236}">
-                <a16:creationId xmlns:a16="http://schemas.microsoft.com/office/drawing/2014/main" id="{233EB147-BF82-4ED6-AF95-A8577B7BE9E8}"/>
+                <a16:creationId xmlns:a16="http://schemas.microsoft.com/office/drawing/2014/main" id="{30833B2E-1AE0-4664-8CF3-9F1B5E158522}"/>
               </a:ext>
             </a:extLst>
           </p:cNvPr>
@@ -8619,7 +8997,7 @@
           <p:cNvPr id="3" name="s7-title">
             <a:extLst xmlns:a="http://schemas.openxmlformats.org/drawingml/2006/main">
               <a:ext uri="{FF2B5EF4-FFF2-40B4-BE49-F238E27FC236}">
-                <a16:creationId xmlns:a16="http://schemas.microsoft.com/office/drawing/2014/main" id="{ACECF148-F188-438E-8092-7C3EBF72060D}"/>
+                <a16:creationId xmlns:a16="http://schemas.microsoft.com/office/drawing/2014/main" id="{921F8A4B-E902-4811-97CA-FBE18A7E1244}"/>
               </a:ext>
             </a:extLst>
           </p:cNvPr>
@@ -8677,7 +9055,7 @@
           <p:cNvPr id="4" name="s7-footer">
             <a:extLst xmlns:a="http://schemas.openxmlformats.org/drawingml/2006/main">
               <a:ext uri="{FF2B5EF4-FFF2-40B4-BE49-F238E27FC236}">
-                <a16:creationId xmlns:a16="http://schemas.microsoft.com/office/drawing/2014/main" id="{6C7EF653-899E-4F21-A27F-92EAF0E9B5D5}"/>
+                <a16:creationId xmlns:a16="http://schemas.microsoft.com/office/drawing/2014/main" id="{EBC50177-1B71-4845-B191-32B42010FC6C}"/>
               </a:ext>
             </a:extLst>
           </p:cNvPr>
@@ -8708,7 +9086,7 @@
           <p:cNvPr id="5" name="s7-identity">
             <a:extLst xmlns:a="http://schemas.openxmlformats.org/drawingml/2006/main">
               <a:ext uri="{FF2B5EF4-FFF2-40B4-BE49-F238E27FC236}">
-                <a16:creationId xmlns:a16="http://schemas.microsoft.com/office/drawing/2014/main" id="{F7AAF22B-3AFC-424C-B721-D5349FB4050E}"/>
+                <a16:creationId xmlns:a16="http://schemas.microsoft.com/office/drawing/2014/main" id="{7370F907-B709-4A0B-B151-6F14CB7992B3}"/>
               </a:ext>
             </a:extLst>
           </p:cNvPr>
@@ -8766,7 +9144,7 @@
           <p:cNvPr id="6" name="core-no-0">
             <a:extLst xmlns:a="http://schemas.openxmlformats.org/drawingml/2006/main">
               <a:ext uri="{FF2B5EF4-FFF2-40B4-BE49-F238E27FC236}">
-                <a16:creationId xmlns:a16="http://schemas.microsoft.com/office/drawing/2014/main" id="{DD92F491-ED82-4626-B352-9892F752571A}"/>
+                <a16:creationId xmlns:a16="http://schemas.microsoft.com/office/drawing/2014/main" id="{B7255395-CCFD-484F-8DA9-0EFA3A324034}"/>
               </a:ext>
             </a:extLst>
           </p:cNvPr>
@@ -8798,7 +9176,7 @@
             <a:pPr algn="l">
               <a:defRPr sz="2250" b="1">
                 <a:solidFill>
-                  <a:srgbClr val="2D9B72"/>
+                  <a:srgbClr val="0B6B4F"/>
                 </a:solidFill>
                 <a:latin typeface="PingFang SC"/>
                 <a:ea typeface="PingFang SC"/>
@@ -8808,7 +9186,7 @@
             <a:r>
               <a:rPr sz="2250" b="1">
                 <a:solidFill>
-                  <a:srgbClr val="2D9B72"/>
+                  <a:srgbClr val="0B6B4F"/>
                 </a:solidFill>
                 <a:latin typeface="PingFang SC"/>
                 <a:ea typeface="PingFang SC"/>
@@ -8824,7 +9202,7 @@
           <p:cNvPr id="7" name="core-label-0">
             <a:extLst xmlns:a="http://schemas.openxmlformats.org/drawingml/2006/main">
               <a:ext uri="{FF2B5EF4-FFF2-40B4-BE49-F238E27FC236}">
-                <a16:creationId xmlns:a16="http://schemas.microsoft.com/office/drawing/2014/main" id="{00F55410-777E-4CAF-9C3A-4FD89530F115}"/>
+                <a16:creationId xmlns:a16="http://schemas.microsoft.com/office/drawing/2014/main" id="{6C4F2E77-99C3-48E8-ADCF-A4D987D5BD35}"/>
               </a:ext>
             </a:extLst>
           </p:cNvPr>
@@ -8882,7 +9260,7 @@
           <p:cNvPr id="8" name="core-body-0">
             <a:extLst xmlns:a="http://schemas.openxmlformats.org/drawingml/2006/main">
               <a:ext uri="{FF2B5EF4-FFF2-40B4-BE49-F238E27FC236}">
-                <a16:creationId xmlns:a16="http://schemas.microsoft.com/office/drawing/2014/main" id="{7D6B8A81-7E33-4A02-9B6A-243227B0F87F}"/>
+                <a16:creationId xmlns:a16="http://schemas.microsoft.com/office/drawing/2014/main" id="{056D2A82-14D7-430E-ACC7-FBF7CB550D30}"/>
               </a:ext>
             </a:extLst>
           </p:cNvPr>
@@ -8906,7 +9284,7 @@
           </a:solidFill>
           <a:ln xmlns:a="http://schemas.openxmlformats.org/drawingml/2006/main" w="19050">
             <a:solidFill>
-              <a:srgbClr val="2D9B72"/>
+              <a:srgbClr val="0B6B4F"/>
             </a:solidFill>
             <a:prstDash val="solid"/>
           </a:ln>
@@ -8946,7 +9324,7 @@
           <p:cNvPr id="9" name="core-no-1">
             <a:extLst xmlns:a="http://schemas.openxmlformats.org/drawingml/2006/main">
               <a:ext uri="{FF2B5EF4-FFF2-40B4-BE49-F238E27FC236}">
-                <a16:creationId xmlns:a16="http://schemas.microsoft.com/office/drawing/2014/main" id="{D2DE265D-1307-4A84-B6F8-01024603BC0D}"/>
+                <a16:creationId xmlns:a16="http://schemas.microsoft.com/office/drawing/2014/main" id="{5C7F3A08-F4FA-43E9-9C83-B9B5E171289A}"/>
               </a:ext>
             </a:extLst>
           </p:cNvPr>
@@ -8978,7 +9356,7 @@
             <a:pPr algn="l">
               <a:defRPr sz="2250" b="1">
                 <a:solidFill>
-                  <a:srgbClr val="2D9B72"/>
+                  <a:srgbClr val="0B6B4F"/>
                 </a:solidFill>
                 <a:latin typeface="PingFang SC"/>
                 <a:ea typeface="PingFang SC"/>
@@ -8988,7 +9366,7 @@
             <a:r>
               <a:rPr sz="2250" b="1">
                 <a:solidFill>
-                  <a:srgbClr val="2D9B72"/>
+                  <a:srgbClr val="0B6B4F"/>
                 </a:solidFill>
                 <a:latin typeface="PingFang SC"/>
                 <a:ea typeface="PingFang SC"/>
@@ -9004,7 +9382,7 @@
           <p:cNvPr id="10" name="core-body-1">
             <a:extLst xmlns:a="http://schemas.openxmlformats.org/drawingml/2006/main">
               <a:ext uri="{FF2B5EF4-FFF2-40B4-BE49-F238E27FC236}">
-                <a16:creationId xmlns:a16="http://schemas.microsoft.com/office/drawing/2014/main" id="{7F183695-3BED-467F-94DD-F59BFAB6E251}"/>
+                <a16:creationId xmlns:a16="http://schemas.microsoft.com/office/drawing/2014/main" id="{7084B08B-7B48-4B71-9B58-77CEDA7BFB98}"/>
               </a:ext>
             </a:extLst>
           </p:cNvPr>
@@ -9068,7 +9446,7 @@
           <p:cNvPr id="11" name="s7-takeaway-rule">
             <a:extLst xmlns:a="http://schemas.openxmlformats.org/drawingml/2006/main">
               <a:ext uri="{FF2B5EF4-FFF2-40B4-BE49-F238E27FC236}">
-                <a16:creationId xmlns:a16="http://schemas.microsoft.com/office/drawing/2014/main" id="{39D12655-C803-4FC6-BF51-F56CBD79811B}"/>
+                <a16:creationId xmlns:a16="http://schemas.microsoft.com/office/drawing/2014/main" id="{B5DA53A9-891D-4835-8CDC-52593F091EC2}"/>
               </a:ext>
             </a:extLst>
           </p:cNvPr>
@@ -9101,7 +9479,7 @@
           <p:cNvPr id="12" name="s7-takeaway">
             <a:extLst xmlns:a="http://schemas.openxmlformats.org/drawingml/2006/main">
               <a:ext uri="{FF2B5EF4-FFF2-40B4-BE49-F238E27FC236}">
-                <a16:creationId xmlns:a16="http://schemas.microsoft.com/office/drawing/2014/main" id="{3BFE3834-3FF3-4B50-BB34-4BEC941593B0}"/>
+                <a16:creationId xmlns:a16="http://schemas.microsoft.com/office/drawing/2014/main" id="{4E19513C-61B7-42E3-A793-A8C68EB833CF}"/>
               </a:ext>
             </a:extLst>
           </p:cNvPr>
@@ -9157,7 +9535,7 @@
     </p:spTree>
     <p:extLst>
       <p:ext uri="{BB962C8B-B14F-4D97-AF65-F5344CB8AC3E}">
-        <p14:creationId xmlns:p14="http://schemas.microsoft.com/office/powerpoint/2010/main" val="1027420864"/>
+        <p14:creationId xmlns:p14="http://schemas.microsoft.com/office/powerpoint/2010/main" val="1946175582"/>
       </p:ext>
     </p:extLst>
   </p:cSld>
@@ -9188,7 +9566,7 @@
           <p:cNvPr id="1" name="s8-rule">
             <a:extLst xmlns:a="http://schemas.openxmlformats.org/drawingml/2006/main">
               <a:ext uri="{FF2B5EF4-FFF2-40B4-BE49-F238E27FC236}">
-                <a16:creationId xmlns:a16="http://schemas.microsoft.com/office/drawing/2014/main" id="{AFE6E72D-52B0-4882-8521-0B9EDF865116}"/>
+                <a16:creationId xmlns:a16="http://schemas.microsoft.com/office/drawing/2014/main" id="{AF28ED51-4FB4-4AE4-BF11-887B76416AE9}"/>
               </a:ext>
             </a:extLst>
           </p:cNvPr>
@@ -9221,7 +9599,7 @@
           <p:cNvPr id="2" name="s8-eyebrow">
             <a:extLst xmlns:a="http://schemas.openxmlformats.org/drawingml/2006/main">
               <a:ext uri="{FF2B5EF4-FFF2-40B4-BE49-F238E27FC236}">
-                <a16:creationId xmlns:a16="http://schemas.microsoft.com/office/drawing/2014/main" id="{A6968F98-9750-478D-99CA-5972995C118A}"/>
+                <a16:creationId xmlns:a16="http://schemas.microsoft.com/office/drawing/2014/main" id="{96574D74-C65B-46F7-9C53-6DB087905948}"/>
               </a:ext>
             </a:extLst>
           </p:cNvPr>
@@ -9279,7 +9657,7 @@
           <p:cNvPr id="3" name="s8-title">
             <a:extLst xmlns:a="http://schemas.openxmlformats.org/drawingml/2006/main">
               <a:ext uri="{FF2B5EF4-FFF2-40B4-BE49-F238E27FC236}">
-                <a16:creationId xmlns:a16="http://schemas.microsoft.com/office/drawing/2014/main" id="{6383A271-8F43-463B-8D54-5E05D0B70F0F}"/>
+                <a16:creationId xmlns:a16="http://schemas.microsoft.com/office/drawing/2014/main" id="{ADA5CA22-C6C0-4055-9002-D77234C816E4}"/>
               </a:ext>
             </a:extLst>
           </p:cNvPr>
@@ -9337,7 +9715,7 @@
           <p:cNvPr id="4" name="s8-footer">
             <a:extLst xmlns:a="http://schemas.openxmlformats.org/drawingml/2006/main">
               <a:ext uri="{FF2B5EF4-FFF2-40B4-BE49-F238E27FC236}">
-                <a16:creationId xmlns:a16="http://schemas.microsoft.com/office/drawing/2014/main" id="{BECD83DE-210B-42CE-9D47-0CFD9454D81B}"/>
+                <a16:creationId xmlns:a16="http://schemas.microsoft.com/office/drawing/2014/main" id="{47426ABD-EACD-4826-A808-A758395F5BA0}"/>
               </a:ext>
             </a:extLst>
           </p:cNvPr>
@@ -9368,7 +9746,7 @@
           <p:cNvPr id="5" name="s8-identity">
             <a:extLst xmlns:a="http://schemas.openxmlformats.org/drawingml/2006/main">
               <a:ext uri="{FF2B5EF4-FFF2-40B4-BE49-F238E27FC236}">
-                <a16:creationId xmlns:a16="http://schemas.microsoft.com/office/drawing/2014/main" id="{ED820342-A804-4A94-9A6B-938824200C41}"/>
+                <a16:creationId xmlns:a16="http://schemas.microsoft.com/office/drawing/2014/main" id="{184D8EF1-F6C3-4C45-967C-3E1EBDF61872}"/>
               </a:ext>
             </a:extLst>
           </p:cNvPr>
@@ -9426,7 +9804,7 @@
           <p:cNvPr id="6" name="core-no-0">
             <a:extLst xmlns:a="http://schemas.openxmlformats.org/drawingml/2006/main">
               <a:ext uri="{FF2B5EF4-FFF2-40B4-BE49-F238E27FC236}">
-                <a16:creationId xmlns:a16="http://schemas.microsoft.com/office/drawing/2014/main" id="{71F4143B-2BD3-43ED-ADED-09AC9BE28517}"/>
+                <a16:creationId xmlns:a16="http://schemas.microsoft.com/office/drawing/2014/main" id="{E62AEC9C-70B9-45AB-B15E-80ECEA8CB1C5}"/>
               </a:ext>
             </a:extLst>
           </p:cNvPr>
@@ -9458,7 +9836,7 @@
             <a:pPr algn="l">
               <a:defRPr sz="2250" b="1">
                 <a:solidFill>
-                  <a:srgbClr val="2D9B72"/>
+                  <a:srgbClr val="0B6B4F"/>
                 </a:solidFill>
                 <a:latin typeface="PingFang SC"/>
                 <a:ea typeface="PingFang SC"/>
@@ -9468,7 +9846,7 @@
             <a:r>
               <a:rPr sz="2250" b="1">
                 <a:solidFill>
-                  <a:srgbClr val="2D9B72"/>
+                  <a:srgbClr val="0B6B4F"/>
                 </a:solidFill>
                 <a:latin typeface="PingFang SC"/>
                 <a:ea typeface="PingFang SC"/>
@@ -9484,7 +9862,7 @@
           <p:cNvPr id="7" name="core-label-0">
             <a:extLst xmlns:a="http://schemas.openxmlformats.org/drawingml/2006/main">
               <a:ext uri="{FF2B5EF4-FFF2-40B4-BE49-F238E27FC236}">
-                <a16:creationId xmlns:a16="http://schemas.microsoft.com/office/drawing/2014/main" id="{A3FE2B6A-EC5F-45F8-8A5E-DCED14992D16}"/>
+                <a16:creationId xmlns:a16="http://schemas.microsoft.com/office/drawing/2014/main" id="{8A4DF294-815C-4010-B174-3307927572FC}"/>
               </a:ext>
             </a:extLst>
           </p:cNvPr>
@@ -9542,7 +9920,7 @@
           <p:cNvPr id="8" name="core-body-0">
             <a:extLst xmlns:a="http://schemas.openxmlformats.org/drawingml/2006/main">
               <a:ext uri="{FF2B5EF4-FFF2-40B4-BE49-F238E27FC236}">
-                <a16:creationId xmlns:a16="http://schemas.microsoft.com/office/drawing/2014/main" id="{0D76ABFA-FB00-4EA4-A347-5DC79D9D7B41}"/>
+                <a16:creationId xmlns:a16="http://schemas.microsoft.com/office/drawing/2014/main" id="{D8B91877-C620-44E4-904B-6F13559BA95A}"/>
               </a:ext>
             </a:extLst>
           </p:cNvPr>
@@ -9566,7 +9944,7 @@
           </a:solidFill>
           <a:ln xmlns:a="http://schemas.openxmlformats.org/drawingml/2006/main" w="19050">
             <a:solidFill>
-              <a:srgbClr val="2D9B72"/>
+              <a:srgbClr val="0B6B4F"/>
             </a:solidFill>
             <a:prstDash val="solid"/>
           </a:ln>
@@ -9606,7 +9984,7 @@
           <p:cNvPr id="9" name="core-no-1">
             <a:extLst xmlns:a="http://schemas.openxmlformats.org/drawingml/2006/main">
               <a:ext uri="{FF2B5EF4-FFF2-40B4-BE49-F238E27FC236}">
-                <a16:creationId xmlns:a16="http://schemas.microsoft.com/office/drawing/2014/main" id="{D8B633A0-ECAC-4DF5-8C75-7D515DC18715}"/>
+                <a16:creationId xmlns:a16="http://schemas.microsoft.com/office/drawing/2014/main" id="{F7BF4F73-62EC-4352-9E4A-A26050860E8D}"/>
               </a:ext>
             </a:extLst>
           </p:cNvPr>
@@ -9638,7 +10016,7 @@
             <a:pPr algn="l">
               <a:defRPr sz="2250" b="1">
                 <a:solidFill>
-                  <a:srgbClr val="2D9B72"/>
+                  <a:srgbClr val="0B6B4F"/>
                 </a:solidFill>
                 <a:latin typeface="PingFang SC"/>
                 <a:ea typeface="PingFang SC"/>
@@ -9648,7 +10026,7 @@
             <a:r>
               <a:rPr sz="2250" b="1">
                 <a:solidFill>
-                  <a:srgbClr val="2D9B72"/>
+                  <a:srgbClr val="0B6B4F"/>
                 </a:solidFill>
                 <a:latin typeface="PingFang SC"/>
                 <a:ea typeface="PingFang SC"/>
@@ -9664,7 +10042,7 @@
           <p:cNvPr id="10" name="core-body-1">
             <a:extLst xmlns:a="http://schemas.openxmlformats.org/drawingml/2006/main">
               <a:ext uri="{FF2B5EF4-FFF2-40B4-BE49-F238E27FC236}">
-                <a16:creationId xmlns:a16="http://schemas.microsoft.com/office/drawing/2014/main" id="{5B33A0A9-0AA9-4EC9-865C-5D862DB248A1}"/>
+                <a16:creationId xmlns:a16="http://schemas.microsoft.com/office/drawing/2014/main" id="{99FD6D25-E22A-47DC-960F-A4F07A89F56F}"/>
               </a:ext>
             </a:extLst>
           </p:cNvPr>
@@ -9728,7 +10106,7 @@
           <p:cNvPr id="11" name="s8-takeaway-rule">
             <a:extLst xmlns:a="http://schemas.openxmlformats.org/drawingml/2006/main">
               <a:ext uri="{FF2B5EF4-FFF2-40B4-BE49-F238E27FC236}">
-                <a16:creationId xmlns:a16="http://schemas.microsoft.com/office/drawing/2014/main" id="{7AD7D371-2DBB-4C9B-B6B2-B81A86B87C56}"/>
+                <a16:creationId xmlns:a16="http://schemas.microsoft.com/office/drawing/2014/main" id="{8CF73475-1FB3-42D2-888A-7D5EA410F176}"/>
               </a:ext>
             </a:extLst>
           </p:cNvPr>
@@ -9761,7 +10139,7 @@
           <p:cNvPr id="12" name="s8-takeaway">
             <a:extLst xmlns:a="http://schemas.openxmlformats.org/drawingml/2006/main">
               <a:ext uri="{FF2B5EF4-FFF2-40B4-BE49-F238E27FC236}">
-                <a16:creationId xmlns:a16="http://schemas.microsoft.com/office/drawing/2014/main" id="{88662877-0E24-49BD-B7A8-68D5B5E83D78}"/>
+                <a16:creationId xmlns:a16="http://schemas.microsoft.com/office/drawing/2014/main" id="{79AF4B4E-0D2A-4EA6-8B7C-10D221647CA0}"/>
               </a:ext>
             </a:extLst>
           </p:cNvPr>
@@ -9817,7 +10195,7 @@
     </p:spTree>
     <p:extLst>
       <p:ext uri="{BB962C8B-B14F-4D97-AF65-F5344CB8AC3E}">
-        <p14:creationId xmlns:p14="http://schemas.microsoft.com/office/powerpoint/2010/main" val="253778420"/>
+        <p14:creationId xmlns:p14="http://schemas.microsoft.com/office/powerpoint/2010/main" val="1598266760"/>
       </p:ext>
     </p:extLst>
   </p:cSld>
@@ -9848,7 +10226,7 @@
           <p:cNvPr id="1" name="s9-rule">
             <a:extLst xmlns:a="http://schemas.openxmlformats.org/drawingml/2006/main">
               <a:ext uri="{FF2B5EF4-FFF2-40B4-BE49-F238E27FC236}">
-                <a16:creationId xmlns:a16="http://schemas.microsoft.com/office/drawing/2014/main" id="{9E916D19-9B7F-4E26-B070-9726F8A017EC}"/>
+                <a16:creationId xmlns:a16="http://schemas.microsoft.com/office/drawing/2014/main" id="{B073FAF6-DFB6-47A0-929D-66EDF3559848}"/>
               </a:ext>
             </a:extLst>
           </p:cNvPr>
@@ -9881,7 +10259,7 @@
           <p:cNvPr id="2" name="s9-eyebrow">
             <a:extLst xmlns:a="http://schemas.openxmlformats.org/drawingml/2006/main">
               <a:ext uri="{FF2B5EF4-FFF2-40B4-BE49-F238E27FC236}">
-                <a16:creationId xmlns:a16="http://schemas.microsoft.com/office/drawing/2014/main" id="{B6FFA664-A53C-458B-9037-55F339F085F1}"/>
+                <a16:creationId xmlns:a16="http://schemas.microsoft.com/office/drawing/2014/main" id="{6F22A607-3BB0-43EC-84ED-AF9EFF0DE87A}"/>
               </a:ext>
             </a:extLst>
           </p:cNvPr>
@@ -9939,7 +10317,7 @@
           <p:cNvPr id="3" name="s9-title">
             <a:extLst xmlns:a="http://schemas.openxmlformats.org/drawingml/2006/main">
               <a:ext uri="{FF2B5EF4-FFF2-40B4-BE49-F238E27FC236}">
-                <a16:creationId xmlns:a16="http://schemas.microsoft.com/office/drawing/2014/main" id="{2897D9E9-3EFA-417C-8B2F-BB112D009295}"/>
+                <a16:creationId xmlns:a16="http://schemas.microsoft.com/office/drawing/2014/main" id="{5CFC7038-6F97-406B-B4F1-01D2580AA374}"/>
               </a:ext>
             </a:extLst>
           </p:cNvPr>
@@ -9997,7 +10375,7 @@
           <p:cNvPr id="4" name="s9-footer">
             <a:extLst xmlns:a="http://schemas.openxmlformats.org/drawingml/2006/main">
               <a:ext uri="{FF2B5EF4-FFF2-40B4-BE49-F238E27FC236}">
-                <a16:creationId xmlns:a16="http://schemas.microsoft.com/office/drawing/2014/main" id="{64A26D97-D409-4AC0-A2F0-40463E891BEF}"/>
+                <a16:creationId xmlns:a16="http://schemas.microsoft.com/office/drawing/2014/main" id="{CFD46912-0C76-4844-A4F3-294B4F897EA5}"/>
               </a:ext>
             </a:extLst>
           </p:cNvPr>
@@ -10028,7 +10406,7 @@
           <p:cNvPr id="5" name="s9-identity">
             <a:extLst xmlns:a="http://schemas.openxmlformats.org/drawingml/2006/main">
               <a:ext uri="{FF2B5EF4-FFF2-40B4-BE49-F238E27FC236}">
-                <a16:creationId xmlns:a16="http://schemas.microsoft.com/office/drawing/2014/main" id="{E63A299B-34EE-43EE-B7D7-2F82FFBEFCB3}"/>
+                <a16:creationId xmlns:a16="http://schemas.microsoft.com/office/drawing/2014/main" id="{4D62D8E5-E2F1-4D85-90B8-90183F0A59AF}"/>
               </a:ext>
             </a:extLst>
           </p:cNvPr>
@@ -10086,7 +10464,7 @@
           <p:cNvPr id="6" name="case-title">
             <a:extLst xmlns:a="http://schemas.openxmlformats.org/drawingml/2006/main">
               <a:ext uri="{FF2B5EF4-FFF2-40B4-BE49-F238E27FC236}">
-                <a16:creationId xmlns:a16="http://schemas.microsoft.com/office/drawing/2014/main" id="{F4E9CE1F-4CAA-4CD8-8332-9305930BDFFD}"/>
+                <a16:creationId xmlns:a16="http://schemas.microsoft.com/office/drawing/2014/main" id="{CFB476DE-7748-4DF0-848F-CB4FB3694A43}"/>
               </a:ext>
             </a:extLst>
           </p:cNvPr>
@@ -10150,23 +10528,23 @@
           <p:cNvPr id="7" name="case-row-0">
             <a:extLst xmlns:a="http://schemas.openxmlformats.org/drawingml/2006/main">
               <a:ext uri="{FF2B5EF4-FFF2-40B4-BE49-F238E27FC236}">
-                <a16:creationId xmlns:a16="http://schemas.microsoft.com/office/drawing/2014/main" id="{26F7CB4B-73D6-4781-8AED-8F8F8C94AC4A}"/>
-              </a:ext>
-            </a:extLst>
-          </p:cNvPr>
-          <p:cNvSpPr>
-            <a:spLocks xmlns:a="http://schemas.openxmlformats.org/drawingml/2006/main" noGrp="1"/>
-          </p:cNvSpPr>
-          <p:nvPr/>
-        </p:nvSpPr>
-        <p:spPr>
-          <a:xfrm xmlns:a="http://schemas.openxmlformats.org/drawingml/2006/main">
-            <a:off x="4286250" y="2228850"/>
-            <a:ext cx="6534150" cy="1238250"/>
+                <a16:creationId xmlns:a16="http://schemas.microsoft.com/office/drawing/2014/main" id="{BE369B9A-CFCF-4862-A8C3-868B284D51A8}"/>
+              </a:ext>
+            </a:extLst>
+          </p:cNvPr>
+          <p:cNvSpPr>
+            <a:spLocks xmlns:a="http://schemas.openxmlformats.org/drawingml/2006/main" noGrp="1"/>
+          </p:cNvSpPr>
+          <p:nvPr/>
+        </p:nvSpPr>
+        <p:spPr>
+          <a:xfrm xmlns:a="http://schemas.openxmlformats.org/drawingml/2006/main">
+            <a:off x="4286250" y="2038350"/>
+            <a:ext cx="6534150" cy="514350"/>
           </a:xfrm>
           <a:prstGeom xmlns:a="http://schemas.openxmlformats.org/drawingml/2006/main" prst="roundRect">
             <a:avLst>
-              <a:gd name="adj" fmla="val 10000"/>
+              <a:gd name="adj" fmla="val 24074"/>
             </a:avLst>
           </a:prstGeom>
           <a:solidFill xmlns:a="http://schemas.openxmlformats.org/drawingml/2006/main">
@@ -10181,7 +10559,7 @@
         </p:spPr>
         <p:txBody>
           <a:bodyPr xmlns:a="http://schemas.openxmlformats.org/drawingml/2006/main" lIns="152400" tIns="133350" rIns="152400" bIns="133350" anchor="ctr">
-            <a:normAutofit fontScale="100000"/>
+            <a:normAutofit fontScale="72956"/>
           </a:bodyPr>
           <a:lstStyle xmlns:a="http://schemas.openxmlformats.org/drawingml/2006/main"/>
           <a:p xmlns:a="http://schemas.openxmlformats.org/drawingml/2006/main">
@@ -10204,7 +10582,7 @@
                 <a:ea typeface="PingFang SC"/>
                 <a:cs typeface="PingFang SC"/>
               </a:rPr>
-              <a:t>场景｜实验定义两处出口、三类行动速度、局部可见范围和无全局通信的个体。方案 A 让个体选择最近出口，方案 B 在局部拥堵超过阈值时引导部分个体改道…</a:t>
+              <a:t>场景｜实验定义两处出口、三类行动速度、局部可见范围和无全局通信的个体</a:t>
             </a:r>
           </a:p>
         </p:txBody>
@@ -10214,23 +10592,215 @@
           <p:cNvPr id="8" name="case-row-1">
             <a:extLst xmlns:a="http://schemas.openxmlformats.org/drawingml/2006/main">
               <a:ext uri="{FF2B5EF4-FFF2-40B4-BE49-F238E27FC236}">
-                <a16:creationId xmlns:a16="http://schemas.microsoft.com/office/drawing/2014/main" id="{D9FA0CE3-E4C9-402D-8707-0976C08160EA}"/>
-              </a:ext>
-            </a:extLst>
-          </p:cNvPr>
-          <p:cNvSpPr>
-            <a:spLocks xmlns:a="http://schemas.openxmlformats.org/drawingml/2006/main" noGrp="1"/>
-          </p:cNvSpPr>
-          <p:nvPr/>
-        </p:nvSpPr>
-        <p:spPr>
-          <a:xfrm xmlns:a="http://schemas.openxmlformats.org/drawingml/2006/main">
-            <a:off x="4286250" y="3714750"/>
-            <a:ext cx="6534150" cy="1238250"/>
+                <a16:creationId xmlns:a16="http://schemas.microsoft.com/office/drawing/2014/main" id="{ED463094-D105-4519-9E2E-FE9F701F7AFC}"/>
+              </a:ext>
+            </a:extLst>
+          </p:cNvPr>
+          <p:cNvSpPr>
+            <a:spLocks xmlns:a="http://schemas.openxmlformats.org/drawingml/2006/main" noGrp="1"/>
+          </p:cNvSpPr>
+          <p:nvPr/>
+        </p:nvSpPr>
+        <p:spPr>
+          <a:xfrm xmlns:a="http://schemas.openxmlformats.org/drawingml/2006/main">
+            <a:off x="4286250" y="2667000"/>
+            <a:ext cx="6534150" cy="514350"/>
           </a:xfrm>
           <a:prstGeom xmlns:a="http://schemas.openxmlformats.org/drawingml/2006/main" prst="roundRect">
             <a:avLst>
-              <a:gd name="adj" fmla="val 10000"/>
+              <a:gd name="adj" fmla="val 24074"/>
+            </a:avLst>
+          </a:prstGeom>
+          <a:solidFill xmlns:a="http://schemas.openxmlformats.org/drawingml/2006/main">
+            <a:srgbClr val="FFFFFF"/>
+          </a:solidFill>
+          <a:ln xmlns:a="http://schemas.openxmlformats.org/drawingml/2006/main" w="9525">
+            <a:solidFill>
+              <a:srgbClr val="D8E0E8"/>
+            </a:solidFill>
+            <a:prstDash val="solid"/>
+          </a:ln>
+        </p:spPr>
+        <p:txBody>
+          <a:bodyPr xmlns:a="http://schemas.openxmlformats.org/drawingml/2006/main" lIns="152400" tIns="133350" rIns="152400" bIns="133350" anchor="ctr">
+            <a:normAutofit fontScale="72956"/>
+          </a:bodyPr>
+          <a:lstStyle xmlns:a="http://schemas.openxmlformats.org/drawingml/2006/main"/>
+          <a:p xmlns:a="http://schemas.openxmlformats.org/drawingml/2006/main">
+            <a:pPr algn="l">
+              <a:defRPr sz="1575" b="0">
+                <a:solidFill>
+                  <a:srgbClr val="10233F"/>
+                </a:solidFill>
+                <a:latin typeface="PingFang SC"/>
+                <a:ea typeface="PingFang SC"/>
+                <a:cs typeface="PingFang SC"/>
+              </a:defRPr>
+            </a:pPr>
+            <a:r>
+              <a:rPr sz="1575" b="0">
+                <a:solidFill>
+                  <a:srgbClr val="10233F"/>
+                </a:solidFill>
+                <a:latin typeface="PingFang SC"/>
+                <a:ea typeface="PingFang SC"/>
+                <a:cs typeface="PingFang SC"/>
+              </a:rPr>
+              <a:t>机制｜方案 A 让个体选择最近出口，方案 B 在局部拥堵超过阈值时引导部分个体改道</a:t>
+            </a:r>
+          </a:p>
+        </p:txBody>
+      </p:sp>
+      <p:sp>
+        <p:nvSpPr>
+          <p:cNvPr id="9" name="case-row-2">
+            <a:extLst xmlns:a="http://schemas.openxmlformats.org/drawingml/2006/main">
+              <a:ext uri="{FF2B5EF4-FFF2-40B4-BE49-F238E27FC236}">
+                <a16:creationId xmlns:a16="http://schemas.microsoft.com/office/drawing/2014/main" id="{FDD2D9AA-599F-4B1A-89B1-33ADB221FD6F}"/>
+              </a:ext>
+            </a:extLst>
+          </p:cNvPr>
+          <p:cNvSpPr>
+            <a:spLocks xmlns:a="http://schemas.openxmlformats.org/drawingml/2006/main" noGrp="1"/>
+          </p:cNvSpPr>
+          <p:nvPr/>
+        </p:nvSpPr>
+        <p:spPr>
+          <a:xfrm xmlns:a="http://schemas.openxmlformats.org/drawingml/2006/main">
+            <a:off x="4286250" y="3295650"/>
+            <a:ext cx="6534150" cy="514350"/>
+          </a:xfrm>
+          <a:prstGeom xmlns:a="http://schemas.openxmlformats.org/drawingml/2006/main" prst="roundRect">
+            <a:avLst>
+              <a:gd name="adj" fmla="val 24074"/>
+            </a:avLst>
+          </a:prstGeom>
+          <a:solidFill xmlns:a="http://schemas.openxmlformats.org/drawingml/2006/main">
+            <a:srgbClr val="FFFFFF"/>
+          </a:solidFill>
+          <a:ln xmlns:a="http://schemas.openxmlformats.org/drawingml/2006/main" w="9525">
+            <a:solidFill>
+              <a:srgbClr val="D8E0E8"/>
+            </a:solidFill>
+            <a:prstDash val="solid"/>
+          </a:ln>
+        </p:spPr>
+        <p:txBody>
+          <a:bodyPr xmlns:a="http://schemas.openxmlformats.org/drawingml/2006/main" lIns="152400" tIns="133350" rIns="152400" bIns="133350" anchor="ctr">
+            <a:normAutofit fontScale="72956"/>
+          </a:bodyPr>
+          <a:lstStyle xmlns:a="http://schemas.openxmlformats.org/drawingml/2006/main"/>
+          <a:p xmlns:a="http://schemas.openxmlformats.org/drawingml/2006/main">
+            <a:pPr algn="l">
+              <a:defRPr sz="1575" b="0">
+                <a:solidFill>
+                  <a:srgbClr val="10233F"/>
+                </a:solidFill>
+                <a:latin typeface="PingFang SC"/>
+                <a:ea typeface="PingFang SC"/>
+                <a:cs typeface="PingFang SC"/>
+              </a:defRPr>
+            </a:pPr>
+            <a:r>
+              <a:rPr sz="1575" b="0">
+                <a:solidFill>
+                  <a:srgbClr val="10233F"/>
+                </a:solidFill>
+                <a:latin typeface="PingFang SC"/>
+                <a:ea typeface="PingFang SC"/>
+                <a:cs typeface="PingFang SC"/>
+              </a:rPr>
+              <a:t>机制｜每个方案使用相同的 30 组随机初始状态运行</a:t>
+            </a:r>
+          </a:p>
+        </p:txBody>
+      </p:sp>
+      <p:sp>
+        <p:nvSpPr>
+          <p:cNvPr id="10" name="case-row-3">
+            <a:extLst xmlns:a="http://schemas.openxmlformats.org/drawingml/2006/main">
+              <a:ext uri="{FF2B5EF4-FFF2-40B4-BE49-F238E27FC236}">
+                <a16:creationId xmlns:a16="http://schemas.microsoft.com/office/drawing/2014/main" id="{7064A3C5-9BE3-4254-85F1-F7F795F3D694}"/>
+              </a:ext>
+            </a:extLst>
+          </p:cNvPr>
+          <p:cNvSpPr>
+            <a:spLocks xmlns:a="http://schemas.openxmlformats.org/drawingml/2006/main" noGrp="1"/>
+          </p:cNvSpPr>
+          <p:nvPr/>
+        </p:nvSpPr>
+        <p:spPr>
+          <a:xfrm xmlns:a="http://schemas.openxmlformats.org/drawingml/2006/main">
+            <a:off x="4286250" y="3924300"/>
+            <a:ext cx="6534150" cy="514350"/>
+          </a:xfrm>
+          <a:prstGeom xmlns:a="http://schemas.openxmlformats.org/drawingml/2006/main" prst="roundRect">
+            <a:avLst>
+              <a:gd name="adj" fmla="val 24074"/>
+            </a:avLst>
+          </a:prstGeom>
+          <a:solidFill xmlns:a="http://schemas.openxmlformats.org/drawingml/2006/main">
+            <a:srgbClr val="FFFFFF"/>
+          </a:solidFill>
+          <a:ln xmlns:a="http://schemas.openxmlformats.org/drawingml/2006/main" w="9525">
+            <a:solidFill>
+              <a:srgbClr val="D8E0E8"/>
+            </a:solidFill>
+            <a:prstDash val="solid"/>
+          </a:ln>
+        </p:spPr>
+        <p:txBody>
+          <a:bodyPr xmlns:a="http://schemas.openxmlformats.org/drawingml/2006/main" lIns="152400" tIns="133350" rIns="152400" bIns="133350" anchor="ctr">
+            <a:normAutofit fontScale="72956"/>
+          </a:bodyPr>
+          <a:lstStyle xmlns:a="http://schemas.openxmlformats.org/drawingml/2006/main"/>
+          <a:p xmlns:a="http://schemas.openxmlformats.org/drawingml/2006/main">
+            <a:pPr algn="l">
+              <a:defRPr sz="1575" b="0">
+                <a:solidFill>
+                  <a:srgbClr val="10233F"/>
+                </a:solidFill>
+                <a:latin typeface="PingFang SC"/>
+                <a:ea typeface="PingFang SC"/>
+                <a:cs typeface="PingFang SC"/>
+              </a:defRPr>
+            </a:pPr>
+            <a:r>
+              <a:rPr sz="1575" b="0">
+                <a:solidFill>
+                  <a:srgbClr val="10233F"/>
+                </a:solidFill>
+                <a:latin typeface="PingFang SC"/>
+                <a:ea typeface="PingFang SC"/>
+                <a:cs typeface="PingFang SC"/>
+              </a:rPr>
+              <a:t>方法｜评测同时记录总疏散时间、最高局部密度、个体等待时间分布和出口利用率</a:t>
+            </a:r>
+          </a:p>
+        </p:txBody>
+      </p:sp>
+      <p:sp>
+        <p:nvSpPr>
+          <p:cNvPr id="11" name="case-row-4">
+            <a:extLst xmlns:a="http://schemas.openxmlformats.org/drawingml/2006/main">
+              <a:ext uri="{FF2B5EF4-FFF2-40B4-BE49-F238E27FC236}">
+                <a16:creationId xmlns:a16="http://schemas.microsoft.com/office/drawing/2014/main" id="{56CA153B-D283-41D3-B56A-E013BE454479}"/>
+              </a:ext>
+            </a:extLst>
+          </p:cNvPr>
+          <p:cNvSpPr>
+            <a:spLocks xmlns:a="http://schemas.openxmlformats.org/drawingml/2006/main" noGrp="1"/>
+          </p:cNvSpPr>
+          <p:nvPr/>
+        </p:nvSpPr>
+        <p:spPr>
+          <a:xfrm xmlns:a="http://schemas.openxmlformats.org/drawingml/2006/main">
+            <a:off x="4286250" y="4552950"/>
+            <a:ext cx="6534150" cy="514350"/>
+          </a:xfrm>
+          <a:prstGeom xmlns:a="http://schemas.openxmlformats.org/drawingml/2006/main" prst="roundRect">
+            <a:avLst>
+              <a:gd name="adj" fmla="val 24074"/>
             </a:avLst>
           </a:prstGeom>
           <a:solidFill xmlns:a="http://schemas.openxmlformats.org/drawingml/2006/main">
@@ -10238,14 +10808,14 @@
           </a:solidFill>
           <a:ln xmlns:a="http://schemas.openxmlformats.org/drawingml/2006/main" w="9525">
             <a:solidFill>
-              <a:srgbClr val="2D9B72"/>
+              <a:srgbClr val="0B6B4F"/>
             </a:solidFill>
             <a:prstDash val="solid"/>
           </a:ln>
         </p:spPr>
         <p:txBody>
           <a:bodyPr xmlns:a="http://schemas.openxmlformats.org/drawingml/2006/main" lIns="152400" tIns="133350" rIns="152400" bIns="133350" anchor="ctr">
-            <a:normAutofit fontScale="93636"/>
+            <a:normAutofit fontScale="72679"/>
           </a:bodyPr>
           <a:lstStyle xmlns:a="http://schemas.openxmlformats.org/drawingml/2006/main"/>
           <a:p xmlns:a="http://schemas.openxmlformats.org/drawingml/2006/main">
@@ -10268,17 +10838,17 @@
                 <a:ea typeface="PingFang SC"/>
                 <a:cs typeface="PingFang SC"/>
               </a:rPr>
-              <a:t>机制｜评测同时记录总疏散时间、最高局部密度、个体等待时间分布和出口利用率。若方案 B 只降低平均时间，却让行动较慢群体等待更久，就需要继续调整公平与安全约束…</a:t>
-            </a:r>
-          </a:p>
-        </p:txBody>
-      </p:sp>
-      <p:sp>
-        <p:nvSpPr>
-          <p:cNvPr id="9" name="s9-takeaway-rule">
-            <a:extLst xmlns:a="http://schemas.openxmlformats.org/drawingml/2006/main">
-              <a:ext uri="{FF2B5EF4-FFF2-40B4-BE49-F238E27FC236}">
-                <a16:creationId xmlns:a16="http://schemas.microsoft.com/office/drawing/2014/main" id="{BB259893-C2A1-461E-857F-5C4826CE642C}"/>
+              <a:t>边界｜若方案 B 只降低平均时间，却让行动较慢群体等待更久，就需要继续调整公平与安全约束</a:t>
+            </a:r>
+          </a:p>
+        </p:txBody>
+      </p:sp>
+      <p:sp>
+        <p:nvSpPr>
+          <p:cNvPr id="12" name="s9-takeaway-rule">
+            <a:extLst xmlns:a="http://schemas.openxmlformats.org/drawingml/2006/main">
+              <a:ext uri="{FF2B5EF4-FFF2-40B4-BE49-F238E27FC236}">
+                <a16:creationId xmlns:a16="http://schemas.microsoft.com/office/drawing/2014/main" id="{E4250250-7F3F-449B-9430-98E1A50C2C52}"/>
               </a:ext>
             </a:extLst>
           </p:cNvPr>
@@ -10308,10 +10878,10 @@
       </p:sp>
       <p:sp>
         <p:nvSpPr>
-          <p:cNvPr id="10" name="s9-takeaway">
-            <a:extLst xmlns:a="http://schemas.openxmlformats.org/drawingml/2006/main">
-              <a:ext uri="{FF2B5EF4-FFF2-40B4-BE49-F238E27FC236}">
-                <a16:creationId xmlns:a16="http://schemas.microsoft.com/office/drawing/2014/main" id="{D4E5EBA2-919E-48EC-9509-3C9315BC26FB}"/>
+          <p:cNvPr id="13" name="s9-takeaway">
+            <a:extLst xmlns:a="http://schemas.openxmlformats.org/drawingml/2006/main">
+              <a:ext uri="{FF2B5EF4-FFF2-40B4-BE49-F238E27FC236}">
+                <a16:creationId xmlns:a16="http://schemas.microsoft.com/office/drawing/2014/main" id="{2FE8414B-8410-4D48-BED8-A7EB2CE2DC6C}"/>
               </a:ext>
             </a:extLst>
           </p:cNvPr>
@@ -10367,7 +10937,7 @@
     </p:spTree>
     <p:extLst>
       <p:ext uri="{BB962C8B-B14F-4D97-AF65-F5344CB8AC3E}">
-        <p14:creationId xmlns:p14="http://schemas.microsoft.com/office/powerpoint/2010/main" val="280445053"/>
+        <p14:creationId xmlns:p14="http://schemas.microsoft.com/office/powerpoint/2010/main" val="1706702604"/>
       </p:ext>
     </p:extLst>
   </p:cSld>

--- a/docs/public/course-assets/course-pptx/em-006.pptx
+++ b/docs/public/course-assets/course-pptx/em-006.pptx
@@ -2,25 +2,25 @@
 <file path=ppt/presentation.xml><?xml version="1.0" encoding="utf-8"?>
 <p:presentation xmlns:p="http://schemas.openxmlformats.org/presentationml/2006/main">
   <p:sldMasterIdLst>
-    <p:sldMasterId xmlns:r="http://schemas.openxmlformats.org/officeDocument/2006/relationships" id="2147483648" r:id="R3e213e53d36e46cd"/>
+    <p:sldMasterId xmlns:r="http://schemas.openxmlformats.org/officeDocument/2006/relationships" id="2147483648" r:id="R22b6d1fa246a435a"/>
   </p:sldMasterIdLst>
   <p:notesMasterIdLst>
-    <p:notesMasterId xmlns:r="http://schemas.openxmlformats.org/officeDocument/2006/relationships" r:id="R775a4f398ce54849"/>
+    <p:notesMasterId xmlns:r="http://schemas.openxmlformats.org/officeDocument/2006/relationships" r:id="Ra03bf3436fac4936"/>
   </p:notesMasterIdLst>
   <p:sldIdLst>
-    <p:sldId xmlns:r="http://schemas.openxmlformats.org/officeDocument/2006/relationships" id="256" r:id="R1fb917401467411b"/>
-    <p:sldId xmlns:r="http://schemas.openxmlformats.org/officeDocument/2006/relationships" id="257" r:id="R36e70fe8071e47a2"/>
-    <p:sldId xmlns:r="http://schemas.openxmlformats.org/officeDocument/2006/relationships" id="258" r:id="Rb3ff5dd3fe89472d"/>
-    <p:sldId xmlns:r="http://schemas.openxmlformats.org/officeDocument/2006/relationships" id="259" r:id="R4193705deb554dbb"/>
-    <p:sldId xmlns:r="http://schemas.openxmlformats.org/officeDocument/2006/relationships" id="260" r:id="Rf59ae355a2c94261"/>
-    <p:sldId xmlns:r="http://schemas.openxmlformats.org/officeDocument/2006/relationships" id="261" r:id="R2021f9deb8904659"/>
-    <p:sldId xmlns:r="http://schemas.openxmlformats.org/officeDocument/2006/relationships" id="262" r:id="R65e95cd3ba4d41c7"/>
-    <p:sldId xmlns:r="http://schemas.openxmlformats.org/officeDocument/2006/relationships" id="263" r:id="R6f3d84744efd4721"/>
-    <p:sldId xmlns:r="http://schemas.openxmlformats.org/officeDocument/2006/relationships" id="264" r:id="R73005e0a400b4f78"/>
-    <p:sldId xmlns:r="http://schemas.openxmlformats.org/officeDocument/2006/relationships" id="265" r:id="R0990b776f93e4f05"/>
-    <p:sldId xmlns:r="http://schemas.openxmlformats.org/officeDocument/2006/relationships" id="266" r:id="R694547fa058a4ccf"/>
-    <p:sldId xmlns:r="http://schemas.openxmlformats.org/officeDocument/2006/relationships" id="267" r:id="R2adad7225ac74aff"/>
-    <p:sldId xmlns:r="http://schemas.openxmlformats.org/officeDocument/2006/relationships" id="268" r:id="R620dcab5eac34f57"/>
+    <p:sldId xmlns:r="http://schemas.openxmlformats.org/officeDocument/2006/relationships" id="256" r:id="Rabd8f2d831be4766"/>
+    <p:sldId xmlns:r="http://schemas.openxmlformats.org/officeDocument/2006/relationships" id="257" r:id="Radd734a090824662"/>
+    <p:sldId xmlns:r="http://schemas.openxmlformats.org/officeDocument/2006/relationships" id="258" r:id="Rea9ad57ddfae4cb9"/>
+    <p:sldId xmlns:r="http://schemas.openxmlformats.org/officeDocument/2006/relationships" id="259" r:id="R0005dc6a41f24841"/>
+    <p:sldId xmlns:r="http://schemas.openxmlformats.org/officeDocument/2006/relationships" id="260" r:id="Re5e791f6084c4e50"/>
+    <p:sldId xmlns:r="http://schemas.openxmlformats.org/officeDocument/2006/relationships" id="261" r:id="Rad98a35e09604053"/>
+    <p:sldId xmlns:r="http://schemas.openxmlformats.org/officeDocument/2006/relationships" id="262" r:id="Rb882ed5aa8ae4e7a"/>
+    <p:sldId xmlns:r="http://schemas.openxmlformats.org/officeDocument/2006/relationships" id="263" r:id="R3956940e444f45fb"/>
+    <p:sldId xmlns:r="http://schemas.openxmlformats.org/officeDocument/2006/relationships" id="264" r:id="R8c94edf724d44f38"/>
+    <p:sldId xmlns:r="http://schemas.openxmlformats.org/officeDocument/2006/relationships" id="265" r:id="Rabbb7b0978ea4312"/>
+    <p:sldId xmlns:r="http://schemas.openxmlformats.org/officeDocument/2006/relationships" id="266" r:id="R723261453f9d4e30"/>
+    <p:sldId xmlns:r="http://schemas.openxmlformats.org/officeDocument/2006/relationships" id="267" r:id="Rf8687ddab0e74e36"/>
+    <p:sldId xmlns:r="http://schemas.openxmlformats.org/officeDocument/2006/relationships" id="268" r:id="R73b4517f19334d2a"/>
   </p:sldIdLst>
   <p:sldSz cx="12192000" cy="6858000"/>
   <p:notesSz cx="6858000" cy="9144000"/>
@@ -1405,7 +1405,7 @@
   </p:cSld>
   <p:clrMap bg1="lt1" tx1="dk1" bg2="lt2" tx2="dk2" accent1="accent1" accent2="accent2" accent3="accent3" accent4="accent4" accent5="accent5" accent6="accent6" hlink="hlink" folHlink="folHlink"/>
   <p:sldLayoutIdLst>
-    <p:sldLayoutId xmlns:r="http://schemas.openxmlformats.org/officeDocument/2006/relationships" id="2147483649" r:id="R3e4bec7254ce4711"/>
+    <p:sldLayoutId xmlns:r="http://schemas.openxmlformats.org/officeDocument/2006/relationships" id="2147483649" r:id="R0987a428f5f94dc8"/>
   </p:sldLayoutIdLst>
   <p:txStyles>
     <p:titleStyle>
@@ -1956,7 +1956,7 @@
           <p:cNvPr id="1" name="cover-rule">
             <a:extLst xmlns:a="http://schemas.openxmlformats.org/drawingml/2006/main">
               <a:ext uri="{FF2B5EF4-FFF2-40B4-BE49-F238E27FC236}">
-                <a16:creationId xmlns:a16="http://schemas.microsoft.com/office/drawing/2014/main" id="{F49E4E03-C117-4252-84A0-FE9397612995}"/>
+                <a16:creationId xmlns:a16="http://schemas.microsoft.com/office/drawing/2014/main" id="{7A9D7600-7571-4CE1-93A7-57F951321BB9}"/>
               </a:ext>
             </a:extLst>
           </p:cNvPr>
@@ -1989,7 +1989,7 @@
           <p:cNvPr id="2" name="cover-ring-1">
             <a:extLst xmlns:a="http://schemas.openxmlformats.org/drawingml/2006/main">
               <a:ext uri="{FF2B5EF4-FFF2-40B4-BE49-F238E27FC236}">
-                <a16:creationId xmlns:a16="http://schemas.microsoft.com/office/drawing/2014/main" id="{02E6C6A5-AC88-47BF-82BE-D12EE049B1AA}"/>
+                <a16:creationId xmlns:a16="http://schemas.microsoft.com/office/drawing/2014/main" id="{885A97AB-9928-4C3F-BF19-411476B71786}"/>
               </a:ext>
             </a:extLst>
           </p:cNvPr>
@@ -2020,7 +2020,7 @@
           <p:cNvPr id="3" name="cover-ring-2">
             <a:extLst xmlns:a="http://schemas.openxmlformats.org/drawingml/2006/main">
               <a:ext uri="{FF2B5EF4-FFF2-40B4-BE49-F238E27FC236}">
-                <a16:creationId xmlns:a16="http://schemas.microsoft.com/office/drawing/2014/main" id="{D2129240-93FE-47A2-BB7E-24F46C7E129B}"/>
+                <a16:creationId xmlns:a16="http://schemas.microsoft.com/office/drawing/2014/main" id="{4FE73382-2DD0-424E-A938-36AA8DDC781B}"/>
               </a:ext>
             </a:extLst>
           </p:cNvPr>
@@ -2051,7 +2051,7 @@
           <p:cNvPr id="4" name="cover-core">
             <a:extLst xmlns:a="http://schemas.openxmlformats.org/drawingml/2006/main">
               <a:ext uri="{FF2B5EF4-FFF2-40B4-BE49-F238E27FC236}">
-                <a16:creationId xmlns:a16="http://schemas.microsoft.com/office/drawing/2014/main" id="{A4F843FB-F743-4C13-8275-4CC56343985A}"/>
+                <a16:creationId xmlns:a16="http://schemas.microsoft.com/office/drawing/2014/main" id="{776F59F9-6F39-42FE-B636-158465E3E687}"/>
               </a:ext>
             </a:extLst>
           </p:cNvPr>
@@ -2084,7 +2084,7 @@
           <p:cNvPr id="5" name="cover-line-1">
             <a:extLst xmlns:a="http://schemas.openxmlformats.org/drawingml/2006/main">
               <a:ext uri="{FF2B5EF4-FFF2-40B4-BE49-F238E27FC236}">
-                <a16:creationId xmlns:a16="http://schemas.microsoft.com/office/drawing/2014/main" id="{032B7CD7-006E-47E5-AAE8-8989D5320828}"/>
+                <a16:creationId xmlns:a16="http://schemas.microsoft.com/office/drawing/2014/main" id="{2E53FD52-DDD5-431D-93E9-1C00ED5E030A}"/>
               </a:ext>
             </a:extLst>
           </p:cNvPr>
@@ -2115,7 +2115,7 @@
           <p:cNvPr id="6" name="cover-line-2">
             <a:extLst xmlns:a="http://schemas.openxmlformats.org/drawingml/2006/main">
               <a:ext uri="{FF2B5EF4-FFF2-40B4-BE49-F238E27FC236}">
-                <a16:creationId xmlns:a16="http://schemas.microsoft.com/office/drawing/2014/main" id="{BEC3D0A4-264A-48D9-9B70-82DC408FFF6E}"/>
+                <a16:creationId xmlns:a16="http://schemas.microsoft.com/office/drawing/2014/main" id="{7823AEC0-2B01-43CA-96FE-7EBB93976ABC}"/>
               </a:ext>
             </a:extLst>
           </p:cNvPr>
@@ -2146,7 +2146,7 @@
           <p:cNvPr id="7" name="cover-eyebrow">
             <a:extLst xmlns:a="http://schemas.openxmlformats.org/drawingml/2006/main">
               <a:ext uri="{FF2B5EF4-FFF2-40B4-BE49-F238E27FC236}">
-                <a16:creationId xmlns:a16="http://schemas.microsoft.com/office/drawing/2014/main" id="{BA4A0594-16EB-42A8-BB15-E78EBE8C903A}"/>
+                <a16:creationId xmlns:a16="http://schemas.microsoft.com/office/drawing/2014/main" id="{1E4045A4-8BE0-4E55-9D6D-98004F849DD3}"/>
               </a:ext>
             </a:extLst>
           </p:cNvPr>
@@ -2204,7 +2204,7 @@
           <p:cNvPr id="8" name="cover-title">
             <a:extLst xmlns:a="http://schemas.openxmlformats.org/drawingml/2006/main">
               <a:ext uri="{FF2B5EF4-FFF2-40B4-BE49-F238E27FC236}">
-                <a16:creationId xmlns:a16="http://schemas.microsoft.com/office/drawing/2014/main" id="{7F7C3330-D453-4ABA-AF12-61041ED0AC3A}"/>
+                <a16:creationId xmlns:a16="http://schemas.microsoft.com/office/drawing/2014/main" id="{D3EEEA45-1C2E-4812-A74F-5E4708B5E6D3}"/>
               </a:ext>
             </a:extLst>
           </p:cNvPr>
@@ -2262,7 +2262,7 @@
           <p:cNvPr id="9" name="cover-subtitle">
             <a:extLst xmlns:a="http://schemas.openxmlformats.org/drawingml/2006/main">
               <a:ext uri="{FF2B5EF4-FFF2-40B4-BE49-F238E27FC236}">
-                <a16:creationId xmlns:a16="http://schemas.microsoft.com/office/drawing/2014/main" id="{BDFEA58C-286C-4356-8233-C1CB80BBC112}"/>
+                <a16:creationId xmlns:a16="http://schemas.microsoft.com/office/drawing/2014/main" id="{115EAC12-A217-4812-942B-947698ACBB52}"/>
               </a:ext>
             </a:extLst>
           </p:cNvPr>
@@ -2324,7 +2324,7 @@
           <p:cNvPr id="10" name="cover-lead">
             <a:extLst xmlns:a="http://schemas.openxmlformats.org/drawingml/2006/main">
               <a:ext uri="{FF2B5EF4-FFF2-40B4-BE49-F238E27FC236}">
-                <a16:creationId xmlns:a16="http://schemas.microsoft.com/office/drawing/2014/main" id="{1CBA19FB-0F17-4348-95A7-B65EBF7E362F}"/>
+                <a16:creationId xmlns:a16="http://schemas.microsoft.com/office/drawing/2014/main" id="{B230A845-667E-431B-AE3C-2C13EC43C4B9}"/>
               </a:ext>
             </a:extLst>
           </p:cNvPr>
@@ -2382,7 +2382,7 @@
           <p:cNvPr id="11" name="cover-course">
             <a:extLst xmlns:a="http://schemas.openxmlformats.org/drawingml/2006/main">
               <a:ext uri="{FF2B5EF4-FFF2-40B4-BE49-F238E27FC236}">
-                <a16:creationId xmlns:a16="http://schemas.microsoft.com/office/drawing/2014/main" id="{442CEAD7-C25B-4C3B-9246-71F197317970}"/>
+                <a16:creationId xmlns:a16="http://schemas.microsoft.com/office/drawing/2014/main" id="{F3BEE3E4-ACA4-4C9B-BB7F-D9A305B67643}"/>
               </a:ext>
             </a:extLst>
           </p:cNvPr>
@@ -2440,7 +2440,7 @@
           <p:cNvPr id="12" name="cover-id">
             <a:extLst xmlns:a="http://schemas.openxmlformats.org/drawingml/2006/main">
               <a:ext uri="{FF2B5EF4-FFF2-40B4-BE49-F238E27FC236}">
-                <a16:creationId xmlns:a16="http://schemas.microsoft.com/office/drawing/2014/main" id="{D4F488F4-B23F-4685-9B6F-F4DEA6C001A3}"/>
+                <a16:creationId xmlns:a16="http://schemas.microsoft.com/office/drawing/2014/main" id="{CC4EFCAB-09BC-453D-808C-74AA3846ADF9}"/>
               </a:ext>
             </a:extLst>
           </p:cNvPr>
@@ -2496,7 +2496,7 @@
     </p:spTree>
     <p:extLst>
       <p:ext uri="{BB962C8B-B14F-4D97-AF65-F5344CB8AC3E}">
-        <p14:creationId xmlns:p14="http://schemas.microsoft.com/office/powerpoint/2010/main" val="934661358"/>
+        <p14:creationId xmlns:p14="http://schemas.microsoft.com/office/powerpoint/2010/main" val="1320033058"/>
       </p:ext>
     </p:extLst>
   </p:cSld>
@@ -2527,7 +2527,7 @@
           <p:cNvPr id="1" name="s10-rule">
             <a:extLst xmlns:a="http://schemas.openxmlformats.org/drawingml/2006/main">
               <a:ext uri="{FF2B5EF4-FFF2-40B4-BE49-F238E27FC236}">
-                <a16:creationId xmlns:a16="http://schemas.microsoft.com/office/drawing/2014/main" id="{F74F0CFB-56B4-4056-9C2A-F7278A3C007E}"/>
+                <a16:creationId xmlns:a16="http://schemas.microsoft.com/office/drawing/2014/main" id="{C9CB1F30-EC0F-42F4-BDA5-BE2E03FB611A}"/>
               </a:ext>
             </a:extLst>
           </p:cNvPr>
@@ -2560,7 +2560,7 @@
           <p:cNvPr id="2" name="s10-eyebrow">
             <a:extLst xmlns:a="http://schemas.openxmlformats.org/drawingml/2006/main">
               <a:ext uri="{FF2B5EF4-FFF2-40B4-BE49-F238E27FC236}">
-                <a16:creationId xmlns:a16="http://schemas.microsoft.com/office/drawing/2014/main" id="{F9EB3763-1117-4BD7-8001-CFBFD5D8ABEC}"/>
+                <a16:creationId xmlns:a16="http://schemas.microsoft.com/office/drawing/2014/main" id="{12F51744-0ADC-446C-B0F8-257096F96BDB}"/>
               </a:ext>
             </a:extLst>
           </p:cNvPr>
@@ -2618,7 +2618,7 @@
           <p:cNvPr id="3" name="s10-title">
             <a:extLst xmlns:a="http://schemas.openxmlformats.org/drawingml/2006/main">
               <a:ext uri="{FF2B5EF4-FFF2-40B4-BE49-F238E27FC236}">
-                <a16:creationId xmlns:a16="http://schemas.microsoft.com/office/drawing/2014/main" id="{F866F086-2775-4A0B-B0AB-C2B7E139B744}"/>
+                <a16:creationId xmlns:a16="http://schemas.microsoft.com/office/drawing/2014/main" id="{8AC99B2E-4F23-4502-AE78-FC6A08854406}"/>
               </a:ext>
             </a:extLst>
           </p:cNvPr>
@@ -2676,7 +2676,7 @@
           <p:cNvPr id="4" name="s10-footer">
             <a:extLst xmlns:a="http://schemas.openxmlformats.org/drawingml/2006/main">
               <a:ext uri="{FF2B5EF4-FFF2-40B4-BE49-F238E27FC236}">
-                <a16:creationId xmlns:a16="http://schemas.microsoft.com/office/drawing/2014/main" id="{B502A889-C9A7-4AA8-878C-760E13F9F839}"/>
+                <a16:creationId xmlns:a16="http://schemas.microsoft.com/office/drawing/2014/main" id="{79FB09A4-5B7C-431B-8EE6-BAB940B01418}"/>
               </a:ext>
             </a:extLst>
           </p:cNvPr>
@@ -2707,7 +2707,7 @@
           <p:cNvPr id="5" name="s10-identity">
             <a:extLst xmlns:a="http://schemas.openxmlformats.org/drawingml/2006/main">
               <a:ext uri="{FF2B5EF4-FFF2-40B4-BE49-F238E27FC236}">
-                <a16:creationId xmlns:a16="http://schemas.microsoft.com/office/drawing/2014/main" id="{99E78235-2A64-4B9B-897A-DEA5D27CF885}"/>
+                <a16:creationId xmlns:a16="http://schemas.microsoft.com/office/drawing/2014/main" id="{97BDDB9C-4318-43D7-B7E6-912366C5DA2E}"/>
               </a:ext>
             </a:extLst>
           </p:cNvPr>
@@ -2765,7 +2765,7 @@
           <p:cNvPr id="6" name="case-title">
             <a:extLst xmlns:a="http://schemas.openxmlformats.org/drawingml/2006/main">
               <a:ext uri="{FF2B5EF4-FFF2-40B4-BE49-F238E27FC236}">
-                <a16:creationId xmlns:a16="http://schemas.microsoft.com/office/drawing/2014/main" id="{45ABC3A0-3228-43AD-82C3-7A82790CD55D}"/>
+                <a16:creationId xmlns:a16="http://schemas.microsoft.com/office/drawing/2014/main" id="{CEE27B30-9CFD-4587-B974-0EB6A97736C2}"/>
               </a:ext>
             </a:extLst>
           </p:cNvPr>
@@ -2829,7 +2829,7 @@
           <p:cNvPr id="7" name="case-row-0">
             <a:extLst xmlns:a="http://schemas.openxmlformats.org/drawingml/2006/main">
               <a:ext uri="{FF2B5EF4-FFF2-40B4-BE49-F238E27FC236}">
-                <a16:creationId xmlns:a16="http://schemas.microsoft.com/office/drawing/2014/main" id="{D64EADFC-834A-40E3-95B6-35496FCAA458}"/>
+                <a16:creationId xmlns:a16="http://schemas.microsoft.com/office/drawing/2014/main" id="{BD1CFF01-A489-4AC4-8E6A-476DDC16C39B}"/>
               </a:ext>
             </a:extLst>
           </p:cNvPr>
@@ -2893,7 +2893,7 @@
           <p:cNvPr id="8" name="case-row-1">
             <a:extLst xmlns:a="http://schemas.openxmlformats.org/drawingml/2006/main">
               <a:ext uri="{FF2B5EF4-FFF2-40B4-BE49-F238E27FC236}">
-                <a16:creationId xmlns:a16="http://schemas.microsoft.com/office/drawing/2014/main" id="{2EF86725-A7F8-4494-A253-4B4146B4C50F}"/>
+                <a16:creationId xmlns:a16="http://schemas.microsoft.com/office/drawing/2014/main" id="{C00FA1BC-15E6-4F5B-856A-D368902FF8BA}"/>
               </a:ext>
             </a:extLst>
           </p:cNvPr>
@@ -2957,7 +2957,7 @@
           <p:cNvPr id="9" name="case-row-2">
             <a:extLst xmlns:a="http://schemas.openxmlformats.org/drawingml/2006/main">
               <a:ext uri="{FF2B5EF4-FFF2-40B4-BE49-F238E27FC236}">
-                <a16:creationId xmlns:a16="http://schemas.microsoft.com/office/drawing/2014/main" id="{6C6373F1-399A-46B1-A038-AC2E54F158DE}"/>
+                <a16:creationId xmlns:a16="http://schemas.microsoft.com/office/drawing/2014/main" id="{1FFBA638-0E16-46E4-A24F-D14E3ED49BAE}"/>
               </a:ext>
             </a:extLst>
           </p:cNvPr>
@@ -3021,7 +3021,7 @@
           <p:cNvPr id="10" name="s10-takeaway-rule">
             <a:extLst xmlns:a="http://schemas.openxmlformats.org/drawingml/2006/main">
               <a:ext uri="{FF2B5EF4-FFF2-40B4-BE49-F238E27FC236}">
-                <a16:creationId xmlns:a16="http://schemas.microsoft.com/office/drawing/2014/main" id="{0FF8FC85-51D1-4326-BA41-A9EE38454875}"/>
+                <a16:creationId xmlns:a16="http://schemas.microsoft.com/office/drawing/2014/main" id="{EE70116C-8A0F-4983-B6D0-45C5A87CD12F}"/>
               </a:ext>
             </a:extLst>
           </p:cNvPr>
@@ -3054,7 +3054,7 @@
           <p:cNvPr id="11" name="s10-takeaway">
             <a:extLst xmlns:a="http://schemas.openxmlformats.org/drawingml/2006/main">
               <a:ext uri="{FF2B5EF4-FFF2-40B4-BE49-F238E27FC236}">
-                <a16:creationId xmlns:a16="http://schemas.microsoft.com/office/drawing/2014/main" id="{C4DB571A-E7D7-45AA-A3BA-9EC6667BD2C3}"/>
+                <a16:creationId xmlns:a16="http://schemas.microsoft.com/office/drawing/2014/main" id="{748F9975-CA0D-49EE-989B-FDE3A03FFB03}"/>
               </a:ext>
             </a:extLst>
           </p:cNvPr>
@@ -3110,7 +3110,7 @@
     </p:spTree>
     <p:extLst>
       <p:ext uri="{BB962C8B-B14F-4D97-AF65-F5344CB8AC3E}">
-        <p14:creationId xmlns:p14="http://schemas.microsoft.com/office/powerpoint/2010/main" val="1290473370"/>
+        <p14:creationId xmlns:p14="http://schemas.microsoft.com/office/powerpoint/2010/main" val="414178688"/>
       </p:ext>
     </p:extLst>
   </p:cSld>
@@ -3141,7 +3141,7 @@
           <p:cNvPr id="1" name="s11-rule">
             <a:extLst xmlns:a="http://schemas.openxmlformats.org/drawingml/2006/main">
               <a:ext uri="{FF2B5EF4-FFF2-40B4-BE49-F238E27FC236}">
-                <a16:creationId xmlns:a16="http://schemas.microsoft.com/office/drawing/2014/main" id="{304E32F9-34D1-49C4-8D5A-9E71194183F7}"/>
+                <a16:creationId xmlns:a16="http://schemas.microsoft.com/office/drawing/2014/main" id="{707AAB96-2996-4396-A172-A6C82A8900C5}"/>
               </a:ext>
             </a:extLst>
           </p:cNvPr>
@@ -3174,7 +3174,7 @@
           <p:cNvPr id="2" name="s11-eyebrow">
             <a:extLst xmlns:a="http://schemas.openxmlformats.org/drawingml/2006/main">
               <a:ext uri="{FF2B5EF4-FFF2-40B4-BE49-F238E27FC236}">
-                <a16:creationId xmlns:a16="http://schemas.microsoft.com/office/drawing/2014/main" id="{2FD80A37-0B06-4111-BC34-9D7396B5702C}"/>
+                <a16:creationId xmlns:a16="http://schemas.microsoft.com/office/drawing/2014/main" id="{3BD1FA50-079A-403B-8371-0ABB40919B14}"/>
               </a:ext>
             </a:extLst>
           </p:cNvPr>
@@ -3232,7 +3232,7 @@
           <p:cNvPr id="3" name="s11-title">
             <a:extLst xmlns:a="http://schemas.openxmlformats.org/drawingml/2006/main">
               <a:ext uri="{FF2B5EF4-FFF2-40B4-BE49-F238E27FC236}">
-                <a16:creationId xmlns:a16="http://schemas.microsoft.com/office/drawing/2014/main" id="{5400C08C-4489-4B3B-BEF2-8ABAA30ECB5F}"/>
+                <a16:creationId xmlns:a16="http://schemas.microsoft.com/office/drawing/2014/main" id="{62224490-9C70-46A1-AFF5-CB1E4E0263B4}"/>
               </a:ext>
             </a:extLst>
           </p:cNvPr>
@@ -3290,7 +3290,7 @@
           <p:cNvPr id="4" name="s11-footer">
             <a:extLst xmlns:a="http://schemas.openxmlformats.org/drawingml/2006/main">
               <a:ext uri="{FF2B5EF4-FFF2-40B4-BE49-F238E27FC236}">
-                <a16:creationId xmlns:a16="http://schemas.microsoft.com/office/drawing/2014/main" id="{2DE3994E-5F81-4EF4-9D86-7EF2035E4648}"/>
+                <a16:creationId xmlns:a16="http://schemas.microsoft.com/office/drawing/2014/main" id="{742EC510-A1D1-488E-97AD-55D6E293FF97}"/>
               </a:ext>
             </a:extLst>
           </p:cNvPr>
@@ -3321,7 +3321,7 @@
           <p:cNvPr id="5" name="s11-identity">
             <a:extLst xmlns:a="http://schemas.openxmlformats.org/drawingml/2006/main">
               <a:ext uri="{FF2B5EF4-FFF2-40B4-BE49-F238E27FC236}">
-                <a16:creationId xmlns:a16="http://schemas.microsoft.com/office/drawing/2014/main" id="{21944640-78E1-4448-86AB-DC851227986E}"/>
+                <a16:creationId xmlns:a16="http://schemas.microsoft.com/office/drawing/2014/main" id="{58805EDC-AEDA-4383-BE01-96CEF608EB5D}"/>
               </a:ext>
             </a:extLst>
           </p:cNvPr>
@@ -3379,7 +3379,7 @@
           <p:cNvPr id="6" name="practice-circle-0">
             <a:extLst xmlns:a="http://schemas.openxmlformats.org/drawingml/2006/main">
               <a:ext uri="{FF2B5EF4-FFF2-40B4-BE49-F238E27FC236}">
-                <a16:creationId xmlns:a16="http://schemas.microsoft.com/office/drawing/2014/main" id="{36E021D6-F698-4958-9720-3B4F9CB9FE47}"/>
+                <a16:creationId xmlns:a16="http://schemas.microsoft.com/office/drawing/2014/main" id="{7EB57850-7DD0-415A-A8FC-4F6012EFEF0B}"/>
               </a:ext>
             </a:extLst>
           </p:cNvPr>
@@ -3412,7 +3412,7 @@
           <p:cNvPr id="7" name="practice-number-0">
             <a:extLst xmlns:a="http://schemas.openxmlformats.org/drawingml/2006/main">
               <a:ext uri="{FF2B5EF4-FFF2-40B4-BE49-F238E27FC236}">
-                <a16:creationId xmlns:a16="http://schemas.microsoft.com/office/drawing/2014/main" id="{07F6D759-611F-4B34-9B38-A4BB1DE67393}"/>
+                <a16:creationId xmlns:a16="http://schemas.microsoft.com/office/drawing/2014/main" id="{C88EB17E-72B6-4BEF-A31C-F9698DFD1BFE}"/>
               </a:ext>
             </a:extLst>
           </p:cNvPr>
@@ -3470,7 +3470,7 @@
           <p:cNvPr id="8" name="practice-item-0">
             <a:extLst xmlns:a="http://schemas.openxmlformats.org/drawingml/2006/main">
               <a:ext uri="{FF2B5EF4-FFF2-40B4-BE49-F238E27FC236}">
-                <a16:creationId xmlns:a16="http://schemas.microsoft.com/office/drawing/2014/main" id="{537FBAF0-9087-481E-9A2B-AC0217143E41}"/>
+                <a16:creationId xmlns:a16="http://schemas.microsoft.com/office/drawing/2014/main" id="{936B522B-09E0-44CA-BBBD-501921BF1539}"/>
               </a:ext>
             </a:extLst>
           </p:cNvPr>
@@ -3534,7 +3534,7 @@
           <p:cNvPr id="9" name="practice-connector-0">
             <a:extLst xmlns:a="http://schemas.openxmlformats.org/drawingml/2006/main">
               <a:ext uri="{FF2B5EF4-FFF2-40B4-BE49-F238E27FC236}">
-                <a16:creationId xmlns:a16="http://schemas.microsoft.com/office/drawing/2014/main" id="{B4D18803-60B3-4293-9D49-A2AEFD2212DD}"/>
+                <a16:creationId xmlns:a16="http://schemas.microsoft.com/office/drawing/2014/main" id="{7C44C17C-62FE-4777-9733-94D0B117A084}"/>
               </a:ext>
             </a:extLst>
           </p:cNvPr>
@@ -3565,7 +3565,7 @@
           <p:cNvPr id="10" name="practice-circle-1">
             <a:extLst xmlns:a="http://schemas.openxmlformats.org/drawingml/2006/main">
               <a:ext uri="{FF2B5EF4-FFF2-40B4-BE49-F238E27FC236}">
-                <a16:creationId xmlns:a16="http://schemas.microsoft.com/office/drawing/2014/main" id="{5E920B8D-E02C-4FF9-B605-E1860B81895C}"/>
+                <a16:creationId xmlns:a16="http://schemas.microsoft.com/office/drawing/2014/main" id="{BD29409F-DBDE-4AEF-B680-7F47898159C2}"/>
               </a:ext>
             </a:extLst>
           </p:cNvPr>
@@ -3598,7 +3598,7 @@
           <p:cNvPr id="11" name="practice-number-1">
             <a:extLst xmlns:a="http://schemas.openxmlformats.org/drawingml/2006/main">
               <a:ext uri="{FF2B5EF4-FFF2-40B4-BE49-F238E27FC236}">
-                <a16:creationId xmlns:a16="http://schemas.microsoft.com/office/drawing/2014/main" id="{2ABB3757-1383-48BA-8445-B1B56EC6BD8C}"/>
+                <a16:creationId xmlns:a16="http://schemas.microsoft.com/office/drawing/2014/main" id="{6CA1EAB3-1ECC-4369-BD1B-56A057E517F7}"/>
               </a:ext>
             </a:extLst>
           </p:cNvPr>
@@ -3656,7 +3656,7 @@
           <p:cNvPr id="12" name="practice-item-1">
             <a:extLst xmlns:a="http://schemas.openxmlformats.org/drawingml/2006/main">
               <a:ext uri="{FF2B5EF4-FFF2-40B4-BE49-F238E27FC236}">
-                <a16:creationId xmlns:a16="http://schemas.microsoft.com/office/drawing/2014/main" id="{E726E4E8-8E33-4267-914E-ED6C82EFAC3B}"/>
+                <a16:creationId xmlns:a16="http://schemas.microsoft.com/office/drawing/2014/main" id="{F6EA38C5-9B44-4231-B060-CC87E88A52D0}"/>
               </a:ext>
             </a:extLst>
           </p:cNvPr>
@@ -3720,7 +3720,7 @@
           <p:cNvPr id="13" name="practice-connector-1">
             <a:extLst xmlns:a="http://schemas.openxmlformats.org/drawingml/2006/main">
               <a:ext uri="{FF2B5EF4-FFF2-40B4-BE49-F238E27FC236}">
-                <a16:creationId xmlns:a16="http://schemas.microsoft.com/office/drawing/2014/main" id="{265BE24E-603B-4466-9C1A-957848154567}"/>
+                <a16:creationId xmlns:a16="http://schemas.microsoft.com/office/drawing/2014/main" id="{C5018FE5-336C-4C5E-91A3-20AD3DF76B0A}"/>
               </a:ext>
             </a:extLst>
           </p:cNvPr>
@@ -3751,7 +3751,7 @@
           <p:cNvPr id="14" name="practice-circle-2">
             <a:extLst xmlns:a="http://schemas.openxmlformats.org/drawingml/2006/main">
               <a:ext uri="{FF2B5EF4-FFF2-40B4-BE49-F238E27FC236}">
-                <a16:creationId xmlns:a16="http://schemas.microsoft.com/office/drawing/2014/main" id="{5535D80D-3CBE-4DE5-91DE-D6CDB32A069E}"/>
+                <a16:creationId xmlns:a16="http://schemas.microsoft.com/office/drawing/2014/main" id="{E57CAFA5-C06F-47DD-979A-DE68A17894D1}"/>
               </a:ext>
             </a:extLst>
           </p:cNvPr>
@@ -3784,7 +3784,7 @@
           <p:cNvPr id="15" name="practice-number-2">
             <a:extLst xmlns:a="http://schemas.openxmlformats.org/drawingml/2006/main">
               <a:ext uri="{FF2B5EF4-FFF2-40B4-BE49-F238E27FC236}">
-                <a16:creationId xmlns:a16="http://schemas.microsoft.com/office/drawing/2014/main" id="{9A3F7244-4F14-4E3C-8CB1-D894DD5ADB5B}"/>
+                <a16:creationId xmlns:a16="http://schemas.microsoft.com/office/drawing/2014/main" id="{0C81F668-49D1-4E9B-A967-29AD0F9B9F96}"/>
               </a:ext>
             </a:extLst>
           </p:cNvPr>
@@ -3842,7 +3842,7 @@
           <p:cNvPr id="16" name="practice-item-2">
             <a:extLst xmlns:a="http://schemas.openxmlformats.org/drawingml/2006/main">
               <a:ext uri="{FF2B5EF4-FFF2-40B4-BE49-F238E27FC236}">
-                <a16:creationId xmlns:a16="http://schemas.microsoft.com/office/drawing/2014/main" id="{A31066C4-6598-408B-8450-BAE7B64978C9}"/>
+                <a16:creationId xmlns:a16="http://schemas.microsoft.com/office/drawing/2014/main" id="{85EDFDB4-43A0-4401-B259-C86F3BFEF48B}"/>
               </a:ext>
             </a:extLst>
           </p:cNvPr>
@@ -3904,7 +3904,7 @@
     </p:spTree>
     <p:extLst>
       <p:ext uri="{BB962C8B-B14F-4D97-AF65-F5344CB8AC3E}">
-        <p14:creationId xmlns:p14="http://schemas.microsoft.com/office/powerpoint/2010/main" val="1390161268"/>
+        <p14:creationId xmlns:p14="http://schemas.microsoft.com/office/powerpoint/2010/main" val="1239315938"/>
       </p:ext>
     </p:extLst>
   </p:cSld>
@@ -3935,7 +3935,7 @@
           <p:cNvPr id="1" name="s12-rule">
             <a:extLst xmlns:a="http://schemas.openxmlformats.org/drawingml/2006/main">
               <a:ext uri="{FF2B5EF4-FFF2-40B4-BE49-F238E27FC236}">
-                <a16:creationId xmlns:a16="http://schemas.microsoft.com/office/drawing/2014/main" id="{D733698D-43ED-4873-816B-F4A34A5AE0A2}"/>
+                <a16:creationId xmlns:a16="http://schemas.microsoft.com/office/drawing/2014/main" id="{F0116A5C-38DE-4337-816C-C050B0579B67}"/>
               </a:ext>
             </a:extLst>
           </p:cNvPr>
@@ -3968,7 +3968,7 @@
           <p:cNvPr id="2" name="s12-eyebrow">
             <a:extLst xmlns:a="http://schemas.openxmlformats.org/drawingml/2006/main">
               <a:ext uri="{FF2B5EF4-FFF2-40B4-BE49-F238E27FC236}">
-                <a16:creationId xmlns:a16="http://schemas.microsoft.com/office/drawing/2014/main" id="{52785422-967D-408B-BE60-BF18ACBB9EED}"/>
+                <a16:creationId xmlns:a16="http://schemas.microsoft.com/office/drawing/2014/main" id="{B42C824B-A3DB-4D97-91CD-51A627A6F37E}"/>
               </a:ext>
             </a:extLst>
           </p:cNvPr>
@@ -4026,7 +4026,7 @@
           <p:cNvPr id="3" name="s12-title">
             <a:extLst xmlns:a="http://schemas.openxmlformats.org/drawingml/2006/main">
               <a:ext uri="{FF2B5EF4-FFF2-40B4-BE49-F238E27FC236}">
-                <a16:creationId xmlns:a16="http://schemas.microsoft.com/office/drawing/2014/main" id="{4C27B03B-B3BA-4BF3-BAC5-386C66102BC5}"/>
+                <a16:creationId xmlns:a16="http://schemas.microsoft.com/office/drawing/2014/main" id="{399B6934-4842-4D49-81A0-E0C9A1EDF179}"/>
               </a:ext>
             </a:extLst>
           </p:cNvPr>
@@ -4084,7 +4084,7 @@
           <p:cNvPr id="4" name="s12-footer">
             <a:extLst xmlns:a="http://schemas.openxmlformats.org/drawingml/2006/main">
               <a:ext uri="{FF2B5EF4-FFF2-40B4-BE49-F238E27FC236}">
-                <a16:creationId xmlns:a16="http://schemas.microsoft.com/office/drawing/2014/main" id="{0055AE2F-EC0B-488D-B754-D589BEBA7A62}"/>
+                <a16:creationId xmlns:a16="http://schemas.microsoft.com/office/drawing/2014/main" id="{41466D4C-E76D-4C59-98B8-F11B46A2333C}"/>
               </a:ext>
             </a:extLst>
           </p:cNvPr>
@@ -4115,7 +4115,7 @@
           <p:cNvPr id="5" name="s12-identity">
             <a:extLst xmlns:a="http://schemas.openxmlformats.org/drawingml/2006/main">
               <a:ext uri="{FF2B5EF4-FFF2-40B4-BE49-F238E27FC236}">
-                <a16:creationId xmlns:a16="http://schemas.microsoft.com/office/drawing/2014/main" id="{083D37D8-9C33-4924-A097-DA46520960B8}"/>
+                <a16:creationId xmlns:a16="http://schemas.microsoft.com/office/drawing/2014/main" id="{E3520B6D-603E-4459-86C7-A3A14EB9BEB9}"/>
               </a:ext>
             </a:extLst>
           </p:cNvPr>
@@ -4173,7 +4173,7 @@
           <p:cNvPr id="6" name="recap-circle-0">
             <a:extLst xmlns:a="http://schemas.openxmlformats.org/drawingml/2006/main">
               <a:ext uri="{FF2B5EF4-FFF2-40B4-BE49-F238E27FC236}">
-                <a16:creationId xmlns:a16="http://schemas.microsoft.com/office/drawing/2014/main" id="{9BA4AB87-3CC9-48D7-806A-FDA482486067}"/>
+                <a16:creationId xmlns:a16="http://schemas.microsoft.com/office/drawing/2014/main" id="{A00DE648-F2F1-4BC8-A3D6-B97923B33469}"/>
               </a:ext>
             </a:extLst>
           </p:cNvPr>
@@ -4206,7 +4206,7 @@
           <p:cNvPr id="7" name="recap-number-0">
             <a:extLst xmlns:a="http://schemas.openxmlformats.org/drawingml/2006/main">
               <a:ext uri="{FF2B5EF4-FFF2-40B4-BE49-F238E27FC236}">
-                <a16:creationId xmlns:a16="http://schemas.microsoft.com/office/drawing/2014/main" id="{B90C3257-46BA-436F-B99B-4628F9A89D4C}"/>
+                <a16:creationId xmlns:a16="http://schemas.microsoft.com/office/drawing/2014/main" id="{5D60A669-EFD4-412E-BED7-B3FC1C4D111B}"/>
               </a:ext>
             </a:extLst>
           </p:cNvPr>
@@ -4264,7 +4264,7 @@
           <p:cNvPr id="8" name="recap-item-0">
             <a:extLst xmlns:a="http://schemas.openxmlformats.org/drawingml/2006/main">
               <a:ext uri="{FF2B5EF4-FFF2-40B4-BE49-F238E27FC236}">
-                <a16:creationId xmlns:a16="http://schemas.microsoft.com/office/drawing/2014/main" id="{11EB6979-FA83-4F59-A755-C0F75ED46541}"/>
+                <a16:creationId xmlns:a16="http://schemas.microsoft.com/office/drawing/2014/main" id="{BD535644-12B0-4C78-8A08-63F2265C1F7B}"/>
               </a:ext>
             </a:extLst>
           </p:cNvPr>
@@ -4328,7 +4328,7 @@
           <p:cNvPr id="9" name="recap-connector-0">
             <a:extLst xmlns:a="http://schemas.openxmlformats.org/drawingml/2006/main">
               <a:ext uri="{FF2B5EF4-FFF2-40B4-BE49-F238E27FC236}">
-                <a16:creationId xmlns:a16="http://schemas.microsoft.com/office/drawing/2014/main" id="{E9224490-01F3-41C6-A6B3-B2799148660F}"/>
+                <a16:creationId xmlns:a16="http://schemas.microsoft.com/office/drawing/2014/main" id="{F11421A5-E908-4C84-AE28-5197529A93EC}"/>
               </a:ext>
             </a:extLst>
           </p:cNvPr>
@@ -4359,7 +4359,7 @@
           <p:cNvPr id="10" name="recap-circle-1">
             <a:extLst xmlns:a="http://schemas.openxmlformats.org/drawingml/2006/main">
               <a:ext uri="{FF2B5EF4-FFF2-40B4-BE49-F238E27FC236}">
-                <a16:creationId xmlns:a16="http://schemas.microsoft.com/office/drawing/2014/main" id="{9E0DF4E7-CEC8-4F8C-9119-E5571EC671FD}"/>
+                <a16:creationId xmlns:a16="http://schemas.microsoft.com/office/drawing/2014/main" id="{144705AF-579B-47FC-8762-42E14CC54B65}"/>
               </a:ext>
             </a:extLst>
           </p:cNvPr>
@@ -4392,7 +4392,7 @@
           <p:cNvPr id="11" name="recap-number-1">
             <a:extLst xmlns:a="http://schemas.openxmlformats.org/drawingml/2006/main">
               <a:ext uri="{FF2B5EF4-FFF2-40B4-BE49-F238E27FC236}">
-                <a16:creationId xmlns:a16="http://schemas.microsoft.com/office/drawing/2014/main" id="{A25EEF41-4B9B-4609-9497-2AB97C51CA3A}"/>
+                <a16:creationId xmlns:a16="http://schemas.microsoft.com/office/drawing/2014/main" id="{4D207F4C-1733-4F7C-B1E3-A6BC05532170}"/>
               </a:ext>
             </a:extLst>
           </p:cNvPr>
@@ -4450,7 +4450,7 @@
           <p:cNvPr id="12" name="recap-item-1">
             <a:extLst xmlns:a="http://schemas.openxmlformats.org/drawingml/2006/main">
               <a:ext uri="{FF2B5EF4-FFF2-40B4-BE49-F238E27FC236}">
-                <a16:creationId xmlns:a16="http://schemas.microsoft.com/office/drawing/2014/main" id="{19439410-679D-4EB9-B787-E0DFBEA67AA2}"/>
+                <a16:creationId xmlns:a16="http://schemas.microsoft.com/office/drawing/2014/main" id="{E885962A-9238-461D-BD29-7A447197054C}"/>
               </a:ext>
             </a:extLst>
           </p:cNvPr>
@@ -4514,7 +4514,7 @@
           <p:cNvPr id="13" name="recap-connector-1">
             <a:extLst xmlns:a="http://schemas.openxmlformats.org/drawingml/2006/main">
               <a:ext uri="{FF2B5EF4-FFF2-40B4-BE49-F238E27FC236}">
-                <a16:creationId xmlns:a16="http://schemas.microsoft.com/office/drawing/2014/main" id="{334605D4-55F6-408D-B118-B61019C853E4}"/>
+                <a16:creationId xmlns:a16="http://schemas.microsoft.com/office/drawing/2014/main" id="{C28CB60D-A861-467D-94DD-2615C73B61A1}"/>
               </a:ext>
             </a:extLst>
           </p:cNvPr>
@@ -4545,7 +4545,7 @@
           <p:cNvPr id="14" name="recap-circle-2">
             <a:extLst xmlns:a="http://schemas.openxmlformats.org/drawingml/2006/main">
               <a:ext uri="{FF2B5EF4-FFF2-40B4-BE49-F238E27FC236}">
-                <a16:creationId xmlns:a16="http://schemas.microsoft.com/office/drawing/2014/main" id="{BCB19634-0C3F-4820-8954-3DF19A4516FC}"/>
+                <a16:creationId xmlns:a16="http://schemas.microsoft.com/office/drawing/2014/main" id="{FFAF5FAC-B6BD-433A-A1CD-14CD648366FC}"/>
               </a:ext>
             </a:extLst>
           </p:cNvPr>
@@ -4578,7 +4578,7 @@
           <p:cNvPr id="15" name="recap-number-2">
             <a:extLst xmlns:a="http://schemas.openxmlformats.org/drawingml/2006/main">
               <a:ext uri="{FF2B5EF4-FFF2-40B4-BE49-F238E27FC236}">
-                <a16:creationId xmlns:a16="http://schemas.microsoft.com/office/drawing/2014/main" id="{A1294002-943C-4CDD-BC71-54E9290BEDF3}"/>
+                <a16:creationId xmlns:a16="http://schemas.microsoft.com/office/drawing/2014/main" id="{E934C6EB-211F-432A-B35F-046DCCB9B167}"/>
               </a:ext>
             </a:extLst>
           </p:cNvPr>
@@ -4636,7 +4636,7 @@
           <p:cNvPr id="16" name="recap-item-2">
             <a:extLst xmlns:a="http://schemas.openxmlformats.org/drawingml/2006/main">
               <a:ext uri="{FF2B5EF4-FFF2-40B4-BE49-F238E27FC236}">
-                <a16:creationId xmlns:a16="http://schemas.microsoft.com/office/drawing/2014/main" id="{FEE7E83E-D6F5-41BF-BB3E-FE995FEC56C2}"/>
+                <a16:creationId xmlns:a16="http://schemas.microsoft.com/office/drawing/2014/main" id="{76D98DBE-243D-4292-9C7E-71F1BBFB147A}"/>
               </a:ext>
             </a:extLst>
           </p:cNvPr>
@@ -4698,7 +4698,7 @@
     </p:spTree>
     <p:extLst>
       <p:ext uri="{BB962C8B-B14F-4D97-AF65-F5344CB8AC3E}">
-        <p14:creationId xmlns:p14="http://schemas.microsoft.com/office/powerpoint/2010/main" val="120189746"/>
+        <p14:creationId xmlns:p14="http://schemas.microsoft.com/office/powerpoint/2010/main" val="1263496739"/>
       </p:ext>
     </p:extLst>
   </p:cSld>
@@ -4729,7 +4729,7 @@
           <p:cNvPr id="1" name="s13-rule">
             <a:extLst xmlns:a="http://schemas.openxmlformats.org/drawingml/2006/main">
               <a:ext uri="{FF2B5EF4-FFF2-40B4-BE49-F238E27FC236}">
-                <a16:creationId xmlns:a16="http://schemas.microsoft.com/office/drawing/2014/main" id="{0636CAD4-3ABA-4495-A83F-928DF68FB2BA}"/>
+                <a16:creationId xmlns:a16="http://schemas.microsoft.com/office/drawing/2014/main" id="{72DB5AAA-B497-407A-9800-A33459E8D02D}"/>
               </a:ext>
             </a:extLst>
           </p:cNvPr>
@@ -4762,7 +4762,7 @@
           <p:cNvPr id="2" name="s13-eyebrow">
             <a:extLst xmlns:a="http://schemas.openxmlformats.org/drawingml/2006/main">
               <a:ext uri="{FF2B5EF4-FFF2-40B4-BE49-F238E27FC236}">
-                <a16:creationId xmlns:a16="http://schemas.microsoft.com/office/drawing/2014/main" id="{6D80631C-D9EA-49C3-BFEE-7701DCBE6007}"/>
+                <a16:creationId xmlns:a16="http://schemas.microsoft.com/office/drawing/2014/main" id="{EC90EEFF-8002-4935-8C82-69F6520451F8}"/>
               </a:ext>
             </a:extLst>
           </p:cNvPr>
@@ -4820,7 +4820,7 @@
           <p:cNvPr id="3" name="s13-title">
             <a:extLst xmlns:a="http://schemas.openxmlformats.org/drawingml/2006/main">
               <a:ext uri="{FF2B5EF4-FFF2-40B4-BE49-F238E27FC236}">
-                <a16:creationId xmlns:a16="http://schemas.microsoft.com/office/drawing/2014/main" id="{CED1A72C-6395-41EA-9574-E436A8674962}"/>
+                <a16:creationId xmlns:a16="http://schemas.microsoft.com/office/drawing/2014/main" id="{2784B90A-F1E9-46EF-9BFC-3DF2F6ACB61F}"/>
               </a:ext>
             </a:extLst>
           </p:cNvPr>
@@ -4878,7 +4878,7 @@
           <p:cNvPr id="4" name="s13-footer">
             <a:extLst xmlns:a="http://schemas.openxmlformats.org/drawingml/2006/main">
               <a:ext uri="{FF2B5EF4-FFF2-40B4-BE49-F238E27FC236}">
-                <a16:creationId xmlns:a16="http://schemas.microsoft.com/office/drawing/2014/main" id="{FE1A2DA3-80DB-4773-98A2-3F6704797028}"/>
+                <a16:creationId xmlns:a16="http://schemas.microsoft.com/office/drawing/2014/main" id="{91E6B0C1-C0C9-427D-9955-D8A34977E968}"/>
               </a:ext>
             </a:extLst>
           </p:cNvPr>
@@ -4909,7 +4909,7 @@
           <p:cNvPr id="5" name="s13-identity">
             <a:extLst xmlns:a="http://schemas.openxmlformats.org/drawingml/2006/main">
               <a:ext uri="{FF2B5EF4-FFF2-40B4-BE49-F238E27FC236}">
-                <a16:creationId xmlns:a16="http://schemas.microsoft.com/office/drawing/2014/main" id="{408D76AB-7C2E-4B05-92E1-3D8323BDACAC}"/>
+                <a16:creationId xmlns:a16="http://schemas.microsoft.com/office/drawing/2014/main" id="{F2541D3C-BD48-459B-AA42-CB111DFCEE6E}"/>
               </a:ext>
             </a:extLst>
           </p:cNvPr>
@@ -4967,7 +4967,7 @@
           <p:cNvPr id="6" name="source-0">
             <a:extLst xmlns:a="http://schemas.openxmlformats.org/drawingml/2006/main">
               <a:ext uri="{FF2B5EF4-FFF2-40B4-BE49-F238E27FC236}">
-                <a16:creationId xmlns:a16="http://schemas.microsoft.com/office/drawing/2014/main" id="{346A24B6-86DD-4AB1-8F17-193E8E9BCD15}"/>
+                <a16:creationId xmlns:a16="http://schemas.microsoft.com/office/drawing/2014/main" id="{94887E4C-2D78-44DB-941D-06911CF962BD}"/>
               </a:ext>
             </a:extLst>
           </p:cNvPr>
@@ -5031,7 +5031,7 @@
           <p:cNvPr id="7" name="source-1">
             <a:extLst xmlns:a="http://schemas.openxmlformats.org/drawingml/2006/main">
               <a:ext uri="{FF2B5EF4-FFF2-40B4-BE49-F238E27FC236}">
-                <a16:creationId xmlns:a16="http://schemas.microsoft.com/office/drawing/2014/main" id="{6AD4CC4D-4E7C-4009-BC3B-14381456C796}"/>
+                <a16:creationId xmlns:a16="http://schemas.microsoft.com/office/drawing/2014/main" id="{FA59314B-E6E4-4B16-9823-9C74AD94E813}"/>
               </a:ext>
             </a:extLst>
           </p:cNvPr>
@@ -5095,7 +5095,7 @@
           <p:cNvPr id="8" name="source-2">
             <a:extLst xmlns:a="http://schemas.openxmlformats.org/drawingml/2006/main">
               <a:ext uri="{FF2B5EF4-FFF2-40B4-BE49-F238E27FC236}">
-                <a16:creationId xmlns:a16="http://schemas.microsoft.com/office/drawing/2014/main" id="{4D3E1C29-EBDA-4DF0-8EAE-DD21858C90EE}"/>
+                <a16:creationId xmlns:a16="http://schemas.microsoft.com/office/drawing/2014/main" id="{9877B519-BA19-4542-AFCF-22AB518B1B57}"/>
               </a:ext>
             </a:extLst>
           </p:cNvPr>
@@ -5159,7 +5159,7 @@
           <p:cNvPr id="9" name="source-3">
             <a:extLst xmlns:a="http://schemas.openxmlformats.org/drawingml/2006/main">
               <a:ext uri="{FF2B5EF4-FFF2-40B4-BE49-F238E27FC236}">
-                <a16:creationId xmlns:a16="http://schemas.microsoft.com/office/drawing/2014/main" id="{8620D1E8-B5BA-4973-9A54-9848DDD7158B}"/>
+                <a16:creationId xmlns:a16="http://schemas.microsoft.com/office/drawing/2014/main" id="{1D4F915E-E4A2-47B1-8DAE-66717310FCE2}"/>
               </a:ext>
             </a:extLst>
           </p:cNvPr>
@@ -5223,7 +5223,7 @@
           <p:cNvPr id="10" name="source-4">
             <a:extLst xmlns:a="http://schemas.openxmlformats.org/drawingml/2006/main">
               <a:ext uri="{FF2B5EF4-FFF2-40B4-BE49-F238E27FC236}">
-                <a16:creationId xmlns:a16="http://schemas.microsoft.com/office/drawing/2014/main" id="{3DFD8AC7-AEDC-48B1-9B1B-DC0B6C33D389}"/>
+                <a16:creationId xmlns:a16="http://schemas.microsoft.com/office/drawing/2014/main" id="{6314C1B0-3BC2-4834-B565-5ED7FE69A69C}"/>
               </a:ext>
             </a:extLst>
           </p:cNvPr>
@@ -5287,7 +5287,7 @@
           <p:cNvPr id="11" name="s13-takeaway-rule">
             <a:extLst xmlns:a="http://schemas.openxmlformats.org/drawingml/2006/main">
               <a:ext uri="{FF2B5EF4-FFF2-40B4-BE49-F238E27FC236}">
-                <a16:creationId xmlns:a16="http://schemas.microsoft.com/office/drawing/2014/main" id="{49674FCB-87DD-4694-9820-021C524E72E0}"/>
+                <a16:creationId xmlns:a16="http://schemas.microsoft.com/office/drawing/2014/main" id="{042892BB-AD2D-47A8-BDB3-406E054085D2}"/>
               </a:ext>
             </a:extLst>
           </p:cNvPr>
@@ -5320,7 +5320,7 @@
           <p:cNvPr id="12" name="s13-takeaway">
             <a:extLst xmlns:a="http://schemas.openxmlformats.org/drawingml/2006/main">
               <a:ext uri="{FF2B5EF4-FFF2-40B4-BE49-F238E27FC236}">
-                <a16:creationId xmlns:a16="http://schemas.microsoft.com/office/drawing/2014/main" id="{C85A39E4-EBFC-4C76-BFF2-7782CF6B60E3}"/>
+                <a16:creationId xmlns:a16="http://schemas.microsoft.com/office/drawing/2014/main" id="{A3939414-059C-4F94-BA4A-CD61006DDBBD}"/>
               </a:ext>
             </a:extLst>
           </p:cNvPr>
@@ -5345,7 +5345,7 @@
         </p:spPr>
         <p:txBody>
           <a:bodyPr xmlns:a="http://schemas.openxmlformats.org/drawingml/2006/main" lIns="0" tIns="0" rIns="0" bIns="0" anchor="ctr">
-            <a:normAutofit fontScale="100000"/>
+            <a:normAutofit fontScale="95911"/>
           </a:bodyPr>
           <a:lstStyle xmlns:a="http://schemas.openxmlformats.org/drawingml/2006/main"/>
           <a:p xmlns:a="http://schemas.openxmlformats.org/drawingml/2006/main">
@@ -5368,7 +5368,7 @@
                 <a:ea typeface="PingFang SC"/>
                 <a:cs typeface="PingFang SC"/>
               </a:rPr>
-              <a:t>公开幻灯片只使用课程原创文字与原生图形；完整论证、链接和事实边界请见本节讲义。</a:t>
+              <a:t>课程精编页用于讲授主线；播放器中的“原课件”模式保留团队 PowerPoint 精选页、真实图片和可播放视频。</a:t>
             </a:r>
           </a:p>
         </p:txBody>
@@ -5376,7 +5376,7 @@
     </p:spTree>
     <p:extLst>
       <p:ext uri="{BB962C8B-B14F-4D97-AF65-F5344CB8AC3E}">
-        <p14:creationId xmlns:p14="http://schemas.microsoft.com/office/powerpoint/2010/main" val="1235623993"/>
+        <p14:creationId xmlns:p14="http://schemas.microsoft.com/office/powerpoint/2010/main" val="348508958"/>
       </p:ext>
     </p:extLst>
   </p:cSld>
@@ -5407,7 +5407,7 @@
           <p:cNvPr id="1" name="s2-rule">
             <a:extLst xmlns:a="http://schemas.openxmlformats.org/drawingml/2006/main">
               <a:ext uri="{FF2B5EF4-FFF2-40B4-BE49-F238E27FC236}">
-                <a16:creationId xmlns:a16="http://schemas.microsoft.com/office/drawing/2014/main" id="{A571766A-F448-4E80-AF88-91C298A9AE0F}"/>
+                <a16:creationId xmlns:a16="http://schemas.microsoft.com/office/drawing/2014/main" id="{CC4FA5CB-5D6A-432B-9D26-2B021BA5FCF7}"/>
               </a:ext>
             </a:extLst>
           </p:cNvPr>
@@ -5440,7 +5440,7 @@
           <p:cNvPr id="2" name="s2-eyebrow">
             <a:extLst xmlns:a="http://schemas.openxmlformats.org/drawingml/2006/main">
               <a:ext uri="{FF2B5EF4-FFF2-40B4-BE49-F238E27FC236}">
-                <a16:creationId xmlns:a16="http://schemas.microsoft.com/office/drawing/2014/main" id="{C403233F-A560-44C8-AD02-B30B1E37F7CC}"/>
+                <a16:creationId xmlns:a16="http://schemas.microsoft.com/office/drawing/2014/main" id="{8D452371-87DD-4FF2-BC45-4B3474415BD0}"/>
               </a:ext>
             </a:extLst>
           </p:cNvPr>
@@ -5498,7 +5498,7 @@
           <p:cNvPr id="3" name="s2-title">
             <a:extLst xmlns:a="http://schemas.openxmlformats.org/drawingml/2006/main">
               <a:ext uri="{FF2B5EF4-FFF2-40B4-BE49-F238E27FC236}">
-                <a16:creationId xmlns:a16="http://schemas.microsoft.com/office/drawing/2014/main" id="{4BCF91AE-63B4-47F1-84BF-ECBD2742DE3B}"/>
+                <a16:creationId xmlns:a16="http://schemas.microsoft.com/office/drawing/2014/main" id="{7CE2DB67-C4EE-464B-8C03-49A993B68C96}"/>
               </a:ext>
             </a:extLst>
           </p:cNvPr>
@@ -5556,7 +5556,7 @@
           <p:cNvPr id="4" name="s2-footer">
             <a:extLst xmlns:a="http://schemas.openxmlformats.org/drawingml/2006/main">
               <a:ext uri="{FF2B5EF4-FFF2-40B4-BE49-F238E27FC236}">
-                <a16:creationId xmlns:a16="http://schemas.microsoft.com/office/drawing/2014/main" id="{1C248551-7E54-4A9F-B8C2-242036F047D0}"/>
+                <a16:creationId xmlns:a16="http://schemas.microsoft.com/office/drawing/2014/main" id="{F378FBDC-ACC7-4E97-9924-C1DB3D876F38}"/>
               </a:ext>
             </a:extLst>
           </p:cNvPr>
@@ -5587,7 +5587,7 @@
           <p:cNvPr id="5" name="s2-identity">
             <a:extLst xmlns:a="http://schemas.openxmlformats.org/drawingml/2006/main">
               <a:ext uri="{FF2B5EF4-FFF2-40B4-BE49-F238E27FC236}">
-                <a16:creationId xmlns:a16="http://schemas.microsoft.com/office/drawing/2014/main" id="{39428B29-10F0-45D7-B7C1-4FB70BE19A1D}"/>
+                <a16:creationId xmlns:a16="http://schemas.microsoft.com/office/drawing/2014/main" id="{945678BC-AEB7-4BD4-B4A2-1A6FA1350A9D}"/>
               </a:ext>
             </a:extLst>
           </p:cNvPr>
@@ -5645,7 +5645,7 @@
           <p:cNvPr id="6" name="objective-1">
             <a:extLst xmlns:a="http://schemas.openxmlformats.org/drawingml/2006/main">
               <a:ext uri="{FF2B5EF4-FFF2-40B4-BE49-F238E27FC236}">
-                <a16:creationId xmlns:a16="http://schemas.microsoft.com/office/drawing/2014/main" id="{52AF3F09-E3E0-45E6-908E-A9BFC9B94D72}"/>
+                <a16:creationId xmlns:a16="http://schemas.microsoft.com/office/drawing/2014/main" id="{03CCDD2B-98B1-4FE2-82E5-3BCC7470030E}"/>
               </a:ext>
             </a:extLst>
           </p:cNvPr>
@@ -5732,7 +5732,7 @@
           <p:cNvPr id="7" name="objective-2">
             <a:extLst xmlns:a="http://schemas.openxmlformats.org/drawingml/2006/main">
               <a:ext uri="{FF2B5EF4-FFF2-40B4-BE49-F238E27FC236}">
-                <a16:creationId xmlns:a16="http://schemas.microsoft.com/office/drawing/2014/main" id="{92DFDCB6-B6BC-4F7B-8CD0-0FAE2E7A655A}"/>
+                <a16:creationId xmlns:a16="http://schemas.microsoft.com/office/drawing/2014/main" id="{4BD5A022-D148-49CB-81D2-820F67B7B4E4}"/>
               </a:ext>
             </a:extLst>
           </p:cNvPr>
@@ -5819,7 +5819,7 @@
           <p:cNvPr id="8" name="objective-3">
             <a:extLst xmlns:a="http://schemas.openxmlformats.org/drawingml/2006/main">
               <a:ext uri="{FF2B5EF4-FFF2-40B4-BE49-F238E27FC236}">
-                <a16:creationId xmlns:a16="http://schemas.microsoft.com/office/drawing/2014/main" id="{617D47FB-FCC5-4307-A642-3554F3CB58A9}"/>
+                <a16:creationId xmlns:a16="http://schemas.microsoft.com/office/drawing/2014/main" id="{9AE070DA-30C8-479C-9672-D8E2BC983CDF}"/>
               </a:ext>
             </a:extLst>
           </p:cNvPr>
@@ -5906,7 +5906,7 @@
           <p:cNvPr id="9" name="objective-4">
             <a:extLst xmlns:a="http://schemas.openxmlformats.org/drawingml/2006/main">
               <a:ext uri="{FF2B5EF4-FFF2-40B4-BE49-F238E27FC236}">
-                <a16:creationId xmlns:a16="http://schemas.microsoft.com/office/drawing/2014/main" id="{3C433659-C481-4911-9485-0F16F096F009}"/>
+                <a16:creationId xmlns:a16="http://schemas.microsoft.com/office/drawing/2014/main" id="{E86BDF22-81C3-48CC-AF60-4D64F160AC5A}"/>
               </a:ext>
             </a:extLst>
           </p:cNvPr>
@@ -5991,7 +5991,7 @@
     </p:spTree>
     <p:extLst>
       <p:ext uri="{BB962C8B-B14F-4D97-AF65-F5344CB8AC3E}">
-        <p14:creationId xmlns:p14="http://schemas.microsoft.com/office/powerpoint/2010/main" val="1181325961"/>
+        <p14:creationId xmlns:p14="http://schemas.microsoft.com/office/powerpoint/2010/main" val="183621"/>
       </p:ext>
     </p:extLst>
   </p:cSld>
@@ -6022,7 +6022,7 @@
           <p:cNvPr id="1" name="s3-rule">
             <a:extLst xmlns:a="http://schemas.openxmlformats.org/drawingml/2006/main">
               <a:ext uri="{FF2B5EF4-FFF2-40B4-BE49-F238E27FC236}">
-                <a16:creationId xmlns:a16="http://schemas.microsoft.com/office/drawing/2014/main" id="{DCC9DBB1-AE3F-4075-BCE5-979A9FBD9DA7}"/>
+                <a16:creationId xmlns:a16="http://schemas.microsoft.com/office/drawing/2014/main" id="{2C5862C7-35AE-4538-9100-CD8A9145136D}"/>
               </a:ext>
             </a:extLst>
           </p:cNvPr>
@@ -6055,7 +6055,7 @@
           <p:cNvPr id="2" name="s3-eyebrow">
             <a:extLst xmlns:a="http://schemas.openxmlformats.org/drawingml/2006/main">
               <a:ext uri="{FF2B5EF4-FFF2-40B4-BE49-F238E27FC236}">
-                <a16:creationId xmlns:a16="http://schemas.microsoft.com/office/drawing/2014/main" id="{CFA35006-8FAB-4096-B0DE-8995D0996B07}"/>
+                <a16:creationId xmlns:a16="http://schemas.microsoft.com/office/drawing/2014/main" id="{3D23682B-B582-46B8-92E7-877D7ECF3204}"/>
               </a:ext>
             </a:extLst>
           </p:cNvPr>
@@ -6113,7 +6113,7 @@
           <p:cNvPr id="3" name="s3-title">
             <a:extLst xmlns:a="http://schemas.openxmlformats.org/drawingml/2006/main">
               <a:ext uri="{FF2B5EF4-FFF2-40B4-BE49-F238E27FC236}">
-                <a16:creationId xmlns:a16="http://schemas.microsoft.com/office/drawing/2014/main" id="{39C073A0-F0F9-494F-957E-6FB01065E551}"/>
+                <a16:creationId xmlns:a16="http://schemas.microsoft.com/office/drawing/2014/main" id="{5C6F127D-16F5-47A1-990F-DB60C85B3971}"/>
               </a:ext>
             </a:extLst>
           </p:cNvPr>
@@ -6171,7 +6171,7 @@
           <p:cNvPr id="4" name="s3-footer">
             <a:extLst xmlns:a="http://schemas.openxmlformats.org/drawingml/2006/main">
               <a:ext uri="{FF2B5EF4-FFF2-40B4-BE49-F238E27FC236}">
-                <a16:creationId xmlns:a16="http://schemas.microsoft.com/office/drawing/2014/main" id="{9E5D57FA-D27C-4C29-8E1D-284802590A9F}"/>
+                <a16:creationId xmlns:a16="http://schemas.microsoft.com/office/drawing/2014/main" id="{8E82ADC3-28F0-4CBF-BC6B-920E6FC06C84}"/>
               </a:ext>
             </a:extLst>
           </p:cNvPr>
@@ -6202,7 +6202,7 @@
           <p:cNvPr id="5" name="s3-identity">
             <a:extLst xmlns:a="http://schemas.openxmlformats.org/drawingml/2006/main">
               <a:ext uri="{FF2B5EF4-FFF2-40B4-BE49-F238E27FC236}">
-                <a16:creationId xmlns:a16="http://schemas.microsoft.com/office/drawing/2014/main" id="{48868CF5-E67D-4BFC-8019-42DB0677DF8C}"/>
+                <a16:creationId xmlns:a16="http://schemas.microsoft.com/office/drawing/2014/main" id="{69812379-64EC-4CCA-940E-8F9D8B0AE431}"/>
               </a:ext>
             </a:extLst>
           </p:cNvPr>
@@ -6260,7 +6260,7 @@
           <p:cNvPr id="6" name="core-no-0">
             <a:extLst xmlns:a="http://schemas.openxmlformats.org/drawingml/2006/main">
               <a:ext uri="{FF2B5EF4-FFF2-40B4-BE49-F238E27FC236}">
-                <a16:creationId xmlns:a16="http://schemas.microsoft.com/office/drawing/2014/main" id="{5C922C93-16E5-4BF3-A9A0-A38EC99A0E35}"/>
+                <a16:creationId xmlns:a16="http://schemas.microsoft.com/office/drawing/2014/main" id="{5388E0CA-AE43-4C65-89A5-59C35031CDC1}"/>
               </a:ext>
             </a:extLst>
           </p:cNvPr>
@@ -6318,7 +6318,7 @@
           <p:cNvPr id="7" name="core-label-0">
             <a:extLst xmlns:a="http://schemas.openxmlformats.org/drawingml/2006/main">
               <a:ext uri="{FF2B5EF4-FFF2-40B4-BE49-F238E27FC236}">
-                <a16:creationId xmlns:a16="http://schemas.microsoft.com/office/drawing/2014/main" id="{E4292884-4202-4782-9205-CDC9D09F5E12}"/>
+                <a16:creationId xmlns:a16="http://schemas.microsoft.com/office/drawing/2014/main" id="{E1304C29-F830-48E4-98C3-3E390508D4B2}"/>
               </a:ext>
             </a:extLst>
           </p:cNvPr>
@@ -6376,7 +6376,7 @@
           <p:cNvPr id="8" name="core-body-0">
             <a:extLst xmlns:a="http://schemas.openxmlformats.org/drawingml/2006/main">
               <a:ext uri="{FF2B5EF4-FFF2-40B4-BE49-F238E27FC236}">
-                <a16:creationId xmlns:a16="http://schemas.microsoft.com/office/drawing/2014/main" id="{84DD0489-C331-4CA7-B77C-98800A629C0C}"/>
+                <a16:creationId xmlns:a16="http://schemas.microsoft.com/office/drawing/2014/main" id="{48C3FB07-87D6-42B8-9D00-755419E46CCA}"/>
               </a:ext>
             </a:extLst>
           </p:cNvPr>
@@ -6440,7 +6440,7 @@
           <p:cNvPr id="9" name="core-no-1">
             <a:extLst xmlns:a="http://schemas.openxmlformats.org/drawingml/2006/main">
               <a:ext uri="{FF2B5EF4-FFF2-40B4-BE49-F238E27FC236}">
-                <a16:creationId xmlns:a16="http://schemas.microsoft.com/office/drawing/2014/main" id="{CE328E42-94DB-48AE-A5E1-93D3BCFAD466}"/>
+                <a16:creationId xmlns:a16="http://schemas.microsoft.com/office/drawing/2014/main" id="{64967489-A13B-4974-A671-CFE3FC297322}"/>
               </a:ext>
             </a:extLst>
           </p:cNvPr>
@@ -6498,7 +6498,7 @@
           <p:cNvPr id="10" name="core-body-1">
             <a:extLst xmlns:a="http://schemas.openxmlformats.org/drawingml/2006/main">
               <a:ext uri="{FF2B5EF4-FFF2-40B4-BE49-F238E27FC236}">
-                <a16:creationId xmlns:a16="http://schemas.microsoft.com/office/drawing/2014/main" id="{9A9F127B-7BE0-4BBA-A676-3158168C1C4D}"/>
+                <a16:creationId xmlns:a16="http://schemas.microsoft.com/office/drawing/2014/main" id="{2CB79A4A-2002-4A52-8745-5924898A8E26}"/>
               </a:ext>
             </a:extLst>
           </p:cNvPr>
@@ -6562,7 +6562,7 @@
           <p:cNvPr id="11" name="core-no-2">
             <a:extLst xmlns:a="http://schemas.openxmlformats.org/drawingml/2006/main">
               <a:ext uri="{FF2B5EF4-FFF2-40B4-BE49-F238E27FC236}">
-                <a16:creationId xmlns:a16="http://schemas.microsoft.com/office/drawing/2014/main" id="{E7E8F517-F4BF-4DAC-AFA2-3310215DB38F}"/>
+                <a16:creationId xmlns:a16="http://schemas.microsoft.com/office/drawing/2014/main" id="{66B5232A-4D07-4837-ADAE-E682BD81F0CA}"/>
               </a:ext>
             </a:extLst>
           </p:cNvPr>
@@ -6620,7 +6620,7 @@
           <p:cNvPr id="12" name="core-body-2">
             <a:extLst xmlns:a="http://schemas.openxmlformats.org/drawingml/2006/main">
               <a:ext uri="{FF2B5EF4-FFF2-40B4-BE49-F238E27FC236}">
-                <a16:creationId xmlns:a16="http://schemas.microsoft.com/office/drawing/2014/main" id="{EEE285B2-CDC1-4A6F-98DA-31AD99E5F2BA}"/>
+                <a16:creationId xmlns:a16="http://schemas.microsoft.com/office/drawing/2014/main" id="{BD83A30D-1E52-49E2-A713-DE104E9F868A}"/>
               </a:ext>
             </a:extLst>
           </p:cNvPr>
@@ -6684,7 +6684,7 @@
           <p:cNvPr id="13" name="s3-takeaway-rule">
             <a:extLst xmlns:a="http://schemas.openxmlformats.org/drawingml/2006/main">
               <a:ext uri="{FF2B5EF4-FFF2-40B4-BE49-F238E27FC236}">
-                <a16:creationId xmlns:a16="http://schemas.microsoft.com/office/drawing/2014/main" id="{8251F13D-E4C6-4483-97AB-393A799511A2}"/>
+                <a16:creationId xmlns:a16="http://schemas.microsoft.com/office/drawing/2014/main" id="{BF211B6A-1C1D-4E40-911F-629B2371C42A}"/>
               </a:ext>
             </a:extLst>
           </p:cNvPr>
@@ -6717,7 +6717,7 @@
           <p:cNvPr id="14" name="s3-takeaway">
             <a:extLst xmlns:a="http://schemas.openxmlformats.org/drawingml/2006/main">
               <a:ext uri="{FF2B5EF4-FFF2-40B4-BE49-F238E27FC236}">
-                <a16:creationId xmlns:a16="http://schemas.microsoft.com/office/drawing/2014/main" id="{9F56F69B-A414-4658-9382-F7A61F6B6D42}"/>
+                <a16:creationId xmlns:a16="http://schemas.microsoft.com/office/drawing/2014/main" id="{580117BC-0BB4-46D8-9A91-B013345C7681}"/>
               </a:ext>
             </a:extLst>
           </p:cNvPr>
@@ -6773,7 +6773,7 @@
     </p:spTree>
     <p:extLst>
       <p:ext uri="{BB962C8B-B14F-4D97-AF65-F5344CB8AC3E}">
-        <p14:creationId xmlns:p14="http://schemas.microsoft.com/office/powerpoint/2010/main" val="1866555709"/>
+        <p14:creationId xmlns:p14="http://schemas.microsoft.com/office/powerpoint/2010/main" val="575578909"/>
       </p:ext>
     </p:extLst>
   </p:cSld>
@@ -6804,7 +6804,7 @@
           <p:cNvPr id="1" name="s4-rule">
             <a:extLst xmlns:a="http://schemas.openxmlformats.org/drawingml/2006/main">
               <a:ext uri="{FF2B5EF4-FFF2-40B4-BE49-F238E27FC236}">
-                <a16:creationId xmlns:a16="http://schemas.microsoft.com/office/drawing/2014/main" id="{A8B7952D-AAC8-47AA-B8A5-70A8E32D4AE7}"/>
+                <a16:creationId xmlns:a16="http://schemas.microsoft.com/office/drawing/2014/main" id="{BBB047B1-3660-484F-A96B-C2584B324D41}"/>
               </a:ext>
             </a:extLst>
           </p:cNvPr>
@@ -6837,7 +6837,7 @@
           <p:cNvPr id="2" name="s4-eyebrow">
             <a:extLst xmlns:a="http://schemas.openxmlformats.org/drawingml/2006/main">
               <a:ext uri="{FF2B5EF4-FFF2-40B4-BE49-F238E27FC236}">
-                <a16:creationId xmlns:a16="http://schemas.microsoft.com/office/drawing/2014/main" id="{C8ECFFAF-DFF2-46AA-A756-3D0AB184A9C2}"/>
+                <a16:creationId xmlns:a16="http://schemas.microsoft.com/office/drawing/2014/main" id="{070B646A-9903-4CE7-BA36-C18B07008D14}"/>
               </a:ext>
             </a:extLst>
           </p:cNvPr>
@@ -6895,7 +6895,7 @@
           <p:cNvPr id="3" name="s4-title">
             <a:extLst xmlns:a="http://schemas.openxmlformats.org/drawingml/2006/main">
               <a:ext uri="{FF2B5EF4-FFF2-40B4-BE49-F238E27FC236}">
-                <a16:creationId xmlns:a16="http://schemas.microsoft.com/office/drawing/2014/main" id="{235B41AC-428A-4207-87B8-58E7CA30DBC4}"/>
+                <a16:creationId xmlns:a16="http://schemas.microsoft.com/office/drawing/2014/main" id="{90AFFEA3-0157-4B67-90A9-D46E1352A73E}"/>
               </a:ext>
             </a:extLst>
           </p:cNvPr>
@@ -6953,7 +6953,7 @@
           <p:cNvPr id="4" name="s4-footer">
             <a:extLst xmlns:a="http://schemas.openxmlformats.org/drawingml/2006/main">
               <a:ext uri="{FF2B5EF4-FFF2-40B4-BE49-F238E27FC236}">
-                <a16:creationId xmlns:a16="http://schemas.microsoft.com/office/drawing/2014/main" id="{A0C27F6C-B23F-406B-B1D0-6ACC369E8B37}"/>
+                <a16:creationId xmlns:a16="http://schemas.microsoft.com/office/drawing/2014/main" id="{AD5B90FA-42B7-4054-A342-0B8E920C8084}"/>
               </a:ext>
             </a:extLst>
           </p:cNvPr>
@@ -6984,7 +6984,7 @@
           <p:cNvPr id="5" name="s4-identity">
             <a:extLst xmlns:a="http://schemas.openxmlformats.org/drawingml/2006/main">
               <a:ext uri="{FF2B5EF4-FFF2-40B4-BE49-F238E27FC236}">
-                <a16:creationId xmlns:a16="http://schemas.microsoft.com/office/drawing/2014/main" id="{63B05186-8AEF-4F40-ABC2-2A2D3FF36EE5}"/>
+                <a16:creationId xmlns:a16="http://schemas.microsoft.com/office/drawing/2014/main" id="{792B955F-69A6-468D-B5AE-35EE78619D65}"/>
               </a:ext>
             </a:extLst>
           </p:cNvPr>
@@ -7042,7 +7042,7 @@
           <p:cNvPr id="6" name="core-no-0">
             <a:extLst xmlns:a="http://schemas.openxmlformats.org/drawingml/2006/main">
               <a:ext uri="{FF2B5EF4-FFF2-40B4-BE49-F238E27FC236}">
-                <a16:creationId xmlns:a16="http://schemas.microsoft.com/office/drawing/2014/main" id="{600CCDD1-9616-4CE0-A163-A31AAA4E98BE}"/>
+                <a16:creationId xmlns:a16="http://schemas.microsoft.com/office/drawing/2014/main" id="{4AE5930D-FCB9-4DBE-A7F9-8786016FBB9F}"/>
               </a:ext>
             </a:extLst>
           </p:cNvPr>
@@ -7100,7 +7100,7 @@
           <p:cNvPr id="7" name="core-label-0">
             <a:extLst xmlns:a="http://schemas.openxmlformats.org/drawingml/2006/main">
               <a:ext uri="{FF2B5EF4-FFF2-40B4-BE49-F238E27FC236}">
-                <a16:creationId xmlns:a16="http://schemas.microsoft.com/office/drawing/2014/main" id="{5FDE658B-22F0-4154-A7E9-04523076EE68}"/>
+                <a16:creationId xmlns:a16="http://schemas.microsoft.com/office/drawing/2014/main" id="{36873719-E9E8-47C9-AF39-302E7AC0EEA5}"/>
               </a:ext>
             </a:extLst>
           </p:cNvPr>
@@ -7158,7 +7158,7 @@
           <p:cNvPr id="8" name="core-body-0">
             <a:extLst xmlns:a="http://schemas.openxmlformats.org/drawingml/2006/main">
               <a:ext uri="{FF2B5EF4-FFF2-40B4-BE49-F238E27FC236}">
-                <a16:creationId xmlns:a16="http://schemas.microsoft.com/office/drawing/2014/main" id="{E0B15D20-16E7-4BFB-88AA-79AA7F2BACAF}"/>
+                <a16:creationId xmlns:a16="http://schemas.microsoft.com/office/drawing/2014/main" id="{2E24D78E-C8CA-44B5-8104-8E79F381A981}"/>
               </a:ext>
             </a:extLst>
           </p:cNvPr>
@@ -7222,7 +7222,7 @@
           <p:cNvPr id="9" name="core-no-1">
             <a:extLst xmlns:a="http://schemas.openxmlformats.org/drawingml/2006/main">
               <a:ext uri="{FF2B5EF4-FFF2-40B4-BE49-F238E27FC236}">
-                <a16:creationId xmlns:a16="http://schemas.microsoft.com/office/drawing/2014/main" id="{EB9D5BBD-8C26-4481-A66F-052E239A5A2E}"/>
+                <a16:creationId xmlns:a16="http://schemas.microsoft.com/office/drawing/2014/main" id="{D17439C6-40A9-4278-B536-E60422BEF5AC}"/>
               </a:ext>
             </a:extLst>
           </p:cNvPr>
@@ -7280,7 +7280,7 @@
           <p:cNvPr id="10" name="core-body-1">
             <a:extLst xmlns:a="http://schemas.openxmlformats.org/drawingml/2006/main">
               <a:ext uri="{FF2B5EF4-FFF2-40B4-BE49-F238E27FC236}">
-                <a16:creationId xmlns:a16="http://schemas.microsoft.com/office/drawing/2014/main" id="{82FFBFCC-651D-44C1-92B4-054FDAD0C96B}"/>
+                <a16:creationId xmlns:a16="http://schemas.microsoft.com/office/drawing/2014/main" id="{9C2981FF-778A-4E33-AB0C-D1D4AB978102}"/>
               </a:ext>
             </a:extLst>
           </p:cNvPr>
@@ -7344,7 +7344,7 @@
           <p:cNvPr id="11" name="core-no-2">
             <a:extLst xmlns:a="http://schemas.openxmlformats.org/drawingml/2006/main">
               <a:ext uri="{FF2B5EF4-FFF2-40B4-BE49-F238E27FC236}">
-                <a16:creationId xmlns:a16="http://schemas.microsoft.com/office/drawing/2014/main" id="{8F4D1332-E4FA-4535-B364-C80EEDE38BF5}"/>
+                <a16:creationId xmlns:a16="http://schemas.microsoft.com/office/drawing/2014/main" id="{779BB4B4-428B-4A82-B803-03DDA8A3A4E9}"/>
               </a:ext>
             </a:extLst>
           </p:cNvPr>
@@ -7402,7 +7402,7 @@
           <p:cNvPr id="12" name="core-body-2">
             <a:extLst xmlns:a="http://schemas.openxmlformats.org/drawingml/2006/main">
               <a:ext uri="{FF2B5EF4-FFF2-40B4-BE49-F238E27FC236}">
-                <a16:creationId xmlns:a16="http://schemas.microsoft.com/office/drawing/2014/main" id="{AD2B67F7-1376-456E-9B1F-9251E2540824}"/>
+                <a16:creationId xmlns:a16="http://schemas.microsoft.com/office/drawing/2014/main" id="{B741FFDB-C0EE-484C-9E07-EF55C1EAE66D}"/>
               </a:ext>
             </a:extLst>
           </p:cNvPr>
@@ -7466,7 +7466,7 @@
           <p:cNvPr id="13" name="s4-takeaway-rule">
             <a:extLst xmlns:a="http://schemas.openxmlformats.org/drawingml/2006/main">
               <a:ext uri="{FF2B5EF4-FFF2-40B4-BE49-F238E27FC236}">
-                <a16:creationId xmlns:a16="http://schemas.microsoft.com/office/drawing/2014/main" id="{6FC66595-59C0-4231-BF30-F1E3598A7E6D}"/>
+                <a16:creationId xmlns:a16="http://schemas.microsoft.com/office/drawing/2014/main" id="{5A826D1A-C8A2-49E6-B693-511DEC4B26A5}"/>
               </a:ext>
             </a:extLst>
           </p:cNvPr>
@@ -7499,7 +7499,7 @@
           <p:cNvPr id="14" name="s4-takeaway">
             <a:extLst xmlns:a="http://schemas.openxmlformats.org/drawingml/2006/main">
               <a:ext uri="{FF2B5EF4-FFF2-40B4-BE49-F238E27FC236}">
-                <a16:creationId xmlns:a16="http://schemas.microsoft.com/office/drawing/2014/main" id="{82F9E66C-3537-4533-BA7F-6580436AD646}"/>
+                <a16:creationId xmlns:a16="http://schemas.microsoft.com/office/drawing/2014/main" id="{B791DA1B-B83D-4C62-915B-C4384F10E405}"/>
               </a:ext>
             </a:extLst>
           </p:cNvPr>
@@ -7555,7 +7555,7 @@
     </p:spTree>
     <p:extLst>
       <p:ext uri="{BB962C8B-B14F-4D97-AF65-F5344CB8AC3E}">
-        <p14:creationId xmlns:p14="http://schemas.microsoft.com/office/powerpoint/2010/main" val="1057851211"/>
+        <p14:creationId xmlns:p14="http://schemas.microsoft.com/office/powerpoint/2010/main" val="615405058"/>
       </p:ext>
     </p:extLst>
   </p:cSld>
@@ -7586,7 +7586,7 @@
           <p:cNvPr id="1" name="s5-rule">
             <a:extLst xmlns:a="http://schemas.openxmlformats.org/drawingml/2006/main">
               <a:ext uri="{FF2B5EF4-FFF2-40B4-BE49-F238E27FC236}">
-                <a16:creationId xmlns:a16="http://schemas.microsoft.com/office/drawing/2014/main" id="{1172F798-F1EC-4FC0-BD4A-5A4A1FE4A055}"/>
+                <a16:creationId xmlns:a16="http://schemas.microsoft.com/office/drawing/2014/main" id="{DA73C38C-260E-45E3-8023-D059FA8A193D}"/>
               </a:ext>
             </a:extLst>
           </p:cNvPr>
@@ -7619,7 +7619,7 @@
           <p:cNvPr id="2" name="s5-eyebrow">
             <a:extLst xmlns:a="http://schemas.openxmlformats.org/drawingml/2006/main">
               <a:ext uri="{FF2B5EF4-FFF2-40B4-BE49-F238E27FC236}">
-                <a16:creationId xmlns:a16="http://schemas.microsoft.com/office/drawing/2014/main" id="{F75E642B-DCD6-475E-A953-727FCE2EF524}"/>
+                <a16:creationId xmlns:a16="http://schemas.microsoft.com/office/drawing/2014/main" id="{D274FBA0-B31D-45FF-9724-8949A840127F}"/>
               </a:ext>
             </a:extLst>
           </p:cNvPr>
@@ -7677,7 +7677,7 @@
           <p:cNvPr id="3" name="s5-title">
             <a:extLst xmlns:a="http://schemas.openxmlformats.org/drawingml/2006/main">
               <a:ext uri="{FF2B5EF4-FFF2-40B4-BE49-F238E27FC236}">
-                <a16:creationId xmlns:a16="http://schemas.microsoft.com/office/drawing/2014/main" id="{83F6EF20-D635-47ED-A8BE-B1A4711B6ECC}"/>
+                <a16:creationId xmlns:a16="http://schemas.microsoft.com/office/drawing/2014/main" id="{30EC12CF-3300-4321-9406-E6127C04F1AE}"/>
               </a:ext>
             </a:extLst>
           </p:cNvPr>
@@ -7735,7 +7735,7 @@
           <p:cNvPr id="4" name="s5-footer">
             <a:extLst xmlns:a="http://schemas.openxmlformats.org/drawingml/2006/main">
               <a:ext uri="{FF2B5EF4-FFF2-40B4-BE49-F238E27FC236}">
-                <a16:creationId xmlns:a16="http://schemas.microsoft.com/office/drawing/2014/main" id="{6AE841FF-6782-4704-BAC4-D85220A3FBB7}"/>
+                <a16:creationId xmlns:a16="http://schemas.microsoft.com/office/drawing/2014/main" id="{EAB5578D-BE0E-45DF-B7FB-0F6AB5D2BCCD}"/>
               </a:ext>
             </a:extLst>
           </p:cNvPr>
@@ -7766,7 +7766,7 @@
           <p:cNvPr id="5" name="s5-identity">
             <a:extLst xmlns:a="http://schemas.openxmlformats.org/drawingml/2006/main">
               <a:ext uri="{FF2B5EF4-FFF2-40B4-BE49-F238E27FC236}">
-                <a16:creationId xmlns:a16="http://schemas.microsoft.com/office/drawing/2014/main" id="{701CBA45-1E93-4BE0-B8A2-2DE9A01F4206}"/>
+                <a16:creationId xmlns:a16="http://schemas.microsoft.com/office/drawing/2014/main" id="{5795AB20-665F-4A4E-BCD4-46E5BAAC9F3B}"/>
               </a:ext>
             </a:extLst>
           </p:cNvPr>
@@ -7824,7 +7824,7 @@
           <p:cNvPr id="6" name="core-no-0">
             <a:extLst xmlns:a="http://schemas.openxmlformats.org/drawingml/2006/main">
               <a:ext uri="{FF2B5EF4-FFF2-40B4-BE49-F238E27FC236}">
-                <a16:creationId xmlns:a16="http://schemas.microsoft.com/office/drawing/2014/main" id="{1BDEC623-03F8-4C42-8E36-76D0F132E918}"/>
+                <a16:creationId xmlns:a16="http://schemas.microsoft.com/office/drawing/2014/main" id="{3643A5BB-0110-40AB-8AE2-FC707DA9D5E4}"/>
               </a:ext>
             </a:extLst>
           </p:cNvPr>
@@ -7882,7 +7882,7 @@
           <p:cNvPr id="7" name="core-label-0">
             <a:extLst xmlns:a="http://schemas.openxmlformats.org/drawingml/2006/main">
               <a:ext uri="{FF2B5EF4-FFF2-40B4-BE49-F238E27FC236}">
-                <a16:creationId xmlns:a16="http://schemas.microsoft.com/office/drawing/2014/main" id="{AED1F751-C2BD-45E1-82C0-E8214CB99704}"/>
+                <a16:creationId xmlns:a16="http://schemas.microsoft.com/office/drawing/2014/main" id="{2442449B-6606-49F4-9473-BA6623BD2185}"/>
               </a:ext>
             </a:extLst>
           </p:cNvPr>
@@ -7940,7 +7940,7 @@
           <p:cNvPr id="8" name="core-body-0">
             <a:extLst xmlns:a="http://schemas.openxmlformats.org/drawingml/2006/main">
               <a:ext uri="{FF2B5EF4-FFF2-40B4-BE49-F238E27FC236}">
-                <a16:creationId xmlns:a16="http://schemas.microsoft.com/office/drawing/2014/main" id="{D8AFDB63-2C5D-4DB4-ADD4-FFE77D985A63}"/>
+                <a16:creationId xmlns:a16="http://schemas.microsoft.com/office/drawing/2014/main" id="{F5397ABD-49EC-47FA-9C96-54DD86A162B6}"/>
               </a:ext>
             </a:extLst>
           </p:cNvPr>
@@ -8004,7 +8004,7 @@
           <p:cNvPr id="9" name="core-no-1">
             <a:extLst xmlns:a="http://schemas.openxmlformats.org/drawingml/2006/main">
               <a:ext uri="{FF2B5EF4-FFF2-40B4-BE49-F238E27FC236}">
-                <a16:creationId xmlns:a16="http://schemas.microsoft.com/office/drawing/2014/main" id="{3BDC810F-D839-452F-ABAC-7270A0FF8A35}"/>
+                <a16:creationId xmlns:a16="http://schemas.microsoft.com/office/drawing/2014/main" id="{A05868E1-82F0-477F-9C1F-1FF38A7D1B8B}"/>
               </a:ext>
             </a:extLst>
           </p:cNvPr>
@@ -8062,7 +8062,7 @@
           <p:cNvPr id="10" name="core-body-1">
             <a:extLst xmlns:a="http://schemas.openxmlformats.org/drawingml/2006/main">
               <a:ext uri="{FF2B5EF4-FFF2-40B4-BE49-F238E27FC236}">
-                <a16:creationId xmlns:a16="http://schemas.microsoft.com/office/drawing/2014/main" id="{5A73D4E4-BD6C-46AA-AD6E-D3E71EE4F518}"/>
+                <a16:creationId xmlns:a16="http://schemas.microsoft.com/office/drawing/2014/main" id="{023D5C06-C85A-41BF-A78B-3CE2557C5B28}"/>
               </a:ext>
             </a:extLst>
           </p:cNvPr>
@@ -8126,7 +8126,7 @@
           <p:cNvPr id="11" name="s5-takeaway-rule">
             <a:extLst xmlns:a="http://schemas.openxmlformats.org/drawingml/2006/main">
               <a:ext uri="{FF2B5EF4-FFF2-40B4-BE49-F238E27FC236}">
-                <a16:creationId xmlns:a16="http://schemas.microsoft.com/office/drawing/2014/main" id="{70F798BE-3202-466E-8D22-36B403BC567F}"/>
+                <a16:creationId xmlns:a16="http://schemas.microsoft.com/office/drawing/2014/main" id="{582EB692-99E5-4383-B797-9CA3AED6770D}"/>
               </a:ext>
             </a:extLst>
           </p:cNvPr>
@@ -8159,7 +8159,7 @@
           <p:cNvPr id="12" name="s5-takeaway">
             <a:extLst xmlns:a="http://schemas.openxmlformats.org/drawingml/2006/main">
               <a:ext uri="{FF2B5EF4-FFF2-40B4-BE49-F238E27FC236}">
-                <a16:creationId xmlns:a16="http://schemas.microsoft.com/office/drawing/2014/main" id="{634B8FA3-8C5E-4330-A8E3-284C0DF3CF02}"/>
+                <a16:creationId xmlns:a16="http://schemas.microsoft.com/office/drawing/2014/main" id="{AFF76F2D-ACDA-4938-BD55-53CA692434A5}"/>
               </a:ext>
             </a:extLst>
           </p:cNvPr>
@@ -8215,7 +8215,7 @@
     </p:spTree>
     <p:extLst>
       <p:ext uri="{BB962C8B-B14F-4D97-AF65-F5344CB8AC3E}">
-        <p14:creationId xmlns:p14="http://schemas.microsoft.com/office/powerpoint/2010/main" val="330320248"/>
+        <p14:creationId xmlns:p14="http://schemas.microsoft.com/office/powerpoint/2010/main" val="952855476"/>
       </p:ext>
     </p:extLst>
   </p:cSld>
@@ -8246,7 +8246,7 @@
           <p:cNvPr id="1" name="s6-rule">
             <a:extLst xmlns:a="http://schemas.openxmlformats.org/drawingml/2006/main">
               <a:ext uri="{FF2B5EF4-FFF2-40B4-BE49-F238E27FC236}">
-                <a16:creationId xmlns:a16="http://schemas.microsoft.com/office/drawing/2014/main" id="{364FCC0A-F617-45A8-A534-E7A7C927B852}"/>
+                <a16:creationId xmlns:a16="http://schemas.microsoft.com/office/drawing/2014/main" id="{0639B858-3BD9-466C-BE50-56A48FCF8C43}"/>
               </a:ext>
             </a:extLst>
           </p:cNvPr>
@@ -8279,7 +8279,7 @@
           <p:cNvPr id="2" name="s6-eyebrow">
             <a:extLst xmlns:a="http://schemas.openxmlformats.org/drawingml/2006/main">
               <a:ext uri="{FF2B5EF4-FFF2-40B4-BE49-F238E27FC236}">
-                <a16:creationId xmlns:a16="http://schemas.microsoft.com/office/drawing/2014/main" id="{1C75E0BA-BF97-4182-8D4C-4105E59F3B73}"/>
+                <a16:creationId xmlns:a16="http://schemas.microsoft.com/office/drawing/2014/main" id="{9FEFC3C2-BB4C-45A3-8BD3-73063D6FDCED}"/>
               </a:ext>
             </a:extLst>
           </p:cNvPr>
@@ -8337,7 +8337,7 @@
           <p:cNvPr id="3" name="s6-title">
             <a:extLst xmlns:a="http://schemas.openxmlformats.org/drawingml/2006/main">
               <a:ext uri="{FF2B5EF4-FFF2-40B4-BE49-F238E27FC236}">
-                <a16:creationId xmlns:a16="http://schemas.microsoft.com/office/drawing/2014/main" id="{92F600AB-B6E3-4B91-B31D-606C0B5B49AB}"/>
+                <a16:creationId xmlns:a16="http://schemas.microsoft.com/office/drawing/2014/main" id="{7CEF619E-BA2D-45E8-A2C6-AFC9FE580E69}"/>
               </a:ext>
             </a:extLst>
           </p:cNvPr>
@@ -8395,7 +8395,7 @@
           <p:cNvPr id="4" name="s6-footer">
             <a:extLst xmlns:a="http://schemas.openxmlformats.org/drawingml/2006/main">
               <a:ext uri="{FF2B5EF4-FFF2-40B4-BE49-F238E27FC236}">
-                <a16:creationId xmlns:a16="http://schemas.microsoft.com/office/drawing/2014/main" id="{9CF331C6-F0A2-4F73-A936-22CD537BF6C8}"/>
+                <a16:creationId xmlns:a16="http://schemas.microsoft.com/office/drawing/2014/main" id="{BF4FCA02-A190-4820-A530-A8EADCEBA379}"/>
               </a:ext>
             </a:extLst>
           </p:cNvPr>
@@ -8426,7 +8426,7 @@
           <p:cNvPr id="5" name="s6-identity">
             <a:extLst xmlns:a="http://schemas.openxmlformats.org/drawingml/2006/main">
               <a:ext uri="{FF2B5EF4-FFF2-40B4-BE49-F238E27FC236}">
-                <a16:creationId xmlns:a16="http://schemas.microsoft.com/office/drawing/2014/main" id="{54B5ECAD-38C5-4F22-85DD-A7A2840221D4}"/>
+                <a16:creationId xmlns:a16="http://schemas.microsoft.com/office/drawing/2014/main" id="{8C6AE882-B286-4020-9DD7-AF66A884FB3E}"/>
               </a:ext>
             </a:extLst>
           </p:cNvPr>
@@ -8484,7 +8484,7 @@
           <p:cNvPr id="6" name="core-no-0">
             <a:extLst xmlns:a="http://schemas.openxmlformats.org/drawingml/2006/main">
               <a:ext uri="{FF2B5EF4-FFF2-40B4-BE49-F238E27FC236}">
-                <a16:creationId xmlns:a16="http://schemas.microsoft.com/office/drawing/2014/main" id="{A703A0F9-AE7F-4B5D-B1AE-4E1B73EF32C7}"/>
+                <a16:creationId xmlns:a16="http://schemas.microsoft.com/office/drawing/2014/main" id="{449FF0B6-5953-4C07-818E-122CD4A34256}"/>
               </a:ext>
             </a:extLst>
           </p:cNvPr>
@@ -8542,7 +8542,7 @@
           <p:cNvPr id="7" name="core-label-0">
             <a:extLst xmlns:a="http://schemas.openxmlformats.org/drawingml/2006/main">
               <a:ext uri="{FF2B5EF4-FFF2-40B4-BE49-F238E27FC236}">
-                <a16:creationId xmlns:a16="http://schemas.microsoft.com/office/drawing/2014/main" id="{D4863C83-9917-4806-8748-605C5D20C2BB}"/>
+                <a16:creationId xmlns:a16="http://schemas.microsoft.com/office/drawing/2014/main" id="{1B4C6B73-054C-4B45-A105-7B69C8249FC4}"/>
               </a:ext>
             </a:extLst>
           </p:cNvPr>
@@ -8600,7 +8600,7 @@
           <p:cNvPr id="8" name="core-body-0">
             <a:extLst xmlns:a="http://schemas.openxmlformats.org/drawingml/2006/main">
               <a:ext uri="{FF2B5EF4-FFF2-40B4-BE49-F238E27FC236}">
-                <a16:creationId xmlns:a16="http://schemas.microsoft.com/office/drawing/2014/main" id="{DE64AF49-A1D7-40B4-BF76-346E54502FD6}"/>
+                <a16:creationId xmlns:a16="http://schemas.microsoft.com/office/drawing/2014/main" id="{F6073330-34CC-4AAD-B983-44549229274A}"/>
               </a:ext>
             </a:extLst>
           </p:cNvPr>
@@ -8664,7 +8664,7 @@
           <p:cNvPr id="9" name="core-no-1">
             <a:extLst xmlns:a="http://schemas.openxmlformats.org/drawingml/2006/main">
               <a:ext uri="{FF2B5EF4-FFF2-40B4-BE49-F238E27FC236}">
-                <a16:creationId xmlns:a16="http://schemas.microsoft.com/office/drawing/2014/main" id="{22EE9D0B-2404-42BB-A177-4B988BE2C33D}"/>
+                <a16:creationId xmlns:a16="http://schemas.microsoft.com/office/drawing/2014/main" id="{7E9440D6-EC8F-4FA0-A7D1-B0E0CCE9E711}"/>
               </a:ext>
             </a:extLst>
           </p:cNvPr>
@@ -8722,7 +8722,7 @@
           <p:cNvPr id="10" name="core-body-1">
             <a:extLst xmlns:a="http://schemas.openxmlformats.org/drawingml/2006/main">
               <a:ext uri="{FF2B5EF4-FFF2-40B4-BE49-F238E27FC236}">
-                <a16:creationId xmlns:a16="http://schemas.microsoft.com/office/drawing/2014/main" id="{B7C7B986-743B-42C2-8DA7-B752DE6509DE}"/>
+                <a16:creationId xmlns:a16="http://schemas.microsoft.com/office/drawing/2014/main" id="{D5F4AA2A-19C4-4478-A24F-78AB75034FBF}"/>
               </a:ext>
             </a:extLst>
           </p:cNvPr>
@@ -8786,7 +8786,7 @@
           <p:cNvPr id="11" name="s6-takeaway-rule">
             <a:extLst xmlns:a="http://schemas.openxmlformats.org/drawingml/2006/main">
               <a:ext uri="{FF2B5EF4-FFF2-40B4-BE49-F238E27FC236}">
-                <a16:creationId xmlns:a16="http://schemas.microsoft.com/office/drawing/2014/main" id="{532D4B44-2851-4C15-ABBB-1032515C8FDB}"/>
+                <a16:creationId xmlns:a16="http://schemas.microsoft.com/office/drawing/2014/main" id="{0D9A0090-835E-4F03-B7FA-7D0269A34DE1}"/>
               </a:ext>
             </a:extLst>
           </p:cNvPr>
@@ -8819,7 +8819,7 @@
           <p:cNvPr id="12" name="s6-takeaway">
             <a:extLst xmlns:a="http://schemas.openxmlformats.org/drawingml/2006/main">
               <a:ext uri="{FF2B5EF4-FFF2-40B4-BE49-F238E27FC236}">
-                <a16:creationId xmlns:a16="http://schemas.microsoft.com/office/drawing/2014/main" id="{1F13261A-E09C-4325-8789-4A12B87CD3E4}"/>
+                <a16:creationId xmlns:a16="http://schemas.microsoft.com/office/drawing/2014/main" id="{4FD53EC4-19A4-4145-BD2E-FAB522D78271}"/>
               </a:ext>
             </a:extLst>
           </p:cNvPr>
@@ -8875,7 +8875,7 @@
     </p:spTree>
     <p:extLst>
       <p:ext uri="{BB962C8B-B14F-4D97-AF65-F5344CB8AC3E}">
-        <p14:creationId xmlns:p14="http://schemas.microsoft.com/office/powerpoint/2010/main" val="1474648296"/>
+        <p14:creationId xmlns:p14="http://schemas.microsoft.com/office/powerpoint/2010/main" val="986658773"/>
       </p:ext>
     </p:extLst>
   </p:cSld>
@@ -8906,7 +8906,7 @@
           <p:cNvPr id="1" name="s7-rule">
             <a:extLst xmlns:a="http://schemas.openxmlformats.org/drawingml/2006/main">
               <a:ext uri="{FF2B5EF4-FFF2-40B4-BE49-F238E27FC236}">
-                <a16:creationId xmlns:a16="http://schemas.microsoft.com/office/drawing/2014/main" id="{529988F8-3C68-4FC1-964C-B654B7B7660F}"/>
+                <a16:creationId xmlns:a16="http://schemas.microsoft.com/office/drawing/2014/main" id="{C00A4A38-0598-4A67-9085-A5417D54D980}"/>
               </a:ext>
             </a:extLst>
           </p:cNvPr>
@@ -8939,7 +8939,7 @@
           <p:cNvPr id="2" name="s7-eyebrow">
             <a:extLst xmlns:a="http://schemas.openxmlformats.org/drawingml/2006/main">
               <a:ext uri="{FF2B5EF4-FFF2-40B4-BE49-F238E27FC236}">
-                <a16:creationId xmlns:a16="http://schemas.microsoft.com/office/drawing/2014/main" id="{30833B2E-1AE0-4664-8CF3-9F1B5E158522}"/>
+                <a16:creationId xmlns:a16="http://schemas.microsoft.com/office/drawing/2014/main" id="{3EF11A50-91D9-45EE-A11C-D3CEC77A514A}"/>
               </a:ext>
             </a:extLst>
           </p:cNvPr>
@@ -8997,7 +8997,7 @@
           <p:cNvPr id="3" name="s7-title">
             <a:extLst xmlns:a="http://schemas.openxmlformats.org/drawingml/2006/main">
               <a:ext uri="{FF2B5EF4-FFF2-40B4-BE49-F238E27FC236}">
-                <a16:creationId xmlns:a16="http://schemas.microsoft.com/office/drawing/2014/main" id="{921F8A4B-E902-4811-97CA-FBE18A7E1244}"/>
+                <a16:creationId xmlns:a16="http://schemas.microsoft.com/office/drawing/2014/main" id="{D4356608-393C-40DB-B643-C0C0143740D8}"/>
               </a:ext>
             </a:extLst>
           </p:cNvPr>
@@ -9055,7 +9055,7 @@
           <p:cNvPr id="4" name="s7-footer">
             <a:extLst xmlns:a="http://schemas.openxmlformats.org/drawingml/2006/main">
               <a:ext uri="{FF2B5EF4-FFF2-40B4-BE49-F238E27FC236}">
-                <a16:creationId xmlns:a16="http://schemas.microsoft.com/office/drawing/2014/main" id="{EBC50177-1B71-4845-B191-32B42010FC6C}"/>
+                <a16:creationId xmlns:a16="http://schemas.microsoft.com/office/drawing/2014/main" id="{AD522ECB-D1C2-49B0-9D6B-952C9E4BE5D4}"/>
               </a:ext>
             </a:extLst>
           </p:cNvPr>
@@ -9086,7 +9086,7 @@
           <p:cNvPr id="5" name="s7-identity">
             <a:extLst xmlns:a="http://schemas.openxmlformats.org/drawingml/2006/main">
               <a:ext uri="{FF2B5EF4-FFF2-40B4-BE49-F238E27FC236}">
-                <a16:creationId xmlns:a16="http://schemas.microsoft.com/office/drawing/2014/main" id="{7370F907-B709-4A0B-B151-6F14CB7992B3}"/>
+                <a16:creationId xmlns:a16="http://schemas.microsoft.com/office/drawing/2014/main" id="{84206E95-E6C7-4430-A530-0483B4AEE367}"/>
               </a:ext>
             </a:extLst>
           </p:cNvPr>
@@ -9144,7 +9144,7 @@
           <p:cNvPr id="6" name="core-no-0">
             <a:extLst xmlns:a="http://schemas.openxmlformats.org/drawingml/2006/main">
               <a:ext uri="{FF2B5EF4-FFF2-40B4-BE49-F238E27FC236}">
-                <a16:creationId xmlns:a16="http://schemas.microsoft.com/office/drawing/2014/main" id="{B7255395-CCFD-484F-8DA9-0EFA3A324034}"/>
+                <a16:creationId xmlns:a16="http://schemas.microsoft.com/office/drawing/2014/main" id="{564ECCC5-3349-4429-9DF2-52EED0AEE8FC}"/>
               </a:ext>
             </a:extLst>
           </p:cNvPr>
@@ -9202,7 +9202,7 @@
           <p:cNvPr id="7" name="core-label-0">
             <a:extLst xmlns:a="http://schemas.openxmlformats.org/drawingml/2006/main">
               <a:ext uri="{FF2B5EF4-FFF2-40B4-BE49-F238E27FC236}">
-                <a16:creationId xmlns:a16="http://schemas.microsoft.com/office/drawing/2014/main" id="{6C4F2E77-99C3-48E8-ADCF-A4D987D5BD35}"/>
+                <a16:creationId xmlns:a16="http://schemas.microsoft.com/office/drawing/2014/main" id="{C352EBAE-DEC5-454D-8583-9E192345EA28}"/>
               </a:ext>
             </a:extLst>
           </p:cNvPr>
@@ -9260,7 +9260,7 @@
           <p:cNvPr id="8" name="core-body-0">
             <a:extLst xmlns:a="http://schemas.openxmlformats.org/drawingml/2006/main">
               <a:ext uri="{FF2B5EF4-FFF2-40B4-BE49-F238E27FC236}">
-                <a16:creationId xmlns:a16="http://schemas.microsoft.com/office/drawing/2014/main" id="{056D2A82-14D7-430E-ACC7-FBF7CB550D30}"/>
+                <a16:creationId xmlns:a16="http://schemas.microsoft.com/office/drawing/2014/main" id="{50DF8568-555D-42B5-89A1-C2F7884086B1}"/>
               </a:ext>
             </a:extLst>
           </p:cNvPr>
@@ -9324,7 +9324,7 @@
           <p:cNvPr id="9" name="core-no-1">
             <a:extLst xmlns:a="http://schemas.openxmlformats.org/drawingml/2006/main">
               <a:ext uri="{FF2B5EF4-FFF2-40B4-BE49-F238E27FC236}">
-                <a16:creationId xmlns:a16="http://schemas.microsoft.com/office/drawing/2014/main" id="{5C7F3A08-F4FA-43E9-9C83-B9B5E171289A}"/>
+                <a16:creationId xmlns:a16="http://schemas.microsoft.com/office/drawing/2014/main" id="{9C393243-B1D7-4D2B-91A7-39EAED68D0B6}"/>
               </a:ext>
             </a:extLst>
           </p:cNvPr>
@@ -9382,7 +9382,7 @@
           <p:cNvPr id="10" name="core-body-1">
             <a:extLst xmlns:a="http://schemas.openxmlformats.org/drawingml/2006/main">
               <a:ext uri="{FF2B5EF4-FFF2-40B4-BE49-F238E27FC236}">
-                <a16:creationId xmlns:a16="http://schemas.microsoft.com/office/drawing/2014/main" id="{7084B08B-7B48-4B71-9B58-77CEDA7BFB98}"/>
+                <a16:creationId xmlns:a16="http://schemas.microsoft.com/office/drawing/2014/main" id="{7F1C6113-5EED-4299-8D61-F6E53563497B}"/>
               </a:ext>
             </a:extLst>
           </p:cNvPr>
@@ -9446,7 +9446,7 @@
           <p:cNvPr id="11" name="s7-takeaway-rule">
             <a:extLst xmlns:a="http://schemas.openxmlformats.org/drawingml/2006/main">
               <a:ext uri="{FF2B5EF4-FFF2-40B4-BE49-F238E27FC236}">
-                <a16:creationId xmlns:a16="http://schemas.microsoft.com/office/drawing/2014/main" id="{B5DA53A9-891D-4835-8CDC-52593F091EC2}"/>
+                <a16:creationId xmlns:a16="http://schemas.microsoft.com/office/drawing/2014/main" id="{79C95F60-BE98-4467-9329-01893918A163}"/>
               </a:ext>
             </a:extLst>
           </p:cNvPr>
@@ -9479,7 +9479,7 @@
           <p:cNvPr id="12" name="s7-takeaway">
             <a:extLst xmlns:a="http://schemas.openxmlformats.org/drawingml/2006/main">
               <a:ext uri="{FF2B5EF4-FFF2-40B4-BE49-F238E27FC236}">
-                <a16:creationId xmlns:a16="http://schemas.microsoft.com/office/drawing/2014/main" id="{4E19513C-61B7-42E3-A793-A8C68EB833CF}"/>
+                <a16:creationId xmlns:a16="http://schemas.microsoft.com/office/drawing/2014/main" id="{59B573A8-3B18-4FDB-8BAD-E2B86C488484}"/>
               </a:ext>
             </a:extLst>
           </p:cNvPr>
@@ -9535,7 +9535,7 @@
     </p:spTree>
     <p:extLst>
       <p:ext uri="{BB962C8B-B14F-4D97-AF65-F5344CB8AC3E}">
-        <p14:creationId xmlns:p14="http://schemas.microsoft.com/office/powerpoint/2010/main" val="1946175582"/>
+        <p14:creationId xmlns:p14="http://schemas.microsoft.com/office/powerpoint/2010/main" val="1771193682"/>
       </p:ext>
     </p:extLst>
   </p:cSld>
@@ -9566,7 +9566,7 @@
           <p:cNvPr id="1" name="s8-rule">
             <a:extLst xmlns:a="http://schemas.openxmlformats.org/drawingml/2006/main">
               <a:ext uri="{FF2B5EF4-FFF2-40B4-BE49-F238E27FC236}">
-                <a16:creationId xmlns:a16="http://schemas.microsoft.com/office/drawing/2014/main" id="{AF28ED51-4FB4-4AE4-BF11-887B76416AE9}"/>
+                <a16:creationId xmlns:a16="http://schemas.microsoft.com/office/drawing/2014/main" id="{0B4C535C-173C-4B60-8FA9-8BE4B39FC66C}"/>
               </a:ext>
             </a:extLst>
           </p:cNvPr>
@@ -9599,7 +9599,7 @@
           <p:cNvPr id="2" name="s8-eyebrow">
             <a:extLst xmlns:a="http://schemas.openxmlformats.org/drawingml/2006/main">
               <a:ext uri="{FF2B5EF4-FFF2-40B4-BE49-F238E27FC236}">
-                <a16:creationId xmlns:a16="http://schemas.microsoft.com/office/drawing/2014/main" id="{96574D74-C65B-46F7-9C53-6DB087905948}"/>
+                <a16:creationId xmlns:a16="http://schemas.microsoft.com/office/drawing/2014/main" id="{4EBA5864-63BE-4C8D-B52D-2CD1684062F6}"/>
               </a:ext>
             </a:extLst>
           </p:cNvPr>
@@ -9657,7 +9657,7 @@
           <p:cNvPr id="3" name="s8-title">
             <a:extLst xmlns:a="http://schemas.openxmlformats.org/drawingml/2006/main">
               <a:ext uri="{FF2B5EF4-FFF2-40B4-BE49-F238E27FC236}">
-                <a16:creationId xmlns:a16="http://schemas.microsoft.com/office/drawing/2014/main" id="{ADA5CA22-C6C0-4055-9002-D77234C816E4}"/>
+                <a16:creationId xmlns:a16="http://schemas.microsoft.com/office/drawing/2014/main" id="{C34DC01F-32E3-471B-BEDB-1EAC06D917A4}"/>
               </a:ext>
             </a:extLst>
           </p:cNvPr>
@@ -9715,7 +9715,7 @@
           <p:cNvPr id="4" name="s8-footer">
             <a:extLst xmlns:a="http://schemas.openxmlformats.org/drawingml/2006/main">
               <a:ext uri="{FF2B5EF4-FFF2-40B4-BE49-F238E27FC236}">
-                <a16:creationId xmlns:a16="http://schemas.microsoft.com/office/drawing/2014/main" id="{47426ABD-EACD-4826-A808-A758395F5BA0}"/>
+                <a16:creationId xmlns:a16="http://schemas.microsoft.com/office/drawing/2014/main" id="{B657BF10-F305-41ED-B045-F1CCEF7D9521}"/>
               </a:ext>
             </a:extLst>
           </p:cNvPr>
@@ -9746,7 +9746,7 @@
           <p:cNvPr id="5" name="s8-identity">
             <a:extLst xmlns:a="http://schemas.openxmlformats.org/drawingml/2006/main">
               <a:ext uri="{FF2B5EF4-FFF2-40B4-BE49-F238E27FC236}">
-                <a16:creationId xmlns:a16="http://schemas.microsoft.com/office/drawing/2014/main" id="{184D8EF1-F6C3-4C45-967C-3E1EBDF61872}"/>
+                <a16:creationId xmlns:a16="http://schemas.microsoft.com/office/drawing/2014/main" id="{2A471633-B2CF-4DC2-A256-D96C43C6B072}"/>
               </a:ext>
             </a:extLst>
           </p:cNvPr>
@@ -9804,7 +9804,7 @@
           <p:cNvPr id="6" name="core-no-0">
             <a:extLst xmlns:a="http://schemas.openxmlformats.org/drawingml/2006/main">
               <a:ext uri="{FF2B5EF4-FFF2-40B4-BE49-F238E27FC236}">
-                <a16:creationId xmlns:a16="http://schemas.microsoft.com/office/drawing/2014/main" id="{E62AEC9C-70B9-45AB-B15E-80ECEA8CB1C5}"/>
+                <a16:creationId xmlns:a16="http://schemas.microsoft.com/office/drawing/2014/main" id="{AE98A4F2-CFB3-49E4-98F5-A79FC3AE5B97}"/>
               </a:ext>
             </a:extLst>
           </p:cNvPr>
@@ -9862,7 +9862,7 @@
           <p:cNvPr id="7" name="core-label-0">
             <a:extLst xmlns:a="http://schemas.openxmlformats.org/drawingml/2006/main">
               <a:ext uri="{FF2B5EF4-FFF2-40B4-BE49-F238E27FC236}">
-                <a16:creationId xmlns:a16="http://schemas.microsoft.com/office/drawing/2014/main" id="{8A4DF294-815C-4010-B174-3307927572FC}"/>
+                <a16:creationId xmlns:a16="http://schemas.microsoft.com/office/drawing/2014/main" id="{CF5DF0F4-C770-42ED-B71E-41906220E6ED}"/>
               </a:ext>
             </a:extLst>
           </p:cNvPr>
@@ -9920,7 +9920,7 @@
           <p:cNvPr id="8" name="core-body-0">
             <a:extLst xmlns:a="http://schemas.openxmlformats.org/drawingml/2006/main">
               <a:ext uri="{FF2B5EF4-FFF2-40B4-BE49-F238E27FC236}">
-                <a16:creationId xmlns:a16="http://schemas.microsoft.com/office/drawing/2014/main" id="{D8B91877-C620-44E4-904B-6F13559BA95A}"/>
+                <a16:creationId xmlns:a16="http://schemas.microsoft.com/office/drawing/2014/main" id="{2E532556-54C2-4D0D-9DF7-A73CB9573864}"/>
               </a:ext>
             </a:extLst>
           </p:cNvPr>
@@ -9984,7 +9984,7 @@
           <p:cNvPr id="9" name="core-no-1">
             <a:extLst xmlns:a="http://schemas.openxmlformats.org/drawingml/2006/main">
               <a:ext uri="{FF2B5EF4-FFF2-40B4-BE49-F238E27FC236}">
-                <a16:creationId xmlns:a16="http://schemas.microsoft.com/office/drawing/2014/main" id="{F7BF4F73-62EC-4352-9E4A-A26050860E8D}"/>
+                <a16:creationId xmlns:a16="http://schemas.microsoft.com/office/drawing/2014/main" id="{9C8EAAC9-9D01-40F7-8DB2-9949D93B5C2D}"/>
               </a:ext>
             </a:extLst>
           </p:cNvPr>
@@ -10042,7 +10042,7 @@
           <p:cNvPr id="10" name="core-body-1">
             <a:extLst xmlns:a="http://schemas.openxmlformats.org/drawingml/2006/main">
               <a:ext uri="{FF2B5EF4-FFF2-40B4-BE49-F238E27FC236}">
-                <a16:creationId xmlns:a16="http://schemas.microsoft.com/office/drawing/2014/main" id="{99FD6D25-E22A-47DC-960F-A4F07A89F56F}"/>
+                <a16:creationId xmlns:a16="http://schemas.microsoft.com/office/drawing/2014/main" id="{3E736530-2AE2-4029-BE64-E85DD4654959}"/>
               </a:ext>
             </a:extLst>
           </p:cNvPr>
@@ -10106,7 +10106,7 @@
           <p:cNvPr id="11" name="s8-takeaway-rule">
             <a:extLst xmlns:a="http://schemas.openxmlformats.org/drawingml/2006/main">
               <a:ext uri="{FF2B5EF4-FFF2-40B4-BE49-F238E27FC236}">
-                <a16:creationId xmlns:a16="http://schemas.microsoft.com/office/drawing/2014/main" id="{8CF73475-1FB3-42D2-888A-7D5EA410F176}"/>
+                <a16:creationId xmlns:a16="http://schemas.microsoft.com/office/drawing/2014/main" id="{F20F42BA-D475-43F2-B4BF-3A3460E2005D}"/>
               </a:ext>
             </a:extLst>
           </p:cNvPr>
@@ -10139,7 +10139,7 @@
           <p:cNvPr id="12" name="s8-takeaway">
             <a:extLst xmlns:a="http://schemas.openxmlformats.org/drawingml/2006/main">
               <a:ext uri="{FF2B5EF4-FFF2-40B4-BE49-F238E27FC236}">
-                <a16:creationId xmlns:a16="http://schemas.microsoft.com/office/drawing/2014/main" id="{79AF4B4E-0D2A-4EA6-8B7C-10D221647CA0}"/>
+                <a16:creationId xmlns:a16="http://schemas.microsoft.com/office/drawing/2014/main" id="{8F1459D3-D86C-4207-AAE2-56BA9F8A4307}"/>
               </a:ext>
             </a:extLst>
           </p:cNvPr>
@@ -10195,7 +10195,7 @@
     </p:spTree>
     <p:extLst>
       <p:ext uri="{BB962C8B-B14F-4D97-AF65-F5344CB8AC3E}">
-        <p14:creationId xmlns:p14="http://schemas.microsoft.com/office/powerpoint/2010/main" val="1598266760"/>
+        <p14:creationId xmlns:p14="http://schemas.microsoft.com/office/powerpoint/2010/main" val="1943580809"/>
       </p:ext>
     </p:extLst>
   </p:cSld>
@@ -10226,7 +10226,7 @@
           <p:cNvPr id="1" name="s9-rule">
             <a:extLst xmlns:a="http://schemas.openxmlformats.org/drawingml/2006/main">
               <a:ext uri="{FF2B5EF4-FFF2-40B4-BE49-F238E27FC236}">
-                <a16:creationId xmlns:a16="http://schemas.microsoft.com/office/drawing/2014/main" id="{B073FAF6-DFB6-47A0-929D-66EDF3559848}"/>
+                <a16:creationId xmlns:a16="http://schemas.microsoft.com/office/drawing/2014/main" id="{373208E9-1306-4135-8BE1-F23B8536E975}"/>
               </a:ext>
             </a:extLst>
           </p:cNvPr>
@@ -10259,7 +10259,7 @@
           <p:cNvPr id="2" name="s9-eyebrow">
             <a:extLst xmlns:a="http://schemas.openxmlformats.org/drawingml/2006/main">
               <a:ext uri="{FF2B5EF4-FFF2-40B4-BE49-F238E27FC236}">
-                <a16:creationId xmlns:a16="http://schemas.microsoft.com/office/drawing/2014/main" id="{6F22A607-3BB0-43EC-84ED-AF9EFF0DE87A}"/>
+                <a16:creationId xmlns:a16="http://schemas.microsoft.com/office/drawing/2014/main" id="{4878B07F-10F3-4A17-8AB5-71B4BAE95AA0}"/>
               </a:ext>
             </a:extLst>
           </p:cNvPr>
@@ -10317,7 +10317,7 @@
           <p:cNvPr id="3" name="s9-title">
             <a:extLst xmlns:a="http://schemas.openxmlformats.org/drawingml/2006/main">
               <a:ext uri="{FF2B5EF4-FFF2-40B4-BE49-F238E27FC236}">
-                <a16:creationId xmlns:a16="http://schemas.microsoft.com/office/drawing/2014/main" id="{5CFC7038-6F97-406B-B4F1-01D2580AA374}"/>
+                <a16:creationId xmlns:a16="http://schemas.microsoft.com/office/drawing/2014/main" id="{290D27B6-C551-46E0-9C5A-0AB3BC196677}"/>
               </a:ext>
             </a:extLst>
           </p:cNvPr>
@@ -10375,7 +10375,7 @@
           <p:cNvPr id="4" name="s9-footer">
             <a:extLst xmlns:a="http://schemas.openxmlformats.org/drawingml/2006/main">
               <a:ext uri="{FF2B5EF4-FFF2-40B4-BE49-F238E27FC236}">
-                <a16:creationId xmlns:a16="http://schemas.microsoft.com/office/drawing/2014/main" id="{CFD46912-0C76-4844-A4F3-294B4F897EA5}"/>
+                <a16:creationId xmlns:a16="http://schemas.microsoft.com/office/drawing/2014/main" id="{BEDBC610-91B4-49DA-B1A5-4F5E7204C586}"/>
               </a:ext>
             </a:extLst>
           </p:cNvPr>
@@ -10406,7 +10406,7 @@
           <p:cNvPr id="5" name="s9-identity">
             <a:extLst xmlns:a="http://schemas.openxmlformats.org/drawingml/2006/main">
               <a:ext uri="{FF2B5EF4-FFF2-40B4-BE49-F238E27FC236}">
-                <a16:creationId xmlns:a16="http://schemas.microsoft.com/office/drawing/2014/main" id="{4D62D8E5-E2F1-4D85-90B8-90183F0A59AF}"/>
+                <a16:creationId xmlns:a16="http://schemas.microsoft.com/office/drawing/2014/main" id="{9B707665-5AD8-4747-A2F7-39316CFD65B3}"/>
               </a:ext>
             </a:extLst>
           </p:cNvPr>
@@ -10464,7 +10464,7 @@
           <p:cNvPr id="6" name="case-title">
             <a:extLst xmlns:a="http://schemas.openxmlformats.org/drawingml/2006/main">
               <a:ext uri="{FF2B5EF4-FFF2-40B4-BE49-F238E27FC236}">
-                <a16:creationId xmlns:a16="http://schemas.microsoft.com/office/drawing/2014/main" id="{CFB476DE-7748-4DF0-848F-CB4FB3694A43}"/>
+                <a16:creationId xmlns:a16="http://schemas.microsoft.com/office/drawing/2014/main" id="{5868E6BB-8E2B-4FB4-9057-DDACE7714299}"/>
               </a:ext>
             </a:extLst>
           </p:cNvPr>
@@ -10528,7 +10528,7 @@
           <p:cNvPr id="7" name="case-row-0">
             <a:extLst xmlns:a="http://schemas.openxmlformats.org/drawingml/2006/main">
               <a:ext uri="{FF2B5EF4-FFF2-40B4-BE49-F238E27FC236}">
-                <a16:creationId xmlns:a16="http://schemas.microsoft.com/office/drawing/2014/main" id="{BE369B9A-CFCF-4862-A8C3-868B284D51A8}"/>
+                <a16:creationId xmlns:a16="http://schemas.microsoft.com/office/drawing/2014/main" id="{2DED1835-6979-4456-BBF0-06095BDDA8E6}"/>
               </a:ext>
             </a:extLst>
           </p:cNvPr>
@@ -10592,7 +10592,7 @@
           <p:cNvPr id="8" name="case-row-1">
             <a:extLst xmlns:a="http://schemas.openxmlformats.org/drawingml/2006/main">
               <a:ext uri="{FF2B5EF4-FFF2-40B4-BE49-F238E27FC236}">
-                <a16:creationId xmlns:a16="http://schemas.microsoft.com/office/drawing/2014/main" id="{ED463094-D105-4519-9E2E-FE9F701F7AFC}"/>
+                <a16:creationId xmlns:a16="http://schemas.microsoft.com/office/drawing/2014/main" id="{076555C4-A3A1-4862-B41B-1DE2EACAE3AC}"/>
               </a:ext>
             </a:extLst>
           </p:cNvPr>
@@ -10656,7 +10656,7 @@
           <p:cNvPr id="9" name="case-row-2">
             <a:extLst xmlns:a="http://schemas.openxmlformats.org/drawingml/2006/main">
               <a:ext uri="{FF2B5EF4-FFF2-40B4-BE49-F238E27FC236}">
-                <a16:creationId xmlns:a16="http://schemas.microsoft.com/office/drawing/2014/main" id="{FDD2D9AA-599F-4B1A-89B1-33ADB221FD6F}"/>
+                <a16:creationId xmlns:a16="http://schemas.microsoft.com/office/drawing/2014/main" id="{D84624ED-6600-476E-B5ED-38B27D9D4A5C}"/>
               </a:ext>
             </a:extLst>
           </p:cNvPr>
@@ -10720,7 +10720,7 @@
           <p:cNvPr id="10" name="case-row-3">
             <a:extLst xmlns:a="http://schemas.openxmlformats.org/drawingml/2006/main">
               <a:ext uri="{FF2B5EF4-FFF2-40B4-BE49-F238E27FC236}">
-                <a16:creationId xmlns:a16="http://schemas.microsoft.com/office/drawing/2014/main" id="{7064A3C5-9BE3-4254-85F1-F7F795F3D694}"/>
+                <a16:creationId xmlns:a16="http://schemas.microsoft.com/office/drawing/2014/main" id="{3C412532-144D-4303-879C-24EE9DAEFF4E}"/>
               </a:ext>
             </a:extLst>
           </p:cNvPr>
@@ -10784,7 +10784,7 @@
           <p:cNvPr id="11" name="case-row-4">
             <a:extLst xmlns:a="http://schemas.openxmlformats.org/drawingml/2006/main">
               <a:ext uri="{FF2B5EF4-FFF2-40B4-BE49-F238E27FC236}">
-                <a16:creationId xmlns:a16="http://schemas.microsoft.com/office/drawing/2014/main" id="{56CA153B-D283-41D3-B56A-E013BE454479}"/>
+                <a16:creationId xmlns:a16="http://schemas.microsoft.com/office/drawing/2014/main" id="{033E2CBF-BA9B-47EF-918A-56419DE7743C}"/>
               </a:ext>
             </a:extLst>
           </p:cNvPr>
@@ -10848,7 +10848,7 @@
           <p:cNvPr id="12" name="s9-takeaway-rule">
             <a:extLst xmlns:a="http://schemas.openxmlformats.org/drawingml/2006/main">
               <a:ext uri="{FF2B5EF4-FFF2-40B4-BE49-F238E27FC236}">
-                <a16:creationId xmlns:a16="http://schemas.microsoft.com/office/drawing/2014/main" id="{E4250250-7F3F-449B-9430-98E1A50C2C52}"/>
+                <a16:creationId xmlns:a16="http://schemas.microsoft.com/office/drawing/2014/main" id="{A672AD09-C23D-447E-B94E-1DEB859E1DE8}"/>
               </a:ext>
             </a:extLst>
           </p:cNvPr>
@@ -10881,7 +10881,7 @@
           <p:cNvPr id="13" name="s9-takeaway">
             <a:extLst xmlns:a="http://schemas.openxmlformats.org/drawingml/2006/main">
               <a:ext uri="{FF2B5EF4-FFF2-40B4-BE49-F238E27FC236}">
-                <a16:creationId xmlns:a16="http://schemas.microsoft.com/office/drawing/2014/main" id="{2FE8414B-8410-4D48-BED8-A7EB2CE2DC6C}"/>
+                <a16:creationId xmlns:a16="http://schemas.microsoft.com/office/drawing/2014/main" id="{4BF74255-7B8B-4C20-AD68-BE4CB6A2C829}"/>
               </a:ext>
             </a:extLst>
           </p:cNvPr>
@@ -10937,7 +10937,7 @@
     </p:spTree>
     <p:extLst>
       <p:ext uri="{BB962C8B-B14F-4D97-AF65-F5344CB8AC3E}">
-        <p14:creationId xmlns:p14="http://schemas.microsoft.com/office/powerpoint/2010/main" val="1706702604"/>
+        <p14:creationId xmlns:p14="http://schemas.microsoft.com/office/powerpoint/2010/main" val="1281600139"/>
       </p:ext>
     </p:extLst>
   </p:cSld>

--- a/docs/public/course-assets/course-pptx/em-006.pptx
+++ b/docs/public/course-assets/course-pptx/em-006.pptx
@@ -2,25 +2,25 @@
 <file path=ppt/presentation.xml><?xml version="1.0" encoding="utf-8"?>
 <p:presentation xmlns:p="http://schemas.openxmlformats.org/presentationml/2006/main">
   <p:sldMasterIdLst>
-    <p:sldMasterId xmlns:r="http://schemas.openxmlformats.org/officeDocument/2006/relationships" id="2147483648" r:id="R22b6d1fa246a435a"/>
+    <p:sldMasterId xmlns:r="http://schemas.openxmlformats.org/officeDocument/2006/relationships" id="2147483648" r:id="R7096f37e7b6c4129"/>
   </p:sldMasterIdLst>
   <p:notesMasterIdLst>
-    <p:notesMasterId xmlns:r="http://schemas.openxmlformats.org/officeDocument/2006/relationships" r:id="Ra03bf3436fac4936"/>
+    <p:notesMasterId xmlns:r="http://schemas.openxmlformats.org/officeDocument/2006/relationships" r:id="R07172daa34a648a6"/>
   </p:notesMasterIdLst>
   <p:sldIdLst>
-    <p:sldId xmlns:r="http://schemas.openxmlformats.org/officeDocument/2006/relationships" id="256" r:id="Rabd8f2d831be4766"/>
-    <p:sldId xmlns:r="http://schemas.openxmlformats.org/officeDocument/2006/relationships" id="257" r:id="Radd734a090824662"/>
-    <p:sldId xmlns:r="http://schemas.openxmlformats.org/officeDocument/2006/relationships" id="258" r:id="Rea9ad57ddfae4cb9"/>
-    <p:sldId xmlns:r="http://schemas.openxmlformats.org/officeDocument/2006/relationships" id="259" r:id="R0005dc6a41f24841"/>
-    <p:sldId xmlns:r="http://schemas.openxmlformats.org/officeDocument/2006/relationships" id="260" r:id="Re5e791f6084c4e50"/>
-    <p:sldId xmlns:r="http://schemas.openxmlformats.org/officeDocument/2006/relationships" id="261" r:id="Rad98a35e09604053"/>
-    <p:sldId xmlns:r="http://schemas.openxmlformats.org/officeDocument/2006/relationships" id="262" r:id="Rb882ed5aa8ae4e7a"/>
-    <p:sldId xmlns:r="http://schemas.openxmlformats.org/officeDocument/2006/relationships" id="263" r:id="R3956940e444f45fb"/>
-    <p:sldId xmlns:r="http://schemas.openxmlformats.org/officeDocument/2006/relationships" id="264" r:id="R8c94edf724d44f38"/>
-    <p:sldId xmlns:r="http://schemas.openxmlformats.org/officeDocument/2006/relationships" id="265" r:id="Rabbb7b0978ea4312"/>
-    <p:sldId xmlns:r="http://schemas.openxmlformats.org/officeDocument/2006/relationships" id="266" r:id="R723261453f9d4e30"/>
-    <p:sldId xmlns:r="http://schemas.openxmlformats.org/officeDocument/2006/relationships" id="267" r:id="Rf8687ddab0e74e36"/>
-    <p:sldId xmlns:r="http://schemas.openxmlformats.org/officeDocument/2006/relationships" id="268" r:id="R73b4517f19334d2a"/>
+    <p:sldId xmlns:r="http://schemas.openxmlformats.org/officeDocument/2006/relationships" id="256" r:id="R23df807ae02f4e04"/>
+    <p:sldId xmlns:r="http://schemas.openxmlformats.org/officeDocument/2006/relationships" id="257" r:id="Ra1e9361b85794cd5"/>
+    <p:sldId xmlns:r="http://schemas.openxmlformats.org/officeDocument/2006/relationships" id="258" r:id="R1afc8dc590004e1b"/>
+    <p:sldId xmlns:r="http://schemas.openxmlformats.org/officeDocument/2006/relationships" id="259" r:id="R74797a011dbf4751"/>
+    <p:sldId xmlns:r="http://schemas.openxmlformats.org/officeDocument/2006/relationships" id="260" r:id="Rb816b2c5f93343f9"/>
+    <p:sldId xmlns:r="http://schemas.openxmlformats.org/officeDocument/2006/relationships" id="261" r:id="Ra208e1b249444844"/>
+    <p:sldId xmlns:r="http://schemas.openxmlformats.org/officeDocument/2006/relationships" id="262" r:id="R69fe1efb24b94a98"/>
+    <p:sldId xmlns:r="http://schemas.openxmlformats.org/officeDocument/2006/relationships" id="263" r:id="Re3fb64cedd834068"/>
+    <p:sldId xmlns:r="http://schemas.openxmlformats.org/officeDocument/2006/relationships" id="264" r:id="Re91f5a21abcc4c1c"/>
+    <p:sldId xmlns:r="http://schemas.openxmlformats.org/officeDocument/2006/relationships" id="265" r:id="R68a824a3ac5c4ca7"/>
+    <p:sldId xmlns:r="http://schemas.openxmlformats.org/officeDocument/2006/relationships" id="266" r:id="Rae8c4c9bf01c41c5"/>
+    <p:sldId xmlns:r="http://schemas.openxmlformats.org/officeDocument/2006/relationships" id="267" r:id="Rad5522a29b104af5"/>
+    <p:sldId xmlns:r="http://schemas.openxmlformats.org/officeDocument/2006/relationships" id="268" r:id="Rb0d1659764bf49a7"/>
   </p:sldIdLst>
   <p:sldSz cx="12192000" cy="6858000"/>
   <p:notesSz cx="6858000" cy="9144000"/>
@@ -1405,7 +1405,7 @@
   </p:cSld>
   <p:clrMap bg1="lt1" tx1="dk1" bg2="lt2" tx2="dk2" accent1="accent1" accent2="accent2" accent3="accent3" accent4="accent4" accent5="accent5" accent6="accent6" hlink="hlink" folHlink="folHlink"/>
   <p:sldLayoutIdLst>
-    <p:sldLayoutId xmlns:r="http://schemas.openxmlformats.org/officeDocument/2006/relationships" id="2147483649" r:id="R0987a428f5f94dc8"/>
+    <p:sldLayoutId xmlns:r="http://schemas.openxmlformats.org/officeDocument/2006/relationships" id="2147483649" r:id="Rda261a7f57684296"/>
   </p:sldLayoutIdLst>
   <p:txStyles>
     <p:titleStyle>
@@ -1956,7 +1956,7 @@
           <p:cNvPr id="1" name="cover-rule">
             <a:extLst xmlns:a="http://schemas.openxmlformats.org/drawingml/2006/main">
               <a:ext uri="{FF2B5EF4-FFF2-40B4-BE49-F238E27FC236}">
-                <a16:creationId xmlns:a16="http://schemas.microsoft.com/office/drawing/2014/main" id="{7A9D7600-7571-4CE1-93A7-57F951321BB9}"/>
+                <a16:creationId xmlns:a16="http://schemas.microsoft.com/office/drawing/2014/main" id="{E8A9CCD8-E514-49FF-82C8-9B4D6DFD8C63}"/>
               </a:ext>
             </a:extLst>
           </p:cNvPr>
@@ -1989,7 +1989,7 @@
           <p:cNvPr id="2" name="cover-ring-1">
             <a:extLst xmlns:a="http://schemas.openxmlformats.org/drawingml/2006/main">
               <a:ext uri="{FF2B5EF4-FFF2-40B4-BE49-F238E27FC236}">
-                <a16:creationId xmlns:a16="http://schemas.microsoft.com/office/drawing/2014/main" id="{885A97AB-9928-4C3F-BF19-411476B71786}"/>
+                <a16:creationId xmlns:a16="http://schemas.microsoft.com/office/drawing/2014/main" id="{0F34AC56-32E1-4425-B54E-A32CB5381CC4}"/>
               </a:ext>
             </a:extLst>
           </p:cNvPr>
@@ -2020,7 +2020,7 @@
           <p:cNvPr id="3" name="cover-ring-2">
             <a:extLst xmlns:a="http://schemas.openxmlformats.org/drawingml/2006/main">
               <a:ext uri="{FF2B5EF4-FFF2-40B4-BE49-F238E27FC236}">
-                <a16:creationId xmlns:a16="http://schemas.microsoft.com/office/drawing/2014/main" id="{4FE73382-2DD0-424E-A938-36AA8DDC781B}"/>
+                <a16:creationId xmlns:a16="http://schemas.microsoft.com/office/drawing/2014/main" id="{46CED498-8330-4F65-A57A-0408D51E1148}"/>
               </a:ext>
             </a:extLst>
           </p:cNvPr>
@@ -2051,7 +2051,7 @@
           <p:cNvPr id="4" name="cover-core">
             <a:extLst xmlns:a="http://schemas.openxmlformats.org/drawingml/2006/main">
               <a:ext uri="{FF2B5EF4-FFF2-40B4-BE49-F238E27FC236}">
-                <a16:creationId xmlns:a16="http://schemas.microsoft.com/office/drawing/2014/main" id="{776F59F9-6F39-42FE-B636-158465E3E687}"/>
+                <a16:creationId xmlns:a16="http://schemas.microsoft.com/office/drawing/2014/main" id="{D67599B1-8427-4B55-9CEA-A4D8433DA191}"/>
               </a:ext>
             </a:extLst>
           </p:cNvPr>
@@ -2084,7 +2084,7 @@
           <p:cNvPr id="5" name="cover-line-1">
             <a:extLst xmlns:a="http://schemas.openxmlformats.org/drawingml/2006/main">
               <a:ext uri="{FF2B5EF4-FFF2-40B4-BE49-F238E27FC236}">
-                <a16:creationId xmlns:a16="http://schemas.microsoft.com/office/drawing/2014/main" id="{2E53FD52-DDD5-431D-93E9-1C00ED5E030A}"/>
+                <a16:creationId xmlns:a16="http://schemas.microsoft.com/office/drawing/2014/main" id="{77433A84-08A9-433A-9515-9F1734B9D915}"/>
               </a:ext>
             </a:extLst>
           </p:cNvPr>
@@ -2115,7 +2115,7 @@
           <p:cNvPr id="6" name="cover-line-2">
             <a:extLst xmlns:a="http://schemas.openxmlformats.org/drawingml/2006/main">
               <a:ext uri="{FF2B5EF4-FFF2-40B4-BE49-F238E27FC236}">
-                <a16:creationId xmlns:a16="http://schemas.microsoft.com/office/drawing/2014/main" id="{7823AEC0-2B01-43CA-96FE-7EBB93976ABC}"/>
+                <a16:creationId xmlns:a16="http://schemas.microsoft.com/office/drawing/2014/main" id="{E141C32F-FFE8-4713-B031-6757F45471A6}"/>
               </a:ext>
             </a:extLst>
           </p:cNvPr>
@@ -2146,7 +2146,7 @@
           <p:cNvPr id="7" name="cover-eyebrow">
             <a:extLst xmlns:a="http://schemas.openxmlformats.org/drawingml/2006/main">
               <a:ext uri="{FF2B5EF4-FFF2-40B4-BE49-F238E27FC236}">
-                <a16:creationId xmlns:a16="http://schemas.microsoft.com/office/drawing/2014/main" id="{1E4045A4-8BE0-4E55-9D6D-98004F849DD3}"/>
+                <a16:creationId xmlns:a16="http://schemas.microsoft.com/office/drawing/2014/main" id="{6FC3604E-48C8-4C37-BAEE-8154BCA1DE7B}"/>
               </a:ext>
             </a:extLst>
           </p:cNvPr>
@@ -2204,7 +2204,7 @@
           <p:cNvPr id="8" name="cover-title">
             <a:extLst xmlns:a="http://schemas.openxmlformats.org/drawingml/2006/main">
               <a:ext uri="{FF2B5EF4-FFF2-40B4-BE49-F238E27FC236}">
-                <a16:creationId xmlns:a16="http://schemas.microsoft.com/office/drawing/2014/main" id="{D3EEEA45-1C2E-4812-A74F-5E4708B5E6D3}"/>
+                <a16:creationId xmlns:a16="http://schemas.microsoft.com/office/drawing/2014/main" id="{E10B945C-BBFF-4E83-836E-F1464083ABD7}"/>
               </a:ext>
             </a:extLst>
           </p:cNvPr>
@@ -2262,7 +2262,7 @@
           <p:cNvPr id="9" name="cover-subtitle">
             <a:extLst xmlns:a="http://schemas.openxmlformats.org/drawingml/2006/main">
               <a:ext uri="{FF2B5EF4-FFF2-40B4-BE49-F238E27FC236}">
-                <a16:creationId xmlns:a16="http://schemas.microsoft.com/office/drawing/2014/main" id="{115EAC12-A217-4812-942B-947698ACBB52}"/>
+                <a16:creationId xmlns:a16="http://schemas.microsoft.com/office/drawing/2014/main" id="{46BF9DF3-C9DF-4200-BA43-F79205413164}"/>
               </a:ext>
             </a:extLst>
           </p:cNvPr>
@@ -2324,7 +2324,7 @@
           <p:cNvPr id="10" name="cover-lead">
             <a:extLst xmlns:a="http://schemas.openxmlformats.org/drawingml/2006/main">
               <a:ext uri="{FF2B5EF4-FFF2-40B4-BE49-F238E27FC236}">
-                <a16:creationId xmlns:a16="http://schemas.microsoft.com/office/drawing/2014/main" id="{B230A845-667E-431B-AE3C-2C13EC43C4B9}"/>
+                <a16:creationId xmlns:a16="http://schemas.microsoft.com/office/drawing/2014/main" id="{3664E584-853F-4403-B228-FCA53E323795}"/>
               </a:ext>
             </a:extLst>
           </p:cNvPr>
@@ -2382,7 +2382,7 @@
           <p:cNvPr id="11" name="cover-course">
             <a:extLst xmlns:a="http://schemas.openxmlformats.org/drawingml/2006/main">
               <a:ext uri="{FF2B5EF4-FFF2-40B4-BE49-F238E27FC236}">
-                <a16:creationId xmlns:a16="http://schemas.microsoft.com/office/drawing/2014/main" id="{F3BEE3E4-ACA4-4C9B-BB7F-D9A305B67643}"/>
+                <a16:creationId xmlns:a16="http://schemas.microsoft.com/office/drawing/2014/main" id="{E745624D-A67C-4059-B40D-26CE644E889A}"/>
               </a:ext>
             </a:extLst>
           </p:cNvPr>
@@ -2440,7 +2440,7 @@
           <p:cNvPr id="12" name="cover-id">
             <a:extLst xmlns:a="http://schemas.openxmlformats.org/drawingml/2006/main">
               <a:ext uri="{FF2B5EF4-FFF2-40B4-BE49-F238E27FC236}">
-                <a16:creationId xmlns:a16="http://schemas.microsoft.com/office/drawing/2014/main" id="{CC4EFCAB-09BC-453D-808C-74AA3846ADF9}"/>
+                <a16:creationId xmlns:a16="http://schemas.microsoft.com/office/drawing/2014/main" id="{D07DBEA0-6277-4AA4-BB3F-3CDC604095D5}"/>
               </a:ext>
             </a:extLst>
           </p:cNvPr>
@@ -2496,7 +2496,7 @@
     </p:spTree>
     <p:extLst>
       <p:ext uri="{BB962C8B-B14F-4D97-AF65-F5344CB8AC3E}">
-        <p14:creationId xmlns:p14="http://schemas.microsoft.com/office/powerpoint/2010/main" val="1320033058"/>
+        <p14:creationId xmlns:p14="http://schemas.microsoft.com/office/powerpoint/2010/main" val="1226110222"/>
       </p:ext>
     </p:extLst>
   </p:cSld>
@@ -2527,7 +2527,7 @@
           <p:cNvPr id="1" name="s10-rule">
             <a:extLst xmlns:a="http://schemas.openxmlformats.org/drawingml/2006/main">
               <a:ext uri="{FF2B5EF4-FFF2-40B4-BE49-F238E27FC236}">
-                <a16:creationId xmlns:a16="http://schemas.microsoft.com/office/drawing/2014/main" id="{C9CB1F30-EC0F-42F4-BDA5-BE2E03FB611A}"/>
+                <a16:creationId xmlns:a16="http://schemas.microsoft.com/office/drawing/2014/main" id="{7A233F84-ABAC-42A2-B0BB-9C502FA93EDD}"/>
               </a:ext>
             </a:extLst>
           </p:cNvPr>
@@ -2560,7 +2560,7 @@
           <p:cNvPr id="2" name="s10-eyebrow">
             <a:extLst xmlns:a="http://schemas.openxmlformats.org/drawingml/2006/main">
               <a:ext uri="{FF2B5EF4-FFF2-40B4-BE49-F238E27FC236}">
-                <a16:creationId xmlns:a16="http://schemas.microsoft.com/office/drawing/2014/main" id="{12F51744-0ADC-446C-B0F8-257096F96BDB}"/>
+                <a16:creationId xmlns:a16="http://schemas.microsoft.com/office/drawing/2014/main" id="{C893A184-E29F-4AA5-929A-D29EF484DCB7}"/>
               </a:ext>
             </a:extLst>
           </p:cNvPr>
@@ -2618,7 +2618,7 @@
           <p:cNvPr id="3" name="s10-title">
             <a:extLst xmlns:a="http://schemas.openxmlformats.org/drawingml/2006/main">
               <a:ext uri="{FF2B5EF4-FFF2-40B4-BE49-F238E27FC236}">
-                <a16:creationId xmlns:a16="http://schemas.microsoft.com/office/drawing/2014/main" id="{8AC99B2E-4F23-4502-AE78-FC6A08854406}"/>
+                <a16:creationId xmlns:a16="http://schemas.microsoft.com/office/drawing/2014/main" id="{123D4E4E-9617-4939-904A-B5A7B9BDAF88}"/>
               </a:ext>
             </a:extLst>
           </p:cNvPr>
@@ -2676,7 +2676,7 @@
           <p:cNvPr id="4" name="s10-footer">
             <a:extLst xmlns:a="http://schemas.openxmlformats.org/drawingml/2006/main">
               <a:ext uri="{FF2B5EF4-FFF2-40B4-BE49-F238E27FC236}">
-                <a16:creationId xmlns:a16="http://schemas.microsoft.com/office/drawing/2014/main" id="{79FB09A4-5B7C-431B-8EE6-BAB940B01418}"/>
+                <a16:creationId xmlns:a16="http://schemas.microsoft.com/office/drawing/2014/main" id="{DCB906B1-9926-4A6B-B3EA-02A96CA99C03}"/>
               </a:ext>
             </a:extLst>
           </p:cNvPr>
@@ -2707,7 +2707,7 @@
           <p:cNvPr id="5" name="s10-identity">
             <a:extLst xmlns:a="http://schemas.openxmlformats.org/drawingml/2006/main">
               <a:ext uri="{FF2B5EF4-FFF2-40B4-BE49-F238E27FC236}">
-                <a16:creationId xmlns:a16="http://schemas.microsoft.com/office/drawing/2014/main" id="{97BDDB9C-4318-43D7-B7E6-912366C5DA2E}"/>
+                <a16:creationId xmlns:a16="http://schemas.microsoft.com/office/drawing/2014/main" id="{C6474784-DB0A-45D0-B0CE-FDF6DE3ACA61}"/>
               </a:ext>
             </a:extLst>
           </p:cNvPr>
@@ -2765,7 +2765,7 @@
           <p:cNvPr id="6" name="case-title">
             <a:extLst xmlns:a="http://schemas.openxmlformats.org/drawingml/2006/main">
               <a:ext uri="{FF2B5EF4-FFF2-40B4-BE49-F238E27FC236}">
-                <a16:creationId xmlns:a16="http://schemas.microsoft.com/office/drawing/2014/main" id="{CEE27B30-9CFD-4587-B974-0EB6A97736C2}"/>
+                <a16:creationId xmlns:a16="http://schemas.microsoft.com/office/drawing/2014/main" id="{9B2D82A1-1C35-438D-99CC-33BAB0A3D8AE}"/>
               </a:ext>
             </a:extLst>
           </p:cNvPr>
@@ -2829,7 +2829,7 @@
           <p:cNvPr id="7" name="case-row-0">
             <a:extLst xmlns:a="http://schemas.openxmlformats.org/drawingml/2006/main">
               <a:ext uri="{FF2B5EF4-FFF2-40B4-BE49-F238E27FC236}">
-                <a16:creationId xmlns:a16="http://schemas.microsoft.com/office/drawing/2014/main" id="{BD1CFF01-A489-4AC4-8E6A-476DDC16C39B}"/>
+                <a16:creationId xmlns:a16="http://schemas.microsoft.com/office/drawing/2014/main" id="{63D3917D-675D-4F37-BF26-36FB8F5D2E16}"/>
               </a:ext>
             </a:extLst>
           </p:cNvPr>
@@ -2893,7 +2893,7 @@
           <p:cNvPr id="8" name="case-row-1">
             <a:extLst xmlns:a="http://schemas.openxmlformats.org/drawingml/2006/main">
               <a:ext uri="{FF2B5EF4-FFF2-40B4-BE49-F238E27FC236}">
-                <a16:creationId xmlns:a16="http://schemas.microsoft.com/office/drawing/2014/main" id="{C00FA1BC-15E6-4F5B-856A-D368902FF8BA}"/>
+                <a16:creationId xmlns:a16="http://schemas.microsoft.com/office/drawing/2014/main" id="{DD52F92C-B08A-42B2-B147-FB2FAFAF448D}"/>
               </a:ext>
             </a:extLst>
           </p:cNvPr>
@@ -2957,7 +2957,7 @@
           <p:cNvPr id="9" name="case-row-2">
             <a:extLst xmlns:a="http://schemas.openxmlformats.org/drawingml/2006/main">
               <a:ext uri="{FF2B5EF4-FFF2-40B4-BE49-F238E27FC236}">
-                <a16:creationId xmlns:a16="http://schemas.microsoft.com/office/drawing/2014/main" id="{1FFBA638-0E16-46E4-A24F-D14E3ED49BAE}"/>
+                <a16:creationId xmlns:a16="http://schemas.microsoft.com/office/drawing/2014/main" id="{520D2E9B-323D-4912-8564-C5BEE923C56F}"/>
               </a:ext>
             </a:extLst>
           </p:cNvPr>
@@ -3021,7 +3021,7 @@
           <p:cNvPr id="10" name="s10-takeaway-rule">
             <a:extLst xmlns:a="http://schemas.openxmlformats.org/drawingml/2006/main">
               <a:ext uri="{FF2B5EF4-FFF2-40B4-BE49-F238E27FC236}">
-                <a16:creationId xmlns:a16="http://schemas.microsoft.com/office/drawing/2014/main" id="{EE70116C-8A0F-4983-B6D0-45C5A87CD12F}"/>
+                <a16:creationId xmlns:a16="http://schemas.microsoft.com/office/drawing/2014/main" id="{253DEA04-7DF1-4632-BAA3-9D5493C4A32F}"/>
               </a:ext>
             </a:extLst>
           </p:cNvPr>
@@ -3054,7 +3054,7 @@
           <p:cNvPr id="11" name="s10-takeaway">
             <a:extLst xmlns:a="http://schemas.openxmlformats.org/drawingml/2006/main">
               <a:ext uri="{FF2B5EF4-FFF2-40B4-BE49-F238E27FC236}">
-                <a16:creationId xmlns:a16="http://schemas.microsoft.com/office/drawing/2014/main" id="{748F9975-CA0D-49EE-989B-FDE3A03FFB03}"/>
+                <a16:creationId xmlns:a16="http://schemas.microsoft.com/office/drawing/2014/main" id="{8FB2FAC2-C1EC-4FC4-945F-E9EFAAE24F87}"/>
               </a:ext>
             </a:extLst>
           </p:cNvPr>
@@ -3110,7 +3110,7 @@
     </p:spTree>
     <p:extLst>
       <p:ext uri="{BB962C8B-B14F-4D97-AF65-F5344CB8AC3E}">
-        <p14:creationId xmlns:p14="http://schemas.microsoft.com/office/powerpoint/2010/main" val="414178688"/>
+        <p14:creationId xmlns:p14="http://schemas.microsoft.com/office/powerpoint/2010/main" val="647297707"/>
       </p:ext>
     </p:extLst>
   </p:cSld>
@@ -3141,7 +3141,7 @@
           <p:cNvPr id="1" name="s11-rule">
             <a:extLst xmlns:a="http://schemas.openxmlformats.org/drawingml/2006/main">
               <a:ext uri="{FF2B5EF4-FFF2-40B4-BE49-F238E27FC236}">
-                <a16:creationId xmlns:a16="http://schemas.microsoft.com/office/drawing/2014/main" id="{707AAB96-2996-4396-A172-A6C82A8900C5}"/>
+                <a16:creationId xmlns:a16="http://schemas.microsoft.com/office/drawing/2014/main" id="{AF8829CC-2814-45EA-95DE-CFC32782F474}"/>
               </a:ext>
             </a:extLst>
           </p:cNvPr>
@@ -3174,7 +3174,7 @@
           <p:cNvPr id="2" name="s11-eyebrow">
             <a:extLst xmlns:a="http://schemas.openxmlformats.org/drawingml/2006/main">
               <a:ext uri="{FF2B5EF4-FFF2-40B4-BE49-F238E27FC236}">
-                <a16:creationId xmlns:a16="http://schemas.microsoft.com/office/drawing/2014/main" id="{3BD1FA50-079A-403B-8371-0ABB40919B14}"/>
+                <a16:creationId xmlns:a16="http://schemas.microsoft.com/office/drawing/2014/main" id="{DF478987-4912-4096-8E29-81710806E874}"/>
               </a:ext>
             </a:extLst>
           </p:cNvPr>
@@ -3232,7 +3232,7 @@
           <p:cNvPr id="3" name="s11-title">
             <a:extLst xmlns:a="http://schemas.openxmlformats.org/drawingml/2006/main">
               <a:ext uri="{FF2B5EF4-FFF2-40B4-BE49-F238E27FC236}">
-                <a16:creationId xmlns:a16="http://schemas.microsoft.com/office/drawing/2014/main" id="{62224490-9C70-46A1-AFF5-CB1E4E0263B4}"/>
+                <a16:creationId xmlns:a16="http://schemas.microsoft.com/office/drawing/2014/main" id="{26568742-A5FC-4891-84DA-4FFB6B7A0B9D}"/>
               </a:ext>
             </a:extLst>
           </p:cNvPr>
@@ -3290,7 +3290,7 @@
           <p:cNvPr id="4" name="s11-footer">
             <a:extLst xmlns:a="http://schemas.openxmlformats.org/drawingml/2006/main">
               <a:ext uri="{FF2B5EF4-FFF2-40B4-BE49-F238E27FC236}">
-                <a16:creationId xmlns:a16="http://schemas.microsoft.com/office/drawing/2014/main" id="{742EC510-A1D1-488E-97AD-55D6E293FF97}"/>
+                <a16:creationId xmlns:a16="http://schemas.microsoft.com/office/drawing/2014/main" id="{41DE99FC-F746-4C9B-9E80-CD6E8C6C3901}"/>
               </a:ext>
             </a:extLst>
           </p:cNvPr>
@@ -3321,7 +3321,7 @@
           <p:cNvPr id="5" name="s11-identity">
             <a:extLst xmlns:a="http://schemas.openxmlformats.org/drawingml/2006/main">
               <a:ext uri="{FF2B5EF4-FFF2-40B4-BE49-F238E27FC236}">
-                <a16:creationId xmlns:a16="http://schemas.microsoft.com/office/drawing/2014/main" id="{58805EDC-AEDA-4383-BE01-96CEF608EB5D}"/>
+                <a16:creationId xmlns:a16="http://schemas.microsoft.com/office/drawing/2014/main" id="{9B08C0ED-1E2B-4E45-9ABA-D5A003F46EDD}"/>
               </a:ext>
             </a:extLst>
           </p:cNvPr>
@@ -3379,7 +3379,7 @@
           <p:cNvPr id="6" name="practice-circle-0">
             <a:extLst xmlns:a="http://schemas.openxmlformats.org/drawingml/2006/main">
               <a:ext uri="{FF2B5EF4-FFF2-40B4-BE49-F238E27FC236}">
-                <a16:creationId xmlns:a16="http://schemas.microsoft.com/office/drawing/2014/main" id="{7EB57850-7DD0-415A-A8FC-4F6012EFEF0B}"/>
+                <a16:creationId xmlns:a16="http://schemas.microsoft.com/office/drawing/2014/main" id="{365DE2A4-C589-463C-BFEC-3907BFFF6E81}"/>
               </a:ext>
             </a:extLst>
           </p:cNvPr>
@@ -3412,7 +3412,7 @@
           <p:cNvPr id="7" name="practice-number-0">
             <a:extLst xmlns:a="http://schemas.openxmlformats.org/drawingml/2006/main">
               <a:ext uri="{FF2B5EF4-FFF2-40B4-BE49-F238E27FC236}">
-                <a16:creationId xmlns:a16="http://schemas.microsoft.com/office/drawing/2014/main" id="{C88EB17E-72B6-4BEF-A31C-F9698DFD1BFE}"/>
+                <a16:creationId xmlns:a16="http://schemas.microsoft.com/office/drawing/2014/main" id="{62CA40EF-3F9B-4105-BA46-AC29F971E2A5}"/>
               </a:ext>
             </a:extLst>
           </p:cNvPr>
@@ -3470,7 +3470,7 @@
           <p:cNvPr id="8" name="practice-item-0">
             <a:extLst xmlns:a="http://schemas.openxmlformats.org/drawingml/2006/main">
               <a:ext uri="{FF2B5EF4-FFF2-40B4-BE49-F238E27FC236}">
-                <a16:creationId xmlns:a16="http://schemas.microsoft.com/office/drawing/2014/main" id="{936B522B-09E0-44CA-BBBD-501921BF1539}"/>
+                <a16:creationId xmlns:a16="http://schemas.microsoft.com/office/drawing/2014/main" id="{1110656D-5BB1-4949-8700-DDAFDA997AB7}"/>
               </a:ext>
             </a:extLst>
           </p:cNvPr>
@@ -3534,7 +3534,7 @@
           <p:cNvPr id="9" name="practice-connector-0">
             <a:extLst xmlns:a="http://schemas.openxmlformats.org/drawingml/2006/main">
               <a:ext uri="{FF2B5EF4-FFF2-40B4-BE49-F238E27FC236}">
-                <a16:creationId xmlns:a16="http://schemas.microsoft.com/office/drawing/2014/main" id="{7C44C17C-62FE-4777-9733-94D0B117A084}"/>
+                <a16:creationId xmlns:a16="http://schemas.microsoft.com/office/drawing/2014/main" id="{9F9DF5A7-48CB-4EBF-A608-089EB94D4F5B}"/>
               </a:ext>
             </a:extLst>
           </p:cNvPr>
@@ -3565,7 +3565,7 @@
           <p:cNvPr id="10" name="practice-circle-1">
             <a:extLst xmlns:a="http://schemas.openxmlformats.org/drawingml/2006/main">
               <a:ext uri="{FF2B5EF4-FFF2-40B4-BE49-F238E27FC236}">
-                <a16:creationId xmlns:a16="http://schemas.microsoft.com/office/drawing/2014/main" id="{BD29409F-DBDE-4AEF-B680-7F47898159C2}"/>
+                <a16:creationId xmlns:a16="http://schemas.microsoft.com/office/drawing/2014/main" id="{5EB4535C-1180-4344-9D58-D424AA2FF974}"/>
               </a:ext>
             </a:extLst>
           </p:cNvPr>
@@ -3598,7 +3598,7 @@
           <p:cNvPr id="11" name="practice-number-1">
             <a:extLst xmlns:a="http://schemas.openxmlformats.org/drawingml/2006/main">
               <a:ext uri="{FF2B5EF4-FFF2-40B4-BE49-F238E27FC236}">
-                <a16:creationId xmlns:a16="http://schemas.microsoft.com/office/drawing/2014/main" id="{6CA1EAB3-1ECC-4369-BD1B-56A057E517F7}"/>
+                <a16:creationId xmlns:a16="http://schemas.microsoft.com/office/drawing/2014/main" id="{C8DA2460-1E4B-45D9-B520-052BEC7E0395}"/>
               </a:ext>
             </a:extLst>
           </p:cNvPr>
@@ -3656,7 +3656,7 @@
           <p:cNvPr id="12" name="practice-item-1">
             <a:extLst xmlns:a="http://schemas.openxmlformats.org/drawingml/2006/main">
               <a:ext uri="{FF2B5EF4-FFF2-40B4-BE49-F238E27FC236}">
-                <a16:creationId xmlns:a16="http://schemas.microsoft.com/office/drawing/2014/main" id="{F6EA38C5-9B44-4231-B060-CC87E88A52D0}"/>
+                <a16:creationId xmlns:a16="http://schemas.microsoft.com/office/drawing/2014/main" id="{FE94CDA6-4243-4E0F-A3DC-0EEDEA568A51}"/>
               </a:ext>
             </a:extLst>
           </p:cNvPr>
@@ -3720,7 +3720,7 @@
           <p:cNvPr id="13" name="practice-connector-1">
             <a:extLst xmlns:a="http://schemas.openxmlformats.org/drawingml/2006/main">
               <a:ext uri="{FF2B5EF4-FFF2-40B4-BE49-F238E27FC236}">
-                <a16:creationId xmlns:a16="http://schemas.microsoft.com/office/drawing/2014/main" id="{C5018FE5-336C-4C5E-91A3-20AD3DF76B0A}"/>
+                <a16:creationId xmlns:a16="http://schemas.microsoft.com/office/drawing/2014/main" id="{DD3BF4E6-428F-4C7D-9FC9-8482B18BB3B2}"/>
               </a:ext>
             </a:extLst>
           </p:cNvPr>
@@ -3751,7 +3751,7 @@
           <p:cNvPr id="14" name="practice-circle-2">
             <a:extLst xmlns:a="http://schemas.openxmlformats.org/drawingml/2006/main">
               <a:ext uri="{FF2B5EF4-FFF2-40B4-BE49-F238E27FC236}">
-                <a16:creationId xmlns:a16="http://schemas.microsoft.com/office/drawing/2014/main" id="{E57CAFA5-C06F-47DD-979A-DE68A17894D1}"/>
+                <a16:creationId xmlns:a16="http://schemas.microsoft.com/office/drawing/2014/main" id="{5258EDB4-625F-482A-9372-9941DB4B0879}"/>
               </a:ext>
             </a:extLst>
           </p:cNvPr>
@@ -3784,7 +3784,7 @@
           <p:cNvPr id="15" name="practice-number-2">
             <a:extLst xmlns:a="http://schemas.openxmlformats.org/drawingml/2006/main">
               <a:ext uri="{FF2B5EF4-FFF2-40B4-BE49-F238E27FC236}">
-                <a16:creationId xmlns:a16="http://schemas.microsoft.com/office/drawing/2014/main" id="{0C81F668-49D1-4E9B-A967-29AD0F9B9F96}"/>
+                <a16:creationId xmlns:a16="http://schemas.microsoft.com/office/drawing/2014/main" id="{08B0BF78-3162-4068-B0E3-C5C6D0344E70}"/>
               </a:ext>
             </a:extLst>
           </p:cNvPr>
@@ -3842,7 +3842,7 @@
           <p:cNvPr id="16" name="practice-item-2">
             <a:extLst xmlns:a="http://schemas.openxmlformats.org/drawingml/2006/main">
               <a:ext uri="{FF2B5EF4-FFF2-40B4-BE49-F238E27FC236}">
-                <a16:creationId xmlns:a16="http://schemas.microsoft.com/office/drawing/2014/main" id="{85EDFDB4-43A0-4401-B259-C86F3BFEF48B}"/>
+                <a16:creationId xmlns:a16="http://schemas.microsoft.com/office/drawing/2014/main" id="{6B09C725-16CF-45BC-9150-57CF26456E43}"/>
               </a:ext>
             </a:extLst>
           </p:cNvPr>
@@ -3904,7 +3904,7 @@
     </p:spTree>
     <p:extLst>
       <p:ext uri="{BB962C8B-B14F-4D97-AF65-F5344CB8AC3E}">
-        <p14:creationId xmlns:p14="http://schemas.microsoft.com/office/powerpoint/2010/main" val="1239315938"/>
+        <p14:creationId xmlns:p14="http://schemas.microsoft.com/office/powerpoint/2010/main" val="214703693"/>
       </p:ext>
     </p:extLst>
   </p:cSld>
@@ -3935,7 +3935,7 @@
           <p:cNvPr id="1" name="s12-rule">
             <a:extLst xmlns:a="http://schemas.openxmlformats.org/drawingml/2006/main">
               <a:ext uri="{FF2B5EF4-FFF2-40B4-BE49-F238E27FC236}">
-                <a16:creationId xmlns:a16="http://schemas.microsoft.com/office/drawing/2014/main" id="{F0116A5C-38DE-4337-816C-C050B0579B67}"/>
+                <a16:creationId xmlns:a16="http://schemas.microsoft.com/office/drawing/2014/main" id="{0FD09EBF-5372-46EA-9A01-2D5275F27EBC}"/>
               </a:ext>
             </a:extLst>
           </p:cNvPr>
@@ -3968,7 +3968,7 @@
           <p:cNvPr id="2" name="s12-eyebrow">
             <a:extLst xmlns:a="http://schemas.openxmlformats.org/drawingml/2006/main">
               <a:ext uri="{FF2B5EF4-FFF2-40B4-BE49-F238E27FC236}">
-                <a16:creationId xmlns:a16="http://schemas.microsoft.com/office/drawing/2014/main" id="{B42C824B-A3DB-4D97-91CD-51A627A6F37E}"/>
+                <a16:creationId xmlns:a16="http://schemas.microsoft.com/office/drawing/2014/main" id="{6A7A854D-5133-4706-BB2F-7778799EAB03}"/>
               </a:ext>
             </a:extLst>
           </p:cNvPr>
@@ -4026,7 +4026,7 @@
           <p:cNvPr id="3" name="s12-title">
             <a:extLst xmlns:a="http://schemas.openxmlformats.org/drawingml/2006/main">
               <a:ext uri="{FF2B5EF4-FFF2-40B4-BE49-F238E27FC236}">
-                <a16:creationId xmlns:a16="http://schemas.microsoft.com/office/drawing/2014/main" id="{399B6934-4842-4D49-81A0-E0C9A1EDF179}"/>
+                <a16:creationId xmlns:a16="http://schemas.microsoft.com/office/drawing/2014/main" id="{89A99D06-53CF-4A50-8B6B-29F9B6576F1C}"/>
               </a:ext>
             </a:extLst>
           </p:cNvPr>
@@ -4084,7 +4084,7 @@
           <p:cNvPr id="4" name="s12-footer">
             <a:extLst xmlns:a="http://schemas.openxmlformats.org/drawingml/2006/main">
               <a:ext uri="{FF2B5EF4-FFF2-40B4-BE49-F238E27FC236}">
-                <a16:creationId xmlns:a16="http://schemas.microsoft.com/office/drawing/2014/main" id="{41466D4C-E76D-4C59-98B8-F11B46A2333C}"/>
+                <a16:creationId xmlns:a16="http://schemas.microsoft.com/office/drawing/2014/main" id="{31E9BE16-665E-4383-8663-0E15AF99759F}"/>
               </a:ext>
             </a:extLst>
           </p:cNvPr>
@@ -4115,7 +4115,7 @@
           <p:cNvPr id="5" name="s12-identity">
             <a:extLst xmlns:a="http://schemas.openxmlformats.org/drawingml/2006/main">
               <a:ext uri="{FF2B5EF4-FFF2-40B4-BE49-F238E27FC236}">
-                <a16:creationId xmlns:a16="http://schemas.microsoft.com/office/drawing/2014/main" id="{E3520B6D-603E-4459-86C7-A3A14EB9BEB9}"/>
+                <a16:creationId xmlns:a16="http://schemas.microsoft.com/office/drawing/2014/main" id="{44FA50FF-003E-46C7-BE57-919C9791E322}"/>
               </a:ext>
             </a:extLst>
           </p:cNvPr>
@@ -4173,7 +4173,7 @@
           <p:cNvPr id="6" name="recap-circle-0">
             <a:extLst xmlns:a="http://schemas.openxmlformats.org/drawingml/2006/main">
               <a:ext uri="{FF2B5EF4-FFF2-40B4-BE49-F238E27FC236}">
-                <a16:creationId xmlns:a16="http://schemas.microsoft.com/office/drawing/2014/main" id="{A00DE648-F2F1-4BC8-A3D6-B97923B33469}"/>
+                <a16:creationId xmlns:a16="http://schemas.microsoft.com/office/drawing/2014/main" id="{18725555-9E98-4DF1-9929-A825688E2369}"/>
               </a:ext>
             </a:extLst>
           </p:cNvPr>
@@ -4206,7 +4206,7 @@
           <p:cNvPr id="7" name="recap-number-0">
             <a:extLst xmlns:a="http://schemas.openxmlformats.org/drawingml/2006/main">
               <a:ext uri="{FF2B5EF4-FFF2-40B4-BE49-F238E27FC236}">
-                <a16:creationId xmlns:a16="http://schemas.microsoft.com/office/drawing/2014/main" id="{5D60A669-EFD4-412E-BED7-B3FC1C4D111B}"/>
+                <a16:creationId xmlns:a16="http://schemas.microsoft.com/office/drawing/2014/main" id="{D2900F87-2053-43CD-A95D-C477272C5BDB}"/>
               </a:ext>
             </a:extLst>
           </p:cNvPr>
@@ -4264,7 +4264,7 @@
           <p:cNvPr id="8" name="recap-item-0">
             <a:extLst xmlns:a="http://schemas.openxmlformats.org/drawingml/2006/main">
               <a:ext uri="{FF2B5EF4-FFF2-40B4-BE49-F238E27FC236}">
-                <a16:creationId xmlns:a16="http://schemas.microsoft.com/office/drawing/2014/main" id="{BD535644-12B0-4C78-8A08-63F2265C1F7B}"/>
+                <a16:creationId xmlns:a16="http://schemas.microsoft.com/office/drawing/2014/main" id="{2AD7CCF6-CB2C-4BF6-A215-77E10F72DD18}"/>
               </a:ext>
             </a:extLst>
           </p:cNvPr>
@@ -4328,7 +4328,7 @@
           <p:cNvPr id="9" name="recap-connector-0">
             <a:extLst xmlns:a="http://schemas.openxmlformats.org/drawingml/2006/main">
               <a:ext uri="{FF2B5EF4-FFF2-40B4-BE49-F238E27FC236}">
-                <a16:creationId xmlns:a16="http://schemas.microsoft.com/office/drawing/2014/main" id="{F11421A5-E908-4C84-AE28-5197529A93EC}"/>
+                <a16:creationId xmlns:a16="http://schemas.microsoft.com/office/drawing/2014/main" id="{1CD0F9AB-45D3-4735-AB52-3D6352611037}"/>
               </a:ext>
             </a:extLst>
           </p:cNvPr>
@@ -4359,7 +4359,7 @@
           <p:cNvPr id="10" name="recap-circle-1">
             <a:extLst xmlns:a="http://schemas.openxmlformats.org/drawingml/2006/main">
               <a:ext uri="{FF2B5EF4-FFF2-40B4-BE49-F238E27FC236}">
-                <a16:creationId xmlns:a16="http://schemas.microsoft.com/office/drawing/2014/main" id="{144705AF-579B-47FC-8762-42E14CC54B65}"/>
+                <a16:creationId xmlns:a16="http://schemas.microsoft.com/office/drawing/2014/main" id="{6DF98140-10B6-4CFE-940B-5F534FF3247E}"/>
               </a:ext>
             </a:extLst>
           </p:cNvPr>
@@ -4392,7 +4392,7 @@
           <p:cNvPr id="11" name="recap-number-1">
             <a:extLst xmlns:a="http://schemas.openxmlformats.org/drawingml/2006/main">
               <a:ext uri="{FF2B5EF4-FFF2-40B4-BE49-F238E27FC236}">
-                <a16:creationId xmlns:a16="http://schemas.microsoft.com/office/drawing/2014/main" id="{4D207F4C-1733-4F7C-B1E3-A6BC05532170}"/>
+                <a16:creationId xmlns:a16="http://schemas.microsoft.com/office/drawing/2014/main" id="{8605FC5F-F1BD-4100-A090-BD52345A03C2}"/>
               </a:ext>
             </a:extLst>
           </p:cNvPr>
@@ -4450,7 +4450,7 @@
           <p:cNvPr id="12" name="recap-item-1">
             <a:extLst xmlns:a="http://schemas.openxmlformats.org/drawingml/2006/main">
               <a:ext uri="{FF2B5EF4-FFF2-40B4-BE49-F238E27FC236}">
-                <a16:creationId xmlns:a16="http://schemas.microsoft.com/office/drawing/2014/main" id="{E885962A-9238-461D-BD29-7A447197054C}"/>
+                <a16:creationId xmlns:a16="http://schemas.microsoft.com/office/drawing/2014/main" id="{1766874F-3114-414D-992D-96C19D2E5E17}"/>
               </a:ext>
             </a:extLst>
           </p:cNvPr>
@@ -4514,7 +4514,7 @@
           <p:cNvPr id="13" name="recap-connector-1">
             <a:extLst xmlns:a="http://schemas.openxmlformats.org/drawingml/2006/main">
               <a:ext uri="{FF2B5EF4-FFF2-40B4-BE49-F238E27FC236}">
-                <a16:creationId xmlns:a16="http://schemas.microsoft.com/office/drawing/2014/main" id="{C28CB60D-A861-467D-94DD-2615C73B61A1}"/>
+                <a16:creationId xmlns:a16="http://schemas.microsoft.com/office/drawing/2014/main" id="{9CD36BC6-03EB-4467-81B6-08F861370AF1}"/>
               </a:ext>
             </a:extLst>
           </p:cNvPr>
@@ -4545,7 +4545,7 @@
           <p:cNvPr id="14" name="recap-circle-2">
             <a:extLst xmlns:a="http://schemas.openxmlformats.org/drawingml/2006/main">
               <a:ext uri="{FF2B5EF4-FFF2-40B4-BE49-F238E27FC236}">
-                <a16:creationId xmlns:a16="http://schemas.microsoft.com/office/drawing/2014/main" id="{FFAF5FAC-B6BD-433A-A1CD-14CD648366FC}"/>
+                <a16:creationId xmlns:a16="http://schemas.microsoft.com/office/drawing/2014/main" id="{829301A2-44D5-4764-859F-9F8101272B9C}"/>
               </a:ext>
             </a:extLst>
           </p:cNvPr>
@@ -4578,7 +4578,7 @@
           <p:cNvPr id="15" name="recap-number-2">
             <a:extLst xmlns:a="http://schemas.openxmlformats.org/drawingml/2006/main">
               <a:ext uri="{FF2B5EF4-FFF2-40B4-BE49-F238E27FC236}">
-                <a16:creationId xmlns:a16="http://schemas.microsoft.com/office/drawing/2014/main" id="{E934C6EB-211F-432A-B35F-046DCCB9B167}"/>
+                <a16:creationId xmlns:a16="http://schemas.microsoft.com/office/drawing/2014/main" id="{D57C39F6-F6DB-4874-AA0E-D91B53513A43}"/>
               </a:ext>
             </a:extLst>
           </p:cNvPr>
@@ -4636,7 +4636,7 @@
           <p:cNvPr id="16" name="recap-item-2">
             <a:extLst xmlns:a="http://schemas.openxmlformats.org/drawingml/2006/main">
               <a:ext uri="{FF2B5EF4-FFF2-40B4-BE49-F238E27FC236}">
-                <a16:creationId xmlns:a16="http://schemas.microsoft.com/office/drawing/2014/main" id="{76D98DBE-243D-4292-9C7E-71F1BBFB147A}"/>
+                <a16:creationId xmlns:a16="http://schemas.microsoft.com/office/drawing/2014/main" id="{A7368C96-DA7D-4A23-A92E-F12953E95CE8}"/>
               </a:ext>
             </a:extLst>
           </p:cNvPr>
@@ -4698,7 +4698,7 @@
     </p:spTree>
     <p:extLst>
       <p:ext uri="{BB962C8B-B14F-4D97-AF65-F5344CB8AC3E}">
-        <p14:creationId xmlns:p14="http://schemas.microsoft.com/office/powerpoint/2010/main" val="1263496739"/>
+        <p14:creationId xmlns:p14="http://schemas.microsoft.com/office/powerpoint/2010/main" val="254116329"/>
       </p:ext>
     </p:extLst>
   </p:cSld>
@@ -4729,7 +4729,7 @@
           <p:cNvPr id="1" name="s13-rule">
             <a:extLst xmlns:a="http://schemas.openxmlformats.org/drawingml/2006/main">
               <a:ext uri="{FF2B5EF4-FFF2-40B4-BE49-F238E27FC236}">
-                <a16:creationId xmlns:a16="http://schemas.microsoft.com/office/drawing/2014/main" id="{72DB5AAA-B497-407A-9800-A33459E8D02D}"/>
+                <a16:creationId xmlns:a16="http://schemas.microsoft.com/office/drawing/2014/main" id="{502D9B1B-9A14-4E29-BBD5-16C54D851A51}"/>
               </a:ext>
             </a:extLst>
           </p:cNvPr>
@@ -4762,7 +4762,7 @@
           <p:cNvPr id="2" name="s13-eyebrow">
             <a:extLst xmlns:a="http://schemas.openxmlformats.org/drawingml/2006/main">
               <a:ext uri="{FF2B5EF4-FFF2-40B4-BE49-F238E27FC236}">
-                <a16:creationId xmlns:a16="http://schemas.microsoft.com/office/drawing/2014/main" id="{EC90EEFF-8002-4935-8C82-69F6520451F8}"/>
+                <a16:creationId xmlns:a16="http://schemas.microsoft.com/office/drawing/2014/main" id="{D75CE7FB-904A-4210-9BC6-49FFF661725B}"/>
               </a:ext>
             </a:extLst>
           </p:cNvPr>
@@ -4820,7 +4820,7 @@
           <p:cNvPr id="3" name="s13-title">
             <a:extLst xmlns:a="http://schemas.openxmlformats.org/drawingml/2006/main">
               <a:ext uri="{FF2B5EF4-FFF2-40B4-BE49-F238E27FC236}">
-                <a16:creationId xmlns:a16="http://schemas.microsoft.com/office/drawing/2014/main" id="{2784B90A-F1E9-46EF-9BFC-3DF2F6ACB61F}"/>
+                <a16:creationId xmlns:a16="http://schemas.microsoft.com/office/drawing/2014/main" id="{80CBD387-9F84-4138-8261-70D958D04604}"/>
               </a:ext>
             </a:extLst>
           </p:cNvPr>
@@ -4878,7 +4878,7 @@
           <p:cNvPr id="4" name="s13-footer">
             <a:extLst xmlns:a="http://schemas.openxmlformats.org/drawingml/2006/main">
               <a:ext uri="{FF2B5EF4-FFF2-40B4-BE49-F238E27FC236}">
-                <a16:creationId xmlns:a16="http://schemas.microsoft.com/office/drawing/2014/main" id="{91E6B0C1-C0C9-427D-9955-D8A34977E968}"/>
+                <a16:creationId xmlns:a16="http://schemas.microsoft.com/office/drawing/2014/main" id="{2F82826B-DA82-4783-8C9B-69AA8F546797}"/>
               </a:ext>
             </a:extLst>
           </p:cNvPr>
@@ -4909,7 +4909,7 @@
           <p:cNvPr id="5" name="s13-identity">
             <a:extLst xmlns:a="http://schemas.openxmlformats.org/drawingml/2006/main">
               <a:ext uri="{FF2B5EF4-FFF2-40B4-BE49-F238E27FC236}">
-                <a16:creationId xmlns:a16="http://schemas.microsoft.com/office/drawing/2014/main" id="{F2541D3C-BD48-459B-AA42-CB111DFCEE6E}"/>
+                <a16:creationId xmlns:a16="http://schemas.microsoft.com/office/drawing/2014/main" id="{B36E6BA1-4030-4A36-A8DC-317C1D7772F7}"/>
               </a:ext>
             </a:extLst>
           </p:cNvPr>
@@ -4967,7 +4967,7 @@
           <p:cNvPr id="6" name="source-0">
             <a:extLst xmlns:a="http://schemas.openxmlformats.org/drawingml/2006/main">
               <a:ext uri="{FF2B5EF4-FFF2-40B4-BE49-F238E27FC236}">
-                <a16:creationId xmlns:a16="http://schemas.microsoft.com/office/drawing/2014/main" id="{94887E4C-2D78-44DB-941D-06911CF962BD}"/>
+                <a16:creationId xmlns:a16="http://schemas.microsoft.com/office/drawing/2014/main" id="{C2E635E6-55EB-4382-898F-F8C91E460421}"/>
               </a:ext>
             </a:extLst>
           </p:cNvPr>
@@ -5031,7 +5031,7 @@
           <p:cNvPr id="7" name="source-1">
             <a:extLst xmlns:a="http://schemas.openxmlformats.org/drawingml/2006/main">
               <a:ext uri="{FF2B5EF4-FFF2-40B4-BE49-F238E27FC236}">
-                <a16:creationId xmlns:a16="http://schemas.microsoft.com/office/drawing/2014/main" id="{FA59314B-E6E4-4B16-9823-9C74AD94E813}"/>
+                <a16:creationId xmlns:a16="http://schemas.microsoft.com/office/drawing/2014/main" id="{E7BD95C0-BC4B-427F-9C2C-94F6DB26C955}"/>
               </a:ext>
             </a:extLst>
           </p:cNvPr>
@@ -5095,7 +5095,7 @@
           <p:cNvPr id="8" name="source-2">
             <a:extLst xmlns:a="http://schemas.openxmlformats.org/drawingml/2006/main">
               <a:ext uri="{FF2B5EF4-FFF2-40B4-BE49-F238E27FC236}">
-                <a16:creationId xmlns:a16="http://schemas.microsoft.com/office/drawing/2014/main" id="{9877B519-BA19-4542-AFCF-22AB518B1B57}"/>
+                <a16:creationId xmlns:a16="http://schemas.microsoft.com/office/drawing/2014/main" id="{85F3F911-9687-4F7B-A076-91C83970F30C}"/>
               </a:ext>
             </a:extLst>
           </p:cNvPr>
@@ -5159,7 +5159,7 @@
           <p:cNvPr id="9" name="source-3">
             <a:extLst xmlns:a="http://schemas.openxmlformats.org/drawingml/2006/main">
               <a:ext uri="{FF2B5EF4-FFF2-40B4-BE49-F238E27FC236}">
-                <a16:creationId xmlns:a16="http://schemas.microsoft.com/office/drawing/2014/main" id="{1D4F915E-E4A2-47B1-8DAE-66717310FCE2}"/>
+                <a16:creationId xmlns:a16="http://schemas.microsoft.com/office/drawing/2014/main" id="{BD0ED549-9201-421C-AE37-400DC8878858}"/>
               </a:ext>
             </a:extLst>
           </p:cNvPr>
@@ -5223,7 +5223,7 @@
           <p:cNvPr id="10" name="source-4">
             <a:extLst xmlns:a="http://schemas.openxmlformats.org/drawingml/2006/main">
               <a:ext uri="{FF2B5EF4-FFF2-40B4-BE49-F238E27FC236}">
-                <a16:creationId xmlns:a16="http://schemas.microsoft.com/office/drawing/2014/main" id="{6314C1B0-3BC2-4834-B565-5ED7FE69A69C}"/>
+                <a16:creationId xmlns:a16="http://schemas.microsoft.com/office/drawing/2014/main" id="{75ABD807-AADA-4D46-8B8A-E575660787F9}"/>
               </a:ext>
             </a:extLst>
           </p:cNvPr>
@@ -5287,7 +5287,7 @@
           <p:cNvPr id="11" name="s13-takeaway-rule">
             <a:extLst xmlns:a="http://schemas.openxmlformats.org/drawingml/2006/main">
               <a:ext uri="{FF2B5EF4-FFF2-40B4-BE49-F238E27FC236}">
-                <a16:creationId xmlns:a16="http://schemas.microsoft.com/office/drawing/2014/main" id="{042892BB-AD2D-47A8-BDB3-406E054085D2}"/>
+                <a16:creationId xmlns:a16="http://schemas.microsoft.com/office/drawing/2014/main" id="{4F320CD0-933E-482B-AEE1-FD32E81FADA1}"/>
               </a:ext>
             </a:extLst>
           </p:cNvPr>
@@ -5320,7 +5320,7 @@
           <p:cNvPr id="12" name="s13-takeaway">
             <a:extLst xmlns:a="http://schemas.openxmlformats.org/drawingml/2006/main">
               <a:ext uri="{FF2B5EF4-FFF2-40B4-BE49-F238E27FC236}">
-                <a16:creationId xmlns:a16="http://schemas.microsoft.com/office/drawing/2014/main" id="{A3939414-059C-4F94-BA4A-CD61006DDBBD}"/>
+                <a16:creationId xmlns:a16="http://schemas.microsoft.com/office/drawing/2014/main" id="{7B22FF2A-8A9A-45B1-B59F-3050CF3732DB}"/>
               </a:ext>
             </a:extLst>
           </p:cNvPr>
@@ -5345,7 +5345,7 @@
         </p:spPr>
         <p:txBody>
           <a:bodyPr xmlns:a="http://schemas.openxmlformats.org/drawingml/2006/main" lIns="0" tIns="0" rIns="0" bIns="0" anchor="ctr">
-            <a:normAutofit fontScale="95911"/>
+            <a:normAutofit fontScale="100000"/>
           </a:bodyPr>
           <a:lstStyle xmlns:a="http://schemas.openxmlformats.org/drawingml/2006/main"/>
           <a:p xmlns:a="http://schemas.openxmlformats.org/drawingml/2006/main">
@@ -5368,7 +5368,7 @@
                 <a:ea typeface="PingFang SC"/>
                 <a:cs typeface="PingFang SC"/>
               </a:rPr>
-              <a:t>课程精编页用于讲授主线；播放器中的“原课件”模式保留团队 PowerPoint 精选页、真实图片和可播放视频。</a:t>
+              <a:t>课程正文与幻灯片共享同一知识主线，图片和视频用于帮助理解本节概念与案例。</a:t>
             </a:r>
           </a:p>
         </p:txBody>
@@ -5376,7 +5376,7 @@
     </p:spTree>
     <p:extLst>
       <p:ext uri="{BB962C8B-B14F-4D97-AF65-F5344CB8AC3E}">
-        <p14:creationId xmlns:p14="http://schemas.microsoft.com/office/powerpoint/2010/main" val="348508958"/>
+        <p14:creationId xmlns:p14="http://schemas.microsoft.com/office/powerpoint/2010/main" val="468498126"/>
       </p:ext>
     </p:extLst>
   </p:cSld>
@@ -5407,7 +5407,7 @@
           <p:cNvPr id="1" name="s2-rule">
             <a:extLst xmlns:a="http://schemas.openxmlformats.org/drawingml/2006/main">
               <a:ext uri="{FF2B5EF4-FFF2-40B4-BE49-F238E27FC236}">
-                <a16:creationId xmlns:a16="http://schemas.microsoft.com/office/drawing/2014/main" id="{CC4FA5CB-5D6A-432B-9D26-2B021BA5FCF7}"/>
+                <a16:creationId xmlns:a16="http://schemas.microsoft.com/office/drawing/2014/main" id="{AD9842AB-97CE-4AFE-ACED-72B7569547D3}"/>
               </a:ext>
             </a:extLst>
           </p:cNvPr>
@@ -5440,7 +5440,7 @@
           <p:cNvPr id="2" name="s2-eyebrow">
             <a:extLst xmlns:a="http://schemas.openxmlformats.org/drawingml/2006/main">
               <a:ext uri="{FF2B5EF4-FFF2-40B4-BE49-F238E27FC236}">
-                <a16:creationId xmlns:a16="http://schemas.microsoft.com/office/drawing/2014/main" id="{8D452371-87DD-4FF2-BC45-4B3474415BD0}"/>
+                <a16:creationId xmlns:a16="http://schemas.microsoft.com/office/drawing/2014/main" id="{062B009F-54E2-47D8-B659-38A89EA146A6}"/>
               </a:ext>
             </a:extLst>
           </p:cNvPr>
@@ -5498,7 +5498,7 @@
           <p:cNvPr id="3" name="s2-title">
             <a:extLst xmlns:a="http://schemas.openxmlformats.org/drawingml/2006/main">
               <a:ext uri="{FF2B5EF4-FFF2-40B4-BE49-F238E27FC236}">
-                <a16:creationId xmlns:a16="http://schemas.microsoft.com/office/drawing/2014/main" id="{7CE2DB67-C4EE-464B-8C03-49A993B68C96}"/>
+                <a16:creationId xmlns:a16="http://schemas.microsoft.com/office/drawing/2014/main" id="{E2A706E0-9A0A-4F18-8CCC-1311E1B30104}"/>
               </a:ext>
             </a:extLst>
           </p:cNvPr>
@@ -5556,7 +5556,7 @@
           <p:cNvPr id="4" name="s2-footer">
             <a:extLst xmlns:a="http://schemas.openxmlformats.org/drawingml/2006/main">
               <a:ext uri="{FF2B5EF4-FFF2-40B4-BE49-F238E27FC236}">
-                <a16:creationId xmlns:a16="http://schemas.microsoft.com/office/drawing/2014/main" id="{F378FBDC-ACC7-4E97-9924-C1DB3D876F38}"/>
+                <a16:creationId xmlns:a16="http://schemas.microsoft.com/office/drawing/2014/main" id="{EE0F7A79-8A28-4C8B-B117-FEE670E48FD6}"/>
               </a:ext>
             </a:extLst>
           </p:cNvPr>
@@ -5587,7 +5587,7 @@
           <p:cNvPr id="5" name="s2-identity">
             <a:extLst xmlns:a="http://schemas.openxmlformats.org/drawingml/2006/main">
               <a:ext uri="{FF2B5EF4-FFF2-40B4-BE49-F238E27FC236}">
-                <a16:creationId xmlns:a16="http://schemas.microsoft.com/office/drawing/2014/main" id="{945678BC-AEB7-4BD4-B4A2-1A6FA1350A9D}"/>
+                <a16:creationId xmlns:a16="http://schemas.microsoft.com/office/drawing/2014/main" id="{66C38221-F499-40BB-8036-A0A2AB2FB9D1}"/>
               </a:ext>
             </a:extLst>
           </p:cNvPr>
@@ -5645,7 +5645,7 @@
           <p:cNvPr id="6" name="objective-1">
             <a:extLst xmlns:a="http://schemas.openxmlformats.org/drawingml/2006/main">
               <a:ext uri="{FF2B5EF4-FFF2-40B4-BE49-F238E27FC236}">
-                <a16:creationId xmlns:a16="http://schemas.microsoft.com/office/drawing/2014/main" id="{03CCDD2B-98B1-4FE2-82E5-3BCC7470030E}"/>
+                <a16:creationId xmlns:a16="http://schemas.microsoft.com/office/drawing/2014/main" id="{12A9482D-56E6-4FE0-9C82-CE005E57E51D}"/>
               </a:ext>
             </a:extLst>
           </p:cNvPr>
@@ -5732,7 +5732,7 @@
           <p:cNvPr id="7" name="objective-2">
             <a:extLst xmlns:a="http://schemas.openxmlformats.org/drawingml/2006/main">
               <a:ext uri="{FF2B5EF4-FFF2-40B4-BE49-F238E27FC236}">
-                <a16:creationId xmlns:a16="http://schemas.microsoft.com/office/drawing/2014/main" id="{4BD5A022-D148-49CB-81D2-820F67B7B4E4}"/>
+                <a16:creationId xmlns:a16="http://schemas.microsoft.com/office/drawing/2014/main" id="{384682C6-0BFB-422D-BE7D-2ACA32548AF1}"/>
               </a:ext>
             </a:extLst>
           </p:cNvPr>
@@ -5819,7 +5819,7 @@
           <p:cNvPr id="8" name="objective-3">
             <a:extLst xmlns:a="http://schemas.openxmlformats.org/drawingml/2006/main">
               <a:ext uri="{FF2B5EF4-FFF2-40B4-BE49-F238E27FC236}">
-                <a16:creationId xmlns:a16="http://schemas.microsoft.com/office/drawing/2014/main" id="{9AE070DA-30C8-479C-9672-D8E2BC983CDF}"/>
+                <a16:creationId xmlns:a16="http://schemas.microsoft.com/office/drawing/2014/main" id="{7337DB5A-03F3-4C08-8C02-7C4B55388B7D}"/>
               </a:ext>
             </a:extLst>
           </p:cNvPr>
@@ -5906,7 +5906,7 @@
           <p:cNvPr id="9" name="objective-4">
             <a:extLst xmlns:a="http://schemas.openxmlformats.org/drawingml/2006/main">
               <a:ext uri="{FF2B5EF4-FFF2-40B4-BE49-F238E27FC236}">
-                <a16:creationId xmlns:a16="http://schemas.microsoft.com/office/drawing/2014/main" id="{E86BDF22-81C3-48CC-AF60-4D64F160AC5A}"/>
+                <a16:creationId xmlns:a16="http://schemas.microsoft.com/office/drawing/2014/main" id="{EF871F1C-A85D-4C97-A80B-52053F39A0AD}"/>
               </a:ext>
             </a:extLst>
           </p:cNvPr>
@@ -5991,7 +5991,7 @@
     </p:spTree>
     <p:extLst>
       <p:ext uri="{BB962C8B-B14F-4D97-AF65-F5344CB8AC3E}">
-        <p14:creationId xmlns:p14="http://schemas.microsoft.com/office/powerpoint/2010/main" val="183621"/>
+        <p14:creationId xmlns:p14="http://schemas.microsoft.com/office/powerpoint/2010/main" val="1385950678"/>
       </p:ext>
     </p:extLst>
   </p:cSld>
@@ -6022,7 +6022,7 @@
           <p:cNvPr id="1" name="s3-rule">
             <a:extLst xmlns:a="http://schemas.openxmlformats.org/drawingml/2006/main">
               <a:ext uri="{FF2B5EF4-FFF2-40B4-BE49-F238E27FC236}">
-                <a16:creationId xmlns:a16="http://schemas.microsoft.com/office/drawing/2014/main" id="{2C5862C7-35AE-4538-9100-CD8A9145136D}"/>
+                <a16:creationId xmlns:a16="http://schemas.microsoft.com/office/drawing/2014/main" id="{14B0BF20-E9F0-4FCD-AE52-B16FE4DECBA0}"/>
               </a:ext>
             </a:extLst>
           </p:cNvPr>
@@ -6055,7 +6055,7 @@
           <p:cNvPr id="2" name="s3-eyebrow">
             <a:extLst xmlns:a="http://schemas.openxmlformats.org/drawingml/2006/main">
               <a:ext uri="{FF2B5EF4-FFF2-40B4-BE49-F238E27FC236}">
-                <a16:creationId xmlns:a16="http://schemas.microsoft.com/office/drawing/2014/main" id="{3D23682B-B582-46B8-92E7-877D7ECF3204}"/>
+                <a16:creationId xmlns:a16="http://schemas.microsoft.com/office/drawing/2014/main" id="{9807FAC4-4196-4A25-897A-109C3C178BEB}"/>
               </a:ext>
             </a:extLst>
           </p:cNvPr>
@@ -6113,7 +6113,7 @@
           <p:cNvPr id="3" name="s3-title">
             <a:extLst xmlns:a="http://schemas.openxmlformats.org/drawingml/2006/main">
               <a:ext uri="{FF2B5EF4-FFF2-40B4-BE49-F238E27FC236}">
-                <a16:creationId xmlns:a16="http://schemas.microsoft.com/office/drawing/2014/main" id="{5C6F127D-16F5-47A1-990F-DB60C85B3971}"/>
+                <a16:creationId xmlns:a16="http://schemas.microsoft.com/office/drawing/2014/main" id="{513234F3-14FC-46B1-A52F-DF7B488F8236}"/>
               </a:ext>
             </a:extLst>
           </p:cNvPr>
@@ -6171,7 +6171,7 @@
           <p:cNvPr id="4" name="s3-footer">
             <a:extLst xmlns:a="http://schemas.openxmlformats.org/drawingml/2006/main">
               <a:ext uri="{FF2B5EF4-FFF2-40B4-BE49-F238E27FC236}">
-                <a16:creationId xmlns:a16="http://schemas.microsoft.com/office/drawing/2014/main" id="{8E82ADC3-28F0-4CBF-BC6B-920E6FC06C84}"/>
+                <a16:creationId xmlns:a16="http://schemas.microsoft.com/office/drawing/2014/main" id="{5FD0B923-5B56-4B4F-9BDB-DE40B32A0988}"/>
               </a:ext>
             </a:extLst>
           </p:cNvPr>
@@ -6202,7 +6202,7 @@
           <p:cNvPr id="5" name="s3-identity">
             <a:extLst xmlns:a="http://schemas.openxmlformats.org/drawingml/2006/main">
               <a:ext uri="{FF2B5EF4-FFF2-40B4-BE49-F238E27FC236}">
-                <a16:creationId xmlns:a16="http://schemas.microsoft.com/office/drawing/2014/main" id="{69812379-64EC-4CCA-940E-8F9D8B0AE431}"/>
+                <a16:creationId xmlns:a16="http://schemas.microsoft.com/office/drawing/2014/main" id="{A76C6CB6-2C16-428E-808A-82328379543D}"/>
               </a:ext>
             </a:extLst>
           </p:cNvPr>
@@ -6260,7 +6260,7 @@
           <p:cNvPr id="6" name="core-no-0">
             <a:extLst xmlns:a="http://schemas.openxmlformats.org/drawingml/2006/main">
               <a:ext uri="{FF2B5EF4-FFF2-40B4-BE49-F238E27FC236}">
-                <a16:creationId xmlns:a16="http://schemas.microsoft.com/office/drawing/2014/main" id="{5388E0CA-AE43-4C65-89A5-59C35031CDC1}"/>
+                <a16:creationId xmlns:a16="http://schemas.microsoft.com/office/drawing/2014/main" id="{C8DC20CB-53A0-43F3-B516-44B1B3592DBF}"/>
               </a:ext>
             </a:extLst>
           </p:cNvPr>
@@ -6318,7 +6318,7 @@
           <p:cNvPr id="7" name="core-label-0">
             <a:extLst xmlns:a="http://schemas.openxmlformats.org/drawingml/2006/main">
               <a:ext uri="{FF2B5EF4-FFF2-40B4-BE49-F238E27FC236}">
-                <a16:creationId xmlns:a16="http://schemas.microsoft.com/office/drawing/2014/main" id="{E1304C29-F830-48E4-98C3-3E390508D4B2}"/>
+                <a16:creationId xmlns:a16="http://schemas.microsoft.com/office/drawing/2014/main" id="{E3BBAFEC-9277-416F-A8C0-4CBDF2C23693}"/>
               </a:ext>
             </a:extLst>
           </p:cNvPr>
@@ -6376,7 +6376,7 @@
           <p:cNvPr id="8" name="core-body-0">
             <a:extLst xmlns:a="http://schemas.openxmlformats.org/drawingml/2006/main">
               <a:ext uri="{FF2B5EF4-FFF2-40B4-BE49-F238E27FC236}">
-                <a16:creationId xmlns:a16="http://schemas.microsoft.com/office/drawing/2014/main" id="{48C3FB07-87D6-42B8-9D00-755419E46CCA}"/>
+                <a16:creationId xmlns:a16="http://schemas.microsoft.com/office/drawing/2014/main" id="{AB951027-9172-4F90-B75E-66710377ADE0}"/>
               </a:ext>
             </a:extLst>
           </p:cNvPr>
@@ -6440,7 +6440,7 @@
           <p:cNvPr id="9" name="core-no-1">
             <a:extLst xmlns:a="http://schemas.openxmlformats.org/drawingml/2006/main">
               <a:ext uri="{FF2B5EF4-FFF2-40B4-BE49-F238E27FC236}">
-                <a16:creationId xmlns:a16="http://schemas.microsoft.com/office/drawing/2014/main" id="{64967489-A13B-4974-A671-CFE3FC297322}"/>
+                <a16:creationId xmlns:a16="http://schemas.microsoft.com/office/drawing/2014/main" id="{EF92B771-2484-4140-8B84-7168B8420304}"/>
               </a:ext>
             </a:extLst>
           </p:cNvPr>
@@ -6498,7 +6498,7 @@
           <p:cNvPr id="10" name="core-body-1">
             <a:extLst xmlns:a="http://schemas.openxmlformats.org/drawingml/2006/main">
               <a:ext uri="{FF2B5EF4-FFF2-40B4-BE49-F238E27FC236}">
-                <a16:creationId xmlns:a16="http://schemas.microsoft.com/office/drawing/2014/main" id="{2CB79A4A-2002-4A52-8745-5924898A8E26}"/>
+                <a16:creationId xmlns:a16="http://schemas.microsoft.com/office/drawing/2014/main" id="{5E124DE6-236D-464C-B0F7-CEBAD0D0AB03}"/>
               </a:ext>
             </a:extLst>
           </p:cNvPr>
@@ -6562,7 +6562,7 @@
           <p:cNvPr id="11" name="core-no-2">
             <a:extLst xmlns:a="http://schemas.openxmlformats.org/drawingml/2006/main">
               <a:ext uri="{FF2B5EF4-FFF2-40B4-BE49-F238E27FC236}">
-                <a16:creationId xmlns:a16="http://schemas.microsoft.com/office/drawing/2014/main" id="{66B5232A-4D07-4837-ADAE-E682BD81F0CA}"/>
+                <a16:creationId xmlns:a16="http://schemas.microsoft.com/office/drawing/2014/main" id="{CA621342-CE72-42DD-B089-98FFFAA42AEF}"/>
               </a:ext>
             </a:extLst>
           </p:cNvPr>
@@ -6620,7 +6620,7 @@
           <p:cNvPr id="12" name="core-body-2">
             <a:extLst xmlns:a="http://schemas.openxmlformats.org/drawingml/2006/main">
               <a:ext uri="{FF2B5EF4-FFF2-40B4-BE49-F238E27FC236}">
-                <a16:creationId xmlns:a16="http://schemas.microsoft.com/office/drawing/2014/main" id="{BD83A30D-1E52-49E2-A713-DE104E9F868A}"/>
+                <a16:creationId xmlns:a16="http://schemas.microsoft.com/office/drawing/2014/main" id="{71BF2E29-D614-4D7A-8D0A-DA9E9F191621}"/>
               </a:ext>
             </a:extLst>
           </p:cNvPr>
@@ -6684,7 +6684,7 @@
           <p:cNvPr id="13" name="s3-takeaway-rule">
             <a:extLst xmlns:a="http://schemas.openxmlformats.org/drawingml/2006/main">
               <a:ext uri="{FF2B5EF4-FFF2-40B4-BE49-F238E27FC236}">
-                <a16:creationId xmlns:a16="http://schemas.microsoft.com/office/drawing/2014/main" id="{BF211B6A-1C1D-4E40-911F-629B2371C42A}"/>
+                <a16:creationId xmlns:a16="http://schemas.microsoft.com/office/drawing/2014/main" id="{DB1AF7E7-DEFF-46AD-97C5-09DB8001A891}"/>
               </a:ext>
             </a:extLst>
           </p:cNvPr>
@@ -6717,7 +6717,7 @@
           <p:cNvPr id="14" name="s3-takeaway">
             <a:extLst xmlns:a="http://schemas.openxmlformats.org/drawingml/2006/main">
               <a:ext uri="{FF2B5EF4-FFF2-40B4-BE49-F238E27FC236}">
-                <a16:creationId xmlns:a16="http://schemas.microsoft.com/office/drawing/2014/main" id="{580117BC-0BB4-46D8-9A91-B013345C7681}"/>
+                <a16:creationId xmlns:a16="http://schemas.microsoft.com/office/drawing/2014/main" id="{A21F7BC3-8EB6-4735-948E-9396DDA16DCE}"/>
               </a:ext>
             </a:extLst>
           </p:cNvPr>
@@ -6773,7 +6773,7 @@
     </p:spTree>
     <p:extLst>
       <p:ext uri="{BB962C8B-B14F-4D97-AF65-F5344CB8AC3E}">
-        <p14:creationId xmlns:p14="http://schemas.microsoft.com/office/powerpoint/2010/main" val="575578909"/>
+        <p14:creationId xmlns:p14="http://schemas.microsoft.com/office/powerpoint/2010/main" val="1925528632"/>
       </p:ext>
     </p:extLst>
   </p:cSld>
@@ -6804,7 +6804,7 @@
           <p:cNvPr id="1" name="s4-rule">
             <a:extLst xmlns:a="http://schemas.openxmlformats.org/drawingml/2006/main">
               <a:ext uri="{FF2B5EF4-FFF2-40B4-BE49-F238E27FC236}">
-                <a16:creationId xmlns:a16="http://schemas.microsoft.com/office/drawing/2014/main" id="{BBB047B1-3660-484F-A96B-C2584B324D41}"/>
+                <a16:creationId xmlns:a16="http://schemas.microsoft.com/office/drawing/2014/main" id="{34BD7208-15D5-4C00-9669-2EEC6B1D2A5C}"/>
               </a:ext>
             </a:extLst>
           </p:cNvPr>
@@ -6837,7 +6837,7 @@
           <p:cNvPr id="2" name="s4-eyebrow">
             <a:extLst xmlns:a="http://schemas.openxmlformats.org/drawingml/2006/main">
               <a:ext uri="{FF2B5EF4-FFF2-40B4-BE49-F238E27FC236}">
-                <a16:creationId xmlns:a16="http://schemas.microsoft.com/office/drawing/2014/main" id="{070B646A-9903-4CE7-BA36-C18B07008D14}"/>
+                <a16:creationId xmlns:a16="http://schemas.microsoft.com/office/drawing/2014/main" id="{E5BAF53B-28C1-4FF1-AA7B-3A41DE7D9B24}"/>
               </a:ext>
             </a:extLst>
           </p:cNvPr>
@@ -6895,7 +6895,7 @@
           <p:cNvPr id="3" name="s4-title">
             <a:extLst xmlns:a="http://schemas.openxmlformats.org/drawingml/2006/main">
               <a:ext uri="{FF2B5EF4-FFF2-40B4-BE49-F238E27FC236}">
-                <a16:creationId xmlns:a16="http://schemas.microsoft.com/office/drawing/2014/main" id="{90AFFEA3-0157-4B67-90A9-D46E1352A73E}"/>
+                <a16:creationId xmlns:a16="http://schemas.microsoft.com/office/drawing/2014/main" id="{85D50408-FCF1-4716-B2B4-A2D821446ADF}"/>
               </a:ext>
             </a:extLst>
           </p:cNvPr>
@@ -6953,7 +6953,7 @@
           <p:cNvPr id="4" name="s4-footer">
             <a:extLst xmlns:a="http://schemas.openxmlformats.org/drawingml/2006/main">
               <a:ext uri="{FF2B5EF4-FFF2-40B4-BE49-F238E27FC236}">
-                <a16:creationId xmlns:a16="http://schemas.microsoft.com/office/drawing/2014/main" id="{AD5B90FA-42B7-4054-A342-0B8E920C8084}"/>
+                <a16:creationId xmlns:a16="http://schemas.microsoft.com/office/drawing/2014/main" id="{82AF20EB-5590-416E-847C-FB35FBE6DA33}"/>
               </a:ext>
             </a:extLst>
           </p:cNvPr>
@@ -6984,7 +6984,7 @@
           <p:cNvPr id="5" name="s4-identity">
             <a:extLst xmlns:a="http://schemas.openxmlformats.org/drawingml/2006/main">
               <a:ext uri="{FF2B5EF4-FFF2-40B4-BE49-F238E27FC236}">
-                <a16:creationId xmlns:a16="http://schemas.microsoft.com/office/drawing/2014/main" id="{792B955F-69A6-468D-B5AE-35EE78619D65}"/>
+                <a16:creationId xmlns:a16="http://schemas.microsoft.com/office/drawing/2014/main" id="{194CE593-7302-45EB-AC90-6B00821F3120}"/>
               </a:ext>
             </a:extLst>
           </p:cNvPr>
@@ -7042,7 +7042,7 @@
           <p:cNvPr id="6" name="core-no-0">
             <a:extLst xmlns:a="http://schemas.openxmlformats.org/drawingml/2006/main">
               <a:ext uri="{FF2B5EF4-FFF2-40B4-BE49-F238E27FC236}">
-                <a16:creationId xmlns:a16="http://schemas.microsoft.com/office/drawing/2014/main" id="{4AE5930D-FCB9-4DBE-A7F9-8786016FBB9F}"/>
+                <a16:creationId xmlns:a16="http://schemas.microsoft.com/office/drawing/2014/main" id="{BCF82147-F565-420E-9B07-2E4DDC519BB8}"/>
               </a:ext>
             </a:extLst>
           </p:cNvPr>
@@ -7100,7 +7100,7 @@
           <p:cNvPr id="7" name="core-label-0">
             <a:extLst xmlns:a="http://schemas.openxmlformats.org/drawingml/2006/main">
               <a:ext uri="{FF2B5EF4-FFF2-40B4-BE49-F238E27FC236}">
-                <a16:creationId xmlns:a16="http://schemas.microsoft.com/office/drawing/2014/main" id="{36873719-E9E8-47C9-AF39-302E7AC0EEA5}"/>
+                <a16:creationId xmlns:a16="http://schemas.microsoft.com/office/drawing/2014/main" id="{159E85A0-9CAD-4DE2-AA9A-377E2BE754B7}"/>
               </a:ext>
             </a:extLst>
           </p:cNvPr>
@@ -7158,7 +7158,7 @@
           <p:cNvPr id="8" name="core-body-0">
             <a:extLst xmlns:a="http://schemas.openxmlformats.org/drawingml/2006/main">
               <a:ext uri="{FF2B5EF4-FFF2-40B4-BE49-F238E27FC236}">
-                <a16:creationId xmlns:a16="http://schemas.microsoft.com/office/drawing/2014/main" id="{2E24D78E-C8CA-44B5-8104-8E79F381A981}"/>
+                <a16:creationId xmlns:a16="http://schemas.microsoft.com/office/drawing/2014/main" id="{D46164D9-BBF0-42A1-99AB-ABA60EEEFAA1}"/>
               </a:ext>
             </a:extLst>
           </p:cNvPr>
@@ -7222,7 +7222,7 @@
           <p:cNvPr id="9" name="core-no-1">
             <a:extLst xmlns:a="http://schemas.openxmlformats.org/drawingml/2006/main">
               <a:ext uri="{FF2B5EF4-FFF2-40B4-BE49-F238E27FC236}">
-                <a16:creationId xmlns:a16="http://schemas.microsoft.com/office/drawing/2014/main" id="{D17439C6-40A9-4278-B536-E60422BEF5AC}"/>
+                <a16:creationId xmlns:a16="http://schemas.microsoft.com/office/drawing/2014/main" id="{6DC8D36F-134D-4127-96E5-CA7CAE20A32A}"/>
               </a:ext>
             </a:extLst>
           </p:cNvPr>
@@ -7280,7 +7280,7 @@
           <p:cNvPr id="10" name="core-body-1">
             <a:extLst xmlns:a="http://schemas.openxmlformats.org/drawingml/2006/main">
               <a:ext uri="{FF2B5EF4-FFF2-40B4-BE49-F238E27FC236}">
-                <a16:creationId xmlns:a16="http://schemas.microsoft.com/office/drawing/2014/main" id="{9C2981FF-778A-4E33-AB0C-D1D4AB978102}"/>
+                <a16:creationId xmlns:a16="http://schemas.microsoft.com/office/drawing/2014/main" id="{FD2D6981-582B-4A2E-9225-6F66B3380E85}"/>
               </a:ext>
             </a:extLst>
           </p:cNvPr>
@@ -7344,7 +7344,7 @@
           <p:cNvPr id="11" name="core-no-2">
             <a:extLst xmlns:a="http://schemas.openxmlformats.org/drawingml/2006/main">
               <a:ext uri="{FF2B5EF4-FFF2-40B4-BE49-F238E27FC236}">
-                <a16:creationId xmlns:a16="http://schemas.microsoft.com/office/drawing/2014/main" id="{779BB4B4-428B-4A82-B803-03DDA8A3A4E9}"/>
+                <a16:creationId xmlns:a16="http://schemas.microsoft.com/office/drawing/2014/main" id="{7011039A-5243-42EF-AF2A-C0D3B1A0A76C}"/>
               </a:ext>
             </a:extLst>
           </p:cNvPr>
@@ -7402,7 +7402,7 @@
           <p:cNvPr id="12" name="core-body-2">
             <a:extLst xmlns:a="http://schemas.openxmlformats.org/drawingml/2006/main">
               <a:ext uri="{FF2B5EF4-FFF2-40B4-BE49-F238E27FC236}">
-                <a16:creationId xmlns:a16="http://schemas.microsoft.com/office/drawing/2014/main" id="{B741FFDB-C0EE-484C-9E07-EF55C1EAE66D}"/>
+                <a16:creationId xmlns:a16="http://schemas.microsoft.com/office/drawing/2014/main" id="{6E3B7721-8E47-4E9F-881B-0616CA02568D}"/>
               </a:ext>
             </a:extLst>
           </p:cNvPr>
@@ -7466,7 +7466,7 @@
           <p:cNvPr id="13" name="s4-takeaway-rule">
             <a:extLst xmlns:a="http://schemas.openxmlformats.org/drawingml/2006/main">
               <a:ext uri="{FF2B5EF4-FFF2-40B4-BE49-F238E27FC236}">
-                <a16:creationId xmlns:a16="http://schemas.microsoft.com/office/drawing/2014/main" id="{5A826D1A-C8A2-49E6-B693-511DEC4B26A5}"/>
+                <a16:creationId xmlns:a16="http://schemas.microsoft.com/office/drawing/2014/main" id="{9CBFA66B-C9B8-4B55-BF91-F4BC9384D515}"/>
               </a:ext>
             </a:extLst>
           </p:cNvPr>
@@ -7499,7 +7499,7 @@
           <p:cNvPr id="14" name="s4-takeaway">
             <a:extLst xmlns:a="http://schemas.openxmlformats.org/drawingml/2006/main">
               <a:ext uri="{FF2B5EF4-FFF2-40B4-BE49-F238E27FC236}">
-                <a16:creationId xmlns:a16="http://schemas.microsoft.com/office/drawing/2014/main" id="{B791DA1B-B83D-4C62-915B-C4384F10E405}"/>
+                <a16:creationId xmlns:a16="http://schemas.microsoft.com/office/drawing/2014/main" id="{E6ADD4D7-6C1D-4987-B325-BD2E5FD83046}"/>
               </a:ext>
             </a:extLst>
           </p:cNvPr>
@@ -7555,7 +7555,7 @@
     </p:spTree>
     <p:extLst>
       <p:ext uri="{BB962C8B-B14F-4D97-AF65-F5344CB8AC3E}">
-        <p14:creationId xmlns:p14="http://schemas.microsoft.com/office/powerpoint/2010/main" val="615405058"/>
+        <p14:creationId xmlns:p14="http://schemas.microsoft.com/office/powerpoint/2010/main" val="1757515896"/>
       </p:ext>
     </p:extLst>
   </p:cSld>
@@ -7586,7 +7586,7 @@
           <p:cNvPr id="1" name="s5-rule">
             <a:extLst xmlns:a="http://schemas.openxmlformats.org/drawingml/2006/main">
               <a:ext uri="{FF2B5EF4-FFF2-40B4-BE49-F238E27FC236}">
-                <a16:creationId xmlns:a16="http://schemas.microsoft.com/office/drawing/2014/main" id="{DA73C38C-260E-45E3-8023-D059FA8A193D}"/>
+                <a16:creationId xmlns:a16="http://schemas.microsoft.com/office/drawing/2014/main" id="{B5ABFE67-6E4D-4848-B98E-6634502C3351}"/>
               </a:ext>
             </a:extLst>
           </p:cNvPr>
@@ -7619,7 +7619,7 @@
           <p:cNvPr id="2" name="s5-eyebrow">
             <a:extLst xmlns:a="http://schemas.openxmlformats.org/drawingml/2006/main">
               <a:ext uri="{FF2B5EF4-FFF2-40B4-BE49-F238E27FC236}">
-                <a16:creationId xmlns:a16="http://schemas.microsoft.com/office/drawing/2014/main" id="{D274FBA0-B31D-45FF-9724-8949A840127F}"/>
+                <a16:creationId xmlns:a16="http://schemas.microsoft.com/office/drawing/2014/main" id="{4CC6F845-5E40-4985-AC95-C6B4EC9A8931}"/>
               </a:ext>
             </a:extLst>
           </p:cNvPr>
@@ -7677,7 +7677,7 @@
           <p:cNvPr id="3" name="s5-title">
             <a:extLst xmlns:a="http://schemas.openxmlformats.org/drawingml/2006/main">
               <a:ext uri="{FF2B5EF4-FFF2-40B4-BE49-F238E27FC236}">
-                <a16:creationId xmlns:a16="http://schemas.microsoft.com/office/drawing/2014/main" id="{30EC12CF-3300-4321-9406-E6127C04F1AE}"/>
+                <a16:creationId xmlns:a16="http://schemas.microsoft.com/office/drawing/2014/main" id="{D29688F9-6C8C-479E-88A6-C8AC6B3AC86F}"/>
               </a:ext>
             </a:extLst>
           </p:cNvPr>
@@ -7735,7 +7735,7 @@
           <p:cNvPr id="4" name="s5-footer">
             <a:extLst xmlns:a="http://schemas.openxmlformats.org/drawingml/2006/main">
               <a:ext uri="{FF2B5EF4-FFF2-40B4-BE49-F238E27FC236}">
-                <a16:creationId xmlns:a16="http://schemas.microsoft.com/office/drawing/2014/main" id="{EAB5578D-BE0E-45DF-B7FB-0F6AB5D2BCCD}"/>
+                <a16:creationId xmlns:a16="http://schemas.microsoft.com/office/drawing/2014/main" id="{B6BFF482-999F-4CCE-BC5E-773566EB182F}"/>
               </a:ext>
             </a:extLst>
           </p:cNvPr>
@@ -7766,7 +7766,7 @@
           <p:cNvPr id="5" name="s5-identity">
             <a:extLst xmlns:a="http://schemas.openxmlformats.org/drawingml/2006/main">
               <a:ext uri="{FF2B5EF4-FFF2-40B4-BE49-F238E27FC236}">
-                <a16:creationId xmlns:a16="http://schemas.microsoft.com/office/drawing/2014/main" id="{5795AB20-665F-4A4E-BCD4-46E5BAAC9F3B}"/>
+                <a16:creationId xmlns:a16="http://schemas.microsoft.com/office/drawing/2014/main" id="{5958A800-FD60-49FD-983D-9A5281A802B8}"/>
               </a:ext>
             </a:extLst>
           </p:cNvPr>
@@ -7824,7 +7824,7 @@
           <p:cNvPr id="6" name="core-no-0">
             <a:extLst xmlns:a="http://schemas.openxmlformats.org/drawingml/2006/main">
               <a:ext uri="{FF2B5EF4-FFF2-40B4-BE49-F238E27FC236}">
-                <a16:creationId xmlns:a16="http://schemas.microsoft.com/office/drawing/2014/main" id="{3643A5BB-0110-40AB-8AE2-FC707DA9D5E4}"/>
+                <a16:creationId xmlns:a16="http://schemas.microsoft.com/office/drawing/2014/main" id="{612C3C9D-6747-4CD2-8B64-815288DF3B5D}"/>
               </a:ext>
             </a:extLst>
           </p:cNvPr>
@@ -7882,7 +7882,7 @@
           <p:cNvPr id="7" name="core-label-0">
             <a:extLst xmlns:a="http://schemas.openxmlformats.org/drawingml/2006/main">
               <a:ext uri="{FF2B5EF4-FFF2-40B4-BE49-F238E27FC236}">
-                <a16:creationId xmlns:a16="http://schemas.microsoft.com/office/drawing/2014/main" id="{2442449B-6606-49F4-9473-BA6623BD2185}"/>
+                <a16:creationId xmlns:a16="http://schemas.microsoft.com/office/drawing/2014/main" id="{37060AF6-BAF5-4F6E-AEAD-CDD0C4E03D88}"/>
               </a:ext>
             </a:extLst>
           </p:cNvPr>
@@ -7940,7 +7940,7 @@
           <p:cNvPr id="8" name="core-body-0">
             <a:extLst xmlns:a="http://schemas.openxmlformats.org/drawingml/2006/main">
               <a:ext uri="{FF2B5EF4-FFF2-40B4-BE49-F238E27FC236}">
-                <a16:creationId xmlns:a16="http://schemas.microsoft.com/office/drawing/2014/main" id="{F5397ABD-49EC-47FA-9C96-54DD86A162B6}"/>
+                <a16:creationId xmlns:a16="http://schemas.microsoft.com/office/drawing/2014/main" id="{972DAEB9-BF26-49B1-82B6-20AC17B7F28D}"/>
               </a:ext>
             </a:extLst>
           </p:cNvPr>
@@ -8004,7 +8004,7 @@
           <p:cNvPr id="9" name="core-no-1">
             <a:extLst xmlns:a="http://schemas.openxmlformats.org/drawingml/2006/main">
               <a:ext uri="{FF2B5EF4-FFF2-40B4-BE49-F238E27FC236}">
-                <a16:creationId xmlns:a16="http://schemas.microsoft.com/office/drawing/2014/main" id="{A05868E1-82F0-477F-9C1F-1FF38A7D1B8B}"/>
+                <a16:creationId xmlns:a16="http://schemas.microsoft.com/office/drawing/2014/main" id="{B0E12B53-7AD4-425E-912C-9C24B7E33219}"/>
               </a:ext>
             </a:extLst>
           </p:cNvPr>
@@ -8062,7 +8062,7 @@
           <p:cNvPr id="10" name="core-body-1">
             <a:extLst xmlns:a="http://schemas.openxmlformats.org/drawingml/2006/main">
               <a:ext uri="{FF2B5EF4-FFF2-40B4-BE49-F238E27FC236}">
-                <a16:creationId xmlns:a16="http://schemas.microsoft.com/office/drawing/2014/main" id="{023D5C06-C85A-41BF-A78B-3CE2557C5B28}"/>
+                <a16:creationId xmlns:a16="http://schemas.microsoft.com/office/drawing/2014/main" id="{E01E2CE7-1D2F-4219-956A-0634A9E4CFEC}"/>
               </a:ext>
             </a:extLst>
           </p:cNvPr>
@@ -8126,7 +8126,7 @@
           <p:cNvPr id="11" name="s5-takeaway-rule">
             <a:extLst xmlns:a="http://schemas.openxmlformats.org/drawingml/2006/main">
               <a:ext uri="{FF2B5EF4-FFF2-40B4-BE49-F238E27FC236}">
-                <a16:creationId xmlns:a16="http://schemas.microsoft.com/office/drawing/2014/main" id="{582EB692-99E5-4383-B797-9CA3AED6770D}"/>
+                <a16:creationId xmlns:a16="http://schemas.microsoft.com/office/drawing/2014/main" id="{7CAF62E5-E00D-4F41-A48E-C85DD63C937C}"/>
               </a:ext>
             </a:extLst>
           </p:cNvPr>
@@ -8159,7 +8159,7 @@
           <p:cNvPr id="12" name="s5-takeaway">
             <a:extLst xmlns:a="http://schemas.openxmlformats.org/drawingml/2006/main">
               <a:ext uri="{FF2B5EF4-FFF2-40B4-BE49-F238E27FC236}">
-                <a16:creationId xmlns:a16="http://schemas.microsoft.com/office/drawing/2014/main" id="{AFF76F2D-ACDA-4938-BD55-53CA692434A5}"/>
+                <a16:creationId xmlns:a16="http://schemas.microsoft.com/office/drawing/2014/main" id="{6698A8D1-F685-468F-924F-74E1812E13AA}"/>
               </a:ext>
             </a:extLst>
           </p:cNvPr>
@@ -8215,7 +8215,7 @@
     </p:spTree>
     <p:extLst>
       <p:ext uri="{BB962C8B-B14F-4D97-AF65-F5344CB8AC3E}">
-        <p14:creationId xmlns:p14="http://schemas.microsoft.com/office/powerpoint/2010/main" val="952855476"/>
+        <p14:creationId xmlns:p14="http://schemas.microsoft.com/office/powerpoint/2010/main" val="13778389"/>
       </p:ext>
     </p:extLst>
   </p:cSld>
@@ -8246,7 +8246,7 @@
           <p:cNvPr id="1" name="s6-rule">
             <a:extLst xmlns:a="http://schemas.openxmlformats.org/drawingml/2006/main">
               <a:ext uri="{FF2B5EF4-FFF2-40B4-BE49-F238E27FC236}">
-                <a16:creationId xmlns:a16="http://schemas.microsoft.com/office/drawing/2014/main" id="{0639B858-3BD9-466C-BE50-56A48FCF8C43}"/>
+                <a16:creationId xmlns:a16="http://schemas.microsoft.com/office/drawing/2014/main" id="{84CFAF7C-BA0C-416B-AE92-4F30D7140087}"/>
               </a:ext>
             </a:extLst>
           </p:cNvPr>
@@ -8279,7 +8279,7 @@
           <p:cNvPr id="2" name="s6-eyebrow">
             <a:extLst xmlns:a="http://schemas.openxmlformats.org/drawingml/2006/main">
               <a:ext uri="{FF2B5EF4-FFF2-40B4-BE49-F238E27FC236}">
-                <a16:creationId xmlns:a16="http://schemas.microsoft.com/office/drawing/2014/main" id="{9FEFC3C2-BB4C-45A3-8BD3-73063D6FDCED}"/>
+                <a16:creationId xmlns:a16="http://schemas.microsoft.com/office/drawing/2014/main" id="{AC5443E3-A0D5-4134-9A82-BD13FDEEB2CA}"/>
               </a:ext>
             </a:extLst>
           </p:cNvPr>
@@ -8337,7 +8337,7 @@
           <p:cNvPr id="3" name="s6-title">
             <a:extLst xmlns:a="http://schemas.openxmlformats.org/drawingml/2006/main">
               <a:ext uri="{FF2B5EF4-FFF2-40B4-BE49-F238E27FC236}">
-                <a16:creationId xmlns:a16="http://schemas.microsoft.com/office/drawing/2014/main" id="{7CEF619E-BA2D-45E8-A2C6-AFC9FE580E69}"/>
+                <a16:creationId xmlns:a16="http://schemas.microsoft.com/office/drawing/2014/main" id="{00C4869C-333D-4885-8C5E-EDFA088CEB45}"/>
               </a:ext>
             </a:extLst>
           </p:cNvPr>
@@ -8395,7 +8395,7 @@
           <p:cNvPr id="4" name="s6-footer">
             <a:extLst xmlns:a="http://schemas.openxmlformats.org/drawingml/2006/main">
               <a:ext uri="{FF2B5EF4-FFF2-40B4-BE49-F238E27FC236}">
-                <a16:creationId xmlns:a16="http://schemas.microsoft.com/office/drawing/2014/main" id="{BF4FCA02-A190-4820-A530-A8EADCEBA379}"/>
+                <a16:creationId xmlns:a16="http://schemas.microsoft.com/office/drawing/2014/main" id="{1D90352D-1DB3-4BF5-BEF3-5C67821BADC4}"/>
               </a:ext>
             </a:extLst>
           </p:cNvPr>
@@ -8426,7 +8426,7 @@
           <p:cNvPr id="5" name="s6-identity">
             <a:extLst xmlns:a="http://schemas.openxmlformats.org/drawingml/2006/main">
               <a:ext uri="{FF2B5EF4-FFF2-40B4-BE49-F238E27FC236}">
-                <a16:creationId xmlns:a16="http://schemas.microsoft.com/office/drawing/2014/main" id="{8C6AE882-B286-4020-9DD7-AF66A884FB3E}"/>
+                <a16:creationId xmlns:a16="http://schemas.microsoft.com/office/drawing/2014/main" id="{D5660792-1D28-4F63-B2AD-9DC30407D344}"/>
               </a:ext>
             </a:extLst>
           </p:cNvPr>
@@ -8484,7 +8484,7 @@
           <p:cNvPr id="6" name="core-no-0">
             <a:extLst xmlns:a="http://schemas.openxmlformats.org/drawingml/2006/main">
               <a:ext uri="{FF2B5EF4-FFF2-40B4-BE49-F238E27FC236}">
-                <a16:creationId xmlns:a16="http://schemas.microsoft.com/office/drawing/2014/main" id="{449FF0B6-5953-4C07-818E-122CD4A34256}"/>
+                <a16:creationId xmlns:a16="http://schemas.microsoft.com/office/drawing/2014/main" id="{CA214210-FFA2-4909-8A36-5CDCC5995538}"/>
               </a:ext>
             </a:extLst>
           </p:cNvPr>
@@ -8542,7 +8542,7 @@
           <p:cNvPr id="7" name="core-label-0">
             <a:extLst xmlns:a="http://schemas.openxmlformats.org/drawingml/2006/main">
               <a:ext uri="{FF2B5EF4-FFF2-40B4-BE49-F238E27FC236}">
-                <a16:creationId xmlns:a16="http://schemas.microsoft.com/office/drawing/2014/main" id="{1B4C6B73-054C-4B45-A105-7B69C8249FC4}"/>
+                <a16:creationId xmlns:a16="http://schemas.microsoft.com/office/drawing/2014/main" id="{1912D13D-1403-430D-A436-F39F896C3E21}"/>
               </a:ext>
             </a:extLst>
           </p:cNvPr>
@@ -8600,7 +8600,7 @@
           <p:cNvPr id="8" name="core-body-0">
             <a:extLst xmlns:a="http://schemas.openxmlformats.org/drawingml/2006/main">
               <a:ext uri="{FF2B5EF4-FFF2-40B4-BE49-F238E27FC236}">
-                <a16:creationId xmlns:a16="http://schemas.microsoft.com/office/drawing/2014/main" id="{F6073330-34CC-4AAD-B983-44549229274A}"/>
+                <a16:creationId xmlns:a16="http://schemas.microsoft.com/office/drawing/2014/main" id="{62229171-F3E8-402B-ADD8-10FC4E17E16B}"/>
               </a:ext>
             </a:extLst>
           </p:cNvPr>
@@ -8664,7 +8664,7 @@
           <p:cNvPr id="9" name="core-no-1">
             <a:extLst xmlns:a="http://schemas.openxmlformats.org/drawingml/2006/main">
               <a:ext uri="{FF2B5EF4-FFF2-40B4-BE49-F238E27FC236}">
-                <a16:creationId xmlns:a16="http://schemas.microsoft.com/office/drawing/2014/main" id="{7E9440D6-EC8F-4FA0-A7D1-B0E0CCE9E711}"/>
+                <a16:creationId xmlns:a16="http://schemas.microsoft.com/office/drawing/2014/main" id="{CAE2C4F4-91BA-4DC6-A406-BBDC803AA20E}"/>
               </a:ext>
             </a:extLst>
           </p:cNvPr>
@@ -8722,7 +8722,7 @@
           <p:cNvPr id="10" name="core-body-1">
             <a:extLst xmlns:a="http://schemas.openxmlformats.org/drawingml/2006/main">
               <a:ext uri="{FF2B5EF4-FFF2-40B4-BE49-F238E27FC236}">
-                <a16:creationId xmlns:a16="http://schemas.microsoft.com/office/drawing/2014/main" id="{D5F4AA2A-19C4-4478-A24F-78AB75034FBF}"/>
+                <a16:creationId xmlns:a16="http://schemas.microsoft.com/office/drawing/2014/main" id="{CD75A4B5-7EA0-4B72-88DA-B08397EE24C0}"/>
               </a:ext>
             </a:extLst>
           </p:cNvPr>
@@ -8786,7 +8786,7 @@
           <p:cNvPr id="11" name="s6-takeaway-rule">
             <a:extLst xmlns:a="http://schemas.openxmlformats.org/drawingml/2006/main">
               <a:ext uri="{FF2B5EF4-FFF2-40B4-BE49-F238E27FC236}">
-                <a16:creationId xmlns:a16="http://schemas.microsoft.com/office/drawing/2014/main" id="{0D9A0090-835E-4F03-B7FA-7D0269A34DE1}"/>
+                <a16:creationId xmlns:a16="http://schemas.microsoft.com/office/drawing/2014/main" id="{EEF6BA79-6039-4A59-AD66-2A621519CEF3}"/>
               </a:ext>
             </a:extLst>
           </p:cNvPr>
@@ -8819,7 +8819,7 @@
           <p:cNvPr id="12" name="s6-takeaway">
             <a:extLst xmlns:a="http://schemas.openxmlformats.org/drawingml/2006/main">
               <a:ext uri="{FF2B5EF4-FFF2-40B4-BE49-F238E27FC236}">
-                <a16:creationId xmlns:a16="http://schemas.microsoft.com/office/drawing/2014/main" id="{4FD53EC4-19A4-4145-BD2E-FAB522D78271}"/>
+                <a16:creationId xmlns:a16="http://schemas.microsoft.com/office/drawing/2014/main" id="{28B23C31-F77E-428E-865A-137E902230C8}"/>
               </a:ext>
             </a:extLst>
           </p:cNvPr>
@@ -8875,7 +8875,7 @@
     </p:spTree>
     <p:extLst>
       <p:ext uri="{BB962C8B-B14F-4D97-AF65-F5344CB8AC3E}">
-        <p14:creationId xmlns:p14="http://schemas.microsoft.com/office/powerpoint/2010/main" val="986658773"/>
+        <p14:creationId xmlns:p14="http://schemas.microsoft.com/office/powerpoint/2010/main" val="1164004249"/>
       </p:ext>
     </p:extLst>
   </p:cSld>
@@ -8906,7 +8906,7 @@
           <p:cNvPr id="1" name="s7-rule">
             <a:extLst xmlns:a="http://schemas.openxmlformats.org/drawingml/2006/main">
               <a:ext uri="{FF2B5EF4-FFF2-40B4-BE49-F238E27FC236}">
-                <a16:creationId xmlns:a16="http://schemas.microsoft.com/office/drawing/2014/main" id="{C00A4A38-0598-4A67-9085-A5417D54D980}"/>
+                <a16:creationId xmlns:a16="http://schemas.microsoft.com/office/drawing/2014/main" id="{08B39733-4D6E-4E68-83DC-CA1C0E283407}"/>
               </a:ext>
             </a:extLst>
           </p:cNvPr>
@@ -8939,7 +8939,7 @@
           <p:cNvPr id="2" name="s7-eyebrow">
             <a:extLst xmlns:a="http://schemas.openxmlformats.org/drawingml/2006/main">
               <a:ext uri="{FF2B5EF4-FFF2-40B4-BE49-F238E27FC236}">
-                <a16:creationId xmlns:a16="http://schemas.microsoft.com/office/drawing/2014/main" id="{3EF11A50-91D9-45EE-A11C-D3CEC77A514A}"/>
+                <a16:creationId xmlns:a16="http://schemas.microsoft.com/office/drawing/2014/main" id="{3415FE69-A038-433C-B65C-48E48AE60085}"/>
               </a:ext>
             </a:extLst>
           </p:cNvPr>
@@ -8997,7 +8997,7 @@
           <p:cNvPr id="3" name="s7-title">
             <a:extLst xmlns:a="http://schemas.openxmlformats.org/drawingml/2006/main">
               <a:ext uri="{FF2B5EF4-FFF2-40B4-BE49-F238E27FC236}">
-                <a16:creationId xmlns:a16="http://schemas.microsoft.com/office/drawing/2014/main" id="{D4356608-393C-40DB-B643-C0C0143740D8}"/>
+                <a16:creationId xmlns:a16="http://schemas.microsoft.com/office/drawing/2014/main" id="{B0F170B8-1CAD-4767-8682-E3165B6087B8}"/>
               </a:ext>
             </a:extLst>
           </p:cNvPr>
@@ -9055,7 +9055,7 @@
           <p:cNvPr id="4" name="s7-footer">
             <a:extLst xmlns:a="http://schemas.openxmlformats.org/drawingml/2006/main">
               <a:ext uri="{FF2B5EF4-FFF2-40B4-BE49-F238E27FC236}">
-                <a16:creationId xmlns:a16="http://schemas.microsoft.com/office/drawing/2014/main" id="{AD522ECB-D1C2-49B0-9D6B-952C9E4BE5D4}"/>
+                <a16:creationId xmlns:a16="http://schemas.microsoft.com/office/drawing/2014/main" id="{58AC4599-1B5F-4746-B5DC-46C3B3985414}"/>
               </a:ext>
             </a:extLst>
           </p:cNvPr>
@@ -9086,7 +9086,7 @@
           <p:cNvPr id="5" name="s7-identity">
             <a:extLst xmlns:a="http://schemas.openxmlformats.org/drawingml/2006/main">
               <a:ext uri="{FF2B5EF4-FFF2-40B4-BE49-F238E27FC236}">
-                <a16:creationId xmlns:a16="http://schemas.microsoft.com/office/drawing/2014/main" id="{84206E95-E6C7-4430-A530-0483B4AEE367}"/>
+                <a16:creationId xmlns:a16="http://schemas.microsoft.com/office/drawing/2014/main" id="{B41A98E8-AC3E-4637-B31B-FC6BF2FEBA0B}"/>
               </a:ext>
             </a:extLst>
           </p:cNvPr>
@@ -9144,7 +9144,7 @@
           <p:cNvPr id="6" name="core-no-0">
             <a:extLst xmlns:a="http://schemas.openxmlformats.org/drawingml/2006/main">
               <a:ext uri="{FF2B5EF4-FFF2-40B4-BE49-F238E27FC236}">
-                <a16:creationId xmlns:a16="http://schemas.microsoft.com/office/drawing/2014/main" id="{564ECCC5-3349-4429-9DF2-52EED0AEE8FC}"/>
+                <a16:creationId xmlns:a16="http://schemas.microsoft.com/office/drawing/2014/main" id="{2A23FE91-B099-4C27-9A5D-F89E0A7F342B}"/>
               </a:ext>
             </a:extLst>
           </p:cNvPr>
@@ -9202,7 +9202,7 @@
           <p:cNvPr id="7" name="core-label-0">
             <a:extLst xmlns:a="http://schemas.openxmlformats.org/drawingml/2006/main">
               <a:ext uri="{FF2B5EF4-FFF2-40B4-BE49-F238E27FC236}">
-                <a16:creationId xmlns:a16="http://schemas.microsoft.com/office/drawing/2014/main" id="{C352EBAE-DEC5-454D-8583-9E192345EA28}"/>
+                <a16:creationId xmlns:a16="http://schemas.microsoft.com/office/drawing/2014/main" id="{3E958241-D328-4BE3-A723-98E3CA1B7CE1}"/>
               </a:ext>
             </a:extLst>
           </p:cNvPr>
@@ -9260,7 +9260,7 @@
           <p:cNvPr id="8" name="core-body-0">
             <a:extLst xmlns:a="http://schemas.openxmlformats.org/drawingml/2006/main">
               <a:ext uri="{FF2B5EF4-FFF2-40B4-BE49-F238E27FC236}">
-                <a16:creationId xmlns:a16="http://schemas.microsoft.com/office/drawing/2014/main" id="{50DF8568-555D-42B5-89A1-C2F7884086B1}"/>
+                <a16:creationId xmlns:a16="http://schemas.microsoft.com/office/drawing/2014/main" id="{B2149859-0519-4244-B013-A20D8BCD9112}"/>
               </a:ext>
             </a:extLst>
           </p:cNvPr>
@@ -9324,7 +9324,7 @@
           <p:cNvPr id="9" name="core-no-1">
             <a:extLst xmlns:a="http://schemas.openxmlformats.org/drawingml/2006/main">
               <a:ext uri="{FF2B5EF4-FFF2-40B4-BE49-F238E27FC236}">
-                <a16:creationId xmlns:a16="http://schemas.microsoft.com/office/drawing/2014/main" id="{9C393243-B1D7-4D2B-91A7-39EAED68D0B6}"/>
+                <a16:creationId xmlns:a16="http://schemas.microsoft.com/office/drawing/2014/main" id="{72DA23BA-0BC7-4BF5-ACC3-AEAEDDDE5571}"/>
               </a:ext>
             </a:extLst>
           </p:cNvPr>
@@ -9382,7 +9382,7 @@
           <p:cNvPr id="10" name="core-body-1">
             <a:extLst xmlns:a="http://schemas.openxmlformats.org/drawingml/2006/main">
               <a:ext uri="{FF2B5EF4-FFF2-40B4-BE49-F238E27FC236}">
-                <a16:creationId xmlns:a16="http://schemas.microsoft.com/office/drawing/2014/main" id="{7F1C6113-5EED-4299-8D61-F6E53563497B}"/>
+                <a16:creationId xmlns:a16="http://schemas.microsoft.com/office/drawing/2014/main" id="{0A887B8F-C2E5-4020-A241-74C8AF324D53}"/>
               </a:ext>
             </a:extLst>
           </p:cNvPr>
@@ -9446,7 +9446,7 @@
           <p:cNvPr id="11" name="s7-takeaway-rule">
             <a:extLst xmlns:a="http://schemas.openxmlformats.org/drawingml/2006/main">
               <a:ext uri="{FF2B5EF4-FFF2-40B4-BE49-F238E27FC236}">
-                <a16:creationId xmlns:a16="http://schemas.microsoft.com/office/drawing/2014/main" id="{79C95F60-BE98-4467-9329-01893918A163}"/>
+                <a16:creationId xmlns:a16="http://schemas.microsoft.com/office/drawing/2014/main" id="{BDA8F6BD-8779-430C-B717-963F5DB75EA9}"/>
               </a:ext>
             </a:extLst>
           </p:cNvPr>
@@ -9479,7 +9479,7 @@
           <p:cNvPr id="12" name="s7-takeaway">
             <a:extLst xmlns:a="http://schemas.openxmlformats.org/drawingml/2006/main">
               <a:ext uri="{FF2B5EF4-FFF2-40B4-BE49-F238E27FC236}">
-                <a16:creationId xmlns:a16="http://schemas.microsoft.com/office/drawing/2014/main" id="{59B573A8-3B18-4FDB-8BAD-E2B86C488484}"/>
+                <a16:creationId xmlns:a16="http://schemas.microsoft.com/office/drawing/2014/main" id="{59E90A80-57F0-4E8A-B270-1E7B8530147E}"/>
               </a:ext>
             </a:extLst>
           </p:cNvPr>
@@ -9535,7 +9535,7 @@
     </p:spTree>
     <p:extLst>
       <p:ext uri="{BB962C8B-B14F-4D97-AF65-F5344CB8AC3E}">
-        <p14:creationId xmlns:p14="http://schemas.microsoft.com/office/powerpoint/2010/main" val="1771193682"/>
+        <p14:creationId xmlns:p14="http://schemas.microsoft.com/office/powerpoint/2010/main" val="752788048"/>
       </p:ext>
     </p:extLst>
   </p:cSld>
@@ -9566,7 +9566,7 @@
           <p:cNvPr id="1" name="s8-rule">
             <a:extLst xmlns:a="http://schemas.openxmlformats.org/drawingml/2006/main">
               <a:ext uri="{FF2B5EF4-FFF2-40B4-BE49-F238E27FC236}">
-                <a16:creationId xmlns:a16="http://schemas.microsoft.com/office/drawing/2014/main" id="{0B4C535C-173C-4B60-8FA9-8BE4B39FC66C}"/>
+                <a16:creationId xmlns:a16="http://schemas.microsoft.com/office/drawing/2014/main" id="{7DBF603D-5688-41B2-B642-4852B9BC877E}"/>
               </a:ext>
             </a:extLst>
           </p:cNvPr>
@@ -9599,7 +9599,7 @@
           <p:cNvPr id="2" name="s8-eyebrow">
             <a:extLst xmlns:a="http://schemas.openxmlformats.org/drawingml/2006/main">
               <a:ext uri="{FF2B5EF4-FFF2-40B4-BE49-F238E27FC236}">
-                <a16:creationId xmlns:a16="http://schemas.microsoft.com/office/drawing/2014/main" id="{4EBA5864-63BE-4C8D-B52D-2CD1684062F6}"/>
+                <a16:creationId xmlns:a16="http://schemas.microsoft.com/office/drawing/2014/main" id="{8642D1D9-A844-4511-AE9E-FE728EF0BC28}"/>
               </a:ext>
             </a:extLst>
           </p:cNvPr>
@@ -9657,7 +9657,7 @@
           <p:cNvPr id="3" name="s8-title">
             <a:extLst xmlns:a="http://schemas.openxmlformats.org/drawingml/2006/main">
               <a:ext uri="{FF2B5EF4-FFF2-40B4-BE49-F238E27FC236}">
-                <a16:creationId xmlns:a16="http://schemas.microsoft.com/office/drawing/2014/main" id="{C34DC01F-32E3-471B-BEDB-1EAC06D917A4}"/>
+                <a16:creationId xmlns:a16="http://schemas.microsoft.com/office/drawing/2014/main" id="{D8DD4CAC-D94D-4E4C-BBB2-1BC02174A580}"/>
               </a:ext>
             </a:extLst>
           </p:cNvPr>
@@ -9715,7 +9715,7 @@
           <p:cNvPr id="4" name="s8-footer">
             <a:extLst xmlns:a="http://schemas.openxmlformats.org/drawingml/2006/main">
               <a:ext uri="{FF2B5EF4-FFF2-40B4-BE49-F238E27FC236}">
-                <a16:creationId xmlns:a16="http://schemas.microsoft.com/office/drawing/2014/main" id="{B657BF10-F305-41ED-B045-F1CCEF7D9521}"/>
+                <a16:creationId xmlns:a16="http://schemas.microsoft.com/office/drawing/2014/main" id="{3FA897E1-6789-4824-8085-92B1464F31E3}"/>
               </a:ext>
             </a:extLst>
           </p:cNvPr>
@@ -9746,7 +9746,7 @@
           <p:cNvPr id="5" name="s8-identity">
             <a:extLst xmlns:a="http://schemas.openxmlformats.org/drawingml/2006/main">
               <a:ext uri="{FF2B5EF4-FFF2-40B4-BE49-F238E27FC236}">
-                <a16:creationId xmlns:a16="http://schemas.microsoft.com/office/drawing/2014/main" id="{2A471633-B2CF-4DC2-A256-D96C43C6B072}"/>
+                <a16:creationId xmlns:a16="http://schemas.microsoft.com/office/drawing/2014/main" id="{55F2E331-3AFC-45CB-8CF8-1D3BD73DC3C3}"/>
               </a:ext>
             </a:extLst>
           </p:cNvPr>
@@ -9804,7 +9804,7 @@
           <p:cNvPr id="6" name="core-no-0">
             <a:extLst xmlns:a="http://schemas.openxmlformats.org/drawingml/2006/main">
               <a:ext uri="{FF2B5EF4-FFF2-40B4-BE49-F238E27FC236}">
-                <a16:creationId xmlns:a16="http://schemas.microsoft.com/office/drawing/2014/main" id="{AE98A4F2-CFB3-49E4-98F5-A79FC3AE5B97}"/>
+                <a16:creationId xmlns:a16="http://schemas.microsoft.com/office/drawing/2014/main" id="{E9E739FE-F117-47F4-A4E4-6D84DCC8E0DF}"/>
               </a:ext>
             </a:extLst>
           </p:cNvPr>
@@ -9862,7 +9862,7 @@
           <p:cNvPr id="7" name="core-label-0">
             <a:extLst xmlns:a="http://schemas.openxmlformats.org/drawingml/2006/main">
               <a:ext uri="{FF2B5EF4-FFF2-40B4-BE49-F238E27FC236}">
-                <a16:creationId xmlns:a16="http://schemas.microsoft.com/office/drawing/2014/main" id="{CF5DF0F4-C770-42ED-B71E-41906220E6ED}"/>
+                <a16:creationId xmlns:a16="http://schemas.microsoft.com/office/drawing/2014/main" id="{3113A6C8-6C93-47B6-A0C6-D13041853EA1}"/>
               </a:ext>
             </a:extLst>
           </p:cNvPr>
@@ -9920,7 +9920,7 @@
           <p:cNvPr id="8" name="core-body-0">
             <a:extLst xmlns:a="http://schemas.openxmlformats.org/drawingml/2006/main">
               <a:ext uri="{FF2B5EF4-FFF2-40B4-BE49-F238E27FC236}">
-                <a16:creationId xmlns:a16="http://schemas.microsoft.com/office/drawing/2014/main" id="{2E532556-54C2-4D0D-9DF7-A73CB9573864}"/>
+                <a16:creationId xmlns:a16="http://schemas.microsoft.com/office/drawing/2014/main" id="{4E07E8AB-702C-401D-8ABA-343C7FA3C33B}"/>
               </a:ext>
             </a:extLst>
           </p:cNvPr>
@@ -9984,7 +9984,7 @@
           <p:cNvPr id="9" name="core-no-1">
             <a:extLst xmlns:a="http://schemas.openxmlformats.org/drawingml/2006/main">
               <a:ext uri="{FF2B5EF4-FFF2-40B4-BE49-F238E27FC236}">
-                <a16:creationId xmlns:a16="http://schemas.microsoft.com/office/drawing/2014/main" id="{9C8EAAC9-9D01-40F7-8DB2-9949D93B5C2D}"/>
+                <a16:creationId xmlns:a16="http://schemas.microsoft.com/office/drawing/2014/main" id="{43D501E9-5D04-412A-A9B7-E1F08DD36EDC}"/>
               </a:ext>
             </a:extLst>
           </p:cNvPr>
@@ -10042,7 +10042,7 @@
           <p:cNvPr id="10" name="core-body-1">
             <a:extLst xmlns:a="http://schemas.openxmlformats.org/drawingml/2006/main">
               <a:ext uri="{FF2B5EF4-FFF2-40B4-BE49-F238E27FC236}">
-                <a16:creationId xmlns:a16="http://schemas.microsoft.com/office/drawing/2014/main" id="{3E736530-2AE2-4029-BE64-E85DD4654959}"/>
+                <a16:creationId xmlns:a16="http://schemas.microsoft.com/office/drawing/2014/main" id="{A1FBEF8B-2F00-41D0-B37C-AB2818D854FC}"/>
               </a:ext>
             </a:extLst>
           </p:cNvPr>
@@ -10106,7 +10106,7 @@
           <p:cNvPr id="11" name="s8-takeaway-rule">
             <a:extLst xmlns:a="http://schemas.openxmlformats.org/drawingml/2006/main">
               <a:ext uri="{FF2B5EF4-FFF2-40B4-BE49-F238E27FC236}">
-                <a16:creationId xmlns:a16="http://schemas.microsoft.com/office/drawing/2014/main" id="{F20F42BA-D475-43F2-B4BF-3A3460E2005D}"/>
+                <a16:creationId xmlns:a16="http://schemas.microsoft.com/office/drawing/2014/main" id="{BBADFBB8-8EB3-4516-A9F7-35AA88118431}"/>
               </a:ext>
             </a:extLst>
           </p:cNvPr>
@@ -10139,7 +10139,7 @@
           <p:cNvPr id="12" name="s8-takeaway">
             <a:extLst xmlns:a="http://schemas.openxmlformats.org/drawingml/2006/main">
               <a:ext uri="{FF2B5EF4-FFF2-40B4-BE49-F238E27FC236}">
-                <a16:creationId xmlns:a16="http://schemas.microsoft.com/office/drawing/2014/main" id="{8F1459D3-D86C-4207-AAE2-56BA9F8A4307}"/>
+                <a16:creationId xmlns:a16="http://schemas.microsoft.com/office/drawing/2014/main" id="{AF5A8C8C-E5D5-4098-92A1-C8A09F8480EA}"/>
               </a:ext>
             </a:extLst>
           </p:cNvPr>
@@ -10195,7 +10195,7 @@
     </p:spTree>
     <p:extLst>
       <p:ext uri="{BB962C8B-B14F-4D97-AF65-F5344CB8AC3E}">
-        <p14:creationId xmlns:p14="http://schemas.microsoft.com/office/powerpoint/2010/main" val="1943580809"/>
+        <p14:creationId xmlns:p14="http://schemas.microsoft.com/office/powerpoint/2010/main" val="1270303175"/>
       </p:ext>
     </p:extLst>
   </p:cSld>
@@ -10226,7 +10226,7 @@
           <p:cNvPr id="1" name="s9-rule">
             <a:extLst xmlns:a="http://schemas.openxmlformats.org/drawingml/2006/main">
               <a:ext uri="{FF2B5EF4-FFF2-40B4-BE49-F238E27FC236}">
-                <a16:creationId xmlns:a16="http://schemas.microsoft.com/office/drawing/2014/main" id="{373208E9-1306-4135-8BE1-F23B8536E975}"/>
+                <a16:creationId xmlns:a16="http://schemas.microsoft.com/office/drawing/2014/main" id="{30B6EC80-AEE2-414E-9963-76D03DC934D4}"/>
               </a:ext>
             </a:extLst>
           </p:cNvPr>
@@ -10259,7 +10259,7 @@
           <p:cNvPr id="2" name="s9-eyebrow">
             <a:extLst xmlns:a="http://schemas.openxmlformats.org/drawingml/2006/main">
               <a:ext uri="{FF2B5EF4-FFF2-40B4-BE49-F238E27FC236}">
-                <a16:creationId xmlns:a16="http://schemas.microsoft.com/office/drawing/2014/main" id="{4878B07F-10F3-4A17-8AB5-71B4BAE95AA0}"/>
+                <a16:creationId xmlns:a16="http://schemas.microsoft.com/office/drawing/2014/main" id="{AF6DA8E3-A343-4257-8FD8-64C5B4D54BF8}"/>
               </a:ext>
             </a:extLst>
           </p:cNvPr>
@@ -10317,7 +10317,7 @@
           <p:cNvPr id="3" name="s9-title">
             <a:extLst xmlns:a="http://schemas.openxmlformats.org/drawingml/2006/main">
               <a:ext uri="{FF2B5EF4-FFF2-40B4-BE49-F238E27FC236}">
-                <a16:creationId xmlns:a16="http://schemas.microsoft.com/office/drawing/2014/main" id="{290D27B6-C551-46E0-9C5A-0AB3BC196677}"/>
+                <a16:creationId xmlns:a16="http://schemas.microsoft.com/office/drawing/2014/main" id="{7F9A4CA5-9069-45A7-BEA4-B3E72FDA5F28}"/>
               </a:ext>
             </a:extLst>
           </p:cNvPr>
@@ -10375,7 +10375,7 @@
           <p:cNvPr id="4" name="s9-footer">
             <a:extLst xmlns:a="http://schemas.openxmlformats.org/drawingml/2006/main">
               <a:ext uri="{FF2B5EF4-FFF2-40B4-BE49-F238E27FC236}">
-                <a16:creationId xmlns:a16="http://schemas.microsoft.com/office/drawing/2014/main" id="{BEDBC610-91B4-49DA-B1A5-4F5E7204C586}"/>
+                <a16:creationId xmlns:a16="http://schemas.microsoft.com/office/drawing/2014/main" id="{21C7F0A5-E9CD-4ABC-97E5-0F220FADE100}"/>
               </a:ext>
             </a:extLst>
           </p:cNvPr>
@@ -10406,7 +10406,7 @@
           <p:cNvPr id="5" name="s9-identity">
             <a:extLst xmlns:a="http://schemas.openxmlformats.org/drawingml/2006/main">
               <a:ext uri="{FF2B5EF4-FFF2-40B4-BE49-F238E27FC236}">
-                <a16:creationId xmlns:a16="http://schemas.microsoft.com/office/drawing/2014/main" id="{9B707665-5AD8-4747-A2F7-39316CFD65B3}"/>
+                <a16:creationId xmlns:a16="http://schemas.microsoft.com/office/drawing/2014/main" id="{C05ADB28-C0EB-4EAE-BBA7-EAF997295BD2}"/>
               </a:ext>
             </a:extLst>
           </p:cNvPr>
@@ -10464,7 +10464,7 @@
           <p:cNvPr id="6" name="case-title">
             <a:extLst xmlns:a="http://schemas.openxmlformats.org/drawingml/2006/main">
               <a:ext uri="{FF2B5EF4-FFF2-40B4-BE49-F238E27FC236}">
-                <a16:creationId xmlns:a16="http://schemas.microsoft.com/office/drawing/2014/main" id="{5868E6BB-8E2B-4FB4-9057-DDACE7714299}"/>
+                <a16:creationId xmlns:a16="http://schemas.microsoft.com/office/drawing/2014/main" id="{9225DEA0-2F64-4485-86DB-47A0FA70A696}"/>
               </a:ext>
             </a:extLst>
           </p:cNvPr>
@@ -10528,7 +10528,7 @@
           <p:cNvPr id="7" name="case-row-0">
             <a:extLst xmlns:a="http://schemas.openxmlformats.org/drawingml/2006/main">
               <a:ext uri="{FF2B5EF4-FFF2-40B4-BE49-F238E27FC236}">
-                <a16:creationId xmlns:a16="http://schemas.microsoft.com/office/drawing/2014/main" id="{2DED1835-6979-4456-BBF0-06095BDDA8E6}"/>
+                <a16:creationId xmlns:a16="http://schemas.microsoft.com/office/drawing/2014/main" id="{06A579C6-67C1-4303-A99A-53517AF686A8}"/>
               </a:ext>
             </a:extLst>
           </p:cNvPr>
@@ -10592,7 +10592,7 @@
           <p:cNvPr id="8" name="case-row-1">
             <a:extLst xmlns:a="http://schemas.openxmlformats.org/drawingml/2006/main">
               <a:ext uri="{FF2B5EF4-FFF2-40B4-BE49-F238E27FC236}">
-                <a16:creationId xmlns:a16="http://schemas.microsoft.com/office/drawing/2014/main" id="{076555C4-A3A1-4862-B41B-1DE2EACAE3AC}"/>
+                <a16:creationId xmlns:a16="http://schemas.microsoft.com/office/drawing/2014/main" id="{77A65CE2-67D1-426D-B3CF-FD84A7E90ADC}"/>
               </a:ext>
             </a:extLst>
           </p:cNvPr>
@@ -10656,7 +10656,7 @@
           <p:cNvPr id="9" name="case-row-2">
             <a:extLst xmlns:a="http://schemas.openxmlformats.org/drawingml/2006/main">
               <a:ext uri="{FF2B5EF4-FFF2-40B4-BE49-F238E27FC236}">
-                <a16:creationId xmlns:a16="http://schemas.microsoft.com/office/drawing/2014/main" id="{D84624ED-6600-476E-B5ED-38B27D9D4A5C}"/>
+                <a16:creationId xmlns:a16="http://schemas.microsoft.com/office/drawing/2014/main" id="{4F5A76E1-0166-44CC-B157-336F0632DF67}"/>
               </a:ext>
             </a:extLst>
           </p:cNvPr>
@@ -10720,7 +10720,7 @@
           <p:cNvPr id="10" name="case-row-3">
             <a:extLst xmlns:a="http://schemas.openxmlformats.org/drawingml/2006/main">
               <a:ext uri="{FF2B5EF4-FFF2-40B4-BE49-F238E27FC236}">
-                <a16:creationId xmlns:a16="http://schemas.microsoft.com/office/drawing/2014/main" id="{3C412532-144D-4303-879C-24EE9DAEFF4E}"/>
+                <a16:creationId xmlns:a16="http://schemas.microsoft.com/office/drawing/2014/main" id="{7B550F94-02A3-4CED-B27F-9702203AD875}"/>
               </a:ext>
             </a:extLst>
           </p:cNvPr>
@@ -10784,7 +10784,7 @@
           <p:cNvPr id="11" name="case-row-4">
             <a:extLst xmlns:a="http://schemas.openxmlformats.org/drawingml/2006/main">
               <a:ext uri="{FF2B5EF4-FFF2-40B4-BE49-F238E27FC236}">
-                <a16:creationId xmlns:a16="http://schemas.microsoft.com/office/drawing/2014/main" id="{033E2CBF-BA9B-47EF-918A-56419DE7743C}"/>
+                <a16:creationId xmlns:a16="http://schemas.microsoft.com/office/drawing/2014/main" id="{C15D10E4-D869-4CF8-8517-4A6A717F178B}"/>
               </a:ext>
             </a:extLst>
           </p:cNvPr>
@@ -10848,7 +10848,7 @@
           <p:cNvPr id="12" name="s9-takeaway-rule">
             <a:extLst xmlns:a="http://schemas.openxmlformats.org/drawingml/2006/main">
               <a:ext uri="{FF2B5EF4-FFF2-40B4-BE49-F238E27FC236}">
-                <a16:creationId xmlns:a16="http://schemas.microsoft.com/office/drawing/2014/main" id="{A672AD09-C23D-447E-B94E-1DEB859E1DE8}"/>
+                <a16:creationId xmlns:a16="http://schemas.microsoft.com/office/drawing/2014/main" id="{8CD79D43-E241-4E39-BC14-FFD4A174FDE2}"/>
               </a:ext>
             </a:extLst>
           </p:cNvPr>
@@ -10881,7 +10881,7 @@
           <p:cNvPr id="13" name="s9-takeaway">
             <a:extLst xmlns:a="http://schemas.openxmlformats.org/drawingml/2006/main">
               <a:ext uri="{FF2B5EF4-FFF2-40B4-BE49-F238E27FC236}">
-                <a16:creationId xmlns:a16="http://schemas.microsoft.com/office/drawing/2014/main" id="{4BF74255-7B8B-4C20-AD68-BE4CB6A2C829}"/>
+                <a16:creationId xmlns:a16="http://schemas.microsoft.com/office/drawing/2014/main" id="{071E1E44-4CC5-4DCA-9403-C5C0F6B15B18}"/>
               </a:ext>
             </a:extLst>
           </p:cNvPr>
@@ -10937,7 +10937,7 @@
     </p:spTree>
     <p:extLst>
       <p:ext uri="{BB962C8B-B14F-4D97-AF65-F5344CB8AC3E}">
-        <p14:creationId xmlns:p14="http://schemas.microsoft.com/office/powerpoint/2010/main" val="1281600139"/>
+        <p14:creationId xmlns:p14="http://schemas.microsoft.com/office/powerpoint/2010/main" val="1116953750"/>
       </p:ext>
     </p:extLst>
   </p:cSld>
